--- a/docs/pptx/whole/jx-linsubhr-ratio-hosp5.pptx
+++ b/docs/pptx/whole/jx-linsubhr-ratio-hosp5.pptx
@@ -2271,7 +2271,7 @@
           </p:nvSpPr>
           <p:spPr>
             <a:xfrm>
-              <a:off x="817517" y="5114368"/>
+              <a:off x="817517" y="5142518"/>
               <a:ext cx="7799693" cy="0"/>
             </a:xfrm>
             <a:custGeom>
@@ -2314,7 +2314,7 @@
           </p:nvSpPr>
           <p:spPr>
             <a:xfrm>
-              <a:off x="817517" y="4244691"/>
+              <a:off x="817517" y="4313054"/>
               <a:ext cx="7799693" cy="0"/>
             </a:xfrm>
             <a:custGeom>
@@ -2357,7 +2357,7 @@
           </p:nvSpPr>
           <p:spPr>
             <a:xfrm>
-              <a:off x="817517" y="3375014"/>
+              <a:off x="817517" y="3483591"/>
               <a:ext cx="7799693" cy="0"/>
             </a:xfrm>
             <a:custGeom>
@@ -2400,7 +2400,7 @@
           </p:nvSpPr>
           <p:spPr>
             <a:xfrm>
-              <a:off x="817517" y="2505337"/>
+              <a:off x="817517" y="2654127"/>
               <a:ext cx="7799693" cy="0"/>
             </a:xfrm>
             <a:custGeom>
@@ -2443,15 +2443,15 @@
           </p:nvSpPr>
           <p:spPr>
             <a:xfrm>
-              <a:off x="1615213" y="1896563"/>
-              <a:ext cx="0" cy="3826579"/>
+              <a:off x="1615213" y="2073503"/>
+              <a:ext cx="0" cy="3649639"/>
             </a:xfrm>
             <a:custGeom>
               <a:avLst/>
               <a:pathLst>
-                <a:path w="0" h="3826579">
+                <a:path w="0" h="3649639">
                   <a:moveTo>
-                    <a:pt x="0" y="3826579"/>
+                    <a:pt x="0" y="3649639"/>
                   </a:moveTo>
                   <a:lnTo>
                     <a:pt x="0" y="0"/>
@@ -2486,15 +2486,15 @@
           </p:nvSpPr>
           <p:spPr>
             <a:xfrm>
-              <a:off x="3387871" y="1896563"/>
-              <a:ext cx="0" cy="3826579"/>
+              <a:off x="3387871" y="2073503"/>
+              <a:ext cx="0" cy="3649639"/>
             </a:xfrm>
             <a:custGeom>
               <a:avLst/>
               <a:pathLst>
-                <a:path w="0" h="3826579">
+                <a:path w="0" h="3649639">
                   <a:moveTo>
-                    <a:pt x="0" y="3826579"/>
+                    <a:pt x="0" y="3649639"/>
                   </a:moveTo>
                   <a:lnTo>
                     <a:pt x="0" y="0"/>
@@ -2529,15 +2529,15 @@
           </p:nvSpPr>
           <p:spPr>
             <a:xfrm>
-              <a:off x="5160528" y="1896563"/>
-              <a:ext cx="0" cy="3826579"/>
+              <a:off x="5160528" y="2073503"/>
+              <a:ext cx="0" cy="3649639"/>
             </a:xfrm>
             <a:custGeom>
               <a:avLst/>
               <a:pathLst>
-                <a:path w="0" h="3826579">
+                <a:path w="0" h="3649639">
                   <a:moveTo>
-                    <a:pt x="0" y="3826579"/>
+                    <a:pt x="0" y="3649639"/>
                   </a:moveTo>
                   <a:lnTo>
                     <a:pt x="0" y="0"/>
@@ -2572,15 +2572,15 @@
           </p:nvSpPr>
           <p:spPr>
             <a:xfrm>
-              <a:off x="6933186" y="1896563"/>
-              <a:ext cx="0" cy="3826579"/>
+              <a:off x="6933186" y="2073503"/>
+              <a:ext cx="0" cy="3649639"/>
             </a:xfrm>
             <a:custGeom>
               <a:avLst/>
               <a:pathLst>
-                <a:path w="0" h="3826579">
+                <a:path w="0" h="3649639">
                   <a:moveTo>
-                    <a:pt x="0" y="3826579"/>
+                    <a:pt x="0" y="3649639"/>
                   </a:moveTo>
                   <a:lnTo>
                     <a:pt x="0" y="0"/>
@@ -2615,7 +2615,7 @@
           </p:nvSpPr>
           <p:spPr>
             <a:xfrm>
-              <a:off x="817517" y="5549207"/>
+              <a:off x="817517" y="5557249"/>
               <a:ext cx="7799693" cy="0"/>
             </a:xfrm>
             <a:custGeom>
@@ -2658,7 +2658,7 @@
           </p:nvSpPr>
           <p:spPr>
             <a:xfrm>
-              <a:off x="817517" y="4679530"/>
+              <a:off x="817517" y="4727786"/>
               <a:ext cx="7799693" cy="0"/>
             </a:xfrm>
             <a:custGeom>
@@ -2701,7 +2701,7 @@
           </p:nvSpPr>
           <p:spPr>
             <a:xfrm>
-              <a:off x="817517" y="3809853"/>
+              <a:off x="817517" y="3898322"/>
               <a:ext cx="7799693" cy="0"/>
             </a:xfrm>
             <a:custGeom>
@@ -2744,7 +2744,7 @@
           </p:nvSpPr>
           <p:spPr>
             <a:xfrm>
-              <a:off x="817517" y="2940175"/>
+              <a:off x="817517" y="3068859"/>
               <a:ext cx="7799693" cy="0"/>
             </a:xfrm>
             <a:custGeom>
@@ -2787,7 +2787,7 @@
           </p:nvSpPr>
           <p:spPr>
             <a:xfrm>
-              <a:off x="817517" y="2070498"/>
+              <a:off x="817517" y="2239395"/>
               <a:ext cx="7799693" cy="0"/>
             </a:xfrm>
             <a:custGeom>
@@ -2830,15 +2830,15 @@
           </p:nvSpPr>
           <p:spPr>
             <a:xfrm>
-              <a:off x="2501542" y="1896563"/>
-              <a:ext cx="0" cy="3826579"/>
+              <a:off x="2501542" y="2073503"/>
+              <a:ext cx="0" cy="3649639"/>
             </a:xfrm>
             <a:custGeom>
               <a:avLst/>
               <a:pathLst>
-                <a:path w="0" h="3826579">
+                <a:path w="0" h="3649639">
                   <a:moveTo>
-                    <a:pt x="0" y="3826579"/>
+                    <a:pt x="0" y="3649639"/>
                   </a:moveTo>
                   <a:lnTo>
                     <a:pt x="0" y="0"/>
@@ -2873,15 +2873,15 @@
           </p:nvSpPr>
           <p:spPr>
             <a:xfrm>
-              <a:off x="4274200" y="1896563"/>
-              <a:ext cx="0" cy="3826579"/>
+              <a:off x="4274200" y="2073503"/>
+              <a:ext cx="0" cy="3649639"/>
             </a:xfrm>
             <a:custGeom>
               <a:avLst/>
               <a:pathLst>
-                <a:path w="0" h="3826579">
+                <a:path w="0" h="3649639">
                   <a:moveTo>
-                    <a:pt x="0" y="3826579"/>
+                    <a:pt x="0" y="3649639"/>
                   </a:moveTo>
                   <a:lnTo>
                     <a:pt x="0" y="0"/>
@@ -2916,15 +2916,15 @@
           </p:nvSpPr>
           <p:spPr>
             <a:xfrm>
-              <a:off x="6046857" y="1896563"/>
-              <a:ext cx="0" cy="3826579"/>
+              <a:off x="6046857" y="2073503"/>
+              <a:ext cx="0" cy="3649639"/>
             </a:xfrm>
             <a:custGeom>
               <a:avLst/>
               <a:pathLst>
-                <a:path w="0" h="3826579">
+                <a:path w="0" h="3649639">
                   <a:moveTo>
-                    <a:pt x="0" y="3826579"/>
+                    <a:pt x="0" y="3649639"/>
                   </a:moveTo>
                   <a:lnTo>
                     <a:pt x="0" y="0"/>
@@ -2959,15 +2959,15 @@
           </p:nvSpPr>
           <p:spPr>
             <a:xfrm>
-              <a:off x="7819515" y="1896563"/>
-              <a:ext cx="0" cy="3826579"/>
+              <a:off x="7819515" y="2073503"/>
+              <a:ext cx="0" cy="3649639"/>
             </a:xfrm>
             <a:custGeom>
               <a:avLst/>
               <a:pathLst>
-                <a:path w="0" h="3826579">
+                <a:path w="0" h="3649639">
                   <a:moveTo>
-                    <a:pt x="0" y="3826579"/>
+                    <a:pt x="0" y="3649639"/>
                   </a:moveTo>
                   <a:lnTo>
                     <a:pt x="0" y="0"/>
@@ -3002,537 +3002,537 @@
           </p:nvSpPr>
           <p:spPr>
             <a:xfrm>
-              <a:off x="817517" y="1896563"/>
-              <a:ext cx="7235830" cy="3619927"/>
+              <a:off x="817517" y="2073503"/>
+              <a:ext cx="7235830" cy="3452543"/>
             </a:xfrm>
             <a:custGeom>
               <a:avLst/>
               <a:pathLst>
-                <a:path w="7235830" h="3619927">
+                <a:path w="7235830" h="3452543">
                   <a:moveTo>
                     <a:pt x="1796529" y="0"/>
                   </a:moveTo>
                   <a:lnTo>
-                    <a:pt x="1851348" y="170852"/>
-                  </a:lnTo>
-                  <a:lnTo>
-                    <a:pt x="1925108" y="386501"/>
-                  </a:lnTo>
-                  <a:lnTo>
-                    <a:pt x="1998868" y="588793"/>
-                  </a:lnTo>
-                  <a:lnTo>
-                    <a:pt x="2072628" y="778557"/>
-                  </a:lnTo>
-                  <a:lnTo>
-                    <a:pt x="2146388" y="956567"/>
-                  </a:lnTo>
-                  <a:lnTo>
-                    <a:pt x="2220148" y="1123552"/>
-                  </a:lnTo>
-                  <a:lnTo>
-                    <a:pt x="2293908" y="1280194"/>
-                  </a:lnTo>
-                  <a:lnTo>
-                    <a:pt x="2367668" y="1427135"/>
-                  </a:lnTo>
-                  <a:lnTo>
-                    <a:pt x="2441428" y="1564975"/>
-                  </a:lnTo>
-                  <a:lnTo>
-                    <a:pt x="2515188" y="1694277"/>
-                  </a:lnTo>
-                  <a:lnTo>
-                    <a:pt x="2588948" y="1815571"/>
-                  </a:lnTo>
-                  <a:lnTo>
-                    <a:pt x="2662708" y="1929352"/>
-                  </a:lnTo>
-                  <a:lnTo>
-                    <a:pt x="2736468" y="2036087"/>
-                  </a:lnTo>
-                  <a:lnTo>
-                    <a:pt x="2810228" y="2136210"/>
-                  </a:lnTo>
-                  <a:lnTo>
-                    <a:pt x="2883988" y="2230132"/>
-                  </a:lnTo>
-                  <a:lnTo>
-                    <a:pt x="2957748" y="2318237"/>
-                  </a:lnTo>
-                  <a:lnTo>
-                    <a:pt x="3031508" y="2400885"/>
-                  </a:lnTo>
-                  <a:lnTo>
-                    <a:pt x="3105268" y="2478415"/>
-                  </a:lnTo>
-                  <a:lnTo>
-                    <a:pt x="3179028" y="2551142"/>
-                  </a:lnTo>
-                  <a:lnTo>
-                    <a:pt x="3252788" y="2619365"/>
-                  </a:lnTo>
-                  <a:lnTo>
-                    <a:pt x="3326548" y="2683362"/>
-                  </a:lnTo>
-                  <a:lnTo>
-                    <a:pt x="3400308" y="2743396"/>
-                  </a:lnTo>
-                  <a:lnTo>
-                    <a:pt x="3474068" y="2789140"/>
-                  </a:lnTo>
-                  <a:lnTo>
-                    <a:pt x="3547828" y="2809135"/>
-                  </a:lnTo>
-                  <a:lnTo>
-                    <a:pt x="3621588" y="2828667"/>
-                  </a:lnTo>
-                  <a:lnTo>
-                    <a:pt x="3695348" y="2847747"/>
-                  </a:lnTo>
-                  <a:lnTo>
-                    <a:pt x="3769108" y="2866385"/>
-                  </a:lnTo>
-                  <a:lnTo>
-                    <a:pt x="3842868" y="2884592"/>
-                  </a:lnTo>
-                  <a:lnTo>
-                    <a:pt x="3916628" y="2902377"/>
-                  </a:lnTo>
-                  <a:lnTo>
-                    <a:pt x="3990388" y="2919750"/>
-                  </a:lnTo>
-                  <a:lnTo>
-                    <a:pt x="4064149" y="2936721"/>
-                  </a:lnTo>
-                  <a:lnTo>
-                    <a:pt x="4137909" y="2953298"/>
-                  </a:lnTo>
-                  <a:lnTo>
-                    <a:pt x="4211669" y="2969492"/>
-                  </a:lnTo>
-                  <a:lnTo>
-                    <a:pt x="4285429" y="2985311"/>
-                  </a:lnTo>
-                  <a:lnTo>
-                    <a:pt x="4359189" y="3000764"/>
-                  </a:lnTo>
-                  <a:lnTo>
-                    <a:pt x="4432949" y="3015859"/>
-                  </a:lnTo>
-                  <a:lnTo>
-                    <a:pt x="4506709" y="3030604"/>
-                  </a:lnTo>
-                  <a:lnTo>
-                    <a:pt x="4580469" y="3045008"/>
-                  </a:lnTo>
-                  <a:lnTo>
-                    <a:pt x="4654229" y="3059078"/>
-                  </a:lnTo>
-                  <a:lnTo>
-                    <a:pt x="4727989" y="3072823"/>
-                  </a:lnTo>
-                  <a:lnTo>
-                    <a:pt x="4801749" y="3086249"/>
-                  </a:lnTo>
-                  <a:lnTo>
-                    <a:pt x="4875509" y="3099365"/>
-                  </a:lnTo>
-                  <a:lnTo>
-                    <a:pt x="4949269" y="3112176"/>
-                  </a:lnTo>
-                  <a:lnTo>
-                    <a:pt x="5023029" y="3124691"/>
-                  </a:lnTo>
-                  <a:lnTo>
-                    <a:pt x="5096789" y="3136917"/>
-                  </a:lnTo>
-                  <a:lnTo>
-                    <a:pt x="5170549" y="3148859"/>
-                  </a:lnTo>
-                  <a:lnTo>
-                    <a:pt x="5244309" y="3160524"/>
-                  </a:lnTo>
-                  <a:lnTo>
-                    <a:pt x="5318069" y="3171920"/>
-                  </a:lnTo>
-                  <a:lnTo>
-                    <a:pt x="5391829" y="3183051"/>
-                  </a:lnTo>
-                  <a:lnTo>
-                    <a:pt x="5465589" y="3193925"/>
-                  </a:lnTo>
-                  <a:lnTo>
-                    <a:pt x="5539349" y="3204547"/>
-                  </a:lnTo>
-                  <a:lnTo>
-                    <a:pt x="5613109" y="3214923"/>
-                  </a:lnTo>
-                  <a:lnTo>
-                    <a:pt x="5686869" y="3225059"/>
-                  </a:lnTo>
-                  <a:lnTo>
-                    <a:pt x="5760629" y="3234960"/>
-                  </a:lnTo>
-                  <a:lnTo>
-                    <a:pt x="5834389" y="3244632"/>
-                  </a:lnTo>
-                  <a:lnTo>
-                    <a:pt x="5908149" y="3254080"/>
-                  </a:lnTo>
-                  <a:lnTo>
-                    <a:pt x="5981909" y="3263309"/>
-                  </a:lnTo>
-                  <a:lnTo>
-                    <a:pt x="6055669" y="3272324"/>
-                  </a:lnTo>
-                  <a:lnTo>
-                    <a:pt x="6129429" y="3281131"/>
-                  </a:lnTo>
-                  <a:lnTo>
-                    <a:pt x="6203189" y="3289734"/>
-                  </a:lnTo>
-                  <a:lnTo>
-                    <a:pt x="6276949" y="3298137"/>
-                  </a:lnTo>
-                  <a:lnTo>
-                    <a:pt x="6350709" y="3306346"/>
-                  </a:lnTo>
-                  <a:lnTo>
-                    <a:pt x="6424469" y="3314365"/>
-                  </a:lnTo>
-                  <a:lnTo>
-                    <a:pt x="6498229" y="3322198"/>
-                  </a:lnTo>
-                  <a:lnTo>
-                    <a:pt x="6571989" y="3329850"/>
-                  </a:lnTo>
-                  <a:lnTo>
-                    <a:pt x="6645749" y="3337324"/>
-                  </a:lnTo>
-                  <a:lnTo>
-                    <a:pt x="6719509" y="3344626"/>
-                  </a:lnTo>
-                  <a:lnTo>
-                    <a:pt x="6793269" y="3351758"/>
-                  </a:lnTo>
-                  <a:lnTo>
-                    <a:pt x="6867029" y="3358726"/>
-                  </a:lnTo>
-                  <a:lnTo>
-                    <a:pt x="6940789" y="3365532"/>
-                  </a:lnTo>
-                  <a:lnTo>
-                    <a:pt x="7014550" y="3372180"/>
-                  </a:lnTo>
-                  <a:lnTo>
-                    <a:pt x="7088310" y="3378674"/>
-                  </a:lnTo>
-                  <a:lnTo>
-                    <a:pt x="7162070" y="3385018"/>
-                  </a:lnTo>
-                  <a:lnTo>
-                    <a:pt x="7235830" y="3391215"/>
-                  </a:lnTo>
-                  <a:lnTo>
-                    <a:pt x="7235830" y="3619927"/>
-                  </a:lnTo>
-                  <a:lnTo>
-                    <a:pt x="7162070" y="3617767"/>
-                  </a:lnTo>
-                  <a:lnTo>
-                    <a:pt x="7088310" y="3615464"/>
-                  </a:lnTo>
-                  <a:lnTo>
-                    <a:pt x="7014550" y="3613009"/>
-                  </a:lnTo>
-                  <a:lnTo>
-                    <a:pt x="6940789" y="3610393"/>
-                  </a:lnTo>
-                  <a:lnTo>
-                    <a:pt x="6867029" y="3607603"/>
-                  </a:lnTo>
-                  <a:lnTo>
-                    <a:pt x="6793269" y="3604629"/>
-                  </a:lnTo>
-                  <a:lnTo>
-                    <a:pt x="6719509" y="3601459"/>
-                  </a:lnTo>
-                  <a:lnTo>
-                    <a:pt x="6645749" y="3598079"/>
-                  </a:lnTo>
-                  <a:lnTo>
-                    <a:pt x="6571989" y="3594477"/>
-                  </a:lnTo>
-                  <a:lnTo>
-                    <a:pt x="6498229" y="3590636"/>
-                  </a:lnTo>
-                  <a:lnTo>
-                    <a:pt x="6424469" y="3586542"/>
-                  </a:lnTo>
-                  <a:lnTo>
-                    <a:pt x="6350709" y="3582178"/>
-                  </a:lnTo>
-                  <a:lnTo>
-                    <a:pt x="6276949" y="3577525"/>
-                  </a:lnTo>
-                  <a:lnTo>
-                    <a:pt x="6203189" y="3572566"/>
-                  </a:lnTo>
-                  <a:lnTo>
-                    <a:pt x="6129429" y="3567278"/>
-                  </a:lnTo>
-                  <a:lnTo>
-                    <a:pt x="6055669" y="3561642"/>
-                  </a:lnTo>
-                  <a:lnTo>
-                    <a:pt x="5981909" y="3555634"/>
-                  </a:lnTo>
-                  <a:lnTo>
-                    <a:pt x="5908149" y="3549229"/>
-                  </a:lnTo>
-                  <a:lnTo>
-                    <a:pt x="5834389" y="3542401"/>
-                  </a:lnTo>
-                  <a:lnTo>
-                    <a:pt x="5760629" y="3535122"/>
-                  </a:lnTo>
-                  <a:lnTo>
-                    <a:pt x="5686869" y="3527362"/>
-                  </a:lnTo>
-                  <a:lnTo>
-                    <a:pt x="5613109" y="3519091"/>
-                  </a:lnTo>
-                  <a:lnTo>
-                    <a:pt x="5539349" y="3510273"/>
-                  </a:lnTo>
-                  <a:lnTo>
-                    <a:pt x="5465589" y="3500873"/>
-                  </a:lnTo>
-                  <a:lnTo>
-                    <a:pt x="5391829" y="3490852"/>
-                  </a:lnTo>
-                  <a:lnTo>
-                    <a:pt x="5318069" y="3480169"/>
-                  </a:lnTo>
-                  <a:lnTo>
-                    <a:pt x="5244309" y="3468782"/>
-                  </a:lnTo>
-                  <a:lnTo>
-                    <a:pt x="5170549" y="3456642"/>
-                  </a:lnTo>
-                  <a:lnTo>
-                    <a:pt x="5096789" y="3443701"/>
-                  </a:lnTo>
-                  <a:lnTo>
-                    <a:pt x="5023029" y="3429906"/>
-                  </a:lnTo>
-                  <a:lnTo>
-                    <a:pt x="4949269" y="3415199"/>
-                  </a:lnTo>
-                  <a:lnTo>
-                    <a:pt x="4875509" y="3399522"/>
-                  </a:lnTo>
-                  <a:lnTo>
-                    <a:pt x="4801749" y="3382809"/>
-                  </a:lnTo>
-                  <a:lnTo>
-                    <a:pt x="4727989" y="3364993"/>
-                  </a:lnTo>
-                  <a:lnTo>
-                    <a:pt x="4654229" y="3346001"/>
-                  </a:lnTo>
-                  <a:lnTo>
-                    <a:pt x="4580469" y="3325755"/>
-                  </a:lnTo>
-                  <a:lnTo>
-                    <a:pt x="4506709" y="3304172"/>
-                  </a:lnTo>
-                  <a:lnTo>
-                    <a:pt x="4432949" y="3281164"/>
-                  </a:lnTo>
-                  <a:lnTo>
-                    <a:pt x="4359189" y="3256637"/>
-                  </a:lnTo>
-                  <a:lnTo>
-                    <a:pt x="4285429" y="3230490"/>
-                  </a:lnTo>
-                  <a:lnTo>
-                    <a:pt x="4211669" y="3202617"/>
-                  </a:lnTo>
-                  <a:lnTo>
-                    <a:pt x="4137909" y="3172904"/>
-                  </a:lnTo>
-                  <a:lnTo>
-                    <a:pt x="4064149" y="3141229"/>
-                  </a:lnTo>
-                  <a:lnTo>
-                    <a:pt x="3990388" y="3107462"/>
-                  </a:lnTo>
-                  <a:lnTo>
-                    <a:pt x="3916628" y="3071466"/>
-                  </a:lnTo>
-                  <a:lnTo>
-                    <a:pt x="3842868" y="3033094"/>
-                  </a:lnTo>
-                  <a:lnTo>
-                    <a:pt x="3769108" y="2992187"/>
-                  </a:lnTo>
-                  <a:lnTo>
-                    <a:pt x="3695348" y="2948580"/>
-                  </a:lnTo>
-                  <a:lnTo>
-                    <a:pt x="3621588" y="2902094"/>
-                  </a:lnTo>
-                  <a:lnTo>
-                    <a:pt x="3547828" y="2852539"/>
-                  </a:lnTo>
-                  <a:lnTo>
-                    <a:pt x="3474068" y="2799711"/>
-                  </a:lnTo>
-                  <a:lnTo>
-                    <a:pt x="3400308" y="2768671"/>
-                  </a:lnTo>
-                  <a:lnTo>
-                    <a:pt x="3326548" y="2747716"/>
-                  </a:lnTo>
-                  <a:lnTo>
-                    <a:pt x="3252788" y="2726265"/>
-                  </a:lnTo>
-                  <a:lnTo>
-                    <a:pt x="3179028" y="2704305"/>
-                  </a:lnTo>
-                  <a:lnTo>
-                    <a:pt x="3105268" y="2681825"/>
-                  </a:lnTo>
-                  <a:lnTo>
-                    <a:pt x="3031508" y="2658812"/>
-                  </a:lnTo>
-                  <a:lnTo>
-                    <a:pt x="2957748" y="2635254"/>
-                  </a:lnTo>
-                  <a:lnTo>
-                    <a:pt x="2883988" y="2611137"/>
-                  </a:lnTo>
-                  <a:lnTo>
-                    <a:pt x="2810228" y="2586448"/>
-                  </a:lnTo>
-                  <a:lnTo>
-                    <a:pt x="2736468" y="2561174"/>
-                  </a:lnTo>
-                  <a:lnTo>
-                    <a:pt x="2662708" y="2535301"/>
-                  </a:lnTo>
-                  <a:lnTo>
-                    <a:pt x="2588948" y="2508814"/>
-                  </a:lnTo>
-                  <a:lnTo>
-                    <a:pt x="2515188" y="2481700"/>
-                  </a:lnTo>
-                  <a:lnTo>
-                    <a:pt x="2441428" y="2453943"/>
-                  </a:lnTo>
-                  <a:lnTo>
-                    <a:pt x="2367668" y="2425528"/>
-                  </a:lnTo>
-                  <a:lnTo>
-                    <a:pt x="2293908" y="2396440"/>
-                  </a:lnTo>
-                  <a:lnTo>
-                    <a:pt x="2220148" y="2366662"/>
-                  </a:lnTo>
-                  <a:lnTo>
-                    <a:pt x="2146388" y="2336178"/>
-                  </a:lnTo>
-                  <a:lnTo>
-                    <a:pt x="2072628" y="2304971"/>
-                  </a:lnTo>
-                  <a:lnTo>
-                    <a:pt x="1998868" y="2273025"/>
-                  </a:lnTo>
-                  <a:lnTo>
-                    <a:pt x="1925108" y="2240321"/>
-                  </a:lnTo>
-                  <a:lnTo>
-                    <a:pt x="1851348" y="2206842"/>
-                  </a:lnTo>
-                  <a:lnTo>
-                    <a:pt x="1777588" y="2172570"/>
-                  </a:lnTo>
-                  <a:lnTo>
-                    <a:pt x="1703828" y="2137485"/>
-                  </a:lnTo>
-                  <a:lnTo>
-                    <a:pt x="1630068" y="2101569"/>
-                  </a:lnTo>
-                  <a:lnTo>
-                    <a:pt x="1556308" y="2064801"/>
-                  </a:lnTo>
-                  <a:lnTo>
-                    <a:pt x="1482548" y="2027161"/>
-                  </a:lnTo>
-                  <a:lnTo>
-                    <a:pt x="1408788" y="1988629"/>
-                  </a:lnTo>
-                  <a:lnTo>
-                    <a:pt x="1335028" y="1949184"/>
-                  </a:lnTo>
-                  <a:lnTo>
-                    <a:pt x="1261268" y="1908804"/>
-                  </a:lnTo>
-                  <a:lnTo>
-                    <a:pt x="1187508" y="1867467"/>
-                  </a:lnTo>
-                  <a:lnTo>
-                    <a:pt x="1113747" y="1825149"/>
-                  </a:lnTo>
-                  <a:lnTo>
-                    <a:pt x="1039987" y="1781829"/>
-                  </a:lnTo>
-                  <a:lnTo>
-                    <a:pt x="966227" y="1737482"/>
-                  </a:lnTo>
-                  <a:lnTo>
-                    <a:pt x="892467" y="1692083"/>
-                  </a:lnTo>
-                  <a:lnTo>
-                    <a:pt x="818707" y="1645608"/>
-                  </a:lnTo>
-                  <a:lnTo>
-                    <a:pt x="744947" y="1598032"/>
-                  </a:lnTo>
-                  <a:lnTo>
-                    <a:pt x="671187" y="1549328"/>
-                  </a:lnTo>
-                  <a:lnTo>
-                    <a:pt x="597427" y="1499469"/>
-                  </a:lnTo>
-                  <a:lnTo>
-                    <a:pt x="523667" y="1448428"/>
-                  </a:lnTo>
-                  <a:lnTo>
-                    <a:pt x="449907" y="1396178"/>
-                  </a:lnTo>
-                  <a:lnTo>
-                    <a:pt x="376147" y="1342689"/>
-                  </a:lnTo>
-                  <a:lnTo>
-                    <a:pt x="302387" y="1287932"/>
-                  </a:lnTo>
-                  <a:lnTo>
-                    <a:pt x="228627" y="1231877"/>
-                  </a:lnTo>
-                  <a:lnTo>
-                    <a:pt x="154867" y="1174493"/>
-                  </a:lnTo>
-                  <a:lnTo>
-                    <a:pt x="81107" y="1115749"/>
-                  </a:lnTo>
-                  <a:lnTo>
-                    <a:pt x="7347" y="1055612"/>
-                  </a:lnTo>
-                  <a:lnTo>
-                    <a:pt x="0" y="1049480"/>
+                    <a:pt x="1851348" y="162952"/>
+                  </a:lnTo>
+                  <a:lnTo>
+                    <a:pt x="1925108" y="368629"/>
+                  </a:lnTo>
+                  <a:lnTo>
+                    <a:pt x="1998868" y="561568"/>
+                  </a:lnTo>
+                  <a:lnTo>
+                    <a:pt x="2072628" y="742557"/>
+                  </a:lnTo>
+                  <a:lnTo>
+                    <a:pt x="2146388" y="912336"/>
+                  </a:lnTo>
+                  <a:lnTo>
+                    <a:pt x="2220148" y="1071599"/>
+                  </a:lnTo>
+                  <a:lnTo>
+                    <a:pt x="2293908" y="1220999"/>
+                  </a:lnTo>
+                  <a:lnTo>
+                    <a:pt x="2367668" y="1361145"/>
+                  </a:lnTo>
+                  <a:lnTo>
+                    <a:pt x="2441428" y="1492611"/>
+                  </a:lnTo>
+                  <a:lnTo>
+                    <a:pt x="2515188" y="1615934"/>
+                  </a:lnTo>
+                  <a:lnTo>
+                    <a:pt x="2588948" y="1731620"/>
+                  </a:lnTo>
+                  <a:lnTo>
+                    <a:pt x="2662708" y="1840140"/>
+                  </a:lnTo>
+                  <a:lnTo>
+                    <a:pt x="2736468" y="1941939"/>
+                  </a:lnTo>
+                  <a:lnTo>
+                    <a:pt x="2810228" y="2037432"/>
+                  </a:lnTo>
+                  <a:lnTo>
+                    <a:pt x="2883988" y="2127012"/>
+                  </a:lnTo>
+                  <a:lnTo>
+                    <a:pt x="2957748" y="2211043"/>
+                  </a:lnTo>
+                  <a:lnTo>
+                    <a:pt x="3031508" y="2289869"/>
+                  </a:lnTo>
+                  <a:lnTo>
+                    <a:pt x="3105268" y="2363814"/>
+                  </a:lnTo>
+                  <a:lnTo>
+                    <a:pt x="3179028" y="2433178"/>
+                  </a:lnTo>
+                  <a:lnTo>
+                    <a:pt x="3252788" y="2498246"/>
+                  </a:lnTo>
+                  <a:lnTo>
+                    <a:pt x="3326548" y="2559285"/>
+                  </a:lnTo>
+                  <a:lnTo>
+                    <a:pt x="3400308" y="2616542"/>
+                  </a:lnTo>
+                  <a:lnTo>
+                    <a:pt x="3474068" y="2660171"/>
+                  </a:lnTo>
+                  <a:lnTo>
+                    <a:pt x="3547828" y="2679242"/>
+                  </a:lnTo>
+                  <a:lnTo>
+                    <a:pt x="3621588" y="2697871"/>
+                  </a:lnTo>
+                  <a:lnTo>
+                    <a:pt x="3695348" y="2716068"/>
+                  </a:lnTo>
+                  <a:lnTo>
+                    <a:pt x="3769108" y="2733845"/>
+                  </a:lnTo>
+                  <a:lnTo>
+                    <a:pt x="3842868" y="2751209"/>
+                  </a:lnTo>
+                  <a:lnTo>
+                    <a:pt x="3916628" y="2768172"/>
+                  </a:lnTo>
+                  <a:lnTo>
+                    <a:pt x="3990388" y="2784742"/>
+                  </a:lnTo>
+                  <a:lnTo>
+                    <a:pt x="4064149" y="2800928"/>
+                  </a:lnTo>
+                  <a:lnTo>
+                    <a:pt x="4137909" y="2816739"/>
+                  </a:lnTo>
+                  <a:lnTo>
+                    <a:pt x="4211669" y="2832184"/>
+                  </a:lnTo>
+                  <a:lnTo>
+                    <a:pt x="4285429" y="2847272"/>
+                  </a:lnTo>
+                  <a:lnTo>
+                    <a:pt x="4359189" y="2862010"/>
+                  </a:lnTo>
+                  <a:lnTo>
+                    <a:pt x="4432949" y="2876407"/>
+                  </a:lnTo>
+                  <a:lnTo>
+                    <a:pt x="4506709" y="2890470"/>
+                  </a:lnTo>
+                  <a:lnTo>
+                    <a:pt x="4580469" y="2904208"/>
+                  </a:lnTo>
+                  <a:lnTo>
+                    <a:pt x="4654229" y="2917628"/>
+                  </a:lnTo>
+                  <a:lnTo>
+                    <a:pt x="4727989" y="2930737"/>
+                  </a:lnTo>
+                  <a:lnTo>
+                    <a:pt x="4801749" y="2943542"/>
+                  </a:lnTo>
+                  <a:lnTo>
+                    <a:pt x="4875509" y="2956051"/>
+                  </a:lnTo>
+                  <a:lnTo>
+                    <a:pt x="4949269" y="2968270"/>
+                  </a:lnTo>
+                  <a:lnTo>
+                    <a:pt x="5023029" y="2980207"/>
+                  </a:lnTo>
+                  <a:lnTo>
+                    <a:pt x="5096789" y="2991867"/>
+                  </a:lnTo>
+                  <a:lnTo>
+                    <a:pt x="5170549" y="3003257"/>
+                  </a:lnTo>
+                  <a:lnTo>
+                    <a:pt x="5244309" y="3014383"/>
+                  </a:lnTo>
+                  <a:lnTo>
+                    <a:pt x="5318069" y="3025251"/>
+                  </a:lnTo>
+                  <a:lnTo>
+                    <a:pt x="5391829" y="3035868"/>
+                  </a:lnTo>
+                  <a:lnTo>
+                    <a:pt x="5465589" y="3046239"/>
+                  </a:lnTo>
+                  <a:lnTo>
+                    <a:pt x="5539349" y="3056370"/>
+                  </a:lnTo>
+                  <a:lnTo>
+                    <a:pt x="5613109" y="3066266"/>
+                  </a:lnTo>
+                  <a:lnTo>
+                    <a:pt x="5686869" y="3075933"/>
+                  </a:lnTo>
+                  <a:lnTo>
+                    <a:pt x="5760629" y="3085377"/>
+                  </a:lnTo>
+                  <a:lnTo>
+                    <a:pt x="5834389" y="3094601"/>
+                  </a:lnTo>
+                  <a:lnTo>
+                    <a:pt x="5908149" y="3103612"/>
+                  </a:lnTo>
+                  <a:lnTo>
+                    <a:pt x="5981909" y="3112415"/>
+                  </a:lnTo>
+                  <a:lnTo>
+                    <a:pt x="6055669" y="3121013"/>
+                  </a:lnTo>
+                  <a:lnTo>
+                    <a:pt x="6129429" y="3129413"/>
+                  </a:lnTo>
+                  <a:lnTo>
+                    <a:pt x="6203189" y="3137618"/>
+                  </a:lnTo>
+                  <a:lnTo>
+                    <a:pt x="6276949" y="3145633"/>
+                  </a:lnTo>
+                  <a:lnTo>
+                    <a:pt x="6350709" y="3153462"/>
+                  </a:lnTo>
+                  <a:lnTo>
+                    <a:pt x="6424469" y="3161110"/>
+                  </a:lnTo>
+                  <a:lnTo>
+                    <a:pt x="6498229" y="3168581"/>
+                  </a:lnTo>
+                  <a:lnTo>
+                    <a:pt x="6571989" y="3175879"/>
+                  </a:lnTo>
+                  <a:lnTo>
+                    <a:pt x="6645749" y="3183008"/>
+                  </a:lnTo>
+                  <a:lnTo>
+                    <a:pt x="6719509" y="3189972"/>
+                  </a:lnTo>
+                  <a:lnTo>
+                    <a:pt x="6793269" y="3196774"/>
+                  </a:lnTo>
+                  <a:lnTo>
+                    <a:pt x="6867029" y="3203419"/>
+                  </a:lnTo>
+                  <a:lnTo>
+                    <a:pt x="6940789" y="3209911"/>
+                  </a:lnTo>
+                  <a:lnTo>
+                    <a:pt x="7014550" y="3216251"/>
+                  </a:lnTo>
+                  <a:lnTo>
+                    <a:pt x="7088310" y="3222446"/>
+                  </a:lnTo>
+                  <a:lnTo>
+                    <a:pt x="7162070" y="3228496"/>
+                  </a:lnTo>
+                  <a:lnTo>
+                    <a:pt x="7235830" y="3234407"/>
+                  </a:lnTo>
+                  <a:lnTo>
+                    <a:pt x="7235830" y="3452543"/>
+                  </a:lnTo>
+                  <a:lnTo>
+                    <a:pt x="7162070" y="3450483"/>
+                  </a:lnTo>
+                  <a:lnTo>
+                    <a:pt x="7088310" y="3448286"/>
+                  </a:lnTo>
+                  <a:lnTo>
+                    <a:pt x="7014550" y="3445945"/>
+                  </a:lnTo>
+                  <a:lnTo>
+                    <a:pt x="6940789" y="3443449"/>
+                  </a:lnTo>
+                  <a:lnTo>
+                    <a:pt x="6867029" y="3440789"/>
+                  </a:lnTo>
+                  <a:lnTo>
+                    <a:pt x="6793269" y="3437952"/>
+                  </a:lnTo>
+                  <a:lnTo>
+                    <a:pt x="6719509" y="3434929"/>
+                  </a:lnTo>
+                  <a:lnTo>
+                    <a:pt x="6645749" y="3431706"/>
+                  </a:lnTo>
+                  <a:lnTo>
+                    <a:pt x="6571989" y="3428269"/>
+                  </a:lnTo>
+                  <a:lnTo>
+                    <a:pt x="6498229" y="3424607"/>
+                  </a:lnTo>
+                  <a:lnTo>
+                    <a:pt x="6424469" y="3420702"/>
+                  </a:lnTo>
+                  <a:lnTo>
+                    <a:pt x="6350709" y="3416539"/>
+                  </a:lnTo>
+                  <a:lnTo>
+                    <a:pt x="6276949" y="3412102"/>
+                  </a:lnTo>
+                  <a:lnTo>
+                    <a:pt x="6203189" y="3407372"/>
+                  </a:lnTo>
+                  <a:lnTo>
+                    <a:pt x="6129429" y="3402329"/>
+                  </a:lnTo>
+                  <a:lnTo>
+                    <a:pt x="6055669" y="3396953"/>
+                  </a:lnTo>
+                  <a:lnTo>
+                    <a:pt x="5981909" y="3391223"/>
+                  </a:lnTo>
+                  <a:lnTo>
+                    <a:pt x="5908149" y="3385114"/>
+                  </a:lnTo>
+                  <a:lnTo>
+                    <a:pt x="5834389" y="3378601"/>
+                  </a:lnTo>
+                  <a:lnTo>
+                    <a:pt x="5760629" y="3371659"/>
+                  </a:lnTo>
+                  <a:lnTo>
+                    <a:pt x="5686869" y="3364258"/>
+                  </a:lnTo>
+                  <a:lnTo>
+                    <a:pt x="5613109" y="3356369"/>
+                  </a:lnTo>
+                  <a:lnTo>
+                    <a:pt x="5539349" y="3347959"/>
+                  </a:lnTo>
+                  <a:lnTo>
+                    <a:pt x="5465589" y="3338994"/>
+                  </a:lnTo>
+                  <a:lnTo>
+                    <a:pt x="5391829" y="3329436"/>
+                  </a:lnTo>
+                  <a:lnTo>
+                    <a:pt x="5318069" y="3319248"/>
+                  </a:lnTo>
+                  <a:lnTo>
+                    <a:pt x="5244309" y="3308387"/>
+                  </a:lnTo>
+                  <a:lnTo>
+                    <a:pt x="5170549" y="3296808"/>
+                  </a:lnTo>
+                  <a:lnTo>
+                    <a:pt x="5096789" y="3284466"/>
+                  </a:lnTo>
+                  <a:lnTo>
+                    <a:pt x="5023029" y="3271308"/>
+                  </a:lnTo>
+                  <a:lnTo>
+                    <a:pt x="4949269" y="3257282"/>
+                  </a:lnTo>
+                  <a:lnTo>
+                    <a:pt x="4875509" y="3242329"/>
+                  </a:lnTo>
+                  <a:lnTo>
+                    <a:pt x="4801749" y="3226389"/>
+                  </a:lnTo>
+                  <a:lnTo>
+                    <a:pt x="4727989" y="3209397"/>
+                  </a:lnTo>
+                  <a:lnTo>
+                    <a:pt x="4654229" y="3191283"/>
+                  </a:lnTo>
+                  <a:lnTo>
+                    <a:pt x="4580469" y="3171973"/>
+                  </a:lnTo>
+                  <a:lnTo>
+                    <a:pt x="4506709" y="3151388"/>
+                  </a:lnTo>
+                  <a:lnTo>
+                    <a:pt x="4432949" y="3129444"/>
+                  </a:lnTo>
+                  <a:lnTo>
+                    <a:pt x="4359189" y="3106051"/>
+                  </a:lnTo>
+                  <a:lnTo>
+                    <a:pt x="4285429" y="3081113"/>
+                  </a:lnTo>
+                  <a:lnTo>
+                    <a:pt x="4211669" y="3054529"/>
+                  </a:lnTo>
+                  <a:lnTo>
+                    <a:pt x="4137909" y="3026190"/>
+                  </a:lnTo>
+                  <a:lnTo>
+                    <a:pt x="4064149" y="2995979"/>
+                  </a:lnTo>
+                  <a:lnTo>
+                    <a:pt x="3990388" y="2963774"/>
+                  </a:lnTo>
+                  <a:lnTo>
+                    <a:pt x="3916628" y="2929443"/>
+                  </a:lnTo>
+                  <a:lnTo>
+                    <a:pt x="3842868" y="2892844"/>
+                  </a:lnTo>
+                  <a:lnTo>
+                    <a:pt x="3769108" y="2853830"/>
+                  </a:lnTo>
+                  <a:lnTo>
+                    <a:pt x="3695348" y="2812239"/>
+                  </a:lnTo>
+                  <a:lnTo>
+                    <a:pt x="3621588" y="2767902"/>
+                  </a:lnTo>
+                  <a:lnTo>
+                    <a:pt x="3547828" y="2720638"/>
+                  </a:lnTo>
+                  <a:lnTo>
+                    <a:pt x="3474068" y="2670254"/>
+                  </a:lnTo>
+                  <a:lnTo>
+                    <a:pt x="3400308" y="2640648"/>
+                  </a:lnTo>
+                  <a:lnTo>
+                    <a:pt x="3326548" y="2620663"/>
+                  </a:lnTo>
+                  <a:lnTo>
+                    <a:pt x="3252788" y="2600204"/>
+                  </a:lnTo>
+                  <a:lnTo>
+                    <a:pt x="3179028" y="2579259"/>
+                  </a:lnTo>
+                  <a:lnTo>
+                    <a:pt x="3105268" y="2557819"/>
+                  </a:lnTo>
+                  <a:lnTo>
+                    <a:pt x="3031508" y="2535870"/>
+                  </a:lnTo>
+                  <a:lnTo>
+                    <a:pt x="2957748" y="2513400"/>
+                  </a:lnTo>
+                  <a:lnTo>
+                    <a:pt x="2883988" y="2490399"/>
+                  </a:lnTo>
+                  <a:lnTo>
+                    <a:pt x="2810228" y="2466851"/>
+                  </a:lnTo>
+                  <a:lnTo>
+                    <a:pt x="2736468" y="2442746"/>
+                  </a:lnTo>
+                  <a:lnTo>
+                    <a:pt x="2662708" y="2418069"/>
+                  </a:lnTo>
+                  <a:lnTo>
+                    <a:pt x="2588948" y="2392808"/>
+                  </a:lnTo>
+                  <a:lnTo>
+                    <a:pt x="2515188" y="2366947"/>
+                  </a:lnTo>
+                  <a:lnTo>
+                    <a:pt x="2441428" y="2340474"/>
+                  </a:lnTo>
+                  <a:lnTo>
+                    <a:pt x="2367668" y="2313373"/>
+                  </a:lnTo>
+                  <a:lnTo>
+                    <a:pt x="2293908" y="2285629"/>
+                  </a:lnTo>
+                  <a:lnTo>
+                    <a:pt x="2220148" y="2257228"/>
+                  </a:lnTo>
+                  <a:lnTo>
+                    <a:pt x="2146388" y="2228154"/>
+                  </a:lnTo>
+                  <a:lnTo>
+                    <a:pt x="2072628" y="2198390"/>
+                  </a:lnTo>
+                  <a:lnTo>
+                    <a:pt x="1998868" y="2167921"/>
+                  </a:lnTo>
+                  <a:lnTo>
+                    <a:pt x="1925108" y="2136730"/>
+                  </a:lnTo>
+                  <a:lnTo>
+                    <a:pt x="1851348" y="2104799"/>
+                  </a:lnTo>
+                  <a:lnTo>
+                    <a:pt x="1777588" y="2072111"/>
+                  </a:lnTo>
+                  <a:lnTo>
+                    <a:pt x="1703828" y="2038649"/>
+                  </a:lnTo>
+                  <a:lnTo>
+                    <a:pt x="1630068" y="2004393"/>
+                  </a:lnTo>
+                  <a:lnTo>
+                    <a:pt x="1556308" y="1969325"/>
+                  </a:lnTo>
+                  <a:lnTo>
+                    <a:pt x="1482548" y="1933426"/>
+                  </a:lnTo>
+                  <a:lnTo>
+                    <a:pt x="1408788" y="1896676"/>
+                  </a:lnTo>
+                  <a:lnTo>
+                    <a:pt x="1335028" y="1859055"/>
+                  </a:lnTo>
+                  <a:lnTo>
+                    <a:pt x="1261268" y="1820542"/>
+                  </a:lnTo>
+                  <a:lnTo>
+                    <a:pt x="1187508" y="1781116"/>
+                  </a:lnTo>
+                  <a:lnTo>
+                    <a:pt x="1113747" y="1740755"/>
+                  </a:lnTo>
+                  <a:lnTo>
+                    <a:pt x="1039987" y="1699438"/>
+                  </a:lnTo>
+                  <a:lnTo>
+                    <a:pt x="966227" y="1657141"/>
+                  </a:lnTo>
+                  <a:lnTo>
+                    <a:pt x="892467" y="1613842"/>
+                  </a:lnTo>
+                  <a:lnTo>
+                    <a:pt x="818707" y="1569516"/>
+                  </a:lnTo>
+                  <a:lnTo>
+                    <a:pt x="744947" y="1524139"/>
+                  </a:lnTo>
+                  <a:lnTo>
+                    <a:pt x="671187" y="1477687"/>
+                  </a:lnTo>
+                  <a:lnTo>
+                    <a:pt x="597427" y="1430134"/>
+                  </a:lnTo>
+                  <a:lnTo>
+                    <a:pt x="523667" y="1381454"/>
+                  </a:lnTo>
+                  <a:lnTo>
+                    <a:pt x="449907" y="1331619"/>
+                  </a:lnTo>
+                  <a:lnTo>
+                    <a:pt x="376147" y="1280603"/>
+                  </a:lnTo>
+                  <a:lnTo>
+                    <a:pt x="302387" y="1228378"/>
+                  </a:lnTo>
+                  <a:lnTo>
+                    <a:pt x="228627" y="1174915"/>
+                  </a:lnTo>
+                  <a:lnTo>
+                    <a:pt x="154867" y="1120185"/>
+                  </a:lnTo>
+                  <a:lnTo>
+                    <a:pt x="81107" y="1064157"/>
+                  </a:lnTo>
+                  <a:lnTo>
+                    <a:pt x="7347" y="1006801"/>
+                  </a:lnTo>
+                  <a:lnTo>
+                    <a:pt x="0" y="1000952"/>
                   </a:lnTo>
                   <a:close/>
                 </a:path>
@@ -3558,237 +3558,237 @@
           </p:nvSpPr>
           <p:spPr>
             <a:xfrm>
-              <a:off x="2614047" y="1896563"/>
-              <a:ext cx="5439300" cy="3391215"/>
+              <a:off x="2614047" y="2073503"/>
+              <a:ext cx="5439300" cy="3234407"/>
             </a:xfrm>
             <a:custGeom>
               <a:avLst/>
               <a:pathLst>
-                <a:path w="5439300" h="3391215">
+                <a:path w="5439300" h="3234407">
                   <a:moveTo>
                     <a:pt x="0" y="0"/>
                   </a:moveTo>
                   <a:lnTo>
-                    <a:pt x="54818" y="170852"/>
-                  </a:lnTo>
-                  <a:lnTo>
-                    <a:pt x="128578" y="386501"/>
-                  </a:lnTo>
-                  <a:lnTo>
-                    <a:pt x="202338" y="588793"/>
-                  </a:lnTo>
-                  <a:lnTo>
-                    <a:pt x="276098" y="778557"/>
-                  </a:lnTo>
-                  <a:lnTo>
-                    <a:pt x="349858" y="956567"/>
-                  </a:lnTo>
-                  <a:lnTo>
-                    <a:pt x="423618" y="1123552"/>
-                  </a:lnTo>
-                  <a:lnTo>
-                    <a:pt x="497378" y="1280194"/>
-                  </a:lnTo>
-                  <a:lnTo>
-                    <a:pt x="571138" y="1427135"/>
-                  </a:lnTo>
-                  <a:lnTo>
-                    <a:pt x="644898" y="1564975"/>
-                  </a:lnTo>
-                  <a:lnTo>
-                    <a:pt x="718658" y="1694277"/>
-                  </a:lnTo>
-                  <a:lnTo>
-                    <a:pt x="792418" y="1815571"/>
-                  </a:lnTo>
-                  <a:lnTo>
-                    <a:pt x="866178" y="1929352"/>
-                  </a:lnTo>
-                  <a:lnTo>
-                    <a:pt x="939938" y="2036087"/>
-                  </a:lnTo>
-                  <a:lnTo>
-                    <a:pt x="1013698" y="2136210"/>
-                  </a:lnTo>
-                  <a:lnTo>
-                    <a:pt x="1087458" y="2230132"/>
-                  </a:lnTo>
-                  <a:lnTo>
-                    <a:pt x="1161218" y="2318237"/>
-                  </a:lnTo>
-                  <a:lnTo>
-                    <a:pt x="1234978" y="2400885"/>
-                  </a:lnTo>
-                  <a:lnTo>
-                    <a:pt x="1308738" y="2478415"/>
-                  </a:lnTo>
-                  <a:lnTo>
-                    <a:pt x="1382498" y="2551142"/>
-                  </a:lnTo>
-                  <a:lnTo>
-                    <a:pt x="1456258" y="2619365"/>
-                  </a:lnTo>
-                  <a:lnTo>
-                    <a:pt x="1530018" y="2683362"/>
-                  </a:lnTo>
-                  <a:lnTo>
-                    <a:pt x="1603778" y="2743396"/>
-                  </a:lnTo>
-                  <a:lnTo>
-                    <a:pt x="1677538" y="2789140"/>
-                  </a:lnTo>
-                  <a:lnTo>
-                    <a:pt x="1751298" y="2809135"/>
-                  </a:lnTo>
-                  <a:lnTo>
-                    <a:pt x="1825058" y="2828667"/>
-                  </a:lnTo>
-                  <a:lnTo>
-                    <a:pt x="1898819" y="2847747"/>
-                  </a:lnTo>
-                  <a:lnTo>
-                    <a:pt x="1972579" y="2866385"/>
-                  </a:lnTo>
-                  <a:lnTo>
-                    <a:pt x="2046339" y="2884592"/>
-                  </a:lnTo>
-                  <a:lnTo>
-                    <a:pt x="2120099" y="2902377"/>
-                  </a:lnTo>
-                  <a:lnTo>
-                    <a:pt x="2193859" y="2919750"/>
-                  </a:lnTo>
-                  <a:lnTo>
-                    <a:pt x="2267619" y="2936721"/>
-                  </a:lnTo>
-                  <a:lnTo>
-                    <a:pt x="2341379" y="2953298"/>
-                  </a:lnTo>
-                  <a:lnTo>
-                    <a:pt x="2415139" y="2969492"/>
-                  </a:lnTo>
-                  <a:lnTo>
-                    <a:pt x="2488899" y="2985311"/>
-                  </a:lnTo>
-                  <a:lnTo>
-                    <a:pt x="2562659" y="3000764"/>
-                  </a:lnTo>
-                  <a:lnTo>
-                    <a:pt x="2636419" y="3015859"/>
-                  </a:lnTo>
-                  <a:lnTo>
-                    <a:pt x="2710179" y="3030604"/>
-                  </a:lnTo>
-                  <a:lnTo>
-                    <a:pt x="2783939" y="3045008"/>
-                  </a:lnTo>
-                  <a:lnTo>
-                    <a:pt x="2857699" y="3059078"/>
-                  </a:lnTo>
-                  <a:lnTo>
-                    <a:pt x="2931459" y="3072823"/>
-                  </a:lnTo>
-                  <a:lnTo>
-                    <a:pt x="3005219" y="3086249"/>
-                  </a:lnTo>
-                  <a:lnTo>
-                    <a:pt x="3078979" y="3099365"/>
-                  </a:lnTo>
-                  <a:lnTo>
-                    <a:pt x="3152739" y="3112176"/>
-                  </a:lnTo>
-                  <a:lnTo>
-                    <a:pt x="3226499" y="3124691"/>
-                  </a:lnTo>
-                  <a:lnTo>
-                    <a:pt x="3300259" y="3136917"/>
-                  </a:lnTo>
-                  <a:lnTo>
-                    <a:pt x="3374019" y="3148859"/>
-                  </a:lnTo>
-                  <a:lnTo>
-                    <a:pt x="3447779" y="3160524"/>
-                  </a:lnTo>
-                  <a:lnTo>
-                    <a:pt x="3521539" y="3171920"/>
-                  </a:lnTo>
-                  <a:lnTo>
-                    <a:pt x="3595299" y="3183051"/>
-                  </a:lnTo>
-                  <a:lnTo>
-                    <a:pt x="3669059" y="3193925"/>
-                  </a:lnTo>
-                  <a:lnTo>
-                    <a:pt x="3742819" y="3204547"/>
-                  </a:lnTo>
-                  <a:lnTo>
-                    <a:pt x="3816579" y="3214923"/>
-                  </a:lnTo>
-                  <a:lnTo>
-                    <a:pt x="3890339" y="3225059"/>
-                  </a:lnTo>
-                  <a:lnTo>
-                    <a:pt x="3964099" y="3234960"/>
-                  </a:lnTo>
-                  <a:lnTo>
-                    <a:pt x="4037859" y="3244632"/>
-                  </a:lnTo>
-                  <a:lnTo>
-                    <a:pt x="4111619" y="3254080"/>
-                  </a:lnTo>
-                  <a:lnTo>
-                    <a:pt x="4185379" y="3263309"/>
-                  </a:lnTo>
-                  <a:lnTo>
-                    <a:pt x="4259139" y="3272324"/>
-                  </a:lnTo>
-                  <a:lnTo>
-                    <a:pt x="4332899" y="3281131"/>
-                  </a:lnTo>
-                  <a:lnTo>
-                    <a:pt x="4406659" y="3289734"/>
-                  </a:lnTo>
-                  <a:lnTo>
-                    <a:pt x="4480419" y="3298137"/>
-                  </a:lnTo>
-                  <a:lnTo>
-                    <a:pt x="4554179" y="3306346"/>
-                  </a:lnTo>
-                  <a:lnTo>
-                    <a:pt x="4627939" y="3314365"/>
-                  </a:lnTo>
-                  <a:lnTo>
-                    <a:pt x="4701699" y="3322198"/>
-                  </a:lnTo>
-                  <a:lnTo>
-                    <a:pt x="4775459" y="3329850"/>
-                  </a:lnTo>
-                  <a:lnTo>
-                    <a:pt x="4849220" y="3337324"/>
-                  </a:lnTo>
-                  <a:lnTo>
-                    <a:pt x="4922980" y="3344626"/>
-                  </a:lnTo>
-                  <a:lnTo>
-                    <a:pt x="4996740" y="3351758"/>
-                  </a:lnTo>
-                  <a:lnTo>
-                    <a:pt x="5070500" y="3358726"/>
-                  </a:lnTo>
-                  <a:lnTo>
-                    <a:pt x="5144260" y="3365532"/>
-                  </a:lnTo>
-                  <a:lnTo>
-                    <a:pt x="5218020" y="3372180"/>
-                  </a:lnTo>
-                  <a:lnTo>
-                    <a:pt x="5291780" y="3378674"/>
-                  </a:lnTo>
-                  <a:lnTo>
-                    <a:pt x="5365540" y="3385018"/>
-                  </a:lnTo>
-                  <a:lnTo>
-                    <a:pt x="5439300" y="3391215"/>
+                    <a:pt x="54818" y="162952"/>
+                  </a:lnTo>
+                  <a:lnTo>
+                    <a:pt x="128578" y="368629"/>
+                  </a:lnTo>
+                  <a:lnTo>
+                    <a:pt x="202338" y="561568"/>
+                  </a:lnTo>
+                  <a:lnTo>
+                    <a:pt x="276098" y="742557"/>
+                  </a:lnTo>
+                  <a:lnTo>
+                    <a:pt x="349858" y="912336"/>
+                  </a:lnTo>
+                  <a:lnTo>
+                    <a:pt x="423618" y="1071599"/>
+                  </a:lnTo>
+                  <a:lnTo>
+                    <a:pt x="497378" y="1220999"/>
+                  </a:lnTo>
+                  <a:lnTo>
+                    <a:pt x="571138" y="1361145"/>
+                  </a:lnTo>
+                  <a:lnTo>
+                    <a:pt x="644898" y="1492611"/>
+                  </a:lnTo>
+                  <a:lnTo>
+                    <a:pt x="718658" y="1615934"/>
+                  </a:lnTo>
+                  <a:lnTo>
+                    <a:pt x="792418" y="1731620"/>
+                  </a:lnTo>
+                  <a:lnTo>
+                    <a:pt x="866178" y="1840140"/>
+                  </a:lnTo>
+                  <a:lnTo>
+                    <a:pt x="939938" y="1941939"/>
+                  </a:lnTo>
+                  <a:lnTo>
+                    <a:pt x="1013698" y="2037432"/>
+                  </a:lnTo>
+                  <a:lnTo>
+                    <a:pt x="1087458" y="2127012"/>
+                  </a:lnTo>
+                  <a:lnTo>
+                    <a:pt x="1161218" y="2211043"/>
+                  </a:lnTo>
+                  <a:lnTo>
+                    <a:pt x="1234978" y="2289869"/>
+                  </a:lnTo>
+                  <a:lnTo>
+                    <a:pt x="1308738" y="2363814"/>
+                  </a:lnTo>
+                  <a:lnTo>
+                    <a:pt x="1382498" y="2433178"/>
+                  </a:lnTo>
+                  <a:lnTo>
+                    <a:pt x="1456258" y="2498246"/>
+                  </a:lnTo>
+                  <a:lnTo>
+                    <a:pt x="1530018" y="2559285"/>
+                  </a:lnTo>
+                  <a:lnTo>
+                    <a:pt x="1603778" y="2616542"/>
+                  </a:lnTo>
+                  <a:lnTo>
+                    <a:pt x="1677538" y="2660171"/>
+                  </a:lnTo>
+                  <a:lnTo>
+                    <a:pt x="1751298" y="2679242"/>
+                  </a:lnTo>
+                  <a:lnTo>
+                    <a:pt x="1825058" y="2697871"/>
+                  </a:lnTo>
+                  <a:lnTo>
+                    <a:pt x="1898819" y="2716068"/>
+                  </a:lnTo>
+                  <a:lnTo>
+                    <a:pt x="1972579" y="2733845"/>
+                  </a:lnTo>
+                  <a:lnTo>
+                    <a:pt x="2046339" y="2751209"/>
+                  </a:lnTo>
+                  <a:lnTo>
+                    <a:pt x="2120099" y="2768172"/>
+                  </a:lnTo>
+                  <a:lnTo>
+                    <a:pt x="2193859" y="2784742"/>
+                  </a:lnTo>
+                  <a:lnTo>
+                    <a:pt x="2267619" y="2800928"/>
+                  </a:lnTo>
+                  <a:lnTo>
+                    <a:pt x="2341379" y="2816739"/>
+                  </a:lnTo>
+                  <a:lnTo>
+                    <a:pt x="2415139" y="2832184"/>
+                  </a:lnTo>
+                  <a:lnTo>
+                    <a:pt x="2488899" y="2847272"/>
+                  </a:lnTo>
+                  <a:lnTo>
+                    <a:pt x="2562659" y="2862010"/>
+                  </a:lnTo>
+                  <a:lnTo>
+                    <a:pt x="2636419" y="2876407"/>
+                  </a:lnTo>
+                  <a:lnTo>
+                    <a:pt x="2710179" y="2890470"/>
+                  </a:lnTo>
+                  <a:lnTo>
+                    <a:pt x="2783939" y="2904208"/>
+                  </a:lnTo>
+                  <a:lnTo>
+                    <a:pt x="2857699" y="2917628"/>
+                  </a:lnTo>
+                  <a:lnTo>
+                    <a:pt x="2931459" y="2930737"/>
+                  </a:lnTo>
+                  <a:lnTo>
+                    <a:pt x="3005219" y="2943542"/>
+                  </a:lnTo>
+                  <a:lnTo>
+                    <a:pt x="3078979" y="2956051"/>
+                  </a:lnTo>
+                  <a:lnTo>
+                    <a:pt x="3152739" y="2968270"/>
+                  </a:lnTo>
+                  <a:lnTo>
+                    <a:pt x="3226499" y="2980207"/>
+                  </a:lnTo>
+                  <a:lnTo>
+                    <a:pt x="3300259" y="2991867"/>
+                  </a:lnTo>
+                  <a:lnTo>
+                    <a:pt x="3374019" y="3003257"/>
+                  </a:lnTo>
+                  <a:lnTo>
+                    <a:pt x="3447779" y="3014383"/>
+                  </a:lnTo>
+                  <a:lnTo>
+                    <a:pt x="3521539" y="3025251"/>
+                  </a:lnTo>
+                  <a:lnTo>
+                    <a:pt x="3595299" y="3035868"/>
+                  </a:lnTo>
+                  <a:lnTo>
+                    <a:pt x="3669059" y="3046239"/>
+                  </a:lnTo>
+                  <a:lnTo>
+                    <a:pt x="3742819" y="3056370"/>
+                  </a:lnTo>
+                  <a:lnTo>
+                    <a:pt x="3816579" y="3066266"/>
+                  </a:lnTo>
+                  <a:lnTo>
+                    <a:pt x="3890339" y="3075933"/>
+                  </a:lnTo>
+                  <a:lnTo>
+                    <a:pt x="3964099" y="3085377"/>
+                  </a:lnTo>
+                  <a:lnTo>
+                    <a:pt x="4037859" y="3094601"/>
+                  </a:lnTo>
+                  <a:lnTo>
+                    <a:pt x="4111619" y="3103612"/>
+                  </a:lnTo>
+                  <a:lnTo>
+                    <a:pt x="4185379" y="3112415"/>
+                  </a:lnTo>
+                  <a:lnTo>
+                    <a:pt x="4259139" y="3121013"/>
+                  </a:lnTo>
+                  <a:lnTo>
+                    <a:pt x="4332899" y="3129413"/>
+                  </a:lnTo>
+                  <a:lnTo>
+                    <a:pt x="4406659" y="3137618"/>
+                  </a:lnTo>
+                  <a:lnTo>
+                    <a:pt x="4480419" y="3145633"/>
+                  </a:lnTo>
+                  <a:lnTo>
+                    <a:pt x="4554179" y="3153462"/>
+                  </a:lnTo>
+                  <a:lnTo>
+                    <a:pt x="4627939" y="3161110"/>
+                  </a:lnTo>
+                  <a:lnTo>
+                    <a:pt x="4701699" y="3168581"/>
+                  </a:lnTo>
+                  <a:lnTo>
+                    <a:pt x="4775459" y="3175879"/>
+                  </a:lnTo>
+                  <a:lnTo>
+                    <a:pt x="4849220" y="3183008"/>
+                  </a:lnTo>
+                  <a:lnTo>
+                    <a:pt x="4922980" y="3189972"/>
+                  </a:lnTo>
+                  <a:lnTo>
+                    <a:pt x="4996740" y="3196774"/>
+                  </a:lnTo>
+                  <a:lnTo>
+                    <a:pt x="5070500" y="3203419"/>
+                  </a:lnTo>
+                  <a:lnTo>
+                    <a:pt x="5144260" y="3209911"/>
+                  </a:lnTo>
+                  <a:lnTo>
+                    <a:pt x="5218020" y="3216251"/>
+                  </a:lnTo>
+                  <a:lnTo>
+                    <a:pt x="5291780" y="3222446"/>
+                  </a:lnTo>
+                  <a:lnTo>
+                    <a:pt x="5365540" y="3228496"/>
+                  </a:lnTo>
+                  <a:lnTo>
+                    <a:pt x="5439300" y="3234407"/>
                   </a:lnTo>
                 </a:path>
               </a:pathLst>
@@ -3808,309 +3808,309 @@
           </p:nvSpPr>
           <p:spPr>
             <a:xfrm>
-              <a:off x="817517" y="2946043"/>
-              <a:ext cx="7235830" cy="2570447"/>
+              <a:off x="817517" y="3074455"/>
+              <a:ext cx="7235830" cy="2451590"/>
             </a:xfrm>
             <a:custGeom>
               <a:avLst/>
               <a:pathLst>
-                <a:path w="7235830" h="2570447">
+                <a:path w="7235830" h="2451590">
                   <a:moveTo>
-                    <a:pt x="7235830" y="2570447"/>
+                    <a:pt x="7235830" y="2451590"/>
                   </a:moveTo>
                   <a:lnTo>
-                    <a:pt x="7162070" y="2568287"/>
-                  </a:lnTo>
-                  <a:lnTo>
-                    <a:pt x="7088310" y="2565984"/>
-                  </a:lnTo>
-                  <a:lnTo>
-                    <a:pt x="7014550" y="2563529"/>
-                  </a:lnTo>
-                  <a:lnTo>
-                    <a:pt x="6940789" y="2560912"/>
-                  </a:lnTo>
-                  <a:lnTo>
-                    <a:pt x="6867029" y="2558123"/>
-                  </a:lnTo>
-                  <a:lnTo>
-                    <a:pt x="6793269" y="2555149"/>
-                  </a:lnTo>
-                  <a:lnTo>
-                    <a:pt x="6719509" y="2551979"/>
-                  </a:lnTo>
-                  <a:lnTo>
-                    <a:pt x="6645749" y="2548599"/>
-                  </a:lnTo>
-                  <a:lnTo>
-                    <a:pt x="6571989" y="2544997"/>
-                  </a:lnTo>
-                  <a:lnTo>
-                    <a:pt x="6498229" y="2541156"/>
-                  </a:lnTo>
-                  <a:lnTo>
-                    <a:pt x="6424469" y="2537062"/>
-                  </a:lnTo>
-                  <a:lnTo>
-                    <a:pt x="6350709" y="2532698"/>
-                  </a:lnTo>
-                  <a:lnTo>
-                    <a:pt x="6276949" y="2528045"/>
-                  </a:lnTo>
-                  <a:lnTo>
-                    <a:pt x="6203189" y="2523085"/>
-                  </a:lnTo>
-                  <a:lnTo>
-                    <a:pt x="6129429" y="2517798"/>
-                  </a:lnTo>
-                  <a:lnTo>
-                    <a:pt x="6055669" y="2512162"/>
-                  </a:lnTo>
-                  <a:lnTo>
-                    <a:pt x="5981909" y="2506154"/>
-                  </a:lnTo>
-                  <a:lnTo>
-                    <a:pt x="5908149" y="2499749"/>
-                  </a:lnTo>
-                  <a:lnTo>
-                    <a:pt x="5834389" y="2492920"/>
-                  </a:lnTo>
-                  <a:lnTo>
-                    <a:pt x="5760629" y="2485642"/>
-                  </a:lnTo>
-                  <a:lnTo>
-                    <a:pt x="5686869" y="2477882"/>
-                  </a:lnTo>
-                  <a:lnTo>
-                    <a:pt x="5613109" y="2469610"/>
-                  </a:lnTo>
-                  <a:lnTo>
-                    <a:pt x="5539349" y="2460793"/>
-                  </a:lnTo>
-                  <a:lnTo>
-                    <a:pt x="5465589" y="2451392"/>
-                  </a:lnTo>
-                  <a:lnTo>
-                    <a:pt x="5391829" y="2441372"/>
-                  </a:lnTo>
-                  <a:lnTo>
-                    <a:pt x="5318069" y="2430689"/>
-                  </a:lnTo>
-                  <a:lnTo>
-                    <a:pt x="5244309" y="2419302"/>
-                  </a:lnTo>
-                  <a:lnTo>
-                    <a:pt x="5170549" y="2407162"/>
-                  </a:lnTo>
-                  <a:lnTo>
-                    <a:pt x="5096789" y="2394221"/>
-                  </a:lnTo>
-                  <a:lnTo>
-                    <a:pt x="5023029" y="2380425"/>
-                  </a:lnTo>
-                  <a:lnTo>
-                    <a:pt x="4949269" y="2365719"/>
-                  </a:lnTo>
-                  <a:lnTo>
-                    <a:pt x="4875509" y="2350042"/>
-                  </a:lnTo>
-                  <a:lnTo>
-                    <a:pt x="4801749" y="2333329"/>
-                  </a:lnTo>
-                  <a:lnTo>
-                    <a:pt x="4727989" y="2315513"/>
-                  </a:lnTo>
-                  <a:lnTo>
-                    <a:pt x="4654229" y="2296521"/>
-                  </a:lnTo>
-                  <a:lnTo>
-                    <a:pt x="4580469" y="2276275"/>
-                  </a:lnTo>
-                  <a:lnTo>
-                    <a:pt x="4506709" y="2254692"/>
-                  </a:lnTo>
-                  <a:lnTo>
-                    <a:pt x="4432949" y="2231684"/>
-                  </a:lnTo>
-                  <a:lnTo>
-                    <a:pt x="4359189" y="2207156"/>
-                  </a:lnTo>
-                  <a:lnTo>
-                    <a:pt x="4285429" y="2181010"/>
-                  </a:lnTo>
-                  <a:lnTo>
-                    <a:pt x="4211669" y="2153137"/>
-                  </a:lnTo>
-                  <a:lnTo>
-                    <a:pt x="4137909" y="2123424"/>
-                  </a:lnTo>
-                  <a:lnTo>
-                    <a:pt x="4064149" y="2091748"/>
-                  </a:lnTo>
-                  <a:lnTo>
-                    <a:pt x="3990388" y="2057982"/>
-                  </a:lnTo>
-                  <a:lnTo>
-                    <a:pt x="3916628" y="2021986"/>
-                  </a:lnTo>
-                  <a:lnTo>
-                    <a:pt x="3842868" y="1983613"/>
-                  </a:lnTo>
-                  <a:lnTo>
-                    <a:pt x="3769108" y="1942707"/>
-                  </a:lnTo>
-                  <a:lnTo>
-                    <a:pt x="3695348" y="1899100"/>
-                  </a:lnTo>
-                  <a:lnTo>
-                    <a:pt x="3621588" y="1852614"/>
-                  </a:lnTo>
-                  <a:lnTo>
-                    <a:pt x="3547828" y="1803058"/>
-                  </a:lnTo>
-                  <a:lnTo>
-                    <a:pt x="3474068" y="1750231"/>
-                  </a:lnTo>
-                  <a:lnTo>
-                    <a:pt x="3400308" y="1719190"/>
-                  </a:lnTo>
-                  <a:lnTo>
-                    <a:pt x="3326548" y="1698236"/>
-                  </a:lnTo>
-                  <a:lnTo>
-                    <a:pt x="3252788" y="1676785"/>
-                  </a:lnTo>
-                  <a:lnTo>
-                    <a:pt x="3179028" y="1654825"/>
-                  </a:lnTo>
-                  <a:lnTo>
-                    <a:pt x="3105268" y="1632345"/>
-                  </a:lnTo>
-                  <a:lnTo>
-                    <a:pt x="3031508" y="1609332"/>
-                  </a:lnTo>
-                  <a:lnTo>
-                    <a:pt x="2957748" y="1585773"/>
-                  </a:lnTo>
-                  <a:lnTo>
-                    <a:pt x="2883988" y="1561656"/>
-                  </a:lnTo>
-                  <a:lnTo>
-                    <a:pt x="2810228" y="1536968"/>
-                  </a:lnTo>
-                  <a:lnTo>
-                    <a:pt x="2736468" y="1511694"/>
-                  </a:lnTo>
-                  <a:lnTo>
-                    <a:pt x="2662708" y="1485821"/>
-                  </a:lnTo>
-                  <a:lnTo>
-                    <a:pt x="2588948" y="1459334"/>
-                  </a:lnTo>
-                  <a:lnTo>
-                    <a:pt x="2515188" y="1432220"/>
-                  </a:lnTo>
-                  <a:lnTo>
-                    <a:pt x="2441428" y="1404463"/>
-                  </a:lnTo>
-                  <a:lnTo>
-                    <a:pt x="2367668" y="1376048"/>
-                  </a:lnTo>
-                  <a:lnTo>
-                    <a:pt x="2293908" y="1346960"/>
-                  </a:lnTo>
-                  <a:lnTo>
-                    <a:pt x="2220148" y="1317181"/>
-                  </a:lnTo>
-                  <a:lnTo>
-                    <a:pt x="2146388" y="1286698"/>
-                  </a:lnTo>
-                  <a:lnTo>
-                    <a:pt x="2072628" y="1255491"/>
-                  </a:lnTo>
-                  <a:lnTo>
-                    <a:pt x="1998868" y="1223545"/>
-                  </a:lnTo>
-                  <a:lnTo>
-                    <a:pt x="1925108" y="1190841"/>
-                  </a:lnTo>
-                  <a:lnTo>
-                    <a:pt x="1851348" y="1157362"/>
-                  </a:lnTo>
-                  <a:lnTo>
-                    <a:pt x="1777588" y="1123090"/>
-                  </a:lnTo>
-                  <a:lnTo>
-                    <a:pt x="1703828" y="1088005"/>
-                  </a:lnTo>
-                  <a:lnTo>
-                    <a:pt x="1630068" y="1052088"/>
-                  </a:lnTo>
-                  <a:lnTo>
-                    <a:pt x="1556308" y="1015320"/>
-                  </a:lnTo>
-                  <a:lnTo>
-                    <a:pt x="1482548" y="977681"/>
-                  </a:lnTo>
-                  <a:lnTo>
-                    <a:pt x="1408788" y="939149"/>
-                  </a:lnTo>
-                  <a:lnTo>
-                    <a:pt x="1335028" y="899704"/>
-                  </a:lnTo>
-                  <a:lnTo>
-                    <a:pt x="1261268" y="859324"/>
-                  </a:lnTo>
-                  <a:lnTo>
-                    <a:pt x="1187508" y="817986"/>
-                  </a:lnTo>
-                  <a:lnTo>
-                    <a:pt x="1113747" y="775669"/>
-                  </a:lnTo>
-                  <a:lnTo>
-                    <a:pt x="1039987" y="732349"/>
-                  </a:lnTo>
-                  <a:lnTo>
-                    <a:pt x="966227" y="688001"/>
-                  </a:lnTo>
-                  <a:lnTo>
-                    <a:pt x="892467" y="642603"/>
-                  </a:lnTo>
-                  <a:lnTo>
-                    <a:pt x="818707" y="596128"/>
-                  </a:lnTo>
-                  <a:lnTo>
-                    <a:pt x="744947" y="548552"/>
-                  </a:lnTo>
-                  <a:lnTo>
-                    <a:pt x="671187" y="499848"/>
-                  </a:lnTo>
-                  <a:lnTo>
-                    <a:pt x="597427" y="449989"/>
-                  </a:lnTo>
-                  <a:lnTo>
-                    <a:pt x="523667" y="398948"/>
-                  </a:lnTo>
-                  <a:lnTo>
-                    <a:pt x="449907" y="346698"/>
-                  </a:lnTo>
-                  <a:lnTo>
-                    <a:pt x="376147" y="293209"/>
-                  </a:lnTo>
-                  <a:lnTo>
-                    <a:pt x="302387" y="238452"/>
-                  </a:lnTo>
-                  <a:lnTo>
-                    <a:pt x="228627" y="182397"/>
-                  </a:lnTo>
-                  <a:lnTo>
-                    <a:pt x="154867" y="125013"/>
-                  </a:lnTo>
-                  <a:lnTo>
-                    <a:pt x="81107" y="66269"/>
-                  </a:lnTo>
-                  <a:lnTo>
-                    <a:pt x="7347" y="6132"/>
+                    <a:pt x="7162070" y="2449530"/>
+                  </a:lnTo>
+                  <a:lnTo>
+                    <a:pt x="7088310" y="2447334"/>
+                  </a:lnTo>
+                  <a:lnTo>
+                    <a:pt x="7014550" y="2444993"/>
+                  </a:lnTo>
+                  <a:lnTo>
+                    <a:pt x="6940789" y="2442497"/>
+                  </a:lnTo>
+                  <a:lnTo>
+                    <a:pt x="6867029" y="2439836"/>
+                  </a:lnTo>
+                  <a:lnTo>
+                    <a:pt x="6793269" y="2437000"/>
+                  </a:lnTo>
+                  <a:lnTo>
+                    <a:pt x="6719509" y="2433976"/>
+                  </a:lnTo>
+                  <a:lnTo>
+                    <a:pt x="6645749" y="2430753"/>
+                  </a:lnTo>
+                  <a:lnTo>
+                    <a:pt x="6571989" y="2427317"/>
+                  </a:lnTo>
+                  <a:lnTo>
+                    <a:pt x="6498229" y="2423654"/>
+                  </a:lnTo>
+                  <a:lnTo>
+                    <a:pt x="6424469" y="2419749"/>
+                  </a:lnTo>
+                  <a:lnTo>
+                    <a:pt x="6350709" y="2415587"/>
+                  </a:lnTo>
+                  <a:lnTo>
+                    <a:pt x="6276949" y="2411149"/>
+                  </a:lnTo>
+                  <a:lnTo>
+                    <a:pt x="6203189" y="2406419"/>
+                  </a:lnTo>
+                  <a:lnTo>
+                    <a:pt x="6129429" y="2401376"/>
+                  </a:lnTo>
+                  <a:lnTo>
+                    <a:pt x="6055669" y="2396001"/>
+                  </a:lnTo>
+                  <a:lnTo>
+                    <a:pt x="5981909" y="2390270"/>
+                  </a:lnTo>
+                  <a:lnTo>
+                    <a:pt x="5908149" y="2384161"/>
+                  </a:lnTo>
+                  <a:lnTo>
+                    <a:pt x="5834389" y="2377649"/>
+                  </a:lnTo>
+                  <a:lnTo>
+                    <a:pt x="5760629" y="2370706"/>
+                  </a:lnTo>
+                  <a:lnTo>
+                    <a:pt x="5686869" y="2363306"/>
+                  </a:lnTo>
+                  <a:lnTo>
+                    <a:pt x="5613109" y="2355417"/>
+                  </a:lnTo>
+                  <a:lnTo>
+                    <a:pt x="5539349" y="2347006"/>
+                  </a:lnTo>
+                  <a:lnTo>
+                    <a:pt x="5465589" y="2338041"/>
+                  </a:lnTo>
+                  <a:lnTo>
+                    <a:pt x="5391829" y="2328484"/>
+                  </a:lnTo>
+                  <a:lnTo>
+                    <a:pt x="5318069" y="2318295"/>
+                  </a:lnTo>
+                  <a:lnTo>
+                    <a:pt x="5244309" y="2307434"/>
+                  </a:lnTo>
+                  <a:lnTo>
+                    <a:pt x="5170549" y="2295856"/>
+                  </a:lnTo>
+                  <a:lnTo>
+                    <a:pt x="5096789" y="2283513"/>
+                  </a:lnTo>
+                  <a:lnTo>
+                    <a:pt x="5023029" y="2270355"/>
+                  </a:lnTo>
+                  <a:lnTo>
+                    <a:pt x="4949269" y="2256329"/>
+                  </a:lnTo>
+                  <a:lnTo>
+                    <a:pt x="4875509" y="2241377"/>
+                  </a:lnTo>
+                  <a:lnTo>
+                    <a:pt x="4801749" y="2225437"/>
+                  </a:lnTo>
+                  <a:lnTo>
+                    <a:pt x="4727989" y="2208445"/>
+                  </a:lnTo>
+                  <a:lnTo>
+                    <a:pt x="4654229" y="2190331"/>
+                  </a:lnTo>
+                  <a:lnTo>
+                    <a:pt x="4580469" y="2171020"/>
+                  </a:lnTo>
+                  <a:lnTo>
+                    <a:pt x="4506709" y="2150435"/>
+                  </a:lnTo>
+                  <a:lnTo>
+                    <a:pt x="4432949" y="2128491"/>
+                  </a:lnTo>
+                  <a:lnTo>
+                    <a:pt x="4359189" y="2105098"/>
+                  </a:lnTo>
+                  <a:lnTo>
+                    <a:pt x="4285429" y="2080161"/>
+                  </a:lnTo>
+                  <a:lnTo>
+                    <a:pt x="4211669" y="2053577"/>
+                  </a:lnTo>
+                  <a:lnTo>
+                    <a:pt x="4137909" y="2025237"/>
+                  </a:lnTo>
+                  <a:lnTo>
+                    <a:pt x="4064149" y="1995027"/>
+                  </a:lnTo>
+                  <a:lnTo>
+                    <a:pt x="3990388" y="1962822"/>
+                  </a:lnTo>
+                  <a:lnTo>
+                    <a:pt x="3916628" y="1928490"/>
+                  </a:lnTo>
+                  <a:lnTo>
+                    <a:pt x="3842868" y="1891892"/>
+                  </a:lnTo>
+                  <a:lnTo>
+                    <a:pt x="3769108" y="1852877"/>
+                  </a:lnTo>
+                  <a:lnTo>
+                    <a:pt x="3695348" y="1811286"/>
+                  </a:lnTo>
+                  <a:lnTo>
+                    <a:pt x="3621588" y="1766950"/>
+                  </a:lnTo>
+                  <a:lnTo>
+                    <a:pt x="3547828" y="1719686"/>
+                  </a:lnTo>
+                  <a:lnTo>
+                    <a:pt x="3474068" y="1669301"/>
+                  </a:lnTo>
+                  <a:lnTo>
+                    <a:pt x="3400308" y="1639696"/>
+                  </a:lnTo>
+                  <a:lnTo>
+                    <a:pt x="3326548" y="1619710"/>
+                  </a:lnTo>
+                  <a:lnTo>
+                    <a:pt x="3252788" y="1599251"/>
+                  </a:lnTo>
+                  <a:lnTo>
+                    <a:pt x="3179028" y="1578307"/>
+                  </a:lnTo>
+                  <a:lnTo>
+                    <a:pt x="3105268" y="1556866"/>
+                  </a:lnTo>
+                  <a:lnTo>
+                    <a:pt x="3031508" y="1534917"/>
+                  </a:lnTo>
+                  <a:lnTo>
+                    <a:pt x="2957748" y="1512448"/>
+                  </a:lnTo>
+                  <a:lnTo>
+                    <a:pt x="2883988" y="1489446"/>
+                  </a:lnTo>
+                  <a:lnTo>
+                    <a:pt x="2810228" y="1465899"/>
+                  </a:lnTo>
+                  <a:lnTo>
+                    <a:pt x="2736468" y="1441794"/>
+                  </a:lnTo>
+                  <a:lnTo>
+                    <a:pt x="2662708" y="1417117"/>
+                  </a:lnTo>
+                  <a:lnTo>
+                    <a:pt x="2588948" y="1391855"/>
+                  </a:lnTo>
+                  <a:lnTo>
+                    <a:pt x="2515188" y="1365995"/>
+                  </a:lnTo>
+                  <a:lnTo>
+                    <a:pt x="2441428" y="1339521"/>
+                  </a:lnTo>
+                  <a:lnTo>
+                    <a:pt x="2367668" y="1312420"/>
+                  </a:lnTo>
+                  <a:lnTo>
+                    <a:pt x="2293908" y="1284677"/>
+                  </a:lnTo>
+                  <a:lnTo>
+                    <a:pt x="2220148" y="1256275"/>
+                  </a:lnTo>
+                  <a:lnTo>
+                    <a:pt x="2146388" y="1227201"/>
+                  </a:lnTo>
+                  <a:lnTo>
+                    <a:pt x="2072628" y="1197437"/>
+                  </a:lnTo>
+                  <a:lnTo>
+                    <a:pt x="1998868" y="1166968"/>
+                  </a:lnTo>
+                  <a:lnTo>
+                    <a:pt x="1925108" y="1135777"/>
+                  </a:lnTo>
+                  <a:lnTo>
+                    <a:pt x="1851348" y="1103846"/>
+                  </a:lnTo>
+                  <a:lnTo>
+                    <a:pt x="1777588" y="1071158"/>
+                  </a:lnTo>
+                  <a:lnTo>
+                    <a:pt x="1703828" y="1037696"/>
+                  </a:lnTo>
+                  <a:lnTo>
+                    <a:pt x="1630068" y="1003440"/>
+                  </a:lnTo>
+                  <a:lnTo>
+                    <a:pt x="1556308" y="968372"/>
+                  </a:lnTo>
+                  <a:lnTo>
+                    <a:pt x="1482548" y="932473"/>
+                  </a:lnTo>
+                  <a:lnTo>
+                    <a:pt x="1408788" y="895723"/>
+                  </a:lnTo>
+                  <a:lnTo>
+                    <a:pt x="1335028" y="858102"/>
+                  </a:lnTo>
+                  <a:lnTo>
+                    <a:pt x="1261268" y="819589"/>
+                  </a:lnTo>
+                  <a:lnTo>
+                    <a:pt x="1187508" y="780163"/>
+                  </a:lnTo>
+                  <a:lnTo>
+                    <a:pt x="1113747" y="739802"/>
+                  </a:lnTo>
+                  <a:lnTo>
+                    <a:pt x="1039987" y="698485"/>
+                  </a:lnTo>
+                  <a:lnTo>
+                    <a:pt x="966227" y="656188"/>
+                  </a:lnTo>
+                  <a:lnTo>
+                    <a:pt x="892467" y="612889"/>
+                  </a:lnTo>
+                  <a:lnTo>
+                    <a:pt x="818707" y="568563"/>
+                  </a:lnTo>
+                  <a:lnTo>
+                    <a:pt x="744947" y="523187"/>
+                  </a:lnTo>
+                  <a:lnTo>
+                    <a:pt x="671187" y="476735"/>
+                  </a:lnTo>
+                  <a:lnTo>
+                    <a:pt x="597427" y="429182"/>
+                  </a:lnTo>
+                  <a:lnTo>
+                    <a:pt x="523667" y="380501"/>
+                  </a:lnTo>
+                  <a:lnTo>
+                    <a:pt x="449907" y="330667"/>
+                  </a:lnTo>
+                  <a:lnTo>
+                    <a:pt x="376147" y="279651"/>
+                  </a:lnTo>
+                  <a:lnTo>
+                    <a:pt x="302387" y="227426"/>
+                  </a:lnTo>
+                  <a:lnTo>
+                    <a:pt x="228627" y="173963"/>
+                  </a:lnTo>
+                  <a:lnTo>
+                    <a:pt x="154867" y="119232"/>
+                  </a:lnTo>
+                  <a:lnTo>
+                    <a:pt x="81107" y="63204"/>
+                  </a:lnTo>
+                  <a:lnTo>
+                    <a:pt x="7347" y="5848"/>
                   </a:lnTo>
                   <a:lnTo>
                     <a:pt x="0" y="0"/>
@@ -4133,270 +4133,270 @@
           </p:nvSpPr>
           <p:spPr>
             <a:xfrm>
-              <a:off x="1846175" y="1896563"/>
-              <a:ext cx="6207172" cy="3560161"/>
+              <a:off x="1846175" y="2073503"/>
+              <a:ext cx="6207172" cy="3395541"/>
             </a:xfrm>
             <a:custGeom>
               <a:avLst/>
               <a:pathLst>
-                <a:path w="6207172" h="3560161">
+                <a:path w="6207172" h="3395541">
                   <a:moveTo>
                     <a:pt x="0" y="0"/>
                   </a:moveTo>
                   <a:lnTo>
-                    <a:pt x="11329" y="24881"/>
-                  </a:lnTo>
-                  <a:lnTo>
-                    <a:pt x="85089" y="179940"/>
-                  </a:lnTo>
-                  <a:lnTo>
-                    <a:pt x="158849" y="328372"/>
-                  </a:lnTo>
-                  <a:lnTo>
-                    <a:pt x="232610" y="470460"/>
-                  </a:lnTo>
-                  <a:lnTo>
-                    <a:pt x="306370" y="606474"/>
-                  </a:lnTo>
-                  <a:lnTo>
-                    <a:pt x="380130" y="736675"/>
-                  </a:lnTo>
-                  <a:lnTo>
-                    <a:pt x="453890" y="861310"/>
-                  </a:lnTo>
-                  <a:lnTo>
-                    <a:pt x="527650" y="980619"/>
-                  </a:lnTo>
-                  <a:lnTo>
-                    <a:pt x="601410" y="1094828"/>
-                  </a:lnTo>
-                  <a:lnTo>
-                    <a:pt x="675170" y="1204155"/>
-                  </a:lnTo>
-                  <a:lnTo>
-                    <a:pt x="748930" y="1308809"/>
-                  </a:lnTo>
-                  <a:lnTo>
-                    <a:pt x="822690" y="1408991"/>
-                  </a:lnTo>
-                  <a:lnTo>
-                    <a:pt x="896450" y="1504890"/>
-                  </a:lnTo>
-                  <a:lnTo>
-                    <a:pt x="970210" y="1596690"/>
-                  </a:lnTo>
-                  <a:lnTo>
-                    <a:pt x="1043970" y="1684566"/>
-                  </a:lnTo>
-                  <a:lnTo>
-                    <a:pt x="1117730" y="1768687"/>
-                  </a:lnTo>
-                  <a:lnTo>
-                    <a:pt x="1191490" y="1849212"/>
-                  </a:lnTo>
-                  <a:lnTo>
-                    <a:pt x="1265250" y="1926295"/>
-                  </a:lnTo>
-                  <a:lnTo>
-                    <a:pt x="1339010" y="2000083"/>
-                  </a:lnTo>
-                  <a:lnTo>
-                    <a:pt x="1412770" y="2070718"/>
-                  </a:lnTo>
-                  <a:lnTo>
-                    <a:pt x="1486530" y="2138333"/>
-                  </a:lnTo>
-                  <a:lnTo>
-                    <a:pt x="1560290" y="2203058"/>
-                  </a:lnTo>
-                  <a:lnTo>
-                    <a:pt x="1634050" y="2265017"/>
-                  </a:lnTo>
-                  <a:lnTo>
-                    <a:pt x="1707810" y="2324328"/>
-                  </a:lnTo>
-                  <a:lnTo>
-                    <a:pt x="1781570" y="2381103"/>
-                  </a:lnTo>
-                  <a:lnTo>
-                    <a:pt x="1855330" y="2435452"/>
-                  </a:lnTo>
-                  <a:lnTo>
-                    <a:pt x="1929090" y="2487478"/>
-                  </a:lnTo>
-                  <a:lnTo>
-                    <a:pt x="2002850" y="2537280"/>
-                  </a:lnTo>
-                  <a:lnTo>
-                    <a:pt x="2076610" y="2584953"/>
-                  </a:lnTo>
-                  <a:lnTo>
-                    <a:pt x="2150370" y="2630589"/>
-                  </a:lnTo>
-                  <a:lnTo>
-                    <a:pt x="2224130" y="2674274"/>
-                  </a:lnTo>
-                  <a:lnTo>
-                    <a:pt x="2297890" y="2716092"/>
-                  </a:lnTo>
-                  <a:lnTo>
-                    <a:pt x="2371650" y="2756122"/>
-                  </a:lnTo>
-                  <a:lnTo>
-                    <a:pt x="2445410" y="2794442"/>
-                  </a:lnTo>
-                  <a:lnTo>
-                    <a:pt x="2519170" y="2831123"/>
-                  </a:lnTo>
-                  <a:lnTo>
-                    <a:pt x="2592930" y="2866237"/>
-                  </a:lnTo>
-                  <a:lnTo>
-                    <a:pt x="2666690" y="2899850"/>
-                  </a:lnTo>
-                  <a:lnTo>
-                    <a:pt x="2740450" y="2932026"/>
-                  </a:lnTo>
-                  <a:lnTo>
-                    <a:pt x="2814210" y="2962827"/>
-                  </a:lnTo>
-                  <a:lnTo>
-                    <a:pt x="2887970" y="2992312"/>
-                  </a:lnTo>
-                  <a:lnTo>
-                    <a:pt x="2961730" y="3020536"/>
-                  </a:lnTo>
-                  <a:lnTo>
-                    <a:pt x="3035490" y="3047554"/>
-                  </a:lnTo>
-                  <a:lnTo>
-                    <a:pt x="3109250" y="3073417"/>
-                  </a:lnTo>
-                  <a:lnTo>
-                    <a:pt x="3183011" y="3098174"/>
-                  </a:lnTo>
-                  <a:lnTo>
-                    <a:pt x="3256771" y="3121874"/>
-                  </a:lnTo>
-                  <a:lnTo>
-                    <a:pt x="3330531" y="3144560"/>
-                  </a:lnTo>
-                  <a:lnTo>
-                    <a:pt x="3404291" y="3166277"/>
-                  </a:lnTo>
-                  <a:lnTo>
-                    <a:pt x="3478051" y="3187065"/>
-                  </a:lnTo>
-                  <a:lnTo>
-                    <a:pt x="3551811" y="3206965"/>
-                  </a:lnTo>
-                  <a:lnTo>
-                    <a:pt x="3625571" y="3226015"/>
-                  </a:lnTo>
-                  <a:lnTo>
-                    <a:pt x="3699331" y="3244250"/>
-                  </a:lnTo>
-                  <a:lnTo>
-                    <a:pt x="3773091" y="3261705"/>
-                  </a:lnTo>
-                  <a:lnTo>
-                    <a:pt x="3846851" y="3278415"/>
-                  </a:lnTo>
-                  <a:lnTo>
-                    <a:pt x="3920611" y="3294411"/>
-                  </a:lnTo>
-                  <a:lnTo>
-                    <a:pt x="3994371" y="3309722"/>
-                  </a:lnTo>
-                  <a:lnTo>
-                    <a:pt x="4068131" y="3324380"/>
-                  </a:lnTo>
-                  <a:lnTo>
-                    <a:pt x="4141891" y="3338410"/>
-                  </a:lnTo>
-                  <a:lnTo>
-                    <a:pt x="4215651" y="3351841"/>
-                  </a:lnTo>
-                  <a:lnTo>
-                    <a:pt x="4289411" y="3364698"/>
-                  </a:lnTo>
-                  <a:lnTo>
-                    <a:pt x="4363171" y="3377006"/>
-                  </a:lnTo>
-                  <a:lnTo>
-                    <a:pt x="4436931" y="3388787"/>
-                  </a:lnTo>
-                  <a:lnTo>
-                    <a:pt x="4510691" y="3400065"/>
-                  </a:lnTo>
-                  <a:lnTo>
-                    <a:pt x="4584451" y="3410861"/>
-                  </a:lnTo>
-                  <a:lnTo>
-                    <a:pt x="4658211" y="3421195"/>
-                  </a:lnTo>
-                  <a:lnTo>
-                    <a:pt x="4731971" y="3431088"/>
-                  </a:lnTo>
-                  <a:lnTo>
-                    <a:pt x="4805731" y="3440558"/>
-                  </a:lnTo>
-                  <a:lnTo>
-                    <a:pt x="4879491" y="3449623"/>
-                  </a:lnTo>
-                  <a:lnTo>
-                    <a:pt x="4953251" y="3458300"/>
-                  </a:lnTo>
-                  <a:lnTo>
-                    <a:pt x="5027011" y="3466607"/>
-                  </a:lnTo>
-                  <a:lnTo>
-                    <a:pt x="5100771" y="3474559"/>
-                  </a:lnTo>
-                  <a:lnTo>
-                    <a:pt x="5174531" y="3482171"/>
-                  </a:lnTo>
-                  <a:lnTo>
-                    <a:pt x="5248291" y="3489457"/>
-                  </a:lnTo>
-                  <a:lnTo>
-                    <a:pt x="5322051" y="3496432"/>
-                  </a:lnTo>
-                  <a:lnTo>
-                    <a:pt x="5395811" y="3503109"/>
-                  </a:lnTo>
-                  <a:lnTo>
-                    <a:pt x="5469571" y="3509500"/>
-                  </a:lnTo>
-                  <a:lnTo>
-                    <a:pt x="5543331" y="3515619"/>
-                  </a:lnTo>
-                  <a:lnTo>
-                    <a:pt x="5617091" y="3521475"/>
-                  </a:lnTo>
-                  <a:lnTo>
-                    <a:pt x="5690851" y="3527082"/>
-                  </a:lnTo>
-                  <a:lnTo>
-                    <a:pt x="5764611" y="3532449"/>
-                  </a:lnTo>
-                  <a:lnTo>
-                    <a:pt x="5838371" y="3537586"/>
-                  </a:lnTo>
-                  <a:lnTo>
-                    <a:pt x="5912131" y="3542504"/>
-                  </a:lnTo>
-                  <a:lnTo>
-                    <a:pt x="5985891" y="3547211"/>
-                  </a:lnTo>
-                  <a:lnTo>
-                    <a:pt x="6059652" y="3551718"/>
-                  </a:lnTo>
-                  <a:lnTo>
-                    <a:pt x="6133412" y="3556032"/>
-                  </a:lnTo>
-                  <a:lnTo>
-                    <a:pt x="6207172" y="3560161"/>
+                    <a:pt x="11329" y="23730"/>
+                  </a:lnTo>
+                  <a:lnTo>
+                    <a:pt x="85089" y="171620"/>
+                  </a:lnTo>
+                  <a:lnTo>
+                    <a:pt x="158849" y="313188"/>
+                  </a:lnTo>
+                  <a:lnTo>
+                    <a:pt x="232610" y="448706"/>
+                  </a:lnTo>
+                  <a:lnTo>
+                    <a:pt x="306370" y="578431"/>
+                  </a:lnTo>
+                  <a:lnTo>
+                    <a:pt x="380130" y="702611"/>
+                  </a:lnTo>
+                  <a:lnTo>
+                    <a:pt x="453890" y="821484"/>
+                  </a:lnTo>
+                  <a:lnTo>
+                    <a:pt x="527650" y="935275"/>
+                  </a:lnTo>
+                  <a:lnTo>
+                    <a:pt x="601410" y="1044203"/>
+                  </a:lnTo>
+                  <a:lnTo>
+                    <a:pt x="675170" y="1148475"/>
+                  </a:lnTo>
+                  <a:lnTo>
+                    <a:pt x="748930" y="1248290"/>
+                  </a:lnTo>
+                  <a:lnTo>
+                    <a:pt x="822690" y="1343839"/>
+                  </a:lnTo>
+                  <a:lnTo>
+                    <a:pt x="896450" y="1435304"/>
+                  </a:lnTo>
+                  <a:lnTo>
+                    <a:pt x="970210" y="1522860"/>
+                  </a:lnTo>
+                  <a:lnTo>
+                    <a:pt x="1043970" y="1606673"/>
+                  </a:lnTo>
+                  <a:lnTo>
+                    <a:pt x="1117730" y="1686903"/>
+                  </a:lnTo>
+                  <a:lnTo>
+                    <a:pt x="1191490" y="1763705"/>
+                  </a:lnTo>
+                  <a:lnTo>
+                    <a:pt x="1265250" y="1837224"/>
+                  </a:lnTo>
+                  <a:lnTo>
+                    <a:pt x="1339010" y="1907600"/>
+                  </a:lnTo>
+                  <a:lnTo>
+                    <a:pt x="1412770" y="1974968"/>
+                  </a:lnTo>
+                  <a:lnTo>
+                    <a:pt x="1486530" y="2039457"/>
+                  </a:lnTo>
+                  <a:lnTo>
+                    <a:pt x="1560290" y="2101190"/>
+                  </a:lnTo>
+                  <a:lnTo>
+                    <a:pt x="1634050" y="2160284"/>
+                  </a:lnTo>
+                  <a:lnTo>
+                    <a:pt x="1707810" y="2216852"/>
+                  </a:lnTo>
+                  <a:lnTo>
+                    <a:pt x="1781570" y="2271002"/>
+                  </a:lnTo>
+                  <a:lnTo>
+                    <a:pt x="1855330" y="2322838"/>
+                  </a:lnTo>
+                  <a:lnTo>
+                    <a:pt x="1929090" y="2372458"/>
+                  </a:lnTo>
+                  <a:lnTo>
+                    <a:pt x="2002850" y="2419957"/>
+                  </a:lnTo>
+                  <a:lnTo>
+                    <a:pt x="2076610" y="2465426"/>
+                  </a:lnTo>
+                  <a:lnTo>
+                    <a:pt x="2150370" y="2508951"/>
+                  </a:lnTo>
+                  <a:lnTo>
+                    <a:pt x="2224130" y="2550616"/>
+                  </a:lnTo>
+                  <a:lnTo>
+                    <a:pt x="2297890" y="2590501"/>
+                  </a:lnTo>
+                  <a:lnTo>
+                    <a:pt x="2371650" y="2628680"/>
+                  </a:lnTo>
+                  <a:lnTo>
+                    <a:pt x="2445410" y="2665228"/>
+                  </a:lnTo>
+                  <a:lnTo>
+                    <a:pt x="2519170" y="2700213"/>
+                  </a:lnTo>
+                  <a:lnTo>
+                    <a:pt x="2592930" y="2733703"/>
+                  </a:lnTo>
+                  <a:lnTo>
+                    <a:pt x="2666690" y="2765762"/>
+                  </a:lnTo>
+                  <a:lnTo>
+                    <a:pt x="2740450" y="2796451"/>
+                  </a:lnTo>
+                  <a:lnTo>
+                    <a:pt x="2814210" y="2825827"/>
+                  </a:lnTo>
+                  <a:lnTo>
+                    <a:pt x="2887970" y="2853948"/>
+                  </a:lnTo>
+                  <a:lnTo>
+                    <a:pt x="2961730" y="2880867"/>
+                  </a:lnTo>
+                  <a:lnTo>
+                    <a:pt x="3035490" y="2906636"/>
+                  </a:lnTo>
+                  <a:lnTo>
+                    <a:pt x="3109250" y="2931303"/>
+                  </a:lnTo>
+                  <a:lnTo>
+                    <a:pt x="3183011" y="2954916"/>
+                  </a:lnTo>
+                  <a:lnTo>
+                    <a:pt x="3256771" y="2977519"/>
+                  </a:lnTo>
+                  <a:lnTo>
+                    <a:pt x="3330531" y="2999157"/>
+                  </a:lnTo>
+                  <a:lnTo>
+                    <a:pt x="3404291" y="3019869"/>
+                  </a:lnTo>
+                  <a:lnTo>
+                    <a:pt x="3478051" y="3039697"/>
+                  </a:lnTo>
+                  <a:lnTo>
+                    <a:pt x="3551811" y="3058676"/>
+                  </a:lnTo>
+                  <a:lnTo>
+                    <a:pt x="3625571" y="3076845"/>
+                  </a:lnTo>
+                  <a:lnTo>
+                    <a:pt x="3699331" y="3094237"/>
+                  </a:lnTo>
+                  <a:lnTo>
+                    <a:pt x="3773091" y="3110885"/>
+                  </a:lnTo>
+                  <a:lnTo>
+                    <a:pt x="3846851" y="3126822"/>
+                  </a:lnTo>
+                  <a:lnTo>
+                    <a:pt x="3920611" y="3142078"/>
+                  </a:lnTo>
+                  <a:lnTo>
+                    <a:pt x="3994371" y="3156682"/>
+                  </a:lnTo>
+                  <a:lnTo>
+                    <a:pt x="4068131" y="3170661"/>
+                  </a:lnTo>
+                  <a:lnTo>
+                    <a:pt x="4141891" y="3184043"/>
+                  </a:lnTo>
+                  <a:lnTo>
+                    <a:pt x="4215651" y="3196854"/>
+                  </a:lnTo>
+                  <a:lnTo>
+                    <a:pt x="4289411" y="3209116"/>
+                  </a:lnTo>
+                  <a:lnTo>
+                    <a:pt x="4363171" y="3220854"/>
+                  </a:lnTo>
+                  <a:lnTo>
+                    <a:pt x="4436931" y="3232091"/>
+                  </a:lnTo>
+                  <a:lnTo>
+                    <a:pt x="4510691" y="3242847"/>
+                  </a:lnTo>
+                  <a:lnTo>
+                    <a:pt x="4584451" y="3253144"/>
+                  </a:lnTo>
+                  <a:lnTo>
+                    <a:pt x="4658211" y="3263001"/>
+                  </a:lnTo>
+                  <a:lnTo>
+                    <a:pt x="4731971" y="3272436"/>
+                  </a:lnTo>
+                  <a:lnTo>
+                    <a:pt x="4805731" y="3281468"/>
+                  </a:lnTo>
+                  <a:lnTo>
+                    <a:pt x="4879491" y="3290114"/>
+                  </a:lnTo>
+                  <a:lnTo>
+                    <a:pt x="4953251" y="3298390"/>
+                  </a:lnTo>
+                  <a:lnTo>
+                    <a:pt x="5027011" y="3306313"/>
+                  </a:lnTo>
+                  <a:lnTo>
+                    <a:pt x="5100771" y="3313896"/>
+                  </a:lnTo>
+                  <a:lnTo>
+                    <a:pt x="5174531" y="3321156"/>
+                  </a:lnTo>
+                  <a:lnTo>
+                    <a:pt x="5248291" y="3328106"/>
+                  </a:lnTo>
+                  <a:lnTo>
+                    <a:pt x="5322051" y="3334758"/>
+                  </a:lnTo>
+                  <a:lnTo>
+                    <a:pt x="5395811" y="3341126"/>
+                  </a:lnTo>
+                  <a:lnTo>
+                    <a:pt x="5469571" y="3347222"/>
+                  </a:lnTo>
+                  <a:lnTo>
+                    <a:pt x="5543331" y="3353058"/>
+                  </a:lnTo>
+                  <a:lnTo>
+                    <a:pt x="5617091" y="3358644"/>
+                  </a:lnTo>
+                  <a:lnTo>
+                    <a:pt x="5690851" y="3363991"/>
+                  </a:lnTo>
+                  <a:lnTo>
+                    <a:pt x="5764611" y="3369109"/>
+                  </a:lnTo>
+                  <a:lnTo>
+                    <a:pt x="5838371" y="3374009"/>
+                  </a:lnTo>
+                  <a:lnTo>
+                    <a:pt x="5912131" y="3378700"/>
+                  </a:lnTo>
+                  <a:lnTo>
+                    <a:pt x="5985891" y="3383190"/>
+                  </a:lnTo>
+                  <a:lnTo>
+                    <a:pt x="6059652" y="3387488"/>
+                  </a:lnTo>
+                  <a:lnTo>
+                    <a:pt x="6133412" y="3391602"/>
+                  </a:lnTo>
+                  <a:lnTo>
+                    <a:pt x="6207172" y="3395541"/>
                   </a:lnTo>
                 </a:path>
               </a:pathLst>
@@ -4425,7 +4425,7 @@
           </p:nvSpPr>
           <p:spPr>
             <a:xfrm>
-              <a:off x="817517" y="4679530"/>
+              <a:off x="817517" y="4727786"/>
               <a:ext cx="7799693" cy="0"/>
             </a:xfrm>
             <a:custGeom>
@@ -4468,15 +4468,15 @@
           </p:nvSpPr>
           <p:spPr>
             <a:xfrm>
-              <a:off x="4269157" y="1896563"/>
-              <a:ext cx="0" cy="3826579"/>
+              <a:off x="4269157" y="2073503"/>
+              <a:ext cx="0" cy="3649639"/>
             </a:xfrm>
             <a:custGeom>
               <a:avLst/>
               <a:pathLst>
-                <a:path w="0" h="3826579">
+                <a:path w="0" h="3649639">
                   <a:moveTo>
-                    <a:pt x="0" y="3826579"/>
+                    <a:pt x="0" y="3649639"/>
                   </a:moveTo>
                   <a:lnTo>
                     <a:pt x="0" y="0"/>
@@ -4511,7 +4511,7 @@
           </p:nvSpPr>
           <p:spPr>
             <a:xfrm>
-              <a:off x="692708" y="5509156"/>
+              <a:off x="692708" y="5517199"/>
               <a:ext cx="62179" cy="80101"/>
             </a:xfrm>
             <a:prstGeom prst="rect">
@@ -4557,7 +4557,7 @@
           </p:nvSpPr>
           <p:spPr>
             <a:xfrm>
-              <a:off x="692708" y="4639479"/>
+              <a:off x="692708" y="4687735"/>
               <a:ext cx="62179" cy="80101"/>
             </a:xfrm>
             <a:prstGeom prst="rect">
@@ -4603,7 +4603,7 @@
           </p:nvSpPr>
           <p:spPr>
             <a:xfrm>
-              <a:off x="692708" y="3769802"/>
+              <a:off x="692708" y="3858272"/>
               <a:ext cx="62179" cy="80101"/>
             </a:xfrm>
             <a:prstGeom prst="rect">
@@ -4649,7 +4649,7 @@
           </p:nvSpPr>
           <p:spPr>
             <a:xfrm>
-              <a:off x="692708" y="2900125"/>
+              <a:off x="692708" y="3028808"/>
               <a:ext cx="62179" cy="80101"/>
             </a:xfrm>
             <a:prstGeom prst="rect">
@@ -4695,7 +4695,7 @@
           </p:nvSpPr>
           <p:spPr>
             <a:xfrm>
-              <a:off x="692708" y="2030448"/>
+              <a:off x="692708" y="2199345"/>
               <a:ext cx="62179" cy="80101"/>
             </a:xfrm>
             <a:prstGeom prst="rect">
@@ -4971,7 +4971,7 @@
           </p:nvSpPr>
           <p:spPr>
             <a:xfrm rot="-5400000">
-              <a:off x="68446" y="3759743"/>
+              <a:off x="68446" y="3848213"/>
               <a:ext cx="1016904" cy="100218"/>
             </a:xfrm>
             <a:prstGeom prst="rect">
@@ -5012,6 +5012,52 @@
         <p:sp>
           <p:nvSpPr>
             <p:cNvPr id="38" name="tx38"/>
+            <p:cNvSpPr/>
+            <p:nvPr/>
+          </p:nvSpPr>
+          <p:spPr>
+            <a:xfrm>
+              <a:off x="817517" y="1896563"/>
+              <a:ext cx="5626211" cy="82021"/>
+            </a:xfrm>
+            <a:prstGeom prst="rect">
+              <a:avLst/>
+            </a:prstGeom>
+            <a:noFill/>
+          </p:spPr>
+          <p:txBody>
+            <a:bodyPr lIns="0" rIns="0" tIns="0" bIns="0" anchorCtr="1" anchor="ctr" wrap="none"/>
+            <a:lstStyle/>
+            <a:p>
+              <a:pPr algn="l" marL="0" marR="0" indent="0">
+                <a:lnSpc>
+                  <a:spcPts val="900"/>
+                </a:lnSpc>
+                <a:spcBef>
+                  <a:spcPts val="0"/>
+                </a:spcBef>
+                <a:spcAft>
+                  <a:spcPts val="0"/>
+                </a:spcAft>
+              </a:pPr>
+              <a:r>
+                <a:rPr sz="900">
+                  <a:solidFill>
+                    <a:srgbClr val="404040">
+                      <a:alpha val="100000"/>
+                    </a:srgbClr>
+                  </a:solidFill>
+                  <a:latin typeface="Helvetica"/>
+                  <a:cs typeface="Helvetica"/>
+                </a:rPr>
+                <a:t>subHR per 0.1 ratio decline: 1.69 (1.33-2.16)  |  per IQR decline (Δ = 0.29): 4.65 (2.28-9.48)  |  IQR: [0.85, 1.15]</a:t>
+              </a:r>
+            </a:p>
+          </p:txBody>
+        </p:sp>
+        <p:sp>
+          <p:nvSpPr>
+            <p:cNvPr id="39" name="tx39"/>
             <p:cNvSpPr/>
             <p:nvPr/>
           </p:nvSpPr>

--- a/docs/pptx/whole/jx-linsubhr-ratio-hosp5.pptx
+++ b/docs/pptx/whole/jx-linsubhr-ratio-hosp5.pptx
@@ -5018,7 +5018,7 @@
           <p:spPr>
             <a:xfrm>
               <a:off x="817517" y="1896563"/>
-              <a:ext cx="5626211" cy="82021"/>
+              <a:ext cx="6236116" cy="82021"/>
             </a:xfrm>
             <a:prstGeom prst="rect">
               <a:avLst/>
@@ -5050,7 +5050,7 @@
                   <a:latin typeface="Helvetica"/>
                   <a:cs typeface="Helvetica"/>
                 </a:rPr>
-                <a:t>subHR per 0.1 ratio decline: 1.69 (1.33-2.16)  |  per IQR decline (Δ = 0.29): 4.65 (2.28-9.48)  |  IQR: [0.85, 1.15]</a:t>
+                <a:t>subHR per 0.1 ratio decline: 1.69 (1.33-2.16), p = &lt;0.001  |  per IQR decline (Δ = 0.29): 4.65 (2.28-9.48)  |  IQR: [0.85, 1.15]</a:t>
               </a:r>
             </a:p>
           </p:txBody>

--- a/docs/pptx/whole/jx-linsubhr-ratio-hosp5.pptx
+++ b/docs/pptx/whole/jx-linsubhr-ratio-hosp5.pptx
@@ -2443,7 +2443,7 @@
           </p:nvSpPr>
           <p:spPr>
             <a:xfrm>
-              <a:off x="1615213" y="2073503"/>
+              <a:off x="1365633" y="2073503"/>
               <a:ext cx="0" cy="3649639"/>
             </a:xfrm>
             <a:custGeom>
@@ -2486,7 +2486,7 @@
           </p:nvSpPr>
           <p:spPr>
             <a:xfrm>
-              <a:off x="3387871" y="2073503"/>
+              <a:off x="3517243" y="2073503"/>
               <a:ext cx="0" cy="3649639"/>
             </a:xfrm>
             <a:custGeom>
@@ -2529,7 +2529,7 @@
           </p:nvSpPr>
           <p:spPr>
             <a:xfrm>
-              <a:off x="5160528" y="2073503"/>
+              <a:off x="5668852" y="2073503"/>
               <a:ext cx="0" cy="3649639"/>
             </a:xfrm>
             <a:custGeom>
@@ -2572,7 +2572,7 @@
           </p:nvSpPr>
           <p:spPr>
             <a:xfrm>
-              <a:off x="6933186" y="2073503"/>
+              <a:off x="7820461" y="2073503"/>
               <a:ext cx="0" cy="3649639"/>
             </a:xfrm>
             <a:custGeom>
@@ -2830,7 +2830,7 @@
           </p:nvSpPr>
           <p:spPr>
             <a:xfrm>
-              <a:off x="2501542" y="2073503"/>
+              <a:off x="2441438" y="2073503"/>
               <a:ext cx="0" cy="3649639"/>
             </a:xfrm>
             <a:custGeom>
@@ -2873,7 +2873,7 @@
           </p:nvSpPr>
           <p:spPr>
             <a:xfrm>
-              <a:off x="4274200" y="2073503"/>
+              <a:off x="4593047" y="2073503"/>
               <a:ext cx="0" cy="3649639"/>
             </a:xfrm>
             <a:custGeom>
@@ -2916,7 +2916,7 @@
           </p:nvSpPr>
           <p:spPr>
             <a:xfrm>
-              <a:off x="6046857" y="2073503"/>
+              <a:off x="6744657" y="2073503"/>
               <a:ext cx="0" cy="3649639"/>
             </a:xfrm>
             <a:custGeom>
@@ -2953,586 +2953,543 @@
         </p:sp>
         <p:sp>
           <p:nvSpPr>
-            <p:cNvPr id="20" name="pl20"/>
+            <p:cNvPr id="20" name="pg20"/>
             <p:cNvSpPr/>
             <p:nvPr/>
           </p:nvSpPr>
           <p:spPr>
             <a:xfrm>
-              <a:off x="7819515" y="2073503"/>
-              <a:ext cx="0" cy="3649639"/>
+              <a:off x="1172049" y="2073503"/>
+              <a:ext cx="7090630" cy="3452543"/>
             </a:xfrm>
             <a:custGeom>
               <a:avLst/>
               <a:pathLst>
-                <a:path w="0" h="3649639">
+                <a:path w="7090630" h="3452543">
                   <a:moveTo>
-                    <a:pt x="0" y="3649639"/>
+                    <a:pt x="1808955" y="0"/>
                   </a:moveTo>
                   <a:lnTo>
-                    <a:pt x="0" y="0"/>
-                  </a:lnTo>
-                  <a:lnTo>
-                    <a:pt x="0" y="0"/>
-                  </a:lnTo>
-                </a:path>
-              </a:pathLst>
-            </a:custGeom>
-            <a:ln w="13550" cap="flat">
-              <a:solidFill>
-                <a:srgbClr val="EBEBEB">
-                  <a:alpha val="100000"/>
-                </a:srgbClr>
-              </a:solidFill>
-              <a:prstDash val="solid"/>
-              <a:round/>
-            </a:ln>
-          </p:spPr>
-          <p:txBody>
-            <a:bodyPr/>
-            <a:lstStyle/>
-            <a:p/>
-          </p:txBody>
-        </p:sp>
-        <p:sp>
-          <p:nvSpPr>
-            <p:cNvPr id="21" name="pg21"/>
-            <p:cNvSpPr/>
-            <p:nvPr/>
-          </p:nvSpPr>
-          <p:spPr>
-            <a:xfrm>
-              <a:off x="817517" y="2073503"/>
-              <a:ext cx="7235830" cy="3452543"/>
-            </a:xfrm>
-            <a:custGeom>
-              <a:avLst/>
-              <a:pathLst>
-                <a:path w="7235830" h="3452543">
-                  <a:moveTo>
-                    <a:pt x="1796529" y="0"/>
-                  </a:moveTo>
-                  <a:lnTo>
-                    <a:pt x="1851348" y="162952"/>
-                  </a:lnTo>
-                  <a:lnTo>
-                    <a:pt x="1925108" y="368629"/>
-                  </a:lnTo>
-                  <a:lnTo>
-                    <a:pt x="1998868" y="561568"/>
-                  </a:lnTo>
-                  <a:lnTo>
-                    <a:pt x="2072628" y="742557"/>
-                  </a:lnTo>
-                  <a:lnTo>
-                    <a:pt x="2146388" y="912336"/>
-                  </a:lnTo>
-                  <a:lnTo>
-                    <a:pt x="2220148" y="1071599"/>
-                  </a:lnTo>
-                  <a:lnTo>
-                    <a:pt x="2293908" y="1220999"/>
-                  </a:lnTo>
-                  <a:lnTo>
-                    <a:pt x="2367668" y="1361145"/>
-                  </a:lnTo>
-                  <a:lnTo>
-                    <a:pt x="2441428" y="1492611"/>
-                  </a:lnTo>
-                  <a:lnTo>
-                    <a:pt x="2515188" y="1615934"/>
-                  </a:lnTo>
-                  <a:lnTo>
-                    <a:pt x="2588948" y="1731620"/>
-                  </a:lnTo>
-                  <a:lnTo>
-                    <a:pt x="2662708" y="1840140"/>
-                  </a:lnTo>
-                  <a:lnTo>
-                    <a:pt x="2736468" y="1941939"/>
-                  </a:lnTo>
-                  <a:lnTo>
-                    <a:pt x="2810228" y="2037432"/>
-                  </a:lnTo>
-                  <a:lnTo>
-                    <a:pt x="2883988" y="2127012"/>
-                  </a:lnTo>
-                  <a:lnTo>
-                    <a:pt x="2957748" y="2211043"/>
-                  </a:lnTo>
-                  <a:lnTo>
-                    <a:pt x="3031508" y="2289869"/>
-                  </a:lnTo>
-                  <a:lnTo>
-                    <a:pt x="3105268" y="2363814"/>
-                  </a:lnTo>
-                  <a:lnTo>
-                    <a:pt x="3179028" y="2433178"/>
-                  </a:lnTo>
-                  <a:lnTo>
-                    <a:pt x="3252788" y="2498246"/>
-                  </a:lnTo>
-                  <a:lnTo>
-                    <a:pt x="3326548" y="2559285"/>
-                  </a:lnTo>
-                  <a:lnTo>
-                    <a:pt x="3400308" y="2616542"/>
-                  </a:lnTo>
-                  <a:lnTo>
-                    <a:pt x="3474068" y="2660171"/>
-                  </a:lnTo>
-                  <a:lnTo>
-                    <a:pt x="3547828" y="2679242"/>
-                  </a:lnTo>
-                  <a:lnTo>
-                    <a:pt x="3621588" y="2697871"/>
-                  </a:lnTo>
-                  <a:lnTo>
-                    <a:pt x="3695348" y="2716068"/>
-                  </a:lnTo>
-                  <a:lnTo>
-                    <a:pt x="3769108" y="2733845"/>
-                  </a:lnTo>
-                  <a:lnTo>
-                    <a:pt x="3842868" y="2751209"/>
-                  </a:lnTo>
-                  <a:lnTo>
-                    <a:pt x="3916628" y="2768172"/>
-                  </a:lnTo>
-                  <a:lnTo>
-                    <a:pt x="3990388" y="2784742"/>
-                  </a:lnTo>
-                  <a:lnTo>
-                    <a:pt x="4064149" y="2800928"/>
-                  </a:lnTo>
-                  <a:lnTo>
-                    <a:pt x="4137909" y="2816739"/>
-                  </a:lnTo>
-                  <a:lnTo>
-                    <a:pt x="4211669" y="2832184"/>
-                  </a:lnTo>
-                  <a:lnTo>
-                    <a:pt x="4285429" y="2847272"/>
-                  </a:lnTo>
-                  <a:lnTo>
-                    <a:pt x="4359189" y="2862010"/>
-                  </a:lnTo>
-                  <a:lnTo>
-                    <a:pt x="4432949" y="2876407"/>
-                  </a:lnTo>
-                  <a:lnTo>
-                    <a:pt x="4506709" y="2890470"/>
-                  </a:lnTo>
-                  <a:lnTo>
-                    <a:pt x="4580469" y="2904208"/>
-                  </a:lnTo>
-                  <a:lnTo>
-                    <a:pt x="4654229" y="2917628"/>
-                  </a:lnTo>
-                  <a:lnTo>
-                    <a:pt x="4727989" y="2930737"/>
-                  </a:lnTo>
-                  <a:lnTo>
-                    <a:pt x="4801749" y="2943542"/>
-                  </a:lnTo>
-                  <a:lnTo>
-                    <a:pt x="4875509" y="2956051"/>
-                  </a:lnTo>
-                  <a:lnTo>
-                    <a:pt x="4949269" y="2968270"/>
-                  </a:lnTo>
-                  <a:lnTo>
-                    <a:pt x="5023029" y="2980207"/>
-                  </a:lnTo>
-                  <a:lnTo>
-                    <a:pt x="5096789" y="2991867"/>
-                  </a:lnTo>
-                  <a:lnTo>
-                    <a:pt x="5170549" y="3003257"/>
-                  </a:lnTo>
-                  <a:lnTo>
-                    <a:pt x="5244309" y="3014383"/>
-                  </a:lnTo>
-                  <a:lnTo>
-                    <a:pt x="5318069" y="3025251"/>
-                  </a:lnTo>
-                  <a:lnTo>
-                    <a:pt x="5391829" y="3035868"/>
-                  </a:lnTo>
-                  <a:lnTo>
-                    <a:pt x="5465589" y="3046239"/>
-                  </a:lnTo>
-                  <a:lnTo>
-                    <a:pt x="5539349" y="3056370"/>
-                  </a:lnTo>
-                  <a:lnTo>
-                    <a:pt x="5613109" y="3066266"/>
-                  </a:lnTo>
-                  <a:lnTo>
-                    <a:pt x="5686869" y="3075933"/>
-                  </a:lnTo>
-                  <a:lnTo>
-                    <a:pt x="5760629" y="3085377"/>
-                  </a:lnTo>
-                  <a:lnTo>
-                    <a:pt x="5834389" y="3094601"/>
-                  </a:lnTo>
-                  <a:lnTo>
-                    <a:pt x="5908149" y="3103612"/>
-                  </a:lnTo>
-                  <a:lnTo>
-                    <a:pt x="5981909" y="3112415"/>
-                  </a:lnTo>
-                  <a:lnTo>
-                    <a:pt x="6055669" y="3121013"/>
-                  </a:lnTo>
-                  <a:lnTo>
-                    <a:pt x="6129429" y="3129413"/>
-                  </a:lnTo>
-                  <a:lnTo>
-                    <a:pt x="6203189" y="3137618"/>
-                  </a:lnTo>
-                  <a:lnTo>
-                    <a:pt x="6276949" y="3145633"/>
-                  </a:lnTo>
-                  <a:lnTo>
-                    <a:pt x="6350709" y="3153462"/>
-                  </a:lnTo>
-                  <a:lnTo>
-                    <a:pt x="6424469" y="3161110"/>
-                  </a:lnTo>
-                  <a:lnTo>
-                    <a:pt x="6498229" y="3168581"/>
-                  </a:lnTo>
-                  <a:lnTo>
-                    <a:pt x="6571989" y="3175879"/>
-                  </a:lnTo>
-                  <a:lnTo>
-                    <a:pt x="6645749" y="3183008"/>
-                  </a:lnTo>
-                  <a:lnTo>
-                    <a:pt x="6719509" y="3189972"/>
-                  </a:lnTo>
-                  <a:lnTo>
-                    <a:pt x="6793269" y="3196774"/>
-                  </a:lnTo>
-                  <a:lnTo>
-                    <a:pt x="6867029" y="3203419"/>
-                  </a:lnTo>
-                  <a:lnTo>
-                    <a:pt x="6940789" y="3209911"/>
-                  </a:lnTo>
-                  <a:lnTo>
-                    <a:pt x="7014550" y="3216251"/>
-                  </a:lnTo>
-                  <a:lnTo>
-                    <a:pt x="7088310" y="3222446"/>
-                  </a:lnTo>
-                  <a:lnTo>
-                    <a:pt x="7162070" y="3228496"/>
-                  </a:lnTo>
-                  <a:lnTo>
-                    <a:pt x="7235830" y="3234407"/>
-                  </a:lnTo>
-                  <a:lnTo>
-                    <a:pt x="7235830" y="3452543"/>
-                  </a:lnTo>
-                  <a:lnTo>
-                    <a:pt x="7162070" y="3450483"/>
-                  </a:lnTo>
-                  <a:lnTo>
-                    <a:pt x="7088310" y="3448286"/>
-                  </a:lnTo>
-                  <a:lnTo>
-                    <a:pt x="7014550" y="3445945"/>
-                  </a:lnTo>
-                  <a:lnTo>
-                    <a:pt x="6940789" y="3443449"/>
-                  </a:lnTo>
-                  <a:lnTo>
-                    <a:pt x="6867029" y="3440789"/>
-                  </a:lnTo>
-                  <a:lnTo>
-                    <a:pt x="6793269" y="3437952"/>
-                  </a:lnTo>
-                  <a:lnTo>
-                    <a:pt x="6719509" y="3434929"/>
-                  </a:lnTo>
-                  <a:lnTo>
-                    <a:pt x="6645749" y="3431706"/>
-                  </a:lnTo>
-                  <a:lnTo>
-                    <a:pt x="6571989" y="3428269"/>
-                  </a:lnTo>
-                  <a:lnTo>
-                    <a:pt x="6498229" y="3424607"/>
-                  </a:lnTo>
-                  <a:lnTo>
-                    <a:pt x="6424469" y="3420702"/>
-                  </a:lnTo>
-                  <a:lnTo>
-                    <a:pt x="6350709" y="3416539"/>
-                  </a:lnTo>
-                  <a:lnTo>
-                    <a:pt x="6276949" y="3412102"/>
-                  </a:lnTo>
-                  <a:lnTo>
-                    <a:pt x="6203189" y="3407372"/>
-                  </a:lnTo>
-                  <a:lnTo>
-                    <a:pt x="6129429" y="3402329"/>
-                  </a:lnTo>
-                  <a:lnTo>
-                    <a:pt x="6055669" y="3396953"/>
-                  </a:lnTo>
-                  <a:lnTo>
-                    <a:pt x="5981909" y="3391223"/>
-                  </a:lnTo>
-                  <a:lnTo>
-                    <a:pt x="5908149" y="3385114"/>
-                  </a:lnTo>
-                  <a:lnTo>
-                    <a:pt x="5834389" y="3378601"/>
-                  </a:lnTo>
-                  <a:lnTo>
-                    <a:pt x="5760629" y="3371659"/>
-                  </a:lnTo>
-                  <a:lnTo>
-                    <a:pt x="5686869" y="3364258"/>
-                  </a:lnTo>
-                  <a:lnTo>
-                    <a:pt x="5613109" y="3356369"/>
-                  </a:lnTo>
-                  <a:lnTo>
-                    <a:pt x="5539349" y="3347959"/>
-                  </a:lnTo>
-                  <a:lnTo>
-                    <a:pt x="5465589" y="3338994"/>
-                  </a:lnTo>
-                  <a:lnTo>
-                    <a:pt x="5391829" y="3329436"/>
-                  </a:lnTo>
-                  <a:lnTo>
-                    <a:pt x="5318069" y="3319248"/>
-                  </a:lnTo>
-                  <a:lnTo>
-                    <a:pt x="5244309" y="3308387"/>
-                  </a:lnTo>
-                  <a:lnTo>
-                    <a:pt x="5170549" y="3296808"/>
-                  </a:lnTo>
-                  <a:lnTo>
-                    <a:pt x="5096789" y="3284466"/>
-                  </a:lnTo>
-                  <a:lnTo>
-                    <a:pt x="5023029" y="3271308"/>
-                  </a:lnTo>
-                  <a:lnTo>
-                    <a:pt x="4949269" y="3257282"/>
-                  </a:lnTo>
-                  <a:lnTo>
-                    <a:pt x="4875509" y="3242329"/>
-                  </a:lnTo>
-                  <a:lnTo>
-                    <a:pt x="4801749" y="3226389"/>
-                  </a:lnTo>
-                  <a:lnTo>
-                    <a:pt x="4727989" y="3209397"/>
-                  </a:lnTo>
-                  <a:lnTo>
-                    <a:pt x="4654229" y="3191283"/>
-                  </a:lnTo>
-                  <a:lnTo>
-                    <a:pt x="4580469" y="3171973"/>
-                  </a:lnTo>
-                  <a:lnTo>
-                    <a:pt x="4506709" y="3151388"/>
-                  </a:lnTo>
-                  <a:lnTo>
-                    <a:pt x="4432949" y="3129444"/>
-                  </a:lnTo>
-                  <a:lnTo>
-                    <a:pt x="4359189" y="3106051"/>
-                  </a:lnTo>
-                  <a:lnTo>
-                    <a:pt x="4285429" y="3081113"/>
-                  </a:lnTo>
-                  <a:lnTo>
-                    <a:pt x="4211669" y="3054529"/>
-                  </a:lnTo>
-                  <a:lnTo>
-                    <a:pt x="4137909" y="3026190"/>
-                  </a:lnTo>
-                  <a:lnTo>
-                    <a:pt x="4064149" y="2995979"/>
-                  </a:lnTo>
-                  <a:lnTo>
-                    <a:pt x="3990388" y="2963774"/>
-                  </a:lnTo>
-                  <a:lnTo>
-                    <a:pt x="3916628" y="2929443"/>
-                  </a:lnTo>
-                  <a:lnTo>
-                    <a:pt x="3842868" y="2892844"/>
-                  </a:lnTo>
-                  <a:lnTo>
-                    <a:pt x="3769108" y="2853830"/>
-                  </a:lnTo>
-                  <a:lnTo>
-                    <a:pt x="3695348" y="2812239"/>
-                  </a:lnTo>
-                  <a:lnTo>
-                    <a:pt x="3621588" y="2767902"/>
-                  </a:lnTo>
-                  <a:lnTo>
-                    <a:pt x="3547828" y="2720638"/>
-                  </a:lnTo>
-                  <a:lnTo>
-                    <a:pt x="3474068" y="2670254"/>
-                  </a:lnTo>
-                  <a:lnTo>
-                    <a:pt x="3400308" y="2640648"/>
-                  </a:lnTo>
-                  <a:lnTo>
-                    <a:pt x="3326548" y="2620663"/>
-                  </a:lnTo>
-                  <a:lnTo>
-                    <a:pt x="3252788" y="2600204"/>
-                  </a:lnTo>
-                  <a:lnTo>
-                    <a:pt x="3179028" y="2579259"/>
-                  </a:lnTo>
-                  <a:lnTo>
-                    <a:pt x="3105268" y="2557819"/>
-                  </a:lnTo>
-                  <a:lnTo>
-                    <a:pt x="3031508" y="2535870"/>
-                  </a:lnTo>
-                  <a:lnTo>
-                    <a:pt x="2957748" y="2513400"/>
-                  </a:lnTo>
-                  <a:lnTo>
-                    <a:pt x="2883988" y="2490399"/>
-                  </a:lnTo>
-                  <a:lnTo>
-                    <a:pt x="2810228" y="2466851"/>
-                  </a:lnTo>
-                  <a:lnTo>
-                    <a:pt x="2736468" y="2442746"/>
-                  </a:lnTo>
-                  <a:lnTo>
-                    <a:pt x="2662708" y="2418069"/>
-                  </a:lnTo>
-                  <a:lnTo>
-                    <a:pt x="2588948" y="2392808"/>
-                  </a:lnTo>
-                  <a:lnTo>
-                    <a:pt x="2515188" y="2366947"/>
-                  </a:lnTo>
-                  <a:lnTo>
-                    <a:pt x="2441428" y="2340474"/>
-                  </a:lnTo>
-                  <a:lnTo>
-                    <a:pt x="2367668" y="2313373"/>
-                  </a:lnTo>
-                  <a:lnTo>
-                    <a:pt x="2293908" y="2285629"/>
-                  </a:lnTo>
-                  <a:lnTo>
-                    <a:pt x="2220148" y="2257228"/>
-                  </a:lnTo>
-                  <a:lnTo>
-                    <a:pt x="2146388" y="2228154"/>
-                  </a:lnTo>
-                  <a:lnTo>
-                    <a:pt x="2072628" y="2198390"/>
-                  </a:lnTo>
-                  <a:lnTo>
-                    <a:pt x="1998868" y="2167921"/>
-                  </a:lnTo>
-                  <a:lnTo>
-                    <a:pt x="1925108" y="2136730"/>
-                  </a:lnTo>
-                  <a:lnTo>
-                    <a:pt x="1851348" y="2104799"/>
-                  </a:lnTo>
-                  <a:lnTo>
-                    <a:pt x="1777588" y="2072111"/>
-                  </a:lnTo>
-                  <a:lnTo>
-                    <a:pt x="1703828" y="2038649"/>
-                  </a:lnTo>
-                  <a:lnTo>
-                    <a:pt x="1630068" y="2004393"/>
-                  </a:lnTo>
-                  <a:lnTo>
-                    <a:pt x="1556308" y="1969325"/>
-                  </a:lnTo>
-                  <a:lnTo>
-                    <a:pt x="1482548" y="1933426"/>
-                  </a:lnTo>
-                  <a:lnTo>
-                    <a:pt x="1408788" y="1896676"/>
-                  </a:lnTo>
-                  <a:lnTo>
-                    <a:pt x="1335028" y="1859055"/>
-                  </a:lnTo>
-                  <a:lnTo>
-                    <a:pt x="1261268" y="1820542"/>
-                  </a:lnTo>
-                  <a:lnTo>
-                    <a:pt x="1187508" y="1781116"/>
-                  </a:lnTo>
-                  <a:lnTo>
-                    <a:pt x="1113747" y="1740755"/>
-                  </a:lnTo>
-                  <a:lnTo>
-                    <a:pt x="1039987" y="1699438"/>
-                  </a:lnTo>
-                  <a:lnTo>
-                    <a:pt x="966227" y="1657141"/>
-                  </a:lnTo>
-                  <a:lnTo>
-                    <a:pt x="892467" y="1613842"/>
-                  </a:lnTo>
-                  <a:lnTo>
-                    <a:pt x="818707" y="1569516"/>
-                  </a:lnTo>
-                  <a:lnTo>
-                    <a:pt x="744947" y="1524139"/>
-                  </a:lnTo>
-                  <a:lnTo>
-                    <a:pt x="671187" y="1477687"/>
-                  </a:lnTo>
-                  <a:lnTo>
-                    <a:pt x="597427" y="1430134"/>
-                  </a:lnTo>
-                  <a:lnTo>
-                    <a:pt x="523667" y="1381454"/>
-                  </a:lnTo>
-                  <a:lnTo>
-                    <a:pt x="449907" y="1331619"/>
-                  </a:lnTo>
-                  <a:lnTo>
-                    <a:pt x="376147" y="1280603"/>
-                  </a:lnTo>
-                  <a:lnTo>
-                    <a:pt x="302387" y="1228378"/>
-                  </a:lnTo>
-                  <a:lnTo>
-                    <a:pt x="228627" y="1174915"/>
-                  </a:lnTo>
-                  <a:lnTo>
-                    <a:pt x="154867" y="1120185"/>
-                  </a:lnTo>
-                  <a:lnTo>
-                    <a:pt x="81107" y="1064157"/>
-                  </a:lnTo>
-                  <a:lnTo>
-                    <a:pt x="7347" y="1006801"/>
-                  </a:lnTo>
-                  <a:lnTo>
-                    <a:pt x="0" y="1000952"/>
+                    <a:pt x="1862185" y="162952"/>
+                  </a:lnTo>
+                  <a:lnTo>
+                    <a:pt x="1933808" y="368629"/>
+                  </a:lnTo>
+                  <a:lnTo>
+                    <a:pt x="2005430" y="561568"/>
+                  </a:lnTo>
+                  <a:lnTo>
+                    <a:pt x="2077053" y="742557"/>
+                  </a:lnTo>
+                  <a:lnTo>
+                    <a:pt x="2148675" y="912336"/>
+                  </a:lnTo>
+                  <a:lnTo>
+                    <a:pt x="2220298" y="1071599"/>
+                  </a:lnTo>
+                  <a:lnTo>
+                    <a:pt x="2291920" y="1220999"/>
+                  </a:lnTo>
+                  <a:lnTo>
+                    <a:pt x="2363543" y="1361145"/>
+                  </a:lnTo>
+                  <a:lnTo>
+                    <a:pt x="2435165" y="1492611"/>
+                  </a:lnTo>
+                  <a:lnTo>
+                    <a:pt x="2506788" y="1615934"/>
+                  </a:lnTo>
+                  <a:lnTo>
+                    <a:pt x="2578410" y="1731620"/>
+                  </a:lnTo>
+                  <a:lnTo>
+                    <a:pt x="2650033" y="1840140"/>
+                  </a:lnTo>
+                  <a:lnTo>
+                    <a:pt x="2721655" y="1941939"/>
+                  </a:lnTo>
+                  <a:lnTo>
+                    <a:pt x="2793278" y="2037432"/>
+                  </a:lnTo>
+                  <a:lnTo>
+                    <a:pt x="2864901" y="2127012"/>
+                  </a:lnTo>
+                  <a:lnTo>
+                    <a:pt x="2936523" y="2211043"/>
+                  </a:lnTo>
+                  <a:lnTo>
+                    <a:pt x="3008146" y="2289869"/>
+                  </a:lnTo>
+                  <a:lnTo>
+                    <a:pt x="3079768" y="2363814"/>
+                  </a:lnTo>
+                  <a:lnTo>
+                    <a:pt x="3151391" y="2433178"/>
+                  </a:lnTo>
+                  <a:lnTo>
+                    <a:pt x="3223013" y="2498246"/>
+                  </a:lnTo>
+                  <a:lnTo>
+                    <a:pt x="3294636" y="2559285"/>
+                  </a:lnTo>
+                  <a:lnTo>
+                    <a:pt x="3366258" y="2616542"/>
+                  </a:lnTo>
+                  <a:lnTo>
+                    <a:pt x="3437881" y="2660171"/>
+                  </a:lnTo>
+                  <a:lnTo>
+                    <a:pt x="3509503" y="2679242"/>
+                  </a:lnTo>
+                  <a:lnTo>
+                    <a:pt x="3581126" y="2697871"/>
+                  </a:lnTo>
+                  <a:lnTo>
+                    <a:pt x="3652748" y="2716068"/>
+                  </a:lnTo>
+                  <a:lnTo>
+                    <a:pt x="3724371" y="2733845"/>
+                  </a:lnTo>
+                  <a:lnTo>
+                    <a:pt x="3795993" y="2751209"/>
+                  </a:lnTo>
+                  <a:lnTo>
+                    <a:pt x="3867616" y="2768172"/>
+                  </a:lnTo>
+                  <a:lnTo>
+                    <a:pt x="3939238" y="2784742"/>
+                  </a:lnTo>
+                  <a:lnTo>
+                    <a:pt x="4010861" y="2800928"/>
+                  </a:lnTo>
+                  <a:lnTo>
+                    <a:pt x="4082483" y="2816739"/>
+                  </a:lnTo>
+                  <a:lnTo>
+                    <a:pt x="4154106" y="2832184"/>
+                  </a:lnTo>
+                  <a:lnTo>
+                    <a:pt x="4225729" y="2847272"/>
+                  </a:lnTo>
+                  <a:lnTo>
+                    <a:pt x="4297351" y="2862010"/>
+                  </a:lnTo>
+                  <a:lnTo>
+                    <a:pt x="4368974" y="2876407"/>
+                  </a:lnTo>
+                  <a:lnTo>
+                    <a:pt x="4440596" y="2890470"/>
+                  </a:lnTo>
+                  <a:lnTo>
+                    <a:pt x="4512219" y="2904208"/>
+                  </a:lnTo>
+                  <a:lnTo>
+                    <a:pt x="4583841" y="2917628"/>
+                  </a:lnTo>
+                  <a:lnTo>
+                    <a:pt x="4655464" y="2930737"/>
+                  </a:lnTo>
+                  <a:lnTo>
+                    <a:pt x="4727086" y="2943542"/>
+                  </a:lnTo>
+                  <a:lnTo>
+                    <a:pt x="4798709" y="2956051"/>
+                  </a:lnTo>
+                  <a:lnTo>
+                    <a:pt x="4870331" y="2968270"/>
+                  </a:lnTo>
+                  <a:lnTo>
+                    <a:pt x="4941954" y="2980207"/>
+                  </a:lnTo>
+                  <a:lnTo>
+                    <a:pt x="5013576" y="2991867"/>
+                  </a:lnTo>
+                  <a:lnTo>
+                    <a:pt x="5085199" y="3003257"/>
+                  </a:lnTo>
+                  <a:lnTo>
+                    <a:pt x="5156821" y="3014383"/>
+                  </a:lnTo>
+                  <a:lnTo>
+                    <a:pt x="5228444" y="3025251"/>
+                  </a:lnTo>
+                  <a:lnTo>
+                    <a:pt x="5300066" y="3035868"/>
+                  </a:lnTo>
+                  <a:lnTo>
+                    <a:pt x="5371689" y="3046239"/>
+                  </a:lnTo>
+                  <a:lnTo>
+                    <a:pt x="5443311" y="3056370"/>
+                  </a:lnTo>
+                  <a:lnTo>
+                    <a:pt x="5514934" y="3066266"/>
+                  </a:lnTo>
+                  <a:lnTo>
+                    <a:pt x="5586557" y="3075933"/>
+                  </a:lnTo>
+                  <a:lnTo>
+                    <a:pt x="5658179" y="3085377"/>
+                  </a:lnTo>
+                  <a:lnTo>
+                    <a:pt x="5729802" y="3094601"/>
+                  </a:lnTo>
+                  <a:lnTo>
+                    <a:pt x="5801424" y="3103612"/>
+                  </a:lnTo>
+                  <a:lnTo>
+                    <a:pt x="5873047" y="3112415"/>
+                  </a:lnTo>
+                  <a:lnTo>
+                    <a:pt x="5944669" y="3121013"/>
+                  </a:lnTo>
+                  <a:lnTo>
+                    <a:pt x="6016292" y="3129413"/>
+                  </a:lnTo>
+                  <a:lnTo>
+                    <a:pt x="6087914" y="3137618"/>
+                  </a:lnTo>
+                  <a:lnTo>
+                    <a:pt x="6159537" y="3145633"/>
+                  </a:lnTo>
+                  <a:lnTo>
+                    <a:pt x="6231159" y="3153462"/>
+                  </a:lnTo>
+                  <a:lnTo>
+                    <a:pt x="6302782" y="3161110"/>
+                  </a:lnTo>
+                  <a:lnTo>
+                    <a:pt x="6374404" y="3168581"/>
+                  </a:lnTo>
+                  <a:lnTo>
+                    <a:pt x="6446027" y="3175879"/>
+                  </a:lnTo>
+                  <a:lnTo>
+                    <a:pt x="6517649" y="3183008"/>
+                  </a:lnTo>
+                  <a:lnTo>
+                    <a:pt x="6589272" y="3189972"/>
+                  </a:lnTo>
+                  <a:lnTo>
+                    <a:pt x="6660894" y="3196774"/>
+                  </a:lnTo>
+                  <a:lnTo>
+                    <a:pt x="6732517" y="3203419"/>
+                  </a:lnTo>
+                  <a:lnTo>
+                    <a:pt x="6804139" y="3209911"/>
+                  </a:lnTo>
+                  <a:lnTo>
+                    <a:pt x="6875762" y="3216251"/>
+                  </a:lnTo>
+                  <a:lnTo>
+                    <a:pt x="6947385" y="3222446"/>
+                  </a:lnTo>
+                  <a:lnTo>
+                    <a:pt x="7019007" y="3228496"/>
+                  </a:lnTo>
+                  <a:lnTo>
+                    <a:pt x="7090630" y="3234407"/>
+                  </a:lnTo>
+                  <a:lnTo>
+                    <a:pt x="7090630" y="3452543"/>
+                  </a:lnTo>
+                  <a:lnTo>
+                    <a:pt x="7019007" y="3450483"/>
+                  </a:lnTo>
+                  <a:lnTo>
+                    <a:pt x="6947385" y="3448286"/>
+                  </a:lnTo>
+                  <a:lnTo>
+                    <a:pt x="6875762" y="3445945"/>
+                  </a:lnTo>
+                  <a:lnTo>
+                    <a:pt x="6804139" y="3443449"/>
+                  </a:lnTo>
+                  <a:lnTo>
+                    <a:pt x="6732517" y="3440789"/>
+                  </a:lnTo>
+                  <a:lnTo>
+                    <a:pt x="6660894" y="3437952"/>
+                  </a:lnTo>
+                  <a:lnTo>
+                    <a:pt x="6589272" y="3434929"/>
+                  </a:lnTo>
+                  <a:lnTo>
+                    <a:pt x="6517649" y="3431706"/>
+                  </a:lnTo>
+                  <a:lnTo>
+                    <a:pt x="6446027" y="3428269"/>
+                  </a:lnTo>
+                  <a:lnTo>
+                    <a:pt x="6374404" y="3424607"/>
+                  </a:lnTo>
+                  <a:lnTo>
+                    <a:pt x="6302782" y="3420702"/>
+                  </a:lnTo>
+                  <a:lnTo>
+                    <a:pt x="6231159" y="3416539"/>
+                  </a:lnTo>
+                  <a:lnTo>
+                    <a:pt x="6159537" y="3412102"/>
+                  </a:lnTo>
+                  <a:lnTo>
+                    <a:pt x="6087914" y="3407372"/>
+                  </a:lnTo>
+                  <a:lnTo>
+                    <a:pt x="6016292" y="3402329"/>
+                  </a:lnTo>
+                  <a:lnTo>
+                    <a:pt x="5944669" y="3396953"/>
+                  </a:lnTo>
+                  <a:lnTo>
+                    <a:pt x="5873047" y="3391223"/>
+                  </a:lnTo>
+                  <a:lnTo>
+                    <a:pt x="5801424" y="3385114"/>
+                  </a:lnTo>
+                  <a:lnTo>
+                    <a:pt x="5729802" y="3378601"/>
+                  </a:lnTo>
+                  <a:lnTo>
+                    <a:pt x="5658179" y="3371659"/>
+                  </a:lnTo>
+                  <a:lnTo>
+                    <a:pt x="5586557" y="3364258"/>
+                  </a:lnTo>
+                  <a:lnTo>
+                    <a:pt x="5514934" y="3356369"/>
+                  </a:lnTo>
+                  <a:lnTo>
+                    <a:pt x="5443311" y="3347959"/>
+                  </a:lnTo>
+                  <a:lnTo>
+                    <a:pt x="5371689" y="3338994"/>
+                  </a:lnTo>
+                  <a:lnTo>
+                    <a:pt x="5300066" y="3329436"/>
+                  </a:lnTo>
+                  <a:lnTo>
+                    <a:pt x="5228444" y="3319248"/>
+                  </a:lnTo>
+                  <a:lnTo>
+                    <a:pt x="5156821" y="3308387"/>
+                  </a:lnTo>
+                  <a:lnTo>
+                    <a:pt x="5085199" y="3296808"/>
+                  </a:lnTo>
+                  <a:lnTo>
+                    <a:pt x="5013576" y="3284466"/>
+                  </a:lnTo>
+                  <a:lnTo>
+                    <a:pt x="4941954" y="3271308"/>
+                  </a:lnTo>
+                  <a:lnTo>
+                    <a:pt x="4870331" y="3257282"/>
+                  </a:lnTo>
+                  <a:lnTo>
+                    <a:pt x="4798709" y="3242329"/>
+                  </a:lnTo>
+                  <a:lnTo>
+                    <a:pt x="4727086" y="3226389"/>
+                  </a:lnTo>
+                  <a:lnTo>
+                    <a:pt x="4655464" y="3209397"/>
+                  </a:lnTo>
+                  <a:lnTo>
+                    <a:pt x="4583841" y="3191283"/>
+                  </a:lnTo>
+                  <a:lnTo>
+                    <a:pt x="4512219" y="3171973"/>
+                  </a:lnTo>
+                  <a:lnTo>
+                    <a:pt x="4440596" y="3151388"/>
+                  </a:lnTo>
+                  <a:lnTo>
+                    <a:pt x="4368974" y="3129444"/>
+                  </a:lnTo>
+                  <a:lnTo>
+                    <a:pt x="4297351" y="3106051"/>
+                  </a:lnTo>
+                  <a:lnTo>
+                    <a:pt x="4225729" y="3081113"/>
+                  </a:lnTo>
+                  <a:lnTo>
+                    <a:pt x="4154106" y="3054529"/>
+                  </a:lnTo>
+                  <a:lnTo>
+                    <a:pt x="4082483" y="3026190"/>
+                  </a:lnTo>
+                  <a:lnTo>
+                    <a:pt x="4010861" y="2995979"/>
+                  </a:lnTo>
+                  <a:lnTo>
+                    <a:pt x="3939238" y="2963774"/>
+                  </a:lnTo>
+                  <a:lnTo>
+                    <a:pt x="3867616" y="2929443"/>
+                  </a:lnTo>
+                  <a:lnTo>
+                    <a:pt x="3795993" y="2892844"/>
+                  </a:lnTo>
+                  <a:lnTo>
+                    <a:pt x="3724371" y="2853830"/>
+                  </a:lnTo>
+                  <a:lnTo>
+                    <a:pt x="3652748" y="2812239"/>
+                  </a:lnTo>
+                  <a:lnTo>
+                    <a:pt x="3581126" y="2767902"/>
+                  </a:lnTo>
+                  <a:lnTo>
+                    <a:pt x="3509503" y="2720638"/>
+                  </a:lnTo>
+                  <a:lnTo>
+                    <a:pt x="3437881" y="2670254"/>
+                  </a:lnTo>
+                  <a:lnTo>
+                    <a:pt x="3366258" y="2640648"/>
+                  </a:lnTo>
+                  <a:lnTo>
+                    <a:pt x="3294636" y="2620663"/>
+                  </a:lnTo>
+                  <a:lnTo>
+                    <a:pt x="3223013" y="2600204"/>
+                  </a:lnTo>
+                  <a:lnTo>
+                    <a:pt x="3151391" y="2579259"/>
+                  </a:lnTo>
+                  <a:lnTo>
+                    <a:pt x="3079768" y="2557819"/>
+                  </a:lnTo>
+                  <a:lnTo>
+                    <a:pt x="3008146" y="2535870"/>
+                  </a:lnTo>
+                  <a:lnTo>
+                    <a:pt x="2936523" y="2513400"/>
+                  </a:lnTo>
+                  <a:lnTo>
+                    <a:pt x="2864901" y="2490399"/>
+                  </a:lnTo>
+                  <a:lnTo>
+                    <a:pt x="2793278" y="2466851"/>
+                  </a:lnTo>
+                  <a:lnTo>
+                    <a:pt x="2721655" y="2442746"/>
+                  </a:lnTo>
+                  <a:lnTo>
+                    <a:pt x="2650033" y="2418069"/>
+                  </a:lnTo>
+                  <a:lnTo>
+                    <a:pt x="2578410" y="2392808"/>
+                  </a:lnTo>
+                  <a:lnTo>
+                    <a:pt x="2506788" y="2366947"/>
+                  </a:lnTo>
+                  <a:lnTo>
+                    <a:pt x="2435165" y="2340474"/>
+                  </a:lnTo>
+                  <a:lnTo>
+                    <a:pt x="2363543" y="2313373"/>
+                  </a:lnTo>
+                  <a:lnTo>
+                    <a:pt x="2291920" y="2285629"/>
+                  </a:lnTo>
+                  <a:lnTo>
+                    <a:pt x="2220298" y="2257228"/>
+                  </a:lnTo>
+                  <a:lnTo>
+                    <a:pt x="2148675" y="2228154"/>
+                  </a:lnTo>
+                  <a:lnTo>
+                    <a:pt x="2077053" y="2198390"/>
+                  </a:lnTo>
+                  <a:lnTo>
+                    <a:pt x="2005430" y="2167921"/>
+                  </a:lnTo>
+                  <a:lnTo>
+                    <a:pt x="1933808" y="2136730"/>
+                  </a:lnTo>
+                  <a:lnTo>
+                    <a:pt x="1862185" y="2104799"/>
+                  </a:lnTo>
+                  <a:lnTo>
+                    <a:pt x="1790563" y="2072111"/>
+                  </a:lnTo>
+                  <a:lnTo>
+                    <a:pt x="1718940" y="2038649"/>
+                  </a:lnTo>
+                  <a:lnTo>
+                    <a:pt x="1647318" y="2004393"/>
+                  </a:lnTo>
+                  <a:lnTo>
+                    <a:pt x="1575695" y="1969325"/>
+                  </a:lnTo>
+                  <a:lnTo>
+                    <a:pt x="1504073" y="1933426"/>
+                  </a:lnTo>
+                  <a:lnTo>
+                    <a:pt x="1432450" y="1896676"/>
+                  </a:lnTo>
+                  <a:lnTo>
+                    <a:pt x="1360827" y="1859055"/>
+                  </a:lnTo>
+                  <a:lnTo>
+                    <a:pt x="1289205" y="1820542"/>
+                  </a:lnTo>
+                  <a:lnTo>
+                    <a:pt x="1217582" y="1781116"/>
+                  </a:lnTo>
+                  <a:lnTo>
+                    <a:pt x="1145960" y="1740755"/>
+                  </a:lnTo>
+                  <a:lnTo>
+                    <a:pt x="1074337" y="1699438"/>
+                  </a:lnTo>
+                  <a:lnTo>
+                    <a:pt x="1002715" y="1657141"/>
+                  </a:lnTo>
+                  <a:lnTo>
+                    <a:pt x="931092" y="1613842"/>
+                  </a:lnTo>
+                  <a:lnTo>
+                    <a:pt x="859470" y="1569516"/>
+                  </a:lnTo>
+                  <a:lnTo>
+                    <a:pt x="787847" y="1524139"/>
+                  </a:lnTo>
+                  <a:lnTo>
+                    <a:pt x="716225" y="1477687"/>
+                  </a:lnTo>
+                  <a:lnTo>
+                    <a:pt x="644602" y="1430134"/>
+                  </a:lnTo>
+                  <a:lnTo>
+                    <a:pt x="572980" y="1381454"/>
+                  </a:lnTo>
+                  <a:lnTo>
+                    <a:pt x="501357" y="1331619"/>
+                  </a:lnTo>
+                  <a:lnTo>
+                    <a:pt x="429735" y="1280603"/>
+                  </a:lnTo>
+                  <a:lnTo>
+                    <a:pt x="358112" y="1228378"/>
+                  </a:lnTo>
+                  <a:lnTo>
+                    <a:pt x="286490" y="1174915"/>
+                  </a:lnTo>
+                  <a:lnTo>
+                    <a:pt x="214867" y="1120185"/>
+                  </a:lnTo>
+                  <a:lnTo>
+                    <a:pt x="143245" y="1064157"/>
+                  </a:lnTo>
+                  <a:lnTo>
+                    <a:pt x="71622" y="1006801"/>
+                  </a:lnTo>
+                  <a:lnTo>
+                    <a:pt x="0" y="948086"/>
                   </a:lnTo>
                   <a:close/>
                 </a:path>
@@ -3552,243 +3509,568 @@
         </p:sp>
         <p:sp>
           <p:nvSpPr>
+            <p:cNvPr id="21" name="pl21"/>
+            <p:cNvSpPr/>
+            <p:nvPr/>
+          </p:nvSpPr>
+          <p:spPr>
+            <a:xfrm>
+              <a:off x="2981005" y="2073503"/>
+              <a:ext cx="5281674" cy="3234407"/>
+            </a:xfrm>
+            <a:custGeom>
+              <a:avLst/>
+              <a:pathLst>
+                <a:path w="5281674" h="3234407">
+                  <a:moveTo>
+                    <a:pt x="0" y="0"/>
+                  </a:moveTo>
+                  <a:lnTo>
+                    <a:pt x="53229" y="162952"/>
+                  </a:lnTo>
+                  <a:lnTo>
+                    <a:pt x="124852" y="368629"/>
+                  </a:lnTo>
+                  <a:lnTo>
+                    <a:pt x="196474" y="561568"/>
+                  </a:lnTo>
+                  <a:lnTo>
+                    <a:pt x="268097" y="742557"/>
+                  </a:lnTo>
+                  <a:lnTo>
+                    <a:pt x="339719" y="912336"/>
+                  </a:lnTo>
+                  <a:lnTo>
+                    <a:pt x="411342" y="1071599"/>
+                  </a:lnTo>
+                  <a:lnTo>
+                    <a:pt x="482964" y="1220999"/>
+                  </a:lnTo>
+                  <a:lnTo>
+                    <a:pt x="554587" y="1361145"/>
+                  </a:lnTo>
+                  <a:lnTo>
+                    <a:pt x="626209" y="1492611"/>
+                  </a:lnTo>
+                  <a:lnTo>
+                    <a:pt x="697832" y="1615934"/>
+                  </a:lnTo>
+                  <a:lnTo>
+                    <a:pt x="769455" y="1731620"/>
+                  </a:lnTo>
+                  <a:lnTo>
+                    <a:pt x="841077" y="1840140"/>
+                  </a:lnTo>
+                  <a:lnTo>
+                    <a:pt x="912700" y="1941939"/>
+                  </a:lnTo>
+                  <a:lnTo>
+                    <a:pt x="984322" y="2037432"/>
+                  </a:lnTo>
+                  <a:lnTo>
+                    <a:pt x="1055945" y="2127012"/>
+                  </a:lnTo>
+                  <a:lnTo>
+                    <a:pt x="1127567" y="2211043"/>
+                  </a:lnTo>
+                  <a:lnTo>
+                    <a:pt x="1199190" y="2289869"/>
+                  </a:lnTo>
+                  <a:lnTo>
+                    <a:pt x="1270812" y="2363814"/>
+                  </a:lnTo>
+                  <a:lnTo>
+                    <a:pt x="1342435" y="2433178"/>
+                  </a:lnTo>
+                  <a:lnTo>
+                    <a:pt x="1414057" y="2498246"/>
+                  </a:lnTo>
+                  <a:lnTo>
+                    <a:pt x="1485680" y="2559285"/>
+                  </a:lnTo>
+                  <a:lnTo>
+                    <a:pt x="1557302" y="2616542"/>
+                  </a:lnTo>
+                  <a:lnTo>
+                    <a:pt x="1628925" y="2660171"/>
+                  </a:lnTo>
+                  <a:lnTo>
+                    <a:pt x="1700547" y="2679242"/>
+                  </a:lnTo>
+                  <a:lnTo>
+                    <a:pt x="1772170" y="2697871"/>
+                  </a:lnTo>
+                  <a:lnTo>
+                    <a:pt x="1843792" y="2716068"/>
+                  </a:lnTo>
+                  <a:lnTo>
+                    <a:pt x="1915415" y="2733845"/>
+                  </a:lnTo>
+                  <a:lnTo>
+                    <a:pt x="1987037" y="2751209"/>
+                  </a:lnTo>
+                  <a:lnTo>
+                    <a:pt x="2058660" y="2768172"/>
+                  </a:lnTo>
+                  <a:lnTo>
+                    <a:pt x="2130283" y="2784742"/>
+                  </a:lnTo>
+                  <a:lnTo>
+                    <a:pt x="2201905" y="2800928"/>
+                  </a:lnTo>
+                  <a:lnTo>
+                    <a:pt x="2273528" y="2816739"/>
+                  </a:lnTo>
+                  <a:lnTo>
+                    <a:pt x="2345150" y="2832184"/>
+                  </a:lnTo>
+                  <a:lnTo>
+                    <a:pt x="2416773" y="2847272"/>
+                  </a:lnTo>
+                  <a:lnTo>
+                    <a:pt x="2488395" y="2862010"/>
+                  </a:lnTo>
+                  <a:lnTo>
+                    <a:pt x="2560018" y="2876407"/>
+                  </a:lnTo>
+                  <a:lnTo>
+                    <a:pt x="2631640" y="2890470"/>
+                  </a:lnTo>
+                  <a:lnTo>
+                    <a:pt x="2703263" y="2904208"/>
+                  </a:lnTo>
+                  <a:lnTo>
+                    <a:pt x="2774885" y="2917628"/>
+                  </a:lnTo>
+                  <a:lnTo>
+                    <a:pt x="2846508" y="2930737"/>
+                  </a:lnTo>
+                  <a:lnTo>
+                    <a:pt x="2918130" y="2943542"/>
+                  </a:lnTo>
+                  <a:lnTo>
+                    <a:pt x="2989753" y="2956051"/>
+                  </a:lnTo>
+                  <a:lnTo>
+                    <a:pt x="3061375" y="2968270"/>
+                  </a:lnTo>
+                  <a:lnTo>
+                    <a:pt x="3132998" y="2980207"/>
+                  </a:lnTo>
+                  <a:lnTo>
+                    <a:pt x="3204620" y="2991867"/>
+                  </a:lnTo>
+                  <a:lnTo>
+                    <a:pt x="3276243" y="3003257"/>
+                  </a:lnTo>
+                  <a:lnTo>
+                    <a:pt x="3347865" y="3014383"/>
+                  </a:lnTo>
+                  <a:lnTo>
+                    <a:pt x="3419488" y="3025251"/>
+                  </a:lnTo>
+                  <a:lnTo>
+                    <a:pt x="3491111" y="3035868"/>
+                  </a:lnTo>
+                  <a:lnTo>
+                    <a:pt x="3562733" y="3046239"/>
+                  </a:lnTo>
+                  <a:lnTo>
+                    <a:pt x="3634356" y="3056370"/>
+                  </a:lnTo>
+                  <a:lnTo>
+                    <a:pt x="3705978" y="3066266"/>
+                  </a:lnTo>
+                  <a:lnTo>
+                    <a:pt x="3777601" y="3075933"/>
+                  </a:lnTo>
+                  <a:lnTo>
+                    <a:pt x="3849223" y="3085377"/>
+                  </a:lnTo>
+                  <a:lnTo>
+                    <a:pt x="3920846" y="3094601"/>
+                  </a:lnTo>
+                  <a:lnTo>
+                    <a:pt x="3992468" y="3103612"/>
+                  </a:lnTo>
+                  <a:lnTo>
+                    <a:pt x="4064091" y="3112415"/>
+                  </a:lnTo>
+                  <a:lnTo>
+                    <a:pt x="4135713" y="3121013"/>
+                  </a:lnTo>
+                  <a:lnTo>
+                    <a:pt x="4207336" y="3129413"/>
+                  </a:lnTo>
+                  <a:lnTo>
+                    <a:pt x="4278958" y="3137618"/>
+                  </a:lnTo>
+                  <a:lnTo>
+                    <a:pt x="4350581" y="3145633"/>
+                  </a:lnTo>
+                  <a:lnTo>
+                    <a:pt x="4422203" y="3153462"/>
+                  </a:lnTo>
+                  <a:lnTo>
+                    <a:pt x="4493826" y="3161110"/>
+                  </a:lnTo>
+                  <a:lnTo>
+                    <a:pt x="4565448" y="3168581"/>
+                  </a:lnTo>
+                  <a:lnTo>
+                    <a:pt x="4637071" y="3175879"/>
+                  </a:lnTo>
+                  <a:lnTo>
+                    <a:pt x="4708693" y="3183008"/>
+                  </a:lnTo>
+                  <a:lnTo>
+                    <a:pt x="4780316" y="3189972"/>
+                  </a:lnTo>
+                  <a:lnTo>
+                    <a:pt x="4851939" y="3196774"/>
+                  </a:lnTo>
+                  <a:lnTo>
+                    <a:pt x="4923561" y="3203419"/>
+                  </a:lnTo>
+                  <a:lnTo>
+                    <a:pt x="4995184" y="3209911"/>
+                  </a:lnTo>
+                  <a:lnTo>
+                    <a:pt x="5066806" y="3216251"/>
+                  </a:lnTo>
+                  <a:lnTo>
+                    <a:pt x="5138429" y="3222446"/>
+                  </a:lnTo>
+                  <a:lnTo>
+                    <a:pt x="5210051" y="3228496"/>
+                  </a:lnTo>
+                  <a:lnTo>
+                    <a:pt x="5281674" y="3234407"/>
+                  </a:lnTo>
+                </a:path>
+              </a:pathLst>
+            </a:custGeom>
+          </p:spPr>
+          <p:txBody>
+            <a:bodyPr/>
+            <a:lstStyle/>
+            <a:p/>
+          </p:txBody>
+        </p:sp>
+        <p:sp>
+          <p:nvSpPr>
             <p:cNvPr id="22" name="pl22"/>
             <p:cNvSpPr/>
             <p:nvPr/>
           </p:nvSpPr>
           <p:spPr>
             <a:xfrm>
-              <a:off x="2614047" y="2073503"/>
-              <a:ext cx="5439300" cy="3234407"/>
+              <a:off x="1172049" y="3021589"/>
+              <a:ext cx="7090630" cy="2504457"/>
             </a:xfrm>
             <a:custGeom>
               <a:avLst/>
               <a:pathLst>
-                <a:path w="5439300" h="3234407">
+                <a:path w="7090630" h="2504457">
                   <a:moveTo>
+                    <a:pt x="7090630" y="2504457"/>
+                  </a:moveTo>
+                  <a:lnTo>
+                    <a:pt x="7019007" y="2502397"/>
+                  </a:lnTo>
+                  <a:lnTo>
+                    <a:pt x="6947385" y="2500200"/>
+                  </a:lnTo>
+                  <a:lnTo>
+                    <a:pt x="6875762" y="2497859"/>
+                  </a:lnTo>
+                  <a:lnTo>
+                    <a:pt x="6804139" y="2495363"/>
+                  </a:lnTo>
+                  <a:lnTo>
+                    <a:pt x="6732517" y="2492703"/>
+                  </a:lnTo>
+                  <a:lnTo>
+                    <a:pt x="6660894" y="2489866"/>
+                  </a:lnTo>
+                  <a:lnTo>
+                    <a:pt x="6589272" y="2486843"/>
+                  </a:lnTo>
+                  <a:lnTo>
+                    <a:pt x="6517649" y="2483620"/>
+                  </a:lnTo>
+                  <a:lnTo>
+                    <a:pt x="6446027" y="2480183"/>
+                  </a:lnTo>
+                  <a:lnTo>
+                    <a:pt x="6374404" y="2476521"/>
+                  </a:lnTo>
+                  <a:lnTo>
+                    <a:pt x="6302782" y="2472616"/>
+                  </a:lnTo>
+                  <a:lnTo>
+                    <a:pt x="6231159" y="2468453"/>
+                  </a:lnTo>
+                  <a:lnTo>
+                    <a:pt x="6159537" y="2464016"/>
+                  </a:lnTo>
+                  <a:lnTo>
+                    <a:pt x="6087914" y="2459285"/>
+                  </a:lnTo>
+                  <a:lnTo>
+                    <a:pt x="6016292" y="2454243"/>
+                  </a:lnTo>
+                  <a:lnTo>
+                    <a:pt x="5944669" y="2448867"/>
+                  </a:lnTo>
+                  <a:lnTo>
+                    <a:pt x="5873047" y="2443137"/>
+                  </a:lnTo>
+                  <a:lnTo>
+                    <a:pt x="5801424" y="2437028"/>
+                  </a:lnTo>
+                  <a:lnTo>
+                    <a:pt x="5729802" y="2430515"/>
+                  </a:lnTo>
+                  <a:lnTo>
+                    <a:pt x="5658179" y="2423573"/>
+                  </a:lnTo>
+                  <a:lnTo>
+                    <a:pt x="5586557" y="2416172"/>
+                  </a:lnTo>
+                  <a:lnTo>
+                    <a:pt x="5514934" y="2408283"/>
+                  </a:lnTo>
+                  <a:lnTo>
+                    <a:pt x="5443311" y="2399873"/>
+                  </a:lnTo>
+                  <a:lnTo>
+                    <a:pt x="5371689" y="2390908"/>
+                  </a:lnTo>
+                  <a:lnTo>
+                    <a:pt x="5300066" y="2381350"/>
+                  </a:lnTo>
+                  <a:lnTo>
+                    <a:pt x="5228444" y="2371162"/>
+                  </a:lnTo>
+                  <a:lnTo>
+                    <a:pt x="5156821" y="2360301"/>
+                  </a:lnTo>
+                  <a:lnTo>
+                    <a:pt x="5085199" y="2348722"/>
+                  </a:lnTo>
+                  <a:lnTo>
+                    <a:pt x="5013576" y="2336380"/>
+                  </a:lnTo>
+                  <a:lnTo>
+                    <a:pt x="4941954" y="2323222"/>
+                  </a:lnTo>
+                  <a:lnTo>
+                    <a:pt x="4870331" y="2309196"/>
+                  </a:lnTo>
+                  <a:lnTo>
+                    <a:pt x="4798709" y="2294243"/>
+                  </a:lnTo>
+                  <a:lnTo>
+                    <a:pt x="4727086" y="2278303"/>
+                  </a:lnTo>
+                  <a:lnTo>
+                    <a:pt x="4655464" y="2261311"/>
+                  </a:lnTo>
+                  <a:lnTo>
+                    <a:pt x="4583841" y="2243197"/>
+                  </a:lnTo>
+                  <a:lnTo>
+                    <a:pt x="4512219" y="2223887"/>
+                  </a:lnTo>
+                  <a:lnTo>
+                    <a:pt x="4440596" y="2203302"/>
+                  </a:lnTo>
+                  <a:lnTo>
+                    <a:pt x="4368974" y="2181358"/>
+                  </a:lnTo>
+                  <a:lnTo>
+                    <a:pt x="4297351" y="2157965"/>
+                  </a:lnTo>
+                  <a:lnTo>
+                    <a:pt x="4225729" y="2133027"/>
+                  </a:lnTo>
+                  <a:lnTo>
+                    <a:pt x="4154106" y="2106443"/>
+                  </a:lnTo>
+                  <a:lnTo>
+                    <a:pt x="4082483" y="2078104"/>
+                  </a:lnTo>
+                  <a:lnTo>
+                    <a:pt x="4010861" y="2047893"/>
+                  </a:lnTo>
+                  <a:lnTo>
+                    <a:pt x="3939238" y="2015688"/>
+                  </a:lnTo>
+                  <a:lnTo>
+                    <a:pt x="3867616" y="1981357"/>
+                  </a:lnTo>
+                  <a:lnTo>
+                    <a:pt x="3795993" y="1944758"/>
+                  </a:lnTo>
+                  <a:lnTo>
+                    <a:pt x="3724371" y="1905744"/>
+                  </a:lnTo>
+                  <a:lnTo>
+                    <a:pt x="3652748" y="1864153"/>
+                  </a:lnTo>
+                  <a:lnTo>
+                    <a:pt x="3581126" y="1819816"/>
+                  </a:lnTo>
+                  <a:lnTo>
+                    <a:pt x="3509503" y="1772552"/>
+                  </a:lnTo>
+                  <a:lnTo>
+                    <a:pt x="3437881" y="1722168"/>
+                  </a:lnTo>
+                  <a:lnTo>
+                    <a:pt x="3366258" y="1692562"/>
+                  </a:lnTo>
+                  <a:lnTo>
+                    <a:pt x="3294636" y="1672577"/>
+                  </a:lnTo>
+                  <a:lnTo>
+                    <a:pt x="3223013" y="1652118"/>
+                  </a:lnTo>
+                  <a:lnTo>
+                    <a:pt x="3151391" y="1631173"/>
+                  </a:lnTo>
+                  <a:lnTo>
+                    <a:pt x="3079768" y="1609733"/>
+                  </a:lnTo>
+                  <a:lnTo>
+                    <a:pt x="3008146" y="1587784"/>
+                  </a:lnTo>
+                  <a:lnTo>
+                    <a:pt x="2936523" y="1565314"/>
+                  </a:lnTo>
+                  <a:lnTo>
+                    <a:pt x="2864901" y="1542313"/>
+                  </a:lnTo>
+                  <a:lnTo>
+                    <a:pt x="2793278" y="1518765"/>
+                  </a:lnTo>
+                  <a:lnTo>
+                    <a:pt x="2721655" y="1494660"/>
+                  </a:lnTo>
+                  <a:lnTo>
+                    <a:pt x="2650033" y="1469983"/>
+                  </a:lnTo>
+                  <a:lnTo>
+                    <a:pt x="2578410" y="1444722"/>
+                  </a:lnTo>
+                  <a:lnTo>
+                    <a:pt x="2506788" y="1418861"/>
+                  </a:lnTo>
+                  <a:lnTo>
+                    <a:pt x="2435165" y="1392388"/>
+                  </a:lnTo>
+                  <a:lnTo>
+                    <a:pt x="2363543" y="1365287"/>
+                  </a:lnTo>
+                  <a:lnTo>
+                    <a:pt x="2291920" y="1337543"/>
+                  </a:lnTo>
+                  <a:lnTo>
+                    <a:pt x="2220298" y="1309142"/>
+                  </a:lnTo>
+                  <a:lnTo>
+                    <a:pt x="2148675" y="1280068"/>
+                  </a:lnTo>
+                  <a:lnTo>
+                    <a:pt x="2077053" y="1250304"/>
+                  </a:lnTo>
+                  <a:lnTo>
+                    <a:pt x="2005430" y="1219835"/>
+                  </a:lnTo>
+                  <a:lnTo>
+                    <a:pt x="1933808" y="1188644"/>
+                  </a:lnTo>
+                  <a:lnTo>
+                    <a:pt x="1862185" y="1156713"/>
+                  </a:lnTo>
+                  <a:lnTo>
+                    <a:pt x="1790563" y="1124025"/>
+                  </a:lnTo>
+                  <a:lnTo>
+                    <a:pt x="1718940" y="1090562"/>
+                  </a:lnTo>
+                  <a:lnTo>
+                    <a:pt x="1647318" y="1056307"/>
+                  </a:lnTo>
+                  <a:lnTo>
+                    <a:pt x="1575695" y="1021239"/>
+                  </a:lnTo>
+                  <a:lnTo>
+                    <a:pt x="1504073" y="985340"/>
+                  </a:lnTo>
+                  <a:lnTo>
+                    <a:pt x="1432450" y="948590"/>
+                  </a:lnTo>
+                  <a:lnTo>
+                    <a:pt x="1360827" y="910969"/>
+                  </a:lnTo>
+                  <a:lnTo>
+                    <a:pt x="1289205" y="872456"/>
+                  </a:lnTo>
+                  <a:lnTo>
+                    <a:pt x="1217582" y="833030"/>
+                  </a:lnTo>
+                  <a:lnTo>
+                    <a:pt x="1145960" y="792669"/>
+                  </a:lnTo>
+                  <a:lnTo>
+                    <a:pt x="1074337" y="751352"/>
+                  </a:lnTo>
+                  <a:lnTo>
+                    <a:pt x="1002715" y="709055"/>
+                  </a:lnTo>
+                  <a:lnTo>
+                    <a:pt x="931092" y="665756"/>
+                  </a:lnTo>
+                  <a:lnTo>
+                    <a:pt x="859470" y="621430"/>
+                  </a:lnTo>
+                  <a:lnTo>
+                    <a:pt x="787847" y="576053"/>
+                  </a:lnTo>
+                  <a:lnTo>
+                    <a:pt x="716225" y="529601"/>
+                  </a:lnTo>
+                  <a:lnTo>
+                    <a:pt x="644602" y="482048"/>
+                  </a:lnTo>
+                  <a:lnTo>
+                    <a:pt x="572980" y="433368"/>
+                  </a:lnTo>
+                  <a:lnTo>
+                    <a:pt x="501357" y="383533"/>
+                  </a:lnTo>
+                  <a:lnTo>
+                    <a:pt x="429735" y="332517"/>
+                  </a:lnTo>
+                  <a:lnTo>
+                    <a:pt x="358112" y="280292"/>
+                  </a:lnTo>
+                  <a:lnTo>
+                    <a:pt x="286490" y="226829"/>
+                  </a:lnTo>
+                  <a:lnTo>
+                    <a:pt x="214867" y="172099"/>
+                  </a:lnTo>
+                  <a:lnTo>
+                    <a:pt x="143245" y="116071"/>
+                  </a:lnTo>
+                  <a:lnTo>
+                    <a:pt x="71622" y="58715"/>
+                  </a:lnTo>
+                  <a:lnTo>
                     <a:pt x="0" y="0"/>
-                  </a:moveTo>
-                  <a:lnTo>
-                    <a:pt x="54818" y="162952"/>
-                  </a:lnTo>
-                  <a:lnTo>
-                    <a:pt x="128578" y="368629"/>
-                  </a:lnTo>
-                  <a:lnTo>
-                    <a:pt x="202338" y="561568"/>
-                  </a:lnTo>
-                  <a:lnTo>
-                    <a:pt x="276098" y="742557"/>
-                  </a:lnTo>
-                  <a:lnTo>
-                    <a:pt x="349858" y="912336"/>
-                  </a:lnTo>
-                  <a:lnTo>
-                    <a:pt x="423618" y="1071599"/>
-                  </a:lnTo>
-                  <a:lnTo>
-                    <a:pt x="497378" y="1220999"/>
-                  </a:lnTo>
-                  <a:lnTo>
-                    <a:pt x="571138" y="1361145"/>
-                  </a:lnTo>
-                  <a:lnTo>
-                    <a:pt x="644898" y="1492611"/>
-                  </a:lnTo>
-                  <a:lnTo>
-                    <a:pt x="718658" y="1615934"/>
-                  </a:lnTo>
-                  <a:lnTo>
-                    <a:pt x="792418" y="1731620"/>
-                  </a:lnTo>
-                  <a:lnTo>
-                    <a:pt x="866178" y="1840140"/>
-                  </a:lnTo>
-                  <a:lnTo>
-                    <a:pt x="939938" y="1941939"/>
-                  </a:lnTo>
-                  <a:lnTo>
-                    <a:pt x="1013698" y="2037432"/>
-                  </a:lnTo>
-                  <a:lnTo>
-                    <a:pt x="1087458" y="2127012"/>
-                  </a:lnTo>
-                  <a:lnTo>
-                    <a:pt x="1161218" y="2211043"/>
-                  </a:lnTo>
-                  <a:lnTo>
-                    <a:pt x="1234978" y="2289869"/>
-                  </a:lnTo>
-                  <a:lnTo>
-                    <a:pt x="1308738" y="2363814"/>
-                  </a:lnTo>
-                  <a:lnTo>
-                    <a:pt x="1382498" y="2433178"/>
-                  </a:lnTo>
-                  <a:lnTo>
-                    <a:pt x="1456258" y="2498246"/>
-                  </a:lnTo>
-                  <a:lnTo>
-                    <a:pt x="1530018" y="2559285"/>
-                  </a:lnTo>
-                  <a:lnTo>
-                    <a:pt x="1603778" y="2616542"/>
-                  </a:lnTo>
-                  <a:lnTo>
-                    <a:pt x="1677538" y="2660171"/>
-                  </a:lnTo>
-                  <a:lnTo>
-                    <a:pt x="1751298" y="2679242"/>
-                  </a:lnTo>
-                  <a:lnTo>
-                    <a:pt x="1825058" y="2697871"/>
-                  </a:lnTo>
-                  <a:lnTo>
-                    <a:pt x="1898819" y="2716068"/>
-                  </a:lnTo>
-                  <a:lnTo>
-                    <a:pt x="1972579" y="2733845"/>
-                  </a:lnTo>
-                  <a:lnTo>
-                    <a:pt x="2046339" y="2751209"/>
-                  </a:lnTo>
-                  <a:lnTo>
-                    <a:pt x="2120099" y="2768172"/>
-                  </a:lnTo>
-                  <a:lnTo>
-                    <a:pt x="2193859" y="2784742"/>
-                  </a:lnTo>
-                  <a:lnTo>
-                    <a:pt x="2267619" y="2800928"/>
-                  </a:lnTo>
-                  <a:lnTo>
-                    <a:pt x="2341379" y="2816739"/>
-                  </a:lnTo>
-                  <a:lnTo>
-                    <a:pt x="2415139" y="2832184"/>
-                  </a:lnTo>
-                  <a:lnTo>
-                    <a:pt x="2488899" y="2847272"/>
-                  </a:lnTo>
-                  <a:lnTo>
-                    <a:pt x="2562659" y="2862010"/>
-                  </a:lnTo>
-                  <a:lnTo>
-                    <a:pt x="2636419" y="2876407"/>
-                  </a:lnTo>
-                  <a:lnTo>
-                    <a:pt x="2710179" y="2890470"/>
-                  </a:lnTo>
-                  <a:lnTo>
-                    <a:pt x="2783939" y="2904208"/>
-                  </a:lnTo>
-                  <a:lnTo>
-                    <a:pt x="2857699" y="2917628"/>
-                  </a:lnTo>
-                  <a:lnTo>
-                    <a:pt x="2931459" y="2930737"/>
-                  </a:lnTo>
-                  <a:lnTo>
-                    <a:pt x="3005219" y="2943542"/>
-                  </a:lnTo>
-                  <a:lnTo>
-                    <a:pt x="3078979" y="2956051"/>
-                  </a:lnTo>
-                  <a:lnTo>
-                    <a:pt x="3152739" y="2968270"/>
-                  </a:lnTo>
-                  <a:lnTo>
-                    <a:pt x="3226499" y="2980207"/>
-                  </a:lnTo>
-                  <a:lnTo>
-                    <a:pt x="3300259" y="2991867"/>
-                  </a:lnTo>
-                  <a:lnTo>
-                    <a:pt x="3374019" y="3003257"/>
-                  </a:lnTo>
-                  <a:lnTo>
-                    <a:pt x="3447779" y="3014383"/>
-                  </a:lnTo>
-                  <a:lnTo>
-                    <a:pt x="3521539" y="3025251"/>
-                  </a:lnTo>
-                  <a:lnTo>
-                    <a:pt x="3595299" y="3035868"/>
-                  </a:lnTo>
-                  <a:lnTo>
-                    <a:pt x="3669059" y="3046239"/>
-                  </a:lnTo>
-                  <a:lnTo>
-                    <a:pt x="3742819" y="3056370"/>
-                  </a:lnTo>
-                  <a:lnTo>
-                    <a:pt x="3816579" y="3066266"/>
-                  </a:lnTo>
-                  <a:lnTo>
-                    <a:pt x="3890339" y="3075933"/>
-                  </a:lnTo>
-                  <a:lnTo>
-                    <a:pt x="3964099" y="3085377"/>
-                  </a:lnTo>
-                  <a:lnTo>
-                    <a:pt x="4037859" y="3094601"/>
-                  </a:lnTo>
-                  <a:lnTo>
-                    <a:pt x="4111619" y="3103612"/>
-                  </a:lnTo>
-                  <a:lnTo>
-                    <a:pt x="4185379" y="3112415"/>
-                  </a:lnTo>
-                  <a:lnTo>
-                    <a:pt x="4259139" y="3121013"/>
-                  </a:lnTo>
-                  <a:lnTo>
-                    <a:pt x="4332899" y="3129413"/>
-                  </a:lnTo>
-                  <a:lnTo>
-                    <a:pt x="4406659" y="3137618"/>
-                  </a:lnTo>
-                  <a:lnTo>
-                    <a:pt x="4480419" y="3145633"/>
-                  </a:lnTo>
-                  <a:lnTo>
-                    <a:pt x="4554179" y="3153462"/>
-                  </a:lnTo>
-                  <a:lnTo>
-                    <a:pt x="4627939" y="3161110"/>
-                  </a:lnTo>
-                  <a:lnTo>
-                    <a:pt x="4701699" y="3168581"/>
-                  </a:lnTo>
-                  <a:lnTo>
-                    <a:pt x="4775459" y="3175879"/>
-                  </a:lnTo>
-                  <a:lnTo>
-                    <a:pt x="4849220" y="3183008"/>
-                  </a:lnTo>
-                  <a:lnTo>
-                    <a:pt x="4922980" y="3189972"/>
-                  </a:lnTo>
-                  <a:lnTo>
-                    <a:pt x="4996740" y="3196774"/>
-                  </a:lnTo>
-                  <a:lnTo>
-                    <a:pt x="5070500" y="3203419"/>
-                  </a:lnTo>
-                  <a:lnTo>
-                    <a:pt x="5144260" y="3209911"/>
-                  </a:lnTo>
-                  <a:lnTo>
-                    <a:pt x="5218020" y="3216251"/>
-                  </a:lnTo>
-                  <a:lnTo>
-                    <a:pt x="5291780" y="3222446"/>
-                  </a:lnTo>
-                  <a:lnTo>
-                    <a:pt x="5365540" y="3228496"/>
-                  </a:lnTo>
-                  <a:lnTo>
-                    <a:pt x="5439300" y="3234407"/>
                   </a:lnTo>
                 </a:path>
               </a:pathLst>
@@ -3808,595 +4090,270 @@
           </p:nvSpPr>
           <p:spPr>
             <a:xfrm>
-              <a:off x="817517" y="3074455"/>
-              <a:ext cx="7235830" cy="2451590"/>
+              <a:off x="2235385" y="2073503"/>
+              <a:ext cx="6027293" cy="3395541"/>
             </a:xfrm>
             <a:custGeom>
               <a:avLst/>
               <a:pathLst>
-                <a:path w="7235830" h="2451590">
-                  <a:moveTo>
-                    <a:pt x="7235830" y="2451590"/>
-                  </a:moveTo>
-                  <a:lnTo>
-                    <a:pt x="7162070" y="2449530"/>
-                  </a:lnTo>
-                  <a:lnTo>
-                    <a:pt x="7088310" y="2447334"/>
-                  </a:lnTo>
-                  <a:lnTo>
-                    <a:pt x="7014550" y="2444993"/>
-                  </a:lnTo>
-                  <a:lnTo>
-                    <a:pt x="6940789" y="2442497"/>
-                  </a:lnTo>
-                  <a:lnTo>
-                    <a:pt x="6867029" y="2439836"/>
-                  </a:lnTo>
-                  <a:lnTo>
-                    <a:pt x="6793269" y="2437000"/>
-                  </a:lnTo>
-                  <a:lnTo>
-                    <a:pt x="6719509" y="2433976"/>
-                  </a:lnTo>
-                  <a:lnTo>
-                    <a:pt x="6645749" y="2430753"/>
-                  </a:lnTo>
-                  <a:lnTo>
-                    <a:pt x="6571989" y="2427317"/>
-                  </a:lnTo>
-                  <a:lnTo>
-                    <a:pt x="6498229" y="2423654"/>
-                  </a:lnTo>
-                  <a:lnTo>
-                    <a:pt x="6424469" y="2419749"/>
-                  </a:lnTo>
-                  <a:lnTo>
-                    <a:pt x="6350709" y="2415587"/>
-                  </a:lnTo>
-                  <a:lnTo>
-                    <a:pt x="6276949" y="2411149"/>
-                  </a:lnTo>
-                  <a:lnTo>
-                    <a:pt x="6203189" y="2406419"/>
-                  </a:lnTo>
-                  <a:lnTo>
-                    <a:pt x="6129429" y="2401376"/>
-                  </a:lnTo>
-                  <a:lnTo>
-                    <a:pt x="6055669" y="2396001"/>
-                  </a:lnTo>
-                  <a:lnTo>
-                    <a:pt x="5981909" y="2390270"/>
-                  </a:lnTo>
-                  <a:lnTo>
-                    <a:pt x="5908149" y="2384161"/>
-                  </a:lnTo>
-                  <a:lnTo>
-                    <a:pt x="5834389" y="2377649"/>
-                  </a:lnTo>
-                  <a:lnTo>
-                    <a:pt x="5760629" y="2370706"/>
-                  </a:lnTo>
-                  <a:lnTo>
-                    <a:pt x="5686869" y="2363306"/>
-                  </a:lnTo>
-                  <a:lnTo>
-                    <a:pt x="5613109" y="2355417"/>
-                  </a:lnTo>
-                  <a:lnTo>
-                    <a:pt x="5539349" y="2347006"/>
-                  </a:lnTo>
-                  <a:lnTo>
-                    <a:pt x="5465589" y="2338041"/>
-                  </a:lnTo>
-                  <a:lnTo>
-                    <a:pt x="5391829" y="2328484"/>
-                  </a:lnTo>
-                  <a:lnTo>
-                    <a:pt x="5318069" y="2318295"/>
-                  </a:lnTo>
-                  <a:lnTo>
-                    <a:pt x="5244309" y="2307434"/>
-                  </a:lnTo>
-                  <a:lnTo>
-                    <a:pt x="5170549" y="2295856"/>
-                  </a:lnTo>
-                  <a:lnTo>
-                    <a:pt x="5096789" y="2283513"/>
-                  </a:lnTo>
-                  <a:lnTo>
-                    <a:pt x="5023029" y="2270355"/>
-                  </a:lnTo>
-                  <a:lnTo>
-                    <a:pt x="4949269" y="2256329"/>
-                  </a:lnTo>
-                  <a:lnTo>
-                    <a:pt x="4875509" y="2241377"/>
-                  </a:lnTo>
-                  <a:lnTo>
-                    <a:pt x="4801749" y="2225437"/>
-                  </a:lnTo>
-                  <a:lnTo>
-                    <a:pt x="4727989" y="2208445"/>
-                  </a:lnTo>
-                  <a:lnTo>
-                    <a:pt x="4654229" y="2190331"/>
-                  </a:lnTo>
-                  <a:lnTo>
-                    <a:pt x="4580469" y="2171020"/>
-                  </a:lnTo>
-                  <a:lnTo>
-                    <a:pt x="4506709" y="2150435"/>
-                  </a:lnTo>
-                  <a:lnTo>
-                    <a:pt x="4432949" y="2128491"/>
-                  </a:lnTo>
-                  <a:lnTo>
-                    <a:pt x="4359189" y="2105098"/>
-                  </a:lnTo>
-                  <a:lnTo>
-                    <a:pt x="4285429" y="2080161"/>
-                  </a:lnTo>
-                  <a:lnTo>
-                    <a:pt x="4211669" y="2053577"/>
-                  </a:lnTo>
-                  <a:lnTo>
-                    <a:pt x="4137909" y="2025237"/>
-                  </a:lnTo>
-                  <a:lnTo>
-                    <a:pt x="4064149" y="1995027"/>
-                  </a:lnTo>
-                  <a:lnTo>
-                    <a:pt x="3990388" y="1962822"/>
-                  </a:lnTo>
-                  <a:lnTo>
-                    <a:pt x="3916628" y="1928490"/>
-                  </a:lnTo>
-                  <a:lnTo>
-                    <a:pt x="3842868" y="1891892"/>
-                  </a:lnTo>
-                  <a:lnTo>
-                    <a:pt x="3769108" y="1852877"/>
-                  </a:lnTo>
-                  <a:lnTo>
-                    <a:pt x="3695348" y="1811286"/>
-                  </a:lnTo>
-                  <a:lnTo>
-                    <a:pt x="3621588" y="1766950"/>
-                  </a:lnTo>
-                  <a:lnTo>
-                    <a:pt x="3547828" y="1719686"/>
-                  </a:lnTo>
-                  <a:lnTo>
-                    <a:pt x="3474068" y="1669301"/>
-                  </a:lnTo>
-                  <a:lnTo>
-                    <a:pt x="3400308" y="1639696"/>
-                  </a:lnTo>
-                  <a:lnTo>
-                    <a:pt x="3326548" y="1619710"/>
-                  </a:lnTo>
-                  <a:lnTo>
-                    <a:pt x="3252788" y="1599251"/>
-                  </a:lnTo>
-                  <a:lnTo>
-                    <a:pt x="3179028" y="1578307"/>
-                  </a:lnTo>
-                  <a:lnTo>
-                    <a:pt x="3105268" y="1556866"/>
-                  </a:lnTo>
-                  <a:lnTo>
-                    <a:pt x="3031508" y="1534917"/>
-                  </a:lnTo>
-                  <a:lnTo>
-                    <a:pt x="2957748" y="1512448"/>
-                  </a:lnTo>
-                  <a:lnTo>
-                    <a:pt x="2883988" y="1489446"/>
-                  </a:lnTo>
-                  <a:lnTo>
-                    <a:pt x="2810228" y="1465899"/>
-                  </a:lnTo>
-                  <a:lnTo>
-                    <a:pt x="2736468" y="1441794"/>
-                  </a:lnTo>
-                  <a:lnTo>
-                    <a:pt x="2662708" y="1417117"/>
-                  </a:lnTo>
-                  <a:lnTo>
-                    <a:pt x="2588948" y="1391855"/>
-                  </a:lnTo>
-                  <a:lnTo>
-                    <a:pt x="2515188" y="1365995"/>
-                  </a:lnTo>
-                  <a:lnTo>
-                    <a:pt x="2441428" y="1339521"/>
-                  </a:lnTo>
-                  <a:lnTo>
-                    <a:pt x="2367668" y="1312420"/>
-                  </a:lnTo>
-                  <a:lnTo>
-                    <a:pt x="2293908" y="1284677"/>
-                  </a:lnTo>
-                  <a:lnTo>
-                    <a:pt x="2220148" y="1256275"/>
-                  </a:lnTo>
-                  <a:lnTo>
-                    <a:pt x="2146388" y="1227201"/>
-                  </a:lnTo>
-                  <a:lnTo>
-                    <a:pt x="2072628" y="1197437"/>
-                  </a:lnTo>
-                  <a:lnTo>
-                    <a:pt x="1998868" y="1166968"/>
-                  </a:lnTo>
-                  <a:lnTo>
-                    <a:pt x="1925108" y="1135777"/>
-                  </a:lnTo>
-                  <a:lnTo>
-                    <a:pt x="1851348" y="1103846"/>
-                  </a:lnTo>
-                  <a:lnTo>
-                    <a:pt x="1777588" y="1071158"/>
-                  </a:lnTo>
-                  <a:lnTo>
-                    <a:pt x="1703828" y="1037696"/>
-                  </a:lnTo>
-                  <a:lnTo>
-                    <a:pt x="1630068" y="1003440"/>
-                  </a:lnTo>
-                  <a:lnTo>
-                    <a:pt x="1556308" y="968372"/>
-                  </a:lnTo>
-                  <a:lnTo>
-                    <a:pt x="1482548" y="932473"/>
-                  </a:lnTo>
-                  <a:lnTo>
-                    <a:pt x="1408788" y="895723"/>
-                  </a:lnTo>
-                  <a:lnTo>
-                    <a:pt x="1335028" y="858102"/>
-                  </a:lnTo>
-                  <a:lnTo>
-                    <a:pt x="1261268" y="819589"/>
-                  </a:lnTo>
-                  <a:lnTo>
-                    <a:pt x="1187508" y="780163"/>
-                  </a:lnTo>
-                  <a:lnTo>
-                    <a:pt x="1113747" y="739802"/>
-                  </a:lnTo>
-                  <a:lnTo>
-                    <a:pt x="1039987" y="698485"/>
-                  </a:lnTo>
-                  <a:lnTo>
-                    <a:pt x="966227" y="656188"/>
-                  </a:lnTo>
-                  <a:lnTo>
-                    <a:pt x="892467" y="612889"/>
-                  </a:lnTo>
-                  <a:lnTo>
-                    <a:pt x="818707" y="568563"/>
-                  </a:lnTo>
-                  <a:lnTo>
-                    <a:pt x="744947" y="523187"/>
-                  </a:lnTo>
-                  <a:lnTo>
-                    <a:pt x="671187" y="476735"/>
-                  </a:lnTo>
-                  <a:lnTo>
-                    <a:pt x="597427" y="429182"/>
-                  </a:lnTo>
-                  <a:lnTo>
-                    <a:pt x="523667" y="380501"/>
-                  </a:lnTo>
-                  <a:lnTo>
-                    <a:pt x="449907" y="330667"/>
-                  </a:lnTo>
-                  <a:lnTo>
-                    <a:pt x="376147" y="279651"/>
-                  </a:lnTo>
-                  <a:lnTo>
-                    <a:pt x="302387" y="227426"/>
-                  </a:lnTo>
-                  <a:lnTo>
-                    <a:pt x="228627" y="173963"/>
-                  </a:lnTo>
-                  <a:lnTo>
-                    <a:pt x="154867" y="119232"/>
-                  </a:lnTo>
-                  <a:lnTo>
-                    <a:pt x="81107" y="63204"/>
-                  </a:lnTo>
-                  <a:lnTo>
-                    <a:pt x="7347" y="5848"/>
-                  </a:lnTo>
-                  <a:lnTo>
-                    <a:pt x="0" y="0"/>
-                  </a:lnTo>
-                </a:path>
-              </a:pathLst>
-            </a:custGeom>
-          </p:spPr>
-          <p:txBody>
-            <a:bodyPr/>
-            <a:lstStyle/>
-            <a:p/>
-          </p:txBody>
-        </p:sp>
-        <p:sp>
-          <p:nvSpPr>
-            <p:cNvPr id="24" name="pl24"/>
-            <p:cNvSpPr/>
-            <p:nvPr/>
-          </p:nvSpPr>
-          <p:spPr>
-            <a:xfrm>
-              <a:off x="1846175" y="2073503"/>
-              <a:ext cx="6207172" cy="3395541"/>
-            </a:xfrm>
-            <a:custGeom>
-              <a:avLst/>
-              <a:pathLst>
-                <a:path w="6207172" h="3395541">
+                <a:path w="6027293" h="3395541">
                   <a:moveTo>
                     <a:pt x="0" y="0"/>
                   </a:moveTo>
                   <a:lnTo>
-                    <a:pt x="11329" y="23730"/>
-                  </a:lnTo>
-                  <a:lnTo>
-                    <a:pt x="85089" y="171620"/>
-                  </a:lnTo>
-                  <a:lnTo>
-                    <a:pt x="158849" y="313188"/>
-                  </a:lnTo>
-                  <a:lnTo>
-                    <a:pt x="232610" y="448706"/>
-                  </a:lnTo>
-                  <a:lnTo>
-                    <a:pt x="306370" y="578431"/>
-                  </a:lnTo>
-                  <a:lnTo>
-                    <a:pt x="380130" y="702611"/>
-                  </a:lnTo>
-                  <a:lnTo>
-                    <a:pt x="453890" y="821484"/>
-                  </a:lnTo>
-                  <a:lnTo>
-                    <a:pt x="527650" y="935275"/>
-                  </a:lnTo>
-                  <a:lnTo>
-                    <a:pt x="601410" y="1044203"/>
-                  </a:lnTo>
-                  <a:lnTo>
-                    <a:pt x="675170" y="1148475"/>
-                  </a:lnTo>
-                  <a:lnTo>
-                    <a:pt x="748930" y="1248290"/>
-                  </a:lnTo>
-                  <a:lnTo>
-                    <a:pt x="822690" y="1343839"/>
-                  </a:lnTo>
-                  <a:lnTo>
-                    <a:pt x="896450" y="1435304"/>
-                  </a:lnTo>
-                  <a:lnTo>
-                    <a:pt x="970210" y="1522860"/>
-                  </a:lnTo>
-                  <a:lnTo>
-                    <a:pt x="1043970" y="1606673"/>
-                  </a:lnTo>
-                  <a:lnTo>
-                    <a:pt x="1117730" y="1686903"/>
-                  </a:lnTo>
-                  <a:lnTo>
-                    <a:pt x="1191490" y="1763705"/>
-                  </a:lnTo>
-                  <a:lnTo>
-                    <a:pt x="1265250" y="1837224"/>
-                  </a:lnTo>
-                  <a:lnTo>
-                    <a:pt x="1339010" y="1907600"/>
-                  </a:lnTo>
-                  <a:lnTo>
-                    <a:pt x="1412770" y="1974968"/>
-                  </a:lnTo>
-                  <a:lnTo>
-                    <a:pt x="1486530" y="2039457"/>
-                  </a:lnTo>
-                  <a:lnTo>
-                    <a:pt x="1560290" y="2101190"/>
-                  </a:lnTo>
-                  <a:lnTo>
-                    <a:pt x="1634050" y="2160284"/>
-                  </a:lnTo>
-                  <a:lnTo>
-                    <a:pt x="1707810" y="2216852"/>
-                  </a:lnTo>
-                  <a:lnTo>
-                    <a:pt x="1781570" y="2271002"/>
-                  </a:lnTo>
-                  <a:lnTo>
-                    <a:pt x="1855330" y="2322838"/>
-                  </a:lnTo>
-                  <a:lnTo>
-                    <a:pt x="1929090" y="2372458"/>
-                  </a:lnTo>
-                  <a:lnTo>
-                    <a:pt x="2002850" y="2419957"/>
-                  </a:lnTo>
-                  <a:lnTo>
-                    <a:pt x="2076610" y="2465426"/>
-                  </a:lnTo>
-                  <a:lnTo>
-                    <a:pt x="2150370" y="2508951"/>
-                  </a:lnTo>
-                  <a:lnTo>
-                    <a:pt x="2224130" y="2550616"/>
-                  </a:lnTo>
-                  <a:lnTo>
-                    <a:pt x="2297890" y="2590501"/>
-                  </a:lnTo>
-                  <a:lnTo>
-                    <a:pt x="2371650" y="2628680"/>
-                  </a:lnTo>
-                  <a:lnTo>
-                    <a:pt x="2445410" y="2665228"/>
-                  </a:lnTo>
-                  <a:lnTo>
-                    <a:pt x="2519170" y="2700213"/>
-                  </a:lnTo>
-                  <a:lnTo>
-                    <a:pt x="2592930" y="2733703"/>
-                  </a:lnTo>
-                  <a:lnTo>
-                    <a:pt x="2666690" y="2765762"/>
-                  </a:lnTo>
-                  <a:lnTo>
-                    <a:pt x="2740450" y="2796451"/>
-                  </a:lnTo>
-                  <a:lnTo>
-                    <a:pt x="2814210" y="2825827"/>
-                  </a:lnTo>
-                  <a:lnTo>
-                    <a:pt x="2887970" y="2853948"/>
-                  </a:lnTo>
-                  <a:lnTo>
-                    <a:pt x="2961730" y="2880867"/>
-                  </a:lnTo>
-                  <a:lnTo>
-                    <a:pt x="3035490" y="2906636"/>
-                  </a:lnTo>
-                  <a:lnTo>
-                    <a:pt x="3109250" y="2931303"/>
-                  </a:lnTo>
-                  <a:lnTo>
-                    <a:pt x="3183011" y="2954916"/>
-                  </a:lnTo>
-                  <a:lnTo>
-                    <a:pt x="3256771" y="2977519"/>
-                  </a:lnTo>
-                  <a:lnTo>
-                    <a:pt x="3330531" y="2999157"/>
-                  </a:lnTo>
-                  <a:lnTo>
-                    <a:pt x="3404291" y="3019869"/>
-                  </a:lnTo>
-                  <a:lnTo>
-                    <a:pt x="3478051" y="3039697"/>
-                  </a:lnTo>
-                  <a:lnTo>
-                    <a:pt x="3551811" y="3058676"/>
-                  </a:lnTo>
-                  <a:lnTo>
-                    <a:pt x="3625571" y="3076845"/>
-                  </a:lnTo>
-                  <a:lnTo>
-                    <a:pt x="3699331" y="3094237"/>
-                  </a:lnTo>
-                  <a:lnTo>
-                    <a:pt x="3773091" y="3110885"/>
-                  </a:lnTo>
-                  <a:lnTo>
-                    <a:pt x="3846851" y="3126822"/>
-                  </a:lnTo>
-                  <a:lnTo>
-                    <a:pt x="3920611" y="3142078"/>
-                  </a:lnTo>
-                  <a:lnTo>
-                    <a:pt x="3994371" y="3156682"/>
-                  </a:lnTo>
-                  <a:lnTo>
-                    <a:pt x="4068131" y="3170661"/>
-                  </a:lnTo>
-                  <a:lnTo>
-                    <a:pt x="4141891" y="3184043"/>
-                  </a:lnTo>
-                  <a:lnTo>
-                    <a:pt x="4215651" y="3196854"/>
-                  </a:lnTo>
-                  <a:lnTo>
-                    <a:pt x="4289411" y="3209116"/>
-                  </a:lnTo>
-                  <a:lnTo>
-                    <a:pt x="4363171" y="3220854"/>
-                  </a:lnTo>
-                  <a:lnTo>
-                    <a:pt x="4436931" y="3232091"/>
-                  </a:lnTo>
-                  <a:lnTo>
-                    <a:pt x="4510691" y="3242847"/>
-                  </a:lnTo>
-                  <a:lnTo>
-                    <a:pt x="4584451" y="3253144"/>
-                  </a:lnTo>
-                  <a:lnTo>
-                    <a:pt x="4658211" y="3263001"/>
-                  </a:lnTo>
-                  <a:lnTo>
-                    <a:pt x="4731971" y="3272436"/>
-                  </a:lnTo>
-                  <a:lnTo>
-                    <a:pt x="4805731" y="3281468"/>
-                  </a:lnTo>
-                  <a:lnTo>
-                    <a:pt x="4879491" y="3290114"/>
-                  </a:lnTo>
-                  <a:lnTo>
-                    <a:pt x="4953251" y="3298390"/>
-                  </a:lnTo>
-                  <a:lnTo>
-                    <a:pt x="5027011" y="3306313"/>
-                  </a:lnTo>
-                  <a:lnTo>
-                    <a:pt x="5100771" y="3313896"/>
-                  </a:lnTo>
-                  <a:lnTo>
-                    <a:pt x="5174531" y="3321156"/>
-                  </a:lnTo>
-                  <a:lnTo>
-                    <a:pt x="5248291" y="3328106"/>
-                  </a:lnTo>
-                  <a:lnTo>
-                    <a:pt x="5322051" y="3334758"/>
-                  </a:lnTo>
-                  <a:lnTo>
-                    <a:pt x="5395811" y="3341126"/>
-                  </a:lnTo>
-                  <a:lnTo>
-                    <a:pt x="5469571" y="3347222"/>
-                  </a:lnTo>
-                  <a:lnTo>
-                    <a:pt x="5543331" y="3353058"/>
-                  </a:lnTo>
-                  <a:lnTo>
-                    <a:pt x="5617091" y="3358644"/>
-                  </a:lnTo>
-                  <a:lnTo>
-                    <a:pt x="5690851" y="3363991"/>
-                  </a:lnTo>
-                  <a:lnTo>
-                    <a:pt x="5764611" y="3369109"/>
-                  </a:lnTo>
-                  <a:lnTo>
-                    <a:pt x="5838371" y="3374009"/>
-                  </a:lnTo>
-                  <a:lnTo>
-                    <a:pt x="5912131" y="3378700"/>
-                  </a:lnTo>
-                  <a:lnTo>
-                    <a:pt x="5985891" y="3383190"/>
-                  </a:lnTo>
-                  <a:lnTo>
-                    <a:pt x="6059652" y="3387488"/>
-                  </a:lnTo>
-                  <a:lnTo>
-                    <a:pt x="6133412" y="3391602"/>
-                  </a:lnTo>
-                  <a:lnTo>
-                    <a:pt x="6207172" y="3395541"/>
+                    <a:pt x="11001" y="23730"/>
+                  </a:lnTo>
+                  <a:lnTo>
+                    <a:pt x="82624" y="171620"/>
+                  </a:lnTo>
+                  <a:lnTo>
+                    <a:pt x="154246" y="313188"/>
+                  </a:lnTo>
+                  <a:lnTo>
+                    <a:pt x="225869" y="448706"/>
+                  </a:lnTo>
+                  <a:lnTo>
+                    <a:pt x="297491" y="578431"/>
+                  </a:lnTo>
+                  <a:lnTo>
+                    <a:pt x="369114" y="702611"/>
+                  </a:lnTo>
+                  <a:lnTo>
+                    <a:pt x="440736" y="821484"/>
+                  </a:lnTo>
+                  <a:lnTo>
+                    <a:pt x="512359" y="935275"/>
+                  </a:lnTo>
+                  <a:lnTo>
+                    <a:pt x="583981" y="1044203"/>
+                  </a:lnTo>
+                  <a:lnTo>
+                    <a:pt x="655604" y="1148475"/>
+                  </a:lnTo>
+                  <a:lnTo>
+                    <a:pt x="727226" y="1248290"/>
+                  </a:lnTo>
+                  <a:lnTo>
+                    <a:pt x="798849" y="1343839"/>
+                  </a:lnTo>
+                  <a:lnTo>
+                    <a:pt x="870471" y="1435304"/>
+                  </a:lnTo>
+                  <a:lnTo>
+                    <a:pt x="942094" y="1522860"/>
+                  </a:lnTo>
+                  <a:lnTo>
+                    <a:pt x="1013716" y="1606673"/>
+                  </a:lnTo>
+                  <a:lnTo>
+                    <a:pt x="1085339" y="1686903"/>
+                  </a:lnTo>
+                  <a:lnTo>
+                    <a:pt x="1156962" y="1763705"/>
+                  </a:lnTo>
+                  <a:lnTo>
+                    <a:pt x="1228584" y="1837224"/>
+                  </a:lnTo>
+                  <a:lnTo>
+                    <a:pt x="1300207" y="1907600"/>
+                  </a:lnTo>
+                  <a:lnTo>
+                    <a:pt x="1371829" y="1974968"/>
+                  </a:lnTo>
+                  <a:lnTo>
+                    <a:pt x="1443452" y="2039457"/>
+                  </a:lnTo>
+                  <a:lnTo>
+                    <a:pt x="1515074" y="2101190"/>
+                  </a:lnTo>
+                  <a:lnTo>
+                    <a:pt x="1586697" y="2160284"/>
+                  </a:lnTo>
+                  <a:lnTo>
+                    <a:pt x="1658319" y="2216852"/>
+                  </a:lnTo>
+                  <a:lnTo>
+                    <a:pt x="1729942" y="2271002"/>
+                  </a:lnTo>
+                  <a:lnTo>
+                    <a:pt x="1801564" y="2322838"/>
+                  </a:lnTo>
+                  <a:lnTo>
+                    <a:pt x="1873187" y="2372458"/>
+                  </a:lnTo>
+                  <a:lnTo>
+                    <a:pt x="1944809" y="2419957"/>
+                  </a:lnTo>
+                  <a:lnTo>
+                    <a:pt x="2016432" y="2465426"/>
+                  </a:lnTo>
+                  <a:lnTo>
+                    <a:pt x="2088054" y="2508951"/>
+                  </a:lnTo>
+                  <a:lnTo>
+                    <a:pt x="2159677" y="2550616"/>
+                  </a:lnTo>
+                  <a:lnTo>
+                    <a:pt x="2231299" y="2590501"/>
+                  </a:lnTo>
+                  <a:lnTo>
+                    <a:pt x="2302922" y="2628680"/>
+                  </a:lnTo>
+                  <a:lnTo>
+                    <a:pt x="2374544" y="2665228"/>
+                  </a:lnTo>
+                  <a:lnTo>
+                    <a:pt x="2446167" y="2700213"/>
+                  </a:lnTo>
+                  <a:lnTo>
+                    <a:pt x="2517790" y="2733703"/>
+                  </a:lnTo>
+                  <a:lnTo>
+                    <a:pt x="2589412" y="2765762"/>
+                  </a:lnTo>
+                  <a:lnTo>
+                    <a:pt x="2661035" y="2796451"/>
+                  </a:lnTo>
+                  <a:lnTo>
+                    <a:pt x="2732657" y="2825827"/>
+                  </a:lnTo>
+                  <a:lnTo>
+                    <a:pt x="2804280" y="2853948"/>
+                  </a:lnTo>
+                  <a:lnTo>
+                    <a:pt x="2875902" y="2880867"/>
+                  </a:lnTo>
+                  <a:lnTo>
+                    <a:pt x="2947525" y="2906636"/>
+                  </a:lnTo>
+                  <a:lnTo>
+                    <a:pt x="3019147" y="2931303"/>
+                  </a:lnTo>
+                  <a:lnTo>
+                    <a:pt x="3090770" y="2954916"/>
+                  </a:lnTo>
+                  <a:lnTo>
+                    <a:pt x="3162392" y="2977519"/>
+                  </a:lnTo>
+                  <a:lnTo>
+                    <a:pt x="3234015" y="2999157"/>
+                  </a:lnTo>
+                  <a:lnTo>
+                    <a:pt x="3305637" y="3019869"/>
+                  </a:lnTo>
+                  <a:lnTo>
+                    <a:pt x="3377260" y="3039697"/>
+                  </a:lnTo>
+                  <a:lnTo>
+                    <a:pt x="3448882" y="3058676"/>
+                  </a:lnTo>
+                  <a:lnTo>
+                    <a:pt x="3520505" y="3076845"/>
+                  </a:lnTo>
+                  <a:lnTo>
+                    <a:pt x="3592127" y="3094237"/>
+                  </a:lnTo>
+                  <a:lnTo>
+                    <a:pt x="3663750" y="3110885"/>
+                  </a:lnTo>
+                  <a:lnTo>
+                    <a:pt x="3735372" y="3126822"/>
+                  </a:lnTo>
+                  <a:lnTo>
+                    <a:pt x="3806995" y="3142078"/>
+                  </a:lnTo>
+                  <a:lnTo>
+                    <a:pt x="3878618" y="3156682"/>
+                  </a:lnTo>
+                  <a:lnTo>
+                    <a:pt x="3950240" y="3170661"/>
+                  </a:lnTo>
+                  <a:lnTo>
+                    <a:pt x="4021863" y="3184043"/>
+                  </a:lnTo>
+                  <a:lnTo>
+                    <a:pt x="4093485" y="3196854"/>
+                  </a:lnTo>
+                  <a:lnTo>
+                    <a:pt x="4165108" y="3209116"/>
+                  </a:lnTo>
+                  <a:lnTo>
+                    <a:pt x="4236730" y="3220854"/>
+                  </a:lnTo>
+                  <a:lnTo>
+                    <a:pt x="4308353" y="3232091"/>
+                  </a:lnTo>
+                  <a:lnTo>
+                    <a:pt x="4379975" y="3242847"/>
+                  </a:lnTo>
+                  <a:lnTo>
+                    <a:pt x="4451598" y="3253144"/>
+                  </a:lnTo>
+                  <a:lnTo>
+                    <a:pt x="4523220" y="3263001"/>
+                  </a:lnTo>
+                  <a:lnTo>
+                    <a:pt x="4594843" y="3272436"/>
+                  </a:lnTo>
+                  <a:lnTo>
+                    <a:pt x="4666465" y="3281468"/>
+                  </a:lnTo>
+                  <a:lnTo>
+                    <a:pt x="4738088" y="3290114"/>
+                  </a:lnTo>
+                  <a:lnTo>
+                    <a:pt x="4809710" y="3298390"/>
+                  </a:lnTo>
+                  <a:lnTo>
+                    <a:pt x="4881333" y="3306313"/>
+                  </a:lnTo>
+                  <a:lnTo>
+                    <a:pt x="4952955" y="3313896"/>
+                  </a:lnTo>
+                  <a:lnTo>
+                    <a:pt x="5024578" y="3321156"/>
+                  </a:lnTo>
+                  <a:lnTo>
+                    <a:pt x="5096200" y="3328106"/>
+                  </a:lnTo>
+                  <a:lnTo>
+                    <a:pt x="5167823" y="3334758"/>
+                  </a:lnTo>
+                  <a:lnTo>
+                    <a:pt x="5239446" y="3341126"/>
+                  </a:lnTo>
+                  <a:lnTo>
+                    <a:pt x="5311068" y="3347222"/>
+                  </a:lnTo>
+                  <a:lnTo>
+                    <a:pt x="5382691" y="3353058"/>
+                  </a:lnTo>
+                  <a:lnTo>
+                    <a:pt x="5454313" y="3358644"/>
+                  </a:lnTo>
+                  <a:lnTo>
+                    <a:pt x="5525936" y="3363991"/>
+                  </a:lnTo>
+                  <a:lnTo>
+                    <a:pt x="5597558" y="3369109"/>
+                  </a:lnTo>
+                  <a:lnTo>
+                    <a:pt x="5669181" y="3374009"/>
+                  </a:lnTo>
+                  <a:lnTo>
+                    <a:pt x="5740803" y="3378700"/>
+                  </a:lnTo>
+                  <a:lnTo>
+                    <a:pt x="5812426" y="3383190"/>
+                  </a:lnTo>
+                  <a:lnTo>
+                    <a:pt x="5884048" y="3387488"/>
+                  </a:lnTo>
+                  <a:lnTo>
+                    <a:pt x="5955671" y="3391602"/>
+                  </a:lnTo>
+                  <a:lnTo>
+                    <a:pt x="6027293" y="3395541"/>
                   </a:lnTo>
                 </a:path>
               </a:pathLst>
@@ -4419,7 +4376,7 @@
         </p:sp>
         <p:sp>
           <p:nvSpPr>
-            <p:cNvPr id="25" name="pl25"/>
+            <p:cNvPr id="24" name="pl24"/>
             <p:cNvSpPr/>
             <p:nvPr/>
           </p:nvSpPr>
@@ -4462,13 +4419,13 @@
         </p:sp>
         <p:sp>
           <p:nvSpPr>
-            <p:cNvPr id="26" name="pl26"/>
+            <p:cNvPr id="25" name="pl25"/>
             <p:cNvSpPr/>
             <p:nvPr/>
           </p:nvSpPr>
           <p:spPr>
             <a:xfrm>
-              <a:off x="4269157" y="2073503"/>
+              <a:off x="4588151" y="2073503"/>
               <a:ext cx="0" cy="3649639"/>
             </a:xfrm>
             <a:custGeom>
@@ -4505,7 +4462,7 @@
         </p:sp>
         <p:sp>
           <p:nvSpPr>
-            <p:cNvPr id="27" name="tx27"/>
+            <p:cNvPr id="26" name="tx26"/>
             <p:cNvSpPr/>
             <p:nvPr/>
           </p:nvSpPr>
@@ -4551,7 +4508,7 @@
         </p:sp>
         <p:sp>
           <p:nvSpPr>
-            <p:cNvPr id="28" name="tx28"/>
+            <p:cNvPr id="27" name="tx27"/>
             <p:cNvSpPr/>
             <p:nvPr/>
           </p:nvSpPr>
@@ -4597,7 +4554,7 @@
         </p:sp>
         <p:sp>
           <p:nvSpPr>
-            <p:cNvPr id="29" name="tx29"/>
+            <p:cNvPr id="28" name="tx28"/>
             <p:cNvSpPr/>
             <p:nvPr/>
           </p:nvSpPr>
@@ -4643,7 +4600,7 @@
         </p:sp>
         <p:sp>
           <p:nvSpPr>
-            <p:cNvPr id="30" name="tx30"/>
+            <p:cNvPr id="29" name="tx29"/>
             <p:cNvSpPr/>
             <p:nvPr/>
           </p:nvSpPr>
@@ -4689,7 +4646,7 @@
         </p:sp>
         <p:sp>
           <p:nvSpPr>
-            <p:cNvPr id="31" name="tx31"/>
+            <p:cNvPr id="30" name="tx30"/>
             <p:cNvSpPr/>
             <p:nvPr/>
           </p:nvSpPr>
@@ -4735,14 +4692,14 @@
         </p:sp>
         <p:sp>
           <p:nvSpPr>
-            <p:cNvPr id="32" name="tx32"/>
+            <p:cNvPr id="31" name="tx31"/>
             <p:cNvSpPr/>
             <p:nvPr/>
           </p:nvSpPr>
           <p:spPr>
             <a:xfrm>
-              <a:off x="2423864" y="5785772"/>
-              <a:ext cx="155356" cy="80101"/>
+              <a:off x="2360651" y="5785772"/>
+              <a:ext cx="161574" cy="80101"/>
             </a:xfrm>
             <a:prstGeom prst="rect">
               <a:avLst/>
@@ -4774,21 +4731,21 @@
                   <a:latin typeface="Helvetica"/>
                   <a:cs typeface="Helvetica"/>
                 </a:rPr>
-                <a:t>0.8</a:t>
+                <a:t>-25</a:t>
               </a:r>
             </a:p>
           </p:txBody>
         </p:sp>
         <p:sp>
           <p:nvSpPr>
-            <p:cNvPr id="33" name="tx33"/>
+            <p:cNvPr id="32" name="tx32"/>
             <p:cNvSpPr/>
             <p:nvPr/>
           </p:nvSpPr>
           <p:spPr>
             <a:xfrm>
-              <a:off x="4196521" y="5785772"/>
-              <a:ext cx="155356" cy="80101"/>
+              <a:off x="4561958" y="5785772"/>
+              <a:ext cx="62179" cy="80101"/>
             </a:xfrm>
             <a:prstGeom prst="rect">
               <a:avLst/>
@@ -4820,21 +4777,21 @@
                   <a:latin typeface="Helvetica"/>
                   <a:cs typeface="Helvetica"/>
                 </a:rPr>
-                <a:t>1.0</a:t>
+                <a:t>0</a:t>
               </a:r>
             </a:p>
           </p:txBody>
         </p:sp>
         <p:sp>
           <p:nvSpPr>
-            <p:cNvPr id="34" name="tx34"/>
+            <p:cNvPr id="33" name="tx33"/>
             <p:cNvSpPr/>
             <p:nvPr/>
           </p:nvSpPr>
           <p:spPr>
             <a:xfrm>
-              <a:off x="5969179" y="5785772"/>
-              <a:ext cx="155356" cy="80101"/>
+              <a:off x="6682478" y="5785772"/>
+              <a:ext cx="124358" cy="80101"/>
             </a:xfrm>
             <a:prstGeom prst="rect">
               <a:avLst/>
@@ -4866,67 +4823,21 @@
                   <a:latin typeface="Helvetica"/>
                   <a:cs typeface="Helvetica"/>
                 </a:rPr>
-                <a:t>1.2</a:t>
+                <a:t>25</a:t>
               </a:r>
             </a:p>
           </p:txBody>
         </p:sp>
         <p:sp>
           <p:nvSpPr>
-            <p:cNvPr id="35" name="tx35"/>
+            <p:cNvPr id="34" name="tx34"/>
             <p:cNvSpPr/>
             <p:nvPr/>
           </p:nvSpPr>
           <p:spPr>
             <a:xfrm>
-              <a:off x="7741836" y="5785772"/>
-              <a:ext cx="155356" cy="80101"/>
-            </a:xfrm>
-            <a:prstGeom prst="rect">
-              <a:avLst/>
-            </a:prstGeom>
-            <a:noFill/>
-          </p:spPr>
-          <p:txBody>
-            <a:bodyPr lIns="0" rIns="0" tIns="0" bIns="0" anchorCtr="1" anchor="ctr" wrap="none"/>
-            <a:lstStyle/>
-            <a:p>
-              <a:pPr algn="l" marL="0" marR="0" indent="0">
-                <a:lnSpc>
-                  <a:spcPts val="880"/>
-                </a:lnSpc>
-                <a:spcBef>
-                  <a:spcPts val="0"/>
-                </a:spcBef>
-                <a:spcAft>
-                  <a:spcPts val="0"/>
-                </a:spcAft>
-              </a:pPr>
-              <a:r>
-                <a:rPr sz="880">
-                  <a:solidFill>
-                    <a:srgbClr val="4D4D4D">
-                      <a:alpha val="100000"/>
-                    </a:srgbClr>
-                  </a:solidFill>
-                  <a:latin typeface="Helvetica"/>
-                  <a:cs typeface="Helvetica"/>
-                </a:rPr>
-                <a:t>1.4</a:t>
-              </a:r>
-            </a:p>
-          </p:txBody>
-        </p:sp>
-        <p:sp>
-          <p:nvSpPr>
-            <p:cNvPr id="36" name="tx36"/>
-            <p:cNvSpPr/>
-            <p:nvPr/>
-          </p:nvSpPr>
-          <p:spPr>
-            <a:xfrm>
-              <a:off x="3879271" y="5925448"/>
-              <a:ext cx="1676186" cy="100218"/>
+              <a:off x="2928340" y="5925448"/>
+              <a:ext cx="3578047" cy="100218"/>
             </a:xfrm>
             <a:prstGeom prst="rect">
               <a:avLst/>
@@ -4958,14 +4869,14 @@
                   <a:latin typeface="Helvetica"/>
                   <a:cs typeface="Helvetica"/>
                 </a:rPr>
-                <a:t>CKD-EPI Cr-Cys / CG ratio</a:t>
+                <a:t>eGFR difference (%): 100 × (CKD-EPI Cr-Cys − CG) / CG</a:t>
               </a:r>
             </a:p>
           </p:txBody>
         </p:sp>
         <p:sp>
           <p:nvSpPr>
-            <p:cNvPr id="37" name="tx37"/>
+            <p:cNvPr id="35" name="tx35"/>
             <p:cNvSpPr/>
             <p:nvPr/>
           </p:nvSpPr>
@@ -5011,14 +4922,14 @@
         </p:sp>
         <p:sp>
           <p:nvSpPr>
-            <p:cNvPr id="38" name="tx38"/>
+            <p:cNvPr id="36" name="tx36"/>
             <p:cNvSpPr/>
             <p:nvPr/>
           </p:nvSpPr>
           <p:spPr>
             <a:xfrm>
               <a:off x="817517" y="1896563"/>
-              <a:ext cx="6236116" cy="82021"/>
+              <a:ext cx="6388364" cy="82021"/>
             </a:xfrm>
             <a:prstGeom prst="rect">
               <a:avLst/>
@@ -5050,14 +4961,14 @@
                   <a:latin typeface="Helvetica"/>
                   <a:cs typeface="Helvetica"/>
                 </a:rPr>
-                <a:t>subHR per 0.1 ratio decline: 1.69 (1.33-2.16), p = &lt;0.001  |  per IQR decline (Δ = 0.29): 4.65 (2.28-9.48)  |  IQR: [0.85, 1.15]</a:t>
+                <a:t>subHR per 10 % decline: 1.69 (1.33-2.16), p = &lt;0.001  |  per IQR decline (Δ = 29.3 %): 4.65 (2.28-9.48)  |  IQR: [-14.6, 14.7] %</a:t>
               </a:r>
             </a:p>
           </p:txBody>
         </p:sp>
         <p:sp>
           <p:nvSpPr>
-            <p:cNvPr id="39" name="tx39"/>
+            <p:cNvPr id="37" name="tx37"/>
             <p:cNvSpPr/>
             <p:nvPr/>
           </p:nvSpPr>

--- a/docs/pptx/whole/jx-linsubhr-ratio-hosp5.pptx
+++ b/docs/pptx/whole/jx-linsubhr-ratio-hosp5.pptx
@@ -2265,34 +2265,26 @@
         </p:sp>
         <p:sp>
           <p:nvSpPr>
-            <p:cNvPr id="4" name="pl4"/>
+            <p:cNvPr id="4" name="rc4"/>
             <p:cNvSpPr/>
             <p:nvPr/>
           </p:nvSpPr>
           <p:spPr>
             <a:xfrm>
-              <a:off x="817517" y="5142518"/>
-              <a:ext cx="7799693" cy="0"/>
+              <a:off x="457200" y="1600200"/>
+              <a:ext cx="8229600" cy="4525962"/>
             </a:xfrm>
-            <a:custGeom>
+            <a:prstGeom prst="rect">
               <a:avLst/>
-              <a:pathLst>
-                <a:path w="7799693" h="0">
-                  <a:moveTo>
-                    <a:pt x="0" y="0"/>
-                  </a:moveTo>
-                  <a:lnTo>
-                    <a:pt x="7799693" y="0"/>
-                  </a:lnTo>
-                  <a:lnTo>
-                    <a:pt x="7799693" y="0"/>
-                  </a:lnTo>
-                </a:path>
-              </a:pathLst>
-            </a:custGeom>
-            <a:ln w="6775" cap="flat">
+            </a:prstGeom>
+            <a:solidFill>
+              <a:srgbClr val="FFFFFF">
+                <a:alpha val="100000"/>
+              </a:srgbClr>
+            </a:solidFill>
+            <a:ln w="13550" cap="rnd">
               <a:solidFill>
-                <a:srgbClr val="EBEBEB">
+                <a:srgbClr val="FFFFFF">
                   <a:alpha val="100000"/>
                 </a:srgbClr>
               </a:solidFill>
@@ -2314,21 +2306,21 @@
           </p:nvSpPr>
           <p:spPr>
             <a:xfrm>
-              <a:off x="817517" y="4313054"/>
-              <a:ext cx="7799693" cy="0"/>
+              <a:off x="887106" y="3250627"/>
+              <a:ext cx="7660515" cy="0"/>
             </a:xfrm>
             <a:custGeom>
               <a:avLst/>
               <a:pathLst>
-                <a:path w="7799693" h="0">
+                <a:path w="7660515" h="0">
                   <a:moveTo>
                     <a:pt x="0" y="0"/>
                   </a:moveTo>
                   <a:lnTo>
-                    <a:pt x="7799693" y="0"/>
-                  </a:lnTo>
-                  <a:lnTo>
-                    <a:pt x="7799693" y="0"/>
+                    <a:pt x="7660515" y="0"/>
+                  </a:lnTo>
+                  <a:lnTo>
+                    <a:pt x="7660515" y="0"/>
                   </a:lnTo>
                 </a:path>
               </a:pathLst>
@@ -2357,21 +2349,21 @@
           </p:nvSpPr>
           <p:spPr>
             <a:xfrm>
-              <a:off x="817517" y="3483591"/>
-              <a:ext cx="7799693" cy="0"/>
+              <a:off x="887106" y="2951293"/>
+              <a:ext cx="7660515" cy="0"/>
             </a:xfrm>
             <a:custGeom>
               <a:avLst/>
               <a:pathLst>
-                <a:path w="7799693" h="0">
+                <a:path w="7660515" h="0">
                   <a:moveTo>
                     <a:pt x="0" y="0"/>
                   </a:moveTo>
                   <a:lnTo>
-                    <a:pt x="7799693" y="0"/>
-                  </a:lnTo>
-                  <a:lnTo>
-                    <a:pt x="7799693" y="0"/>
+                    <a:pt x="7660515" y="0"/>
+                  </a:lnTo>
+                  <a:lnTo>
+                    <a:pt x="7660515" y="0"/>
                   </a:lnTo>
                 </a:path>
               </a:pathLst>
@@ -2400,21 +2392,21 @@
           </p:nvSpPr>
           <p:spPr>
             <a:xfrm>
-              <a:off x="817517" y="2654127"/>
-              <a:ext cx="7799693" cy="0"/>
+              <a:off x="887106" y="2651959"/>
+              <a:ext cx="7660515" cy="0"/>
             </a:xfrm>
             <a:custGeom>
               <a:avLst/>
               <a:pathLst>
-                <a:path w="7799693" h="0">
+                <a:path w="7660515" h="0">
                   <a:moveTo>
                     <a:pt x="0" y="0"/>
                   </a:moveTo>
                   <a:lnTo>
-                    <a:pt x="7799693" y="0"/>
-                  </a:lnTo>
-                  <a:lnTo>
-                    <a:pt x="7799693" y="0"/>
+                    <a:pt x="7660515" y="0"/>
+                  </a:lnTo>
+                  <a:lnTo>
+                    <a:pt x="7660515" y="0"/>
                   </a:lnTo>
                 </a:path>
               </a:pathLst>
@@ -2443,21 +2435,21 @@
           </p:nvSpPr>
           <p:spPr>
             <a:xfrm>
-              <a:off x="1365633" y="2073503"/>
-              <a:ext cx="0" cy="3649639"/>
+              <a:off x="887106" y="2352625"/>
+              <a:ext cx="7660515" cy="0"/>
             </a:xfrm>
             <a:custGeom>
               <a:avLst/>
               <a:pathLst>
-                <a:path w="0" h="3649639">
+                <a:path w="7660515" h="0">
                   <a:moveTo>
-                    <a:pt x="0" y="3649639"/>
+                    <a:pt x="0" y="0"/>
                   </a:moveTo>
                   <a:lnTo>
-                    <a:pt x="0" y="0"/>
-                  </a:lnTo>
-                  <a:lnTo>
-                    <a:pt x="0" y="0"/>
+                    <a:pt x="7660515" y="0"/>
+                  </a:lnTo>
+                  <a:lnTo>
+                    <a:pt x="7660515" y="0"/>
                   </a:lnTo>
                 </a:path>
               </a:pathLst>
@@ -2486,15 +2478,15 @@
           </p:nvSpPr>
           <p:spPr>
             <a:xfrm>
-              <a:off x="3517243" y="2073503"/>
-              <a:ext cx="0" cy="3649639"/>
+              <a:off x="1425442" y="2143092"/>
+              <a:ext cx="0" cy="1317069"/>
             </a:xfrm>
             <a:custGeom>
               <a:avLst/>
               <a:pathLst>
-                <a:path w="0" h="3649639">
+                <a:path w="0" h="1317069">
                   <a:moveTo>
-                    <a:pt x="0" y="3649639"/>
+                    <a:pt x="0" y="1317069"/>
                   </a:moveTo>
                   <a:lnTo>
                     <a:pt x="0" y="0"/>
@@ -2529,15 +2521,15 @@
           </p:nvSpPr>
           <p:spPr>
             <a:xfrm>
-              <a:off x="5668852" y="2073503"/>
-              <a:ext cx="0" cy="3649639"/>
+              <a:off x="3538658" y="2143092"/>
+              <a:ext cx="0" cy="1317069"/>
             </a:xfrm>
             <a:custGeom>
               <a:avLst/>
               <a:pathLst>
-                <a:path w="0" h="3649639">
+                <a:path w="0" h="1317069">
                   <a:moveTo>
-                    <a:pt x="0" y="3649639"/>
+                    <a:pt x="0" y="1317069"/>
                   </a:moveTo>
                   <a:lnTo>
                     <a:pt x="0" y="0"/>
@@ -2572,15 +2564,15 @@
           </p:nvSpPr>
           <p:spPr>
             <a:xfrm>
-              <a:off x="7820461" y="2073503"/>
-              <a:ext cx="0" cy="3649639"/>
+              <a:off x="5651874" y="2143092"/>
+              <a:ext cx="0" cy="1317069"/>
             </a:xfrm>
             <a:custGeom>
               <a:avLst/>
               <a:pathLst>
-                <a:path w="0" h="3649639">
+                <a:path w="0" h="1317069">
                   <a:moveTo>
-                    <a:pt x="0" y="3649639"/>
+                    <a:pt x="0" y="1317069"/>
                   </a:moveTo>
                   <a:lnTo>
                     <a:pt x="0" y="0"/>
@@ -2615,26 +2607,26 @@
           </p:nvSpPr>
           <p:spPr>
             <a:xfrm>
-              <a:off x="817517" y="5557249"/>
-              <a:ext cx="7799693" cy="0"/>
+              <a:off x="7765090" y="2143092"/>
+              <a:ext cx="0" cy="1317069"/>
             </a:xfrm>
             <a:custGeom>
               <a:avLst/>
               <a:pathLst>
-                <a:path w="7799693" h="0">
+                <a:path w="0" h="1317069">
                   <a:moveTo>
+                    <a:pt x="0" y="1317069"/>
+                  </a:moveTo>
+                  <a:lnTo>
                     <a:pt x="0" y="0"/>
-                  </a:moveTo>
-                  <a:lnTo>
-                    <a:pt x="7799693" y="0"/>
-                  </a:lnTo>
-                  <a:lnTo>
-                    <a:pt x="7799693" y="0"/>
+                  </a:lnTo>
+                  <a:lnTo>
+                    <a:pt x="0" y="0"/>
                   </a:lnTo>
                 </a:path>
               </a:pathLst>
             </a:custGeom>
-            <a:ln w="13550" cap="flat">
+            <a:ln w="6775" cap="flat">
               <a:solidFill>
                 <a:srgbClr val="EBEBEB">
                   <a:alpha val="100000"/>
@@ -2658,21 +2650,21 @@
           </p:nvSpPr>
           <p:spPr>
             <a:xfrm>
-              <a:off x="817517" y="4727786"/>
-              <a:ext cx="7799693" cy="0"/>
+              <a:off x="887106" y="3400294"/>
+              <a:ext cx="7660515" cy="0"/>
             </a:xfrm>
             <a:custGeom>
               <a:avLst/>
               <a:pathLst>
-                <a:path w="7799693" h="0">
+                <a:path w="7660515" h="0">
                   <a:moveTo>
                     <a:pt x="0" y="0"/>
                   </a:moveTo>
                   <a:lnTo>
-                    <a:pt x="7799693" y="0"/>
-                  </a:lnTo>
-                  <a:lnTo>
-                    <a:pt x="7799693" y="0"/>
+                    <a:pt x="7660515" y="0"/>
+                  </a:lnTo>
+                  <a:lnTo>
+                    <a:pt x="7660515" y="0"/>
                   </a:lnTo>
                 </a:path>
               </a:pathLst>
@@ -2701,21 +2693,21 @@
           </p:nvSpPr>
           <p:spPr>
             <a:xfrm>
-              <a:off x="817517" y="3898322"/>
-              <a:ext cx="7799693" cy="0"/>
+              <a:off x="887106" y="3100960"/>
+              <a:ext cx="7660515" cy="0"/>
             </a:xfrm>
             <a:custGeom>
               <a:avLst/>
               <a:pathLst>
-                <a:path w="7799693" h="0">
+                <a:path w="7660515" h="0">
                   <a:moveTo>
                     <a:pt x="0" y="0"/>
                   </a:moveTo>
                   <a:lnTo>
-                    <a:pt x="7799693" y="0"/>
-                  </a:lnTo>
-                  <a:lnTo>
-                    <a:pt x="7799693" y="0"/>
+                    <a:pt x="7660515" y="0"/>
+                  </a:lnTo>
+                  <a:lnTo>
+                    <a:pt x="7660515" y="0"/>
                   </a:lnTo>
                 </a:path>
               </a:pathLst>
@@ -2744,21 +2736,21 @@
           </p:nvSpPr>
           <p:spPr>
             <a:xfrm>
-              <a:off x="817517" y="3068859"/>
-              <a:ext cx="7799693" cy="0"/>
+              <a:off x="887106" y="2801626"/>
+              <a:ext cx="7660515" cy="0"/>
             </a:xfrm>
             <a:custGeom>
               <a:avLst/>
               <a:pathLst>
-                <a:path w="7799693" h="0">
+                <a:path w="7660515" h="0">
                   <a:moveTo>
                     <a:pt x="0" y="0"/>
                   </a:moveTo>
                   <a:lnTo>
-                    <a:pt x="7799693" y="0"/>
-                  </a:lnTo>
-                  <a:lnTo>
-                    <a:pt x="7799693" y="0"/>
+                    <a:pt x="7660515" y="0"/>
+                  </a:lnTo>
+                  <a:lnTo>
+                    <a:pt x="7660515" y="0"/>
                   </a:lnTo>
                 </a:path>
               </a:pathLst>
@@ -2787,21 +2779,21 @@
           </p:nvSpPr>
           <p:spPr>
             <a:xfrm>
-              <a:off x="817517" y="2239395"/>
-              <a:ext cx="7799693" cy="0"/>
+              <a:off x="887106" y="2502292"/>
+              <a:ext cx="7660515" cy="0"/>
             </a:xfrm>
             <a:custGeom>
               <a:avLst/>
               <a:pathLst>
-                <a:path w="7799693" h="0">
+                <a:path w="7660515" h="0">
                   <a:moveTo>
                     <a:pt x="0" y="0"/>
                   </a:moveTo>
                   <a:lnTo>
-                    <a:pt x="7799693" y="0"/>
-                  </a:lnTo>
-                  <a:lnTo>
-                    <a:pt x="7799693" y="0"/>
+                    <a:pt x="7660515" y="0"/>
+                  </a:lnTo>
+                  <a:lnTo>
+                    <a:pt x="7660515" y="0"/>
                   </a:lnTo>
                 </a:path>
               </a:pathLst>
@@ -2830,21 +2822,21 @@
           </p:nvSpPr>
           <p:spPr>
             <a:xfrm>
-              <a:off x="2441438" y="2073503"/>
-              <a:ext cx="0" cy="3649639"/>
+              <a:off x="887106" y="2202958"/>
+              <a:ext cx="7660515" cy="0"/>
             </a:xfrm>
             <a:custGeom>
               <a:avLst/>
               <a:pathLst>
-                <a:path w="0" h="3649639">
+                <a:path w="7660515" h="0">
                   <a:moveTo>
-                    <a:pt x="0" y="3649639"/>
+                    <a:pt x="0" y="0"/>
                   </a:moveTo>
                   <a:lnTo>
-                    <a:pt x="0" y="0"/>
-                  </a:lnTo>
-                  <a:lnTo>
-                    <a:pt x="0" y="0"/>
+                    <a:pt x="7660515" y="0"/>
+                  </a:lnTo>
+                  <a:lnTo>
+                    <a:pt x="7660515" y="0"/>
                   </a:lnTo>
                 </a:path>
               </a:pathLst>
@@ -2873,15 +2865,15 @@
           </p:nvSpPr>
           <p:spPr>
             <a:xfrm>
-              <a:off x="4593047" y="2073503"/>
-              <a:ext cx="0" cy="3649639"/>
+              <a:off x="2482050" y="2143092"/>
+              <a:ext cx="0" cy="1317069"/>
             </a:xfrm>
             <a:custGeom>
               <a:avLst/>
               <a:pathLst>
-                <a:path w="0" h="3649639">
+                <a:path w="0" h="1317069">
                   <a:moveTo>
-                    <a:pt x="0" y="3649639"/>
+                    <a:pt x="0" y="1317069"/>
                   </a:moveTo>
                   <a:lnTo>
                     <a:pt x="0" y="0"/>
@@ -2916,15 +2908,15 @@
           </p:nvSpPr>
           <p:spPr>
             <a:xfrm>
-              <a:off x="6744657" y="2073503"/>
-              <a:ext cx="0" cy="3649639"/>
+              <a:off x="4595266" y="2143092"/>
+              <a:ext cx="0" cy="1317069"/>
             </a:xfrm>
             <a:custGeom>
               <a:avLst/>
               <a:pathLst>
-                <a:path w="0" h="3649639">
+                <a:path w="0" h="1317069">
                   <a:moveTo>
-                    <a:pt x="0" y="3649639"/>
+                    <a:pt x="0" y="1317069"/>
                   </a:moveTo>
                   <a:lnTo>
                     <a:pt x="0" y="0"/>
@@ -2953,543 +2945,586 @@
         </p:sp>
         <p:sp>
           <p:nvSpPr>
-            <p:cNvPr id="20" name="pg20"/>
+            <p:cNvPr id="20" name="pl20"/>
             <p:cNvSpPr/>
             <p:nvPr/>
           </p:nvSpPr>
           <p:spPr>
             <a:xfrm>
-              <a:off x="1172049" y="2073503"/>
-              <a:ext cx="7090630" cy="3452543"/>
+              <a:off x="6708482" y="2143092"/>
+              <a:ext cx="0" cy="1317069"/>
             </a:xfrm>
             <a:custGeom>
               <a:avLst/>
               <a:pathLst>
-                <a:path w="7090630" h="3452543">
+                <a:path w="0" h="1317069">
                   <a:moveTo>
-                    <a:pt x="1808955" y="0"/>
+                    <a:pt x="0" y="1317069"/>
                   </a:moveTo>
                   <a:lnTo>
-                    <a:pt x="1862185" y="162952"/>
-                  </a:lnTo>
-                  <a:lnTo>
-                    <a:pt x="1933808" y="368629"/>
-                  </a:lnTo>
-                  <a:lnTo>
-                    <a:pt x="2005430" y="561568"/>
-                  </a:lnTo>
-                  <a:lnTo>
-                    <a:pt x="2077053" y="742557"/>
-                  </a:lnTo>
-                  <a:lnTo>
-                    <a:pt x="2148675" y="912336"/>
-                  </a:lnTo>
-                  <a:lnTo>
-                    <a:pt x="2220298" y="1071599"/>
-                  </a:lnTo>
-                  <a:lnTo>
-                    <a:pt x="2291920" y="1220999"/>
-                  </a:lnTo>
-                  <a:lnTo>
-                    <a:pt x="2363543" y="1361145"/>
-                  </a:lnTo>
-                  <a:lnTo>
-                    <a:pt x="2435165" y="1492611"/>
-                  </a:lnTo>
-                  <a:lnTo>
-                    <a:pt x="2506788" y="1615934"/>
-                  </a:lnTo>
-                  <a:lnTo>
-                    <a:pt x="2578410" y="1731620"/>
-                  </a:lnTo>
-                  <a:lnTo>
-                    <a:pt x="2650033" y="1840140"/>
-                  </a:lnTo>
-                  <a:lnTo>
-                    <a:pt x="2721655" y="1941939"/>
-                  </a:lnTo>
-                  <a:lnTo>
-                    <a:pt x="2793278" y="2037432"/>
-                  </a:lnTo>
-                  <a:lnTo>
-                    <a:pt x="2864901" y="2127012"/>
-                  </a:lnTo>
-                  <a:lnTo>
-                    <a:pt x="2936523" y="2211043"/>
-                  </a:lnTo>
-                  <a:lnTo>
-                    <a:pt x="3008146" y="2289869"/>
-                  </a:lnTo>
-                  <a:lnTo>
-                    <a:pt x="3079768" y="2363814"/>
-                  </a:lnTo>
-                  <a:lnTo>
-                    <a:pt x="3151391" y="2433178"/>
-                  </a:lnTo>
-                  <a:lnTo>
-                    <a:pt x="3223013" y="2498246"/>
-                  </a:lnTo>
-                  <a:lnTo>
-                    <a:pt x="3294636" y="2559285"/>
-                  </a:lnTo>
-                  <a:lnTo>
-                    <a:pt x="3366258" y="2616542"/>
-                  </a:lnTo>
-                  <a:lnTo>
-                    <a:pt x="3437881" y="2660171"/>
-                  </a:lnTo>
-                  <a:lnTo>
-                    <a:pt x="3509503" y="2679242"/>
-                  </a:lnTo>
-                  <a:lnTo>
-                    <a:pt x="3581126" y="2697871"/>
-                  </a:lnTo>
-                  <a:lnTo>
-                    <a:pt x="3652748" y="2716068"/>
-                  </a:lnTo>
-                  <a:lnTo>
-                    <a:pt x="3724371" y="2733845"/>
-                  </a:lnTo>
-                  <a:lnTo>
-                    <a:pt x="3795993" y="2751209"/>
-                  </a:lnTo>
-                  <a:lnTo>
-                    <a:pt x="3867616" y="2768172"/>
-                  </a:lnTo>
-                  <a:lnTo>
-                    <a:pt x="3939238" y="2784742"/>
-                  </a:lnTo>
-                  <a:lnTo>
-                    <a:pt x="4010861" y="2800928"/>
-                  </a:lnTo>
-                  <a:lnTo>
-                    <a:pt x="4082483" y="2816739"/>
-                  </a:lnTo>
-                  <a:lnTo>
-                    <a:pt x="4154106" y="2832184"/>
-                  </a:lnTo>
-                  <a:lnTo>
-                    <a:pt x="4225729" y="2847272"/>
-                  </a:lnTo>
-                  <a:lnTo>
-                    <a:pt x="4297351" y="2862010"/>
-                  </a:lnTo>
-                  <a:lnTo>
-                    <a:pt x="4368974" y="2876407"/>
-                  </a:lnTo>
-                  <a:lnTo>
-                    <a:pt x="4440596" y="2890470"/>
-                  </a:lnTo>
-                  <a:lnTo>
-                    <a:pt x="4512219" y="2904208"/>
-                  </a:lnTo>
-                  <a:lnTo>
-                    <a:pt x="4583841" y="2917628"/>
-                  </a:lnTo>
-                  <a:lnTo>
-                    <a:pt x="4655464" y="2930737"/>
-                  </a:lnTo>
-                  <a:lnTo>
-                    <a:pt x="4727086" y="2943542"/>
-                  </a:lnTo>
-                  <a:lnTo>
-                    <a:pt x="4798709" y="2956051"/>
-                  </a:lnTo>
-                  <a:lnTo>
-                    <a:pt x="4870331" y="2968270"/>
-                  </a:lnTo>
-                  <a:lnTo>
-                    <a:pt x="4941954" y="2980207"/>
-                  </a:lnTo>
-                  <a:lnTo>
-                    <a:pt x="5013576" y="2991867"/>
-                  </a:lnTo>
-                  <a:lnTo>
-                    <a:pt x="5085199" y="3003257"/>
-                  </a:lnTo>
-                  <a:lnTo>
-                    <a:pt x="5156821" y="3014383"/>
-                  </a:lnTo>
-                  <a:lnTo>
-                    <a:pt x="5228444" y="3025251"/>
-                  </a:lnTo>
-                  <a:lnTo>
-                    <a:pt x="5300066" y="3035868"/>
-                  </a:lnTo>
-                  <a:lnTo>
-                    <a:pt x="5371689" y="3046239"/>
-                  </a:lnTo>
-                  <a:lnTo>
-                    <a:pt x="5443311" y="3056370"/>
-                  </a:lnTo>
-                  <a:lnTo>
-                    <a:pt x="5514934" y="3066266"/>
-                  </a:lnTo>
-                  <a:lnTo>
-                    <a:pt x="5586557" y="3075933"/>
-                  </a:lnTo>
-                  <a:lnTo>
-                    <a:pt x="5658179" y="3085377"/>
-                  </a:lnTo>
-                  <a:lnTo>
-                    <a:pt x="5729802" y="3094601"/>
-                  </a:lnTo>
-                  <a:lnTo>
-                    <a:pt x="5801424" y="3103612"/>
-                  </a:lnTo>
-                  <a:lnTo>
-                    <a:pt x="5873047" y="3112415"/>
-                  </a:lnTo>
-                  <a:lnTo>
-                    <a:pt x="5944669" y="3121013"/>
-                  </a:lnTo>
-                  <a:lnTo>
-                    <a:pt x="6016292" y="3129413"/>
-                  </a:lnTo>
-                  <a:lnTo>
-                    <a:pt x="6087914" y="3137618"/>
-                  </a:lnTo>
-                  <a:lnTo>
-                    <a:pt x="6159537" y="3145633"/>
-                  </a:lnTo>
-                  <a:lnTo>
-                    <a:pt x="6231159" y="3153462"/>
-                  </a:lnTo>
-                  <a:lnTo>
-                    <a:pt x="6302782" y="3161110"/>
-                  </a:lnTo>
-                  <a:lnTo>
-                    <a:pt x="6374404" y="3168581"/>
-                  </a:lnTo>
-                  <a:lnTo>
-                    <a:pt x="6446027" y="3175879"/>
-                  </a:lnTo>
-                  <a:lnTo>
-                    <a:pt x="6517649" y="3183008"/>
-                  </a:lnTo>
-                  <a:lnTo>
-                    <a:pt x="6589272" y="3189972"/>
-                  </a:lnTo>
-                  <a:lnTo>
-                    <a:pt x="6660894" y="3196774"/>
-                  </a:lnTo>
-                  <a:lnTo>
-                    <a:pt x="6732517" y="3203419"/>
-                  </a:lnTo>
-                  <a:lnTo>
-                    <a:pt x="6804139" y="3209911"/>
-                  </a:lnTo>
-                  <a:lnTo>
-                    <a:pt x="6875762" y="3216251"/>
-                  </a:lnTo>
-                  <a:lnTo>
-                    <a:pt x="6947385" y="3222446"/>
-                  </a:lnTo>
-                  <a:lnTo>
-                    <a:pt x="7019007" y="3228496"/>
-                  </a:lnTo>
-                  <a:lnTo>
-                    <a:pt x="7090630" y="3234407"/>
-                  </a:lnTo>
-                  <a:lnTo>
-                    <a:pt x="7090630" y="3452543"/>
-                  </a:lnTo>
-                  <a:lnTo>
-                    <a:pt x="7019007" y="3450483"/>
-                  </a:lnTo>
-                  <a:lnTo>
-                    <a:pt x="6947385" y="3448286"/>
-                  </a:lnTo>
-                  <a:lnTo>
-                    <a:pt x="6875762" y="3445945"/>
-                  </a:lnTo>
-                  <a:lnTo>
-                    <a:pt x="6804139" y="3443449"/>
-                  </a:lnTo>
-                  <a:lnTo>
-                    <a:pt x="6732517" y="3440789"/>
-                  </a:lnTo>
-                  <a:lnTo>
-                    <a:pt x="6660894" y="3437952"/>
-                  </a:lnTo>
-                  <a:lnTo>
-                    <a:pt x="6589272" y="3434929"/>
-                  </a:lnTo>
-                  <a:lnTo>
-                    <a:pt x="6517649" y="3431706"/>
-                  </a:lnTo>
-                  <a:lnTo>
-                    <a:pt x="6446027" y="3428269"/>
-                  </a:lnTo>
-                  <a:lnTo>
-                    <a:pt x="6374404" y="3424607"/>
-                  </a:lnTo>
-                  <a:lnTo>
-                    <a:pt x="6302782" y="3420702"/>
-                  </a:lnTo>
-                  <a:lnTo>
-                    <a:pt x="6231159" y="3416539"/>
-                  </a:lnTo>
-                  <a:lnTo>
-                    <a:pt x="6159537" y="3412102"/>
-                  </a:lnTo>
-                  <a:lnTo>
-                    <a:pt x="6087914" y="3407372"/>
-                  </a:lnTo>
-                  <a:lnTo>
-                    <a:pt x="6016292" y="3402329"/>
-                  </a:lnTo>
-                  <a:lnTo>
-                    <a:pt x="5944669" y="3396953"/>
-                  </a:lnTo>
-                  <a:lnTo>
-                    <a:pt x="5873047" y="3391223"/>
-                  </a:lnTo>
-                  <a:lnTo>
-                    <a:pt x="5801424" y="3385114"/>
-                  </a:lnTo>
-                  <a:lnTo>
-                    <a:pt x="5729802" y="3378601"/>
-                  </a:lnTo>
-                  <a:lnTo>
-                    <a:pt x="5658179" y="3371659"/>
-                  </a:lnTo>
-                  <a:lnTo>
-                    <a:pt x="5586557" y="3364258"/>
-                  </a:lnTo>
-                  <a:lnTo>
-                    <a:pt x="5514934" y="3356369"/>
-                  </a:lnTo>
-                  <a:lnTo>
-                    <a:pt x="5443311" y="3347959"/>
-                  </a:lnTo>
-                  <a:lnTo>
-                    <a:pt x="5371689" y="3338994"/>
-                  </a:lnTo>
-                  <a:lnTo>
-                    <a:pt x="5300066" y="3329436"/>
-                  </a:lnTo>
-                  <a:lnTo>
-                    <a:pt x="5228444" y="3319248"/>
-                  </a:lnTo>
-                  <a:lnTo>
-                    <a:pt x="5156821" y="3308387"/>
-                  </a:lnTo>
-                  <a:lnTo>
-                    <a:pt x="5085199" y="3296808"/>
-                  </a:lnTo>
-                  <a:lnTo>
-                    <a:pt x="5013576" y="3284466"/>
-                  </a:lnTo>
-                  <a:lnTo>
-                    <a:pt x="4941954" y="3271308"/>
-                  </a:lnTo>
-                  <a:lnTo>
-                    <a:pt x="4870331" y="3257282"/>
-                  </a:lnTo>
-                  <a:lnTo>
-                    <a:pt x="4798709" y="3242329"/>
-                  </a:lnTo>
-                  <a:lnTo>
-                    <a:pt x="4727086" y="3226389"/>
-                  </a:lnTo>
-                  <a:lnTo>
-                    <a:pt x="4655464" y="3209397"/>
-                  </a:lnTo>
-                  <a:lnTo>
-                    <a:pt x="4583841" y="3191283"/>
-                  </a:lnTo>
-                  <a:lnTo>
-                    <a:pt x="4512219" y="3171973"/>
-                  </a:lnTo>
-                  <a:lnTo>
-                    <a:pt x="4440596" y="3151388"/>
-                  </a:lnTo>
-                  <a:lnTo>
-                    <a:pt x="4368974" y="3129444"/>
-                  </a:lnTo>
-                  <a:lnTo>
-                    <a:pt x="4297351" y="3106051"/>
-                  </a:lnTo>
-                  <a:lnTo>
-                    <a:pt x="4225729" y="3081113"/>
-                  </a:lnTo>
-                  <a:lnTo>
-                    <a:pt x="4154106" y="3054529"/>
-                  </a:lnTo>
-                  <a:lnTo>
-                    <a:pt x="4082483" y="3026190"/>
-                  </a:lnTo>
-                  <a:lnTo>
-                    <a:pt x="4010861" y="2995979"/>
-                  </a:lnTo>
-                  <a:lnTo>
-                    <a:pt x="3939238" y="2963774"/>
-                  </a:lnTo>
-                  <a:lnTo>
-                    <a:pt x="3867616" y="2929443"/>
-                  </a:lnTo>
-                  <a:lnTo>
-                    <a:pt x="3795993" y="2892844"/>
-                  </a:lnTo>
-                  <a:lnTo>
-                    <a:pt x="3724371" y="2853830"/>
-                  </a:lnTo>
-                  <a:lnTo>
-                    <a:pt x="3652748" y="2812239"/>
-                  </a:lnTo>
-                  <a:lnTo>
-                    <a:pt x="3581126" y="2767902"/>
-                  </a:lnTo>
-                  <a:lnTo>
-                    <a:pt x="3509503" y="2720638"/>
-                  </a:lnTo>
-                  <a:lnTo>
-                    <a:pt x="3437881" y="2670254"/>
-                  </a:lnTo>
-                  <a:lnTo>
-                    <a:pt x="3366258" y="2640648"/>
-                  </a:lnTo>
-                  <a:lnTo>
-                    <a:pt x="3294636" y="2620663"/>
-                  </a:lnTo>
-                  <a:lnTo>
-                    <a:pt x="3223013" y="2600204"/>
-                  </a:lnTo>
-                  <a:lnTo>
-                    <a:pt x="3151391" y="2579259"/>
-                  </a:lnTo>
-                  <a:lnTo>
-                    <a:pt x="3079768" y="2557819"/>
-                  </a:lnTo>
-                  <a:lnTo>
-                    <a:pt x="3008146" y="2535870"/>
-                  </a:lnTo>
-                  <a:lnTo>
-                    <a:pt x="2936523" y="2513400"/>
-                  </a:lnTo>
-                  <a:lnTo>
-                    <a:pt x="2864901" y="2490399"/>
-                  </a:lnTo>
-                  <a:lnTo>
-                    <a:pt x="2793278" y="2466851"/>
-                  </a:lnTo>
-                  <a:lnTo>
-                    <a:pt x="2721655" y="2442746"/>
-                  </a:lnTo>
-                  <a:lnTo>
-                    <a:pt x="2650033" y="2418069"/>
-                  </a:lnTo>
-                  <a:lnTo>
-                    <a:pt x="2578410" y="2392808"/>
-                  </a:lnTo>
-                  <a:lnTo>
-                    <a:pt x="2506788" y="2366947"/>
-                  </a:lnTo>
-                  <a:lnTo>
-                    <a:pt x="2435165" y="2340474"/>
-                  </a:lnTo>
-                  <a:lnTo>
-                    <a:pt x="2363543" y="2313373"/>
-                  </a:lnTo>
-                  <a:lnTo>
-                    <a:pt x="2291920" y="2285629"/>
-                  </a:lnTo>
-                  <a:lnTo>
-                    <a:pt x="2220298" y="2257228"/>
-                  </a:lnTo>
-                  <a:lnTo>
-                    <a:pt x="2148675" y="2228154"/>
-                  </a:lnTo>
-                  <a:lnTo>
-                    <a:pt x="2077053" y="2198390"/>
-                  </a:lnTo>
-                  <a:lnTo>
-                    <a:pt x="2005430" y="2167921"/>
-                  </a:lnTo>
-                  <a:lnTo>
-                    <a:pt x="1933808" y="2136730"/>
-                  </a:lnTo>
-                  <a:lnTo>
-                    <a:pt x="1862185" y="2104799"/>
-                  </a:lnTo>
-                  <a:lnTo>
-                    <a:pt x="1790563" y="2072111"/>
-                  </a:lnTo>
-                  <a:lnTo>
-                    <a:pt x="1718940" y="2038649"/>
-                  </a:lnTo>
-                  <a:lnTo>
-                    <a:pt x="1647318" y="2004393"/>
-                  </a:lnTo>
-                  <a:lnTo>
-                    <a:pt x="1575695" y="1969325"/>
-                  </a:lnTo>
-                  <a:lnTo>
-                    <a:pt x="1504073" y="1933426"/>
-                  </a:lnTo>
-                  <a:lnTo>
-                    <a:pt x="1432450" y="1896676"/>
-                  </a:lnTo>
-                  <a:lnTo>
-                    <a:pt x="1360827" y="1859055"/>
-                  </a:lnTo>
-                  <a:lnTo>
-                    <a:pt x="1289205" y="1820542"/>
-                  </a:lnTo>
-                  <a:lnTo>
-                    <a:pt x="1217582" y="1781116"/>
-                  </a:lnTo>
-                  <a:lnTo>
-                    <a:pt x="1145960" y="1740755"/>
-                  </a:lnTo>
-                  <a:lnTo>
-                    <a:pt x="1074337" y="1699438"/>
-                  </a:lnTo>
-                  <a:lnTo>
-                    <a:pt x="1002715" y="1657141"/>
-                  </a:lnTo>
-                  <a:lnTo>
-                    <a:pt x="931092" y="1613842"/>
-                  </a:lnTo>
-                  <a:lnTo>
-                    <a:pt x="859470" y="1569516"/>
-                  </a:lnTo>
-                  <a:lnTo>
-                    <a:pt x="787847" y="1524139"/>
-                  </a:lnTo>
-                  <a:lnTo>
-                    <a:pt x="716225" y="1477687"/>
-                  </a:lnTo>
-                  <a:lnTo>
-                    <a:pt x="644602" y="1430134"/>
-                  </a:lnTo>
-                  <a:lnTo>
-                    <a:pt x="572980" y="1381454"/>
-                  </a:lnTo>
-                  <a:lnTo>
-                    <a:pt x="501357" y="1331619"/>
-                  </a:lnTo>
-                  <a:lnTo>
-                    <a:pt x="429735" y="1280603"/>
-                  </a:lnTo>
-                  <a:lnTo>
-                    <a:pt x="358112" y="1228378"/>
-                  </a:lnTo>
-                  <a:lnTo>
-                    <a:pt x="286490" y="1174915"/>
-                  </a:lnTo>
-                  <a:lnTo>
-                    <a:pt x="214867" y="1120185"/>
-                  </a:lnTo>
-                  <a:lnTo>
-                    <a:pt x="143245" y="1064157"/>
-                  </a:lnTo>
-                  <a:lnTo>
-                    <a:pt x="71622" y="1006801"/>
-                  </a:lnTo>
-                  <a:lnTo>
-                    <a:pt x="0" y="948086"/>
+                    <a:pt x="0" y="0"/>
+                  </a:lnTo>
+                  <a:lnTo>
+                    <a:pt x="0" y="0"/>
+                  </a:lnTo>
+                </a:path>
+              </a:pathLst>
+            </a:custGeom>
+            <a:ln w="13550" cap="flat">
+              <a:solidFill>
+                <a:srgbClr val="EBEBEB">
+                  <a:alpha val="100000"/>
+                </a:srgbClr>
+              </a:solidFill>
+              <a:prstDash val="solid"/>
+              <a:round/>
+            </a:ln>
+          </p:spPr>
+          <p:txBody>
+            <a:bodyPr/>
+            <a:lstStyle/>
+            <a:p/>
+          </p:txBody>
+        </p:sp>
+        <p:sp>
+          <p:nvSpPr>
+            <p:cNvPr id="21" name="pg21"/>
+            <p:cNvSpPr/>
+            <p:nvPr/>
+          </p:nvSpPr>
+          <p:spPr>
+            <a:xfrm>
+              <a:off x="1235312" y="2143092"/>
+              <a:ext cx="6964104" cy="1245941"/>
+            </a:xfrm>
+            <a:custGeom>
+              <a:avLst/>
+              <a:pathLst>
+                <a:path w="6964104" h="1245941">
+                  <a:moveTo>
+                    <a:pt x="1776676" y="0"/>
+                  </a:moveTo>
+                  <a:lnTo>
+                    <a:pt x="1828956" y="58805"/>
+                  </a:lnTo>
+                  <a:lnTo>
+                    <a:pt x="1899301" y="133029"/>
+                  </a:lnTo>
+                  <a:lnTo>
+                    <a:pt x="1969645" y="202656"/>
+                  </a:lnTo>
+                  <a:lnTo>
+                    <a:pt x="2039990" y="267971"/>
+                  </a:lnTo>
+                  <a:lnTo>
+                    <a:pt x="2110334" y="329240"/>
+                  </a:lnTo>
+                  <a:lnTo>
+                    <a:pt x="2180679" y="386715"/>
+                  </a:lnTo>
+                  <a:lnTo>
+                    <a:pt x="2251023" y="440629"/>
+                  </a:lnTo>
+                  <a:lnTo>
+                    <a:pt x="2321368" y="491205"/>
+                  </a:lnTo>
+                  <a:lnTo>
+                    <a:pt x="2391712" y="538648"/>
+                  </a:lnTo>
+                  <a:lnTo>
+                    <a:pt x="2462057" y="583152"/>
+                  </a:lnTo>
+                  <a:lnTo>
+                    <a:pt x="2532401" y="624900"/>
+                  </a:lnTo>
+                  <a:lnTo>
+                    <a:pt x="2602746" y="664063"/>
+                  </a:lnTo>
+                  <a:lnTo>
+                    <a:pt x="2673090" y="700800"/>
+                  </a:lnTo>
+                  <a:lnTo>
+                    <a:pt x="2743435" y="735261"/>
+                  </a:lnTo>
+                  <a:lnTo>
+                    <a:pt x="2813779" y="767588"/>
+                  </a:lnTo>
+                  <a:lnTo>
+                    <a:pt x="2884124" y="797913"/>
+                  </a:lnTo>
+                  <a:lnTo>
+                    <a:pt x="2954468" y="826360"/>
+                  </a:lnTo>
+                  <a:lnTo>
+                    <a:pt x="3024813" y="853044"/>
+                  </a:lnTo>
+                  <a:lnTo>
+                    <a:pt x="3095157" y="878076"/>
+                  </a:lnTo>
+                  <a:lnTo>
+                    <a:pt x="3165502" y="901558"/>
+                  </a:lnTo>
+                  <a:lnTo>
+                    <a:pt x="3235846" y="923585"/>
+                  </a:lnTo>
+                  <a:lnTo>
+                    <a:pt x="3306191" y="944248"/>
+                  </a:lnTo>
+                  <a:lnTo>
+                    <a:pt x="3376535" y="959993"/>
+                  </a:lnTo>
+                  <a:lnTo>
+                    <a:pt x="3446880" y="966875"/>
+                  </a:lnTo>
+                  <a:lnTo>
+                    <a:pt x="3517224" y="973598"/>
+                  </a:lnTo>
+                  <a:lnTo>
+                    <a:pt x="3587569" y="980165"/>
+                  </a:lnTo>
+                  <a:lnTo>
+                    <a:pt x="3657913" y="986580"/>
+                  </a:lnTo>
+                  <a:lnTo>
+                    <a:pt x="3728257" y="992846"/>
+                  </a:lnTo>
+                  <a:lnTo>
+                    <a:pt x="3798602" y="998968"/>
+                  </a:lnTo>
+                  <a:lnTo>
+                    <a:pt x="3868946" y="1004947"/>
+                  </a:lnTo>
+                  <a:lnTo>
+                    <a:pt x="3939291" y="1010789"/>
+                  </a:lnTo>
+                  <a:lnTo>
+                    <a:pt x="4009635" y="1016495"/>
+                  </a:lnTo>
+                  <a:lnTo>
+                    <a:pt x="4079980" y="1022068"/>
+                  </a:lnTo>
+                  <a:lnTo>
+                    <a:pt x="4150324" y="1027513"/>
+                  </a:lnTo>
+                  <a:lnTo>
+                    <a:pt x="4220669" y="1032832"/>
+                  </a:lnTo>
+                  <a:lnTo>
+                    <a:pt x="4291013" y="1038027"/>
+                  </a:lnTo>
+                  <a:lnTo>
+                    <a:pt x="4361358" y="1043102"/>
+                  </a:lnTo>
+                  <a:lnTo>
+                    <a:pt x="4431702" y="1048060"/>
+                  </a:lnTo>
+                  <a:lnTo>
+                    <a:pt x="4502047" y="1052903"/>
+                  </a:lnTo>
+                  <a:lnTo>
+                    <a:pt x="4572391" y="1057634"/>
+                  </a:lnTo>
+                  <a:lnTo>
+                    <a:pt x="4642736" y="1062255"/>
+                  </a:lnTo>
+                  <a:lnTo>
+                    <a:pt x="4713080" y="1066769"/>
+                  </a:lnTo>
+                  <a:lnTo>
+                    <a:pt x="4783425" y="1071179"/>
+                  </a:lnTo>
+                  <a:lnTo>
+                    <a:pt x="4853769" y="1075486"/>
+                  </a:lnTo>
+                  <a:lnTo>
+                    <a:pt x="4924114" y="1079694"/>
+                  </a:lnTo>
+                  <a:lnTo>
+                    <a:pt x="4994458" y="1083804"/>
+                  </a:lnTo>
+                  <a:lnTo>
+                    <a:pt x="5064803" y="1087819"/>
+                  </a:lnTo>
+                  <a:lnTo>
+                    <a:pt x="5135147" y="1091742"/>
+                  </a:lnTo>
+                  <a:lnTo>
+                    <a:pt x="5205492" y="1095573"/>
+                  </a:lnTo>
+                  <a:lnTo>
+                    <a:pt x="5275836" y="1099316"/>
+                  </a:lnTo>
+                  <a:lnTo>
+                    <a:pt x="5346181" y="1102972"/>
+                  </a:lnTo>
+                  <a:lnTo>
+                    <a:pt x="5416525" y="1106543"/>
+                  </a:lnTo>
+                  <a:lnTo>
+                    <a:pt x="5486870" y="1110032"/>
+                  </a:lnTo>
+                  <a:lnTo>
+                    <a:pt x="5557214" y="1113440"/>
+                  </a:lnTo>
+                  <a:lnTo>
+                    <a:pt x="5627559" y="1116769"/>
+                  </a:lnTo>
+                  <a:lnTo>
+                    <a:pt x="5697903" y="1120020"/>
+                  </a:lnTo>
+                  <a:lnTo>
+                    <a:pt x="5768248" y="1123197"/>
+                  </a:lnTo>
+                  <a:lnTo>
+                    <a:pt x="5838592" y="1126300"/>
+                  </a:lnTo>
+                  <a:lnTo>
+                    <a:pt x="5908937" y="1129331"/>
+                  </a:lnTo>
+                  <a:lnTo>
+                    <a:pt x="5979281" y="1132292"/>
+                  </a:lnTo>
+                  <a:lnTo>
+                    <a:pt x="6049626" y="1135184"/>
+                  </a:lnTo>
+                  <a:lnTo>
+                    <a:pt x="6119970" y="1138010"/>
+                  </a:lnTo>
+                  <a:lnTo>
+                    <a:pt x="6190315" y="1140770"/>
+                  </a:lnTo>
+                  <a:lnTo>
+                    <a:pt x="6260659" y="1143466"/>
+                  </a:lnTo>
+                  <a:lnTo>
+                    <a:pt x="6331004" y="1146100"/>
+                  </a:lnTo>
+                  <a:lnTo>
+                    <a:pt x="6401348" y="1148672"/>
+                  </a:lnTo>
+                  <a:lnTo>
+                    <a:pt x="6471693" y="1151185"/>
+                  </a:lnTo>
+                  <a:lnTo>
+                    <a:pt x="6542037" y="1153640"/>
+                  </a:lnTo>
+                  <a:lnTo>
+                    <a:pt x="6612382" y="1156038"/>
+                  </a:lnTo>
+                  <a:lnTo>
+                    <a:pt x="6682726" y="1158381"/>
+                  </a:lnTo>
+                  <a:lnTo>
+                    <a:pt x="6753071" y="1160669"/>
+                  </a:lnTo>
+                  <a:lnTo>
+                    <a:pt x="6823415" y="1162904"/>
+                  </a:lnTo>
+                  <a:lnTo>
+                    <a:pt x="6893760" y="1165088"/>
+                  </a:lnTo>
+                  <a:lnTo>
+                    <a:pt x="6964104" y="1167221"/>
+                  </a:lnTo>
+                  <a:lnTo>
+                    <a:pt x="6964104" y="1245941"/>
+                  </a:lnTo>
+                  <a:lnTo>
+                    <a:pt x="6893760" y="1245198"/>
+                  </a:lnTo>
+                  <a:lnTo>
+                    <a:pt x="6823415" y="1244405"/>
+                  </a:lnTo>
+                  <a:lnTo>
+                    <a:pt x="6753071" y="1243560"/>
+                  </a:lnTo>
+                  <a:lnTo>
+                    <a:pt x="6682726" y="1242660"/>
+                  </a:lnTo>
+                  <a:lnTo>
+                    <a:pt x="6612382" y="1241699"/>
+                  </a:lnTo>
+                  <a:lnTo>
+                    <a:pt x="6542037" y="1240676"/>
+                  </a:lnTo>
+                  <a:lnTo>
+                    <a:pt x="6471693" y="1239585"/>
+                  </a:lnTo>
+                  <a:lnTo>
+                    <a:pt x="6401348" y="1238421"/>
+                  </a:lnTo>
+                  <a:lnTo>
+                    <a:pt x="6331004" y="1237181"/>
+                  </a:lnTo>
+                  <a:lnTo>
+                    <a:pt x="6260659" y="1235860"/>
+                  </a:lnTo>
+                  <a:lnTo>
+                    <a:pt x="6190315" y="1234451"/>
+                  </a:lnTo>
+                  <a:lnTo>
+                    <a:pt x="6119970" y="1232948"/>
+                  </a:lnTo>
+                  <a:lnTo>
+                    <a:pt x="6049626" y="1231347"/>
+                  </a:lnTo>
+                  <a:lnTo>
+                    <a:pt x="5979281" y="1229640"/>
+                  </a:lnTo>
+                  <a:lnTo>
+                    <a:pt x="5908937" y="1227820"/>
+                  </a:lnTo>
+                  <a:lnTo>
+                    <a:pt x="5838592" y="1225880"/>
+                  </a:lnTo>
+                  <a:lnTo>
+                    <a:pt x="5768248" y="1223812"/>
+                  </a:lnTo>
+                  <a:lnTo>
+                    <a:pt x="5697903" y="1221608"/>
+                  </a:lnTo>
+                  <a:lnTo>
+                    <a:pt x="5627559" y="1219257"/>
+                  </a:lnTo>
+                  <a:lnTo>
+                    <a:pt x="5557214" y="1216752"/>
+                  </a:lnTo>
+                  <a:lnTo>
+                    <a:pt x="5486870" y="1214081"/>
+                  </a:lnTo>
+                  <a:lnTo>
+                    <a:pt x="5416525" y="1211234"/>
+                  </a:lnTo>
+                  <a:lnTo>
+                    <a:pt x="5346181" y="1208199"/>
+                  </a:lnTo>
+                  <a:lnTo>
+                    <a:pt x="5275836" y="1204964"/>
+                  </a:lnTo>
+                  <a:lnTo>
+                    <a:pt x="5205492" y="1201515"/>
+                  </a:lnTo>
+                  <a:lnTo>
+                    <a:pt x="5135147" y="1197838"/>
+                  </a:lnTo>
+                  <a:lnTo>
+                    <a:pt x="5064803" y="1193919"/>
+                  </a:lnTo>
+                  <a:lnTo>
+                    <a:pt x="4994458" y="1189740"/>
+                  </a:lnTo>
+                  <a:lnTo>
+                    <a:pt x="4924114" y="1185286"/>
+                  </a:lnTo>
+                  <a:lnTo>
+                    <a:pt x="4853769" y="1180538"/>
+                  </a:lnTo>
+                  <a:lnTo>
+                    <a:pt x="4783425" y="1175476"/>
+                  </a:lnTo>
+                  <a:lnTo>
+                    <a:pt x="4713080" y="1170080"/>
+                  </a:lnTo>
+                  <a:lnTo>
+                    <a:pt x="4642736" y="1164328"/>
+                  </a:lnTo>
+                  <a:lnTo>
+                    <a:pt x="4572391" y="1158196"/>
+                  </a:lnTo>
+                  <a:lnTo>
+                    <a:pt x="4502047" y="1151659"/>
+                  </a:lnTo>
+                  <a:lnTo>
+                    <a:pt x="4431702" y="1144690"/>
+                  </a:lnTo>
+                  <a:lnTo>
+                    <a:pt x="4361358" y="1137261"/>
+                  </a:lnTo>
+                  <a:lnTo>
+                    <a:pt x="4291013" y="1129342"/>
+                  </a:lnTo>
+                  <a:lnTo>
+                    <a:pt x="4220669" y="1120900"/>
+                  </a:lnTo>
+                  <a:lnTo>
+                    <a:pt x="4150324" y="1111901"/>
+                  </a:lnTo>
+                  <a:lnTo>
+                    <a:pt x="4079980" y="1102307"/>
+                  </a:lnTo>
+                  <a:lnTo>
+                    <a:pt x="4009635" y="1092080"/>
+                  </a:lnTo>
+                  <a:lnTo>
+                    <a:pt x="3939291" y="1081178"/>
+                  </a:lnTo>
+                  <a:lnTo>
+                    <a:pt x="3868946" y="1069556"/>
+                  </a:lnTo>
+                  <a:lnTo>
+                    <a:pt x="3798602" y="1057167"/>
+                  </a:lnTo>
+                  <a:lnTo>
+                    <a:pt x="3728257" y="1043959"/>
+                  </a:lnTo>
+                  <a:lnTo>
+                    <a:pt x="3657913" y="1029880"/>
+                  </a:lnTo>
+                  <a:lnTo>
+                    <a:pt x="3587569" y="1014871"/>
+                  </a:lnTo>
+                  <a:lnTo>
+                    <a:pt x="3517224" y="998871"/>
+                  </a:lnTo>
+                  <a:lnTo>
+                    <a:pt x="3446880" y="981814"/>
+                  </a:lnTo>
+                  <a:lnTo>
+                    <a:pt x="3376535" y="963631"/>
+                  </a:lnTo>
+                  <a:lnTo>
+                    <a:pt x="3306191" y="952948"/>
+                  </a:lnTo>
+                  <a:lnTo>
+                    <a:pt x="3235846" y="945735"/>
+                  </a:lnTo>
+                  <a:lnTo>
+                    <a:pt x="3165502" y="938352"/>
+                  </a:lnTo>
+                  <a:lnTo>
+                    <a:pt x="3095157" y="930794"/>
+                  </a:lnTo>
+                  <a:lnTo>
+                    <a:pt x="3024813" y="923056"/>
+                  </a:lnTo>
+                  <a:lnTo>
+                    <a:pt x="2954468" y="915135"/>
+                  </a:lnTo>
+                  <a:lnTo>
+                    <a:pt x="2884124" y="907027"/>
+                  </a:lnTo>
+                  <a:lnTo>
+                    <a:pt x="2813779" y="898726"/>
+                  </a:lnTo>
+                  <a:lnTo>
+                    <a:pt x="2743435" y="890228"/>
+                  </a:lnTo>
+                  <a:lnTo>
+                    <a:pt x="2673090" y="881529"/>
+                  </a:lnTo>
+                  <a:lnTo>
+                    <a:pt x="2602746" y="872624"/>
+                  </a:lnTo>
+                  <a:lnTo>
+                    <a:pt x="2532401" y="863508"/>
+                  </a:lnTo>
+                  <a:lnTo>
+                    <a:pt x="2462057" y="854175"/>
+                  </a:lnTo>
+                  <a:lnTo>
+                    <a:pt x="2391712" y="844622"/>
+                  </a:lnTo>
+                  <a:lnTo>
+                    <a:pt x="2321368" y="834841"/>
+                  </a:lnTo>
+                  <a:lnTo>
+                    <a:pt x="2251023" y="824829"/>
+                  </a:lnTo>
+                  <a:lnTo>
+                    <a:pt x="2180679" y="814580"/>
+                  </a:lnTo>
+                  <a:lnTo>
+                    <a:pt x="2110334" y="804088"/>
+                  </a:lnTo>
+                  <a:lnTo>
+                    <a:pt x="2039990" y="793347"/>
+                  </a:lnTo>
+                  <a:lnTo>
+                    <a:pt x="1969645" y="782351"/>
+                  </a:lnTo>
+                  <a:lnTo>
+                    <a:pt x="1899301" y="771095"/>
+                  </a:lnTo>
+                  <a:lnTo>
+                    <a:pt x="1828956" y="759572"/>
+                  </a:lnTo>
+                  <a:lnTo>
+                    <a:pt x="1758612" y="747776"/>
+                  </a:lnTo>
+                  <a:lnTo>
+                    <a:pt x="1688267" y="735700"/>
+                  </a:lnTo>
+                  <a:lnTo>
+                    <a:pt x="1617923" y="723338"/>
+                  </a:lnTo>
+                  <a:lnTo>
+                    <a:pt x="1547578" y="710683"/>
+                  </a:lnTo>
+                  <a:lnTo>
+                    <a:pt x="1477234" y="697728"/>
+                  </a:lnTo>
+                  <a:lnTo>
+                    <a:pt x="1406889" y="684465"/>
+                  </a:lnTo>
+                  <a:lnTo>
+                    <a:pt x="1336545" y="670889"/>
+                  </a:lnTo>
+                  <a:lnTo>
+                    <a:pt x="1266200" y="656990"/>
+                  </a:lnTo>
+                  <a:lnTo>
+                    <a:pt x="1195856" y="642762"/>
+                  </a:lnTo>
+                  <a:lnTo>
+                    <a:pt x="1125511" y="628197"/>
+                  </a:lnTo>
+                  <a:lnTo>
+                    <a:pt x="1055167" y="613287"/>
+                  </a:lnTo>
+                  <a:lnTo>
+                    <a:pt x="984822" y="598023"/>
+                  </a:lnTo>
+                  <a:lnTo>
+                    <a:pt x="914478" y="582397"/>
+                  </a:lnTo>
+                  <a:lnTo>
+                    <a:pt x="844133" y="566401"/>
+                  </a:lnTo>
+                  <a:lnTo>
+                    <a:pt x="773789" y="550026"/>
+                  </a:lnTo>
+                  <a:lnTo>
+                    <a:pt x="703444" y="533262"/>
+                  </a:lnTo>
+                  <a:lnTo>
+                    <a:pt x="633100" y="516101"/>
+                  </a:lnTo>
+                  <a:lnTo>
+                    <a:pt x="562755" y="498534"/>
+                  </a:lnTo>
+                  <a:lnTo>
+                    <a:pt x="492411" y="480550"/>
+                  </a:lnTo>
+                  <a:lnTo>
+                    <a:pt x="422066" y="462139"/>
+                  </a:lnTo>
+                  <a:lnTo>
+                    <a:pt x="351722" y="443292"/>
+                  </a:lnTo>
+                  <a:lnTo>
+                    <a:pt x="281377" y="423999"/>
+                  </a:lnTo>
+                  <a:lnTo>
+                    <a:pt x="211033" y="404248"/>
+                  </a:lnTo>
+                  <a:lnTo>
+                    <a:pt x="140688" y="384029"/>
+                  </a:lnTo>
+                  <a:lnTo>
+                    <a:pt x="70344" y="363330"/>
+                  </a:lnTo>
+                  <a:lnTo>
+                    <a:pt x="0" y="342141"/>
                   </a:lnTo>
                   <a:close/>
                 </a:path>
@@ -3509,568 +3544,243 @@
         </p:sp>
         <p:sp>
           <p:nvSpPr>
-            <p:cNvPr id="21" name="pl21"/>
-            <p:cNvSpPr/>
-            <p:nvPr/>
-          </p:nvSpPr>
-          <p:spPr>
-            <a:xfrm>
-              <a:off x="2981005" y="2073503"/>
-              <a:ext cx="5281674" cy="3234407"/>
-            </a:xfrm>
-            <a:custGeom>
-              <a:avLst/>
-              <a:pathLst>
-                <a:path w="5281674" h="3234407">
-                  <a:moveTo>
-                    <a:pt x="0" y="0"/>
-                  </a:moveTo>
-                  <a:lnTo>
-                    <a:pt x="53229" y="162952"/>
-                  </a:lnTo>
-                  <a:lnTo>
-                    <a:pt x="124852" y="368629"/>
-                  </a:lnTo>
-                  <a:lnTo>
-                    <a:pt x="196474" y="561568"/>
-                  </a:lnTo>
-                  <a:lnTo>
-                    <a:pt x="268097" y="742557"/>
-                  </a:lnTo>
-                  <a:lnTo>
-                    <a:pt x="339719" y="912336"/>
-                  </a:lnTo>
-                  <a:lnTo>
-                    <a:pt x="411342" y="1071599"/>
-                  </a:lnTo>
-                  <a:lnTo>
-                    <a:pt x="482964" y="1220999"/>
-                  </a:lnTo>
-                  <a:lnTo>
-                    <a:pt x="554587" y="1361145"/>
-                  </a:lnTo>
-                  <a:lnTo>
-                    <a:pt x="626209" y="1492611"/>
-                  </a:lnTo>
-                  <a:lnTo>
-                    <a:pt x="697832" y="1615934"/>
-                  </a:lnTo>
-                  <a:lnTo>
-                    <a:pt x="769455" y="1731620"/>
-                  </a:lnTo>
-                  <a:lnTo>
-                    <a:pt x="841077" y="1840140"/>
-                  </a:lnTo>
-                  <a:lnTo>
-                    <a:pt x="912700" y="1941939"/>
-                  </a:lnTo>
-                  <a:lnTo>
-                    <a:pt x="984322" y="2037432"/>
-                  </a:lnTo>
-                  <a:lnTo>
-                    <a:pt x="1055945" y="2127012"/>
-                  </a:lnTo>
-                  <a:lnTo>
-                    <a:pt x="1127567" y="2211043"/>
-                  </a:lnTo>
-                  <a:lnTo>
-                    <a:pt x="1199190" y="2289869"/>
-                  </a:lnTo>
-                  <a:lnTo>
-                    <a:pt x="1270812" y="2363814"/>
-                  </a:lnTo>
-                  <a:lnTo>
-                    <a:pt x="1342435" y="2433178"/>
-                  </a:lnTo>
-                  <a:lnTo>
-                    <a:pt x="1414057" y="2498246"/>
-                  </a:lnTo>
-                  <a:lnTo>
-                    <a:pt x="1485680" y="2559285"/>
-                  </a:lnTo>
-                  <a:lnTo>
-                    <a:pt x="1557302" y="2616542"/>
-                  </a:lnTo>
-                  <a:lnTo>
-                    <a:pt x="1628925" y="2660171"/>
-                  </a:lnTo>
-                  <a:lnTo>
-                    <a:pt x="1700547" y="2679242"/>
-                  </a:lnTo>
-                  <a:lnTo>
-                    <a:pt x="1772170" y="2697871"/>
-                  </a:lnTo>
-                  <a:lnTo>
-                    <a:pt x="1843792" y="2716068"/>
-                  </a:lnTo>
-                  <a:lnTo>
-                    <a:pt x="1915415" y="2733845"/>
-                  </a:lnTo>
-                  <a:lnTo>
-                    <a:pt x="1987037" y="2751209"/>
-                  </a:lnTo>
-                  <a:lnTo>
-                    <a:pt x="2058660" y="2768172"/>
-                  </a:lnTo>
-                  <a:lnTo>
-                    <a:pt x="2130283" y="2784742"/>
-                  </a:lnTo>
-                  <a:lnTo>
-                    <a:pt x="2201905" y="2800928"/>
-                  </a:lnTo>
-                  <a:lnTo>
-                    <a:pt x="2273528" y="2816739"/>
-                  </a:lnTo>
-                  <a:lnTo>
-                    <a:pt x="2345150" y="2832184"/>
-                  </a:lnTo>
-                  <a:lnTo>
-                    <a:pt x="2416773" y="2847272"/>
-                  </a:lnTo>
-                  <a:lnTo>
-                    <a:pt x="2488395" y="2862010"/>
-                  </a:lnTo>
-                  <a:lnTo>
-                    <a:pt x="2560018" y="2876407"/>
-                  </a:lnTo>
-                  <a:lnTo>
-                    <a:pt x="2631640" y="2890470"/>
-                  </a:lnTo>
-                  <a:lnTo>
-                    <a:pt x="2703263" y="2904208"/>
-                  </a:lnTo>
-                  <a:lnTo>
-                    <a:pt x="2774885" y="2917628"/>
-                  </a:lnTo>
-                  <a:lnTo>
-                    <a:pt x="2846508" y="2930737"/>
-                  </a:lnTo>
-                  <a:lnTo>
-                    <a:pt x="2918130" y="2943542"/>
-                  </a:lnTo>
-                  <a:lnTo>
-                    <a:pt x="2989753" y="2956051"/>
-                  </a:lnTo>
-                  <a:lnTo>
-                    <a:pt x="3061375" y="2968270"/>
-                  </a:lnTo>
-                  <a:lnTo>
-                    <a:pt x="3132998" y="2980207"/>
-                  </a:lnTo>
-                  <a:lnTo>
-                    <a:pt x="3204620" y="2991867"/>
-                  </a:lnTo>
-                  <a:lnTo>
-                    <a:pt x="3276243" y="3003257"/>
-                  </a:lnTo>
-                  <a:lnTo>
-                    <a:pt x="3347865" y="3014383"/>
-                  </a:lnTo>
-                  <a:lnTo>
-                    <a:pt x="3419488" y="3025251"/>
-                  </a:lnTo>
-                  <a:lnTo>
-                    <a:pt x="3491111" y="3035868"/>
-                  </a:lnTo>
-                  <a:lnTo>
-                    <a:pt x="3562733" y="3046239"/>
-                  </a:lnTo>
-                  <a:lnTo>
-                    <a:pt x="3634356" y="3056370"/>
-                  </a:lnTo>
-                  <a:lnTo>
-                    <a:pt x="3705978" y="3066266"/>
-                  </a:lnTo>
-                  <a:lnTo>
-                    <a:pt x="3777601" y="3075933"/>
-                  </a:lnTo>
-                  <a:lnTo>
-                    <a:pt x="3849223" y="3085377"/>
-                  </a:lnTo>
-                  <a:lnTo>
-                    <a:pt x="3920846" y="3094601"/>
-                  </a:lnTo>
-                  <a:lnTo>
-                    <a:pt x="3992468" y="3103612"/>
-                  </a:lnTo>
-                  <a:lnTo>
-                    <a:pt x="4064091" y="3112415"/>
-                  </a:lnTo>
-                  <a:lnTo>
-                    <a:pt x="4135713" y="3121013"/>
-                  </a:lnTo>
-                  <a:lnTo>
-                    <a:pt x="4207336" y="3129413"/>
-                  </a:lnTo>
-                  <a:lnTo>
-                    <a:pt x="4278958" y="3137618"/>
-                  </a:lnTo>
-                  <a:lnTo>
-                    <a:pt x="4350581" y="3145633"/>
-                  </a:lnTo>
-                  <a:lnTo>
-                    <a:pt x="4422203" y="3153462"/>
-                  </a:lnTo>
-                  <a:lnTo>
-                    <a:pt x="4493826" y="3161110"/>
-                  </a:lnTo>
-                  <a:lnTo>
-                    <a:pt x="4565448" y="3168581"/>
-                  </a:lnTo>
-                  <a:lnTo>
-                    <a:pt x="4637071" y="3175879"/>
-                  </a:lnTo>
-                  <a:lnTo>
-                    <a:pt x="4708693" y="3183008"/>
-                  </a:lnTo>
-                  <a:lnTo>
-                    <a:pt x="4780316" y="3189972"/>
-                  </a:lnTo>
-                  <a:lnTo>
-                    <a:pt x="4851939" y="3196774"/>
-                  </a:lnTo>
-                  <a:lnTo>
-                    <a:pt x="4923561" y="3203419"/>
-                  </a:lnTo>
-                  <a:lnTo>
-                    <a:pt x="4995184" y="3209911"/>
-                  </a:lnTo>
-                  <a:lnTo>
-                    <a:pt x="5066806" y="3216251"/>
-                  </a:lnTo>
-                  <a:lnTo>
-                    <a:pt x="5138429" y="3222446"/>
-                  </a:lnTo>
-                  <a:lnTo>
-                    <a:pt x="5210051" y="3228496"/>
-                  </a:lnTo>
-                  <a:lnTo>
-                    <a:pt x="5281674" y="3234407"/>
-                  </a:lnTo>
-                </a:path>
-              </a:pathLst>
-            </a:custGeom>
-          </p:spPr>
-          <p:txBody>
-            <a:bodyPr/>
-            <a:lstStyle/>
-            <a:p/>
-          </p:txBody>
-        </p:sp>
-        <p:sp>
-          <p:nvSpPr>
             <p:cNvPr id="22" name="pl22"/>
             <p:cNvSpPr/>
             <p:nvPr/>
           </p:nvSpPr>
           <p:spPr>
             <a:xfrm>
-              <a:off x="1172049" y="3021589"/>
-              <a:ext cx="7090630" cy="2504457"/>
+              <a:off x="3011988" y="2143092"/>
+              <a:ext cx="5187427" cy="1167221"/>
             </a:xfrm>
             <a:custGeom>
               <a:avLst/>
               <a:pathLst>
-                <a:path w="7090630" h="2504457">
+                <a:path w="5187427" h="1167221">
                   <a:moveTo>
-                    <a:pt x="7090630" y="2504457"/>
+                    <a:pt x="0" y="0"/>
                   </a:moveTo>
                   <a:lnTo>
-                    <a:pt x="7019007" y="2502397"/>
-                  </a:lnTo>
-                  <a:lnTo>
-                    <a:pt x="6947385" y="2500200"/>
-                  </a:lnTo>
-                  <a:lnTo>
-                    <a:pt x="6875762" y="2497859"/>
-                  </a:lnTo>
-                  <a:lnTo>
-                    <a:pt x="6804139" y="2495363"/>
-                  </a:lnTo>
-                  <a:lnTo>
-                    <a:pt x="6732517" y="2492703"/>
-                  </a:lnTo>
-                  <a:lnTo>
-                    <a:pt x="6660894" y="2489866"/>
-                  </a:lnTo>
-                  <a:lnTo>
-                    <a:pt x="6589272" y="2486843"/>
-                  </a:lnTo>
-                  <a:lnTo>
-                    <a:pt x="6517649" y="2483620"/>
-                  </a:lnTo>
-                  <a:lnTo>
-                    <a:pt x="6446027" y="2480183"/>
-                  </a:lnTo>
-                  <a:lnTo>
-                    <a:pt x="6374404" y="2476521"/>
-                  </a:lnTo>
-                  <a:lnTo>
-                    <a:pt x="6302782" y="2472616"/>
-                  </a:lnTo>
-                  <a:lnTo>
-                    <a:pt x="6231159" y="2468453"/>
-                  </a:lnTo>
-                  <a:lnTo>
-                    <a:pt x="6159537" y="2464016"/>
-                  </a:lnTo>
-                  <a:lnTo>
-                    <a:pt x="6087914" y="2459285"/>
-                  </a:lnTo>
-                  <a:lnTo>
-                    <a:pt x="6016292" y="2454243"/>
-                  </a:lnTo>
-                  <a:lnTo>
-                    <a:pt x="5944669" y="2448867"/>
-                  </a:lnTo>
-                  <a:lnTo>
-                    <a:pt x="5873047" y="2443137"/>
-                  </a:lnTo>
-                  <a:lnTo>
-                    <a:pt x="5801424" y="2437028"/>
-                  </a:lnTo>
-                  <a:lnTo>
-                    <a:pt x="5729802" y="2430515"/>
-                  </a:lnTo>
-                  <a:lnTo>
-                    <a:pt x="5658179" y="2423573"/>
-                  </a:lnTo>
-                  <a:lnTo>
-                    <a:pt x="5586557" y="2416172"/>
-                  </a:lnTo>
-                  <a:lnTo>
-                    <a:pt x="5514934" y="2408283"/>
-                  </a:lnTo>
-                  <a:lnTo>
-                    <a:pt x="5443311" y="2399873"/>
-                  </a:lnTo>
-                  <a:lnTo>
-                    <a:pt x="5371689" y="2390908"/>
-                  </a:lnTo>
-                  <a:lnTo>
-                    <a:pt x="5300066" y="2381350"/>
-                  </a:lnTo>
-                  <a:lnTo>
-                    <a:pt x="5228444" y="2371162"/>
-                  </a:lnTo>
-                  <a:lnTo>
-                    <a:pt x="5156821" y="2360301"/>
-                  </a:lnTo>
-                  <a:lnTo>
-                    <a:pt x="5085199" y="2348722"/>
-                  </a:lnTo>
-                  <a:lnTo>
-                    <a:pt x="5013576" y="2336380"/>
-                  </a:lnTo>
-                  <a:lnTo>
-                    <a:pt x="4941954" y="2323222"/>
-                  </a:lnTo>
-                  <a:lnTo>
-                    <a:pt x="4870331" y="2309196"/>
-                  </a:lnTo>
-                  <a:lnTo>
-                    <a:pt x="4798709" y="2294243"/>
-                  </a:lnTo>
-                  <a:lnTo>
-                    <a:pt x="4727086" y="2278303"/>
-                  </a:lnTo>
-                  <a:lnTo>
-                    <a:pt x="4655464" y="2261311"/>
-                  </a:lnTo>
-                  <a:lnTo>
-                    <a:pt x="4583841" y="2243197"/>
-                  </a:lnTo>
-                  <a:lnTo>
-                    <a:pt x="4512219" y="2223887"/>
-                  </a:lnTo>
-                  <a:lnTo>
-                    <a:pt x="4440596" y="2203302"/>
-                  </a:lnTo>
-                  <a:lnTo>
-                    <a:pt x="4368974" y="2181358"/>
-                  </a:lnTo>
-                  <a:lnTo>
-                    <a:pt x="4297351" y="2157965"/>
-                  </a:lnTo>
-                  <a:lnTo>
-                    <a:pt x="4225729" y="2133027"/>
-                  </a:lnTo>
-                  <a:lnTo>
-                    <a:pt x="4154106" y="2106443"/>
-                  </a:lnTo>
-                  <a:lnTo>
-                    <a:pt x="4082483" y="2078104"/>
-                  </a:lnTo>
-                  <a:lnTo>
-                    <a:pt x="4010861" y="2047893"/>
-                  </a:lnTo>
-                  <a:lnTo>
-                    <a:pt x="3939238" y="2015688"/>
-                  </a:lnTo>
-                  <a:lnTo>
-                    <a:pt x="3867616" y="1981357"/>
-                  </a:lnTo>
-                  <a:lnTo>
-                    <a:pt x="3795993" y="1944758"/>
-                  </a:lnTo>
-                  <a:lnTo>
-                    <a:pt x="3724371" y="1905744"/>
-                  </a:lnTo>
-                  <a:lnTo>
-                    <a:pt x="3652748" y="1864153"/>
-                  </a:lnTo>
-                  <a:lnTo>
-                    <a:pt x="3581126" y="1819816"/>
-                  </a:lnTo>
-                  <a:lnTo>
-                    <a:pt x="3509503" y="1772552"/>
-                  </a:lnTo>
-                  <a:lnTo>
-                    <a:pt x="3437881" y="1722168"/>
-                  </a:lnTo>
-                  <a:lnTo>
-                    <a:pt x="3366258" y="1692562"/>
-                  </a:lnTo>
-                  <a:lnTo>
-                    <a:pt x="3294636" y="1672577"/>
-                  </a:lnTo>
-                  <a:lnTo>
-                    <a:pt x="3223013" y="1652118"/>
-                  </a:lnTo>
-                  <a:lnTo>
-                    <a:pt x="3151391" y="1631173"/>
-                  </a:lnTo>
-                  <a:lnTo>
-                    <a:pt x="3079768" y="1609733"/>
-                  </a:lnTo>
-                  <a:lnTo>
-                    <a:pt x="3008146" y="1587784"/>
-                  </a:lnTo>
-                  <a:lnTo>
-                    <a:pt x="2936523" y="1565314"/>
-                  </a:lnTo>
-                  <a:lnTo>
-                    <a:pt x="2864901" y="1542313"/>
-                  </a:lnTo>
-                  <a:lnTo>
-                    <a:pt x="2793278" y="1518765"/>
-                  </a:lnTo>
-                  <a:lnTo>
-                    <a:pt x="2721655" y="1494660"/>
-                  </a:lnTo>
-                  <a:lnTo>
-                    <a:pt x="2650033" y="1469983"/>
-                  </a:lnTo>
-                  <a:lnTo>
-                    <a:pt x="2578410" y="1444722"/>
-                  </a:lnTo>
-                  <a:lnTo>
-                    <a:pt x="2506788" y="1418861"/>
-                  </a:lnTo>
-                  <a:lnTo>
-                    <a:pt x="2435165" y="1392388"/>
-                  </a:lnTo>
-                  <a:lnTo>
-                    <a:pt x="2363543" y="1365287"/>
-                  </a:lnTo>
-                  <a:lnTo>
-                    <a:pt x="2291920" y="1337543"/>
-                  </a:lnTo>
-                  <a:lnTo>
-                    <a:pt x="2220298" y="1309142"/>
-                  </a:lnTo>
-                  <a:lnTo>
-                    <a:pt x="2148675" y="1280068"/>
-                  </a:lnTo>
-                  <a:lnTo>
-                    <a:pt x="2077053" y="1250304"/>
-                  </a:lnTo>
-                  <a:lnTo>
-                    <a:pt x="2005430" y="1219835"/>
-                  </a:lnTo>
-                  <a:lnTo>
-                    <a:pt x="1933808" y="1188644"/>
-                  </a:lnTo>
-                  <a:lnTo>
-                    <a:pt x="1862185" y="1156713"/>
-                  </a:lnTo>
-                  <a:lnTo>
-                    <a:pt x="1790563" y="1124025"/>
-                  </a:lnTo>
-                  <a:lnTo>
-                    <a:pt x="1718940" y="1090562"/>
-                  </a:lnTo>
-                  <a:lnTo>
-                    <a:pt x="1647318" y="1056307"/>
-                  </a:lnTo>
-                  <a:lnTo>
-                    <a:pt x="1575695" y="1021239"/>
-                  </a:lnTo>
-                  <a:lnTo>
-                    <a:pt x="1504073" y="985340"/>
-                  </a:lnTo>
-                  <a:lnTo>
-                    <a:pt x="1432450" y="948590"/>
-                  </a:lnTo>
-                  <a:lnTo>
-                    <a:pt x="1360827" y="910969"/>
-                  </a:lnTo>
-                  <a:lnTo>
-                    <a:pt x="1289205" y="872456"/>
-                  </a:lnTo>
-                  <a:lnTo>
-                    <a:pt x="1217582" y="833030"/>
-                  </a:lnTo>
-                  <a:lnTo>
-                    <a:pt x="1145960" y="792669"/>
-                  </a:lnTo>
-                  <a:lnTo>
-                    <a:pt x="1074337" y="751352"/>
-                  </a:lnTo>
-                  <a:lnTo>
-                    <a:pt x="1002715" y="709055"/>
-                  </a:lnTo>
-                  <a:lnTo>
-                    <a:pt x="931092" y="665756"/>
-                  </a:lnTo>
-                  <a:lnTo>
-                    <a:pt x="859470" y="621430"/>
-                  </a:lnTo>
-                  <a:lnTo>
-                    <a:pt x="787847" y="576053"/>
-                  </a:lnTo>
-                  <a:lnTo>
-                    <a:pt x="716225" y="529601"/>
-                  </a:lnTo>
-                  <a:lnTo>
-                    <a:pt x="644602" y="482048"/>
-                  </a:lnTo>
-                  <a:lnTo>
-                    <a:pt x="572980" y="433368"/>
-                  </a:lnTo>
-                  <a:lnTo>
-                    <a:pt x="501357" y="383533"/>
-                  </a:lnTo>
-                  <a:lnTo>
-                    <a:pt x="429735" y="332517"/>
-                  </a:lnTo>
-                  <a:lnTo>
-                    <a:pt x="358112" y="280292"/>
-                  </a:lnTo>
-                  <a:lnTo>
-                    <a:pt x="286490" y="226829"/>
-                  </a:lnTo>
-                  <a:lnTo>
-                    <a:pt x="214867" y="172099"/>
-                  </a:lnTo>
-                  <a:lnTo>
-                    <a:pt x="143245" y="116071"/>
-                  </a:lnTo>
-                  <a:lnTo>
-                    <a:pt x="71622" y="58715"/>
-                  </a:lnTo>
-                  <a:lnTo>
-                    <a:pt x="0" y="0"/>
+                    <a:pt x="52279" y="58805"/>
+                  </a:lnTo>
+                  <a:lnTo>
+                    <a:pt x="122624" y="133029"/>
+                  </a:lnTo>
+                  <a:lnTo>
+                    <a:pt x="192968" y="202656"/>
+                  </a:lnTo>
+                  <a:lnTo>
+                    <a:pt x="263313" y="267971"/>
+                  </a:lnTo>
+                  <a:lnTo>
+                    <a:pt x="333657" y="329240"/>
+                  </a:lnTo>
+                  <a:lnTo>
+                    <a:pt x="404002" y="386715"/>
+                  </a:lnTo>
+                  <a:lnTo>
+                    <a:pt x="474346" y="440629"/>
+                  </a:lnTo>
+                  <a:lnTo>
+                    <a:pt x="544691" y="491205"/>
+                  </a:lnTo>
+                  <a:lnTo>
+                    <a:pt x="615035" y="538648"/>
+                  </a:lnTo>
+                  <a:lnTo>
+                    <a:pt x="685380" y="583152"/>
+                  </a:lnTo>
+                  <a:lnTo>
+                    <a:pt x="755724" y="624900"/>
+                  </a:lnTo>
+                  <a:lnTo>
+                    <a:pt x="826069" y="664063"/>
+                  </a:lnTo>
+                  <a:lnTo>
+                    <a:pt x="896413" y="700800"/>
+                  </a:lnTo>
+                  <a:lnTo>
+                    <a:pt x="966758" y="735261"/>
+                  </a:lnTo>
+                  <a:lnTo>
+                    <a:pt x="1037102" y="767588"/>
+                  </a:lnTo>
+                  <a:lnTo>
+                    <a:pt x="1107447" y="797913"/>
+                  </a:lnTo>
+                  <a:lnTo>
+                    <a:pt x="1177791" y="826360"/>
+                  </a:lnTo>
+                  <a:lnTo>
+                    <a:pt x="1248136" y="853044"/>
+                  </a:lnTo>
+                  <a:lnTo>
+                    <a:pt x="1318480" y="878076"/>
+                  </a:lnTo>
+                  <a:lnTo>
+                    <a:pt x="1388825" y="901558"/>
+                  </a:lnTo>
+                  <a:lnTo>
+                    <a:pt x="1459169" y="923585"/>
+                  </a:lnTo>
+                  <a:lnTo>
+                    <a:pt x="1529514" y="944248"/>
+                  </a:lnTo>
+                  <a:lnTo>
+                    <a:pt x="1599858" y="959993"/>
+                  </a:lnTo>
+                  <a:lnTo>
+                    <a:pt x="1670203" y="966875"/>
+                  </a:lnTo>
+                  <a:lnTo>
+                    <a:pt x="1740547" y="973598"/>
+                  </a:lnTo>
+                  <a:lnTo>
+                    <a:pt x="1810892" y="980165"/>
+                  </a:lnTo>
+                  <a:lnTo>
+                    <a:pt x="1881236" y="986580"/>
+                  </a:lnTo>
+                  <a:lnTo>
+                    <a:pt x="1951581" y="992846"/>
+                  </a:lnTo>
+                  <a:lnTo>
+                    <a:pt x="2021925" y="998968"/>
+                  </a:lnTo>
+                  <a:lnTo>
+                    <a:pt x="2092270" y="1004947"/>
+                  </a:lnTo>
+                  <a:lnTo>
+                    <a:pt x="2162614" y="1010789"/>
+                  </a:lnTo>
+                  <a:lnTo>
+                    <a:pt x="2232959" y="1016495"/>
+                  </a:lnTo>
+                  <a:lnTo>
+                    <a:pt x="2303303" y="1022068"/>
+                  </a:lnTo>
+                  <a:lnTo>
+                    <a:pt x="2373648" y="1027513"/>
+                  </a:lnTo>
+                  <a:lnTo>
+                    <a:pt x="2443992" y="1032832"/>
+                  </a:lnTo>
+                  <a:lnTo>
+                    <a:pt x="2514337" y="1038027"/>
+                  </a:lnTo>
+                  <a:lnTo>
+                    <a:pt x="2584681" y="1043102"/>
+                  </a:lnTo>
+                  <a:lnTo>
+                    <a:pt x="2655026" y="1048060"/>
+                  </a:lnTo>
+                  <a:lnTo>
+                    <a:pt x="2725370" y="1052903"/>
+                  </a:lnTo>
+                  <a:lnTo>
+                    <a:pt x="2795715" y="1057634"/>
+                  </a:lnTo>
+                  <a:lnTo>
+                    <a:pt x="2866059" y="1062255"/>
+                  </a:lnTo>
+                  <a:lnTo>
+                    <a:pt x="2936404" y="1066769"/>
+                  </a:lnTo>
+                  <a:lnTo>
+                    <a:pt x="3006748" y="1071179"/>
+                  </a:lnTo>
+                  <a:lnTo>
+                    <a:pt x="3077093" y="1075486"/>
+                  </a:lnTo>
+                  <a:lnTo>
+                    <a:pt x="3147437" y="1079694"/>
+                  </a:lnTo>
+                  <a:lnTo>
+                    <a:pt x="3217782" y="1083804"/>
+                  </a:lnTo>
+                  <a:lnTo>
+                    <a:pt x="3288126" y="1087819"/>
+                  </a:lnTo>
+                  <a:lnTo>
+                    <a:pt x="3358471" y="1091742"/>
+                  </a:lnTo>
+                  <a:lnTo>
+                    <a:pt x="3428815" y="1095573"/>
+                  </a:lnTo>
+                  <a:lnTo>
+                    <a:pt x="3499159" y="1099316"/>
+                  </a:lnTo>
+                  <a:lnTo>
+                    <a:pt x="3569504" y="1102972"/>
+                  </a:lnTo>
+                  <a:lnTo>
+                    <a:pt x="3639848" y="1106543"/>
+                  </a:lnTo>
+                  <a:lnTo>
+                    <a:pt x="3710193" y="1110032"/>
+                  </a:lnTo>
+                  <a:lnTo>
+                    <a:pt x="3780537" y="1113440"/>
+                  </a:lnTo>
+                  <a:lnTo>
+                    <a:pt x="3850882" y="1116769"/>
+                  </a:lnTo>
+                  <a:lnTo>
+                    <a:pt x="3921226" y="1120020"/>
+                  </a:lnTo>
+                  <a:lnTo>
+                    <a:pt x="3991571" y="1123197"/>
+                  </a:lnTo>
+                  <a:lnTo>
+                    <a:pt x="4061915" y="1126300"/>
+                  </a:lnTo>
+                  <a:lnTo>
+                    <a:pt x="4132260" y="1129331"/>
+                  </a:lnTo>
+                  <a:lnTo>
+                    <a:pt x="4202604" y="1132292"/>
+                  </a:lnTo>
+                  <a:lnTo>
+                    <a:pt x="4272949" y="1135184"/>
+                  </a:lnTo>
+                  <a:lnTo>
+                    <a:pt x="4343293" y="1138010"/>
+                  </a:lnTo>
+                  <a:lnTo>
+                    <a:pt x="4413638" y="1140770"/>
+                  </a:lnTo>
+                  <a:lnTo>
+                    <a:pt x="4483982" y="1143466"/>
+                  </a:lnTo>
+                  <a:lnTo>
+                    <a:pt x="4554327" y="1146100"/>
+                  </a:lnTo>
+                  <a:lnTo>
+                    <a:pt x="4624671" y="1148672"/>
+                  </a:lnTo>
+                  <a:lnTo>
+                    <a:pt x="4695016" y="1151185"/>
+                  </a:lnTo>
+                  <a:lnTo>
+                    <a:pt x="4765360" y="1153640"/>
+                  </a:lnTo>
+                  <a:lnTo>
+                    <a:pt x="4835705" y="1156038"/>
+                  </a:lnTo>
+                  <a:lnTo>
+                    <a:pt x="4906049" y="1158381"/>
+                  </a:lnTo>
+                  <a:lnTo>
+                    <a:pt x="4976394" y="1160669"/>
+                  </a:lnTo>
+                  <a:lnTo>
+                    <a:pt x="5046738" y="1162904"/>
+                  </a:lnTo>
+                  <a:lnTo>
+                    <a:pt x="5117083" y="1165088"/>
+                  </a:lnTo>
+                  <a:lnTo>
+                    <a:pt x="5187427" y="1167221"/>
                   </a:lnTo>
                 </a:path>
               </a:pathLst>
@@ -4090,270 +3800,595 @@
           </p:nvSpPr>
           <p:spPr>
             <a:xfrm>
-              <a:off x="2235385" y="2073503"/>
-              <a:ext cx="6027293" cy="3395541"/>
+              <a:off x="1235312" y="2485234"/>
+              <a:ext cx="6964104" cy="903799"/>
             </a:xfrm>
             <a:custGeom>
               <a:avLst/>
               <a:pathLst>
-                <a:path w="6027293" h="3395541">
+                <a:path w="6964104" h="903799">
+                  <a:moveTo>
+                    <a:pt x="6964104" y="903799"/>
+                  </a:moveTo>
+                  <a:lnTo>
+                    <a:pt x="6893760" y="903056"/>
+                  </a:lnTo>
+                  <a:lnTo>
+                    <a:pt x="6823415" y="902263"/>
+                  </a:lnTo>
+                  <a:lnTo>
+                    <a:pt x="6753071" y="901418"/>
+                  </a:lnTo>
+                  <a:lnTo>
+                    <a:pt x="6682726" y="900518"/>
+                  </a:lnTo>
+                  <a:lnTo>
+                    <a:pt x="6612382" y="899557"/>
+                  </a:lnTo>
+                  <a:lnTo>
+                    <a:pt x="6542037" y="898534"/>
+                  </a:lnTo>
+                  <a:lnTo>
+                    <a:pt x="6471693" y="897443"/>
+                  </a:lnTo>
+                  <a:lnTo>
+                    <a:pt x="6401348" y="896280"/>
+                  </a:lnTo>
+                  <a:lnTo>
+                    <a:pt x="6331004" y="895040"/>
+                  </a:lnTo>
+                  <a:lnTo>
+                    <a:pt x="6260659" y="893718"/>
+                  </a:lnTo>
+                  <a:lnTo>
+                    <a:pt x="6190315" y="892309"/>
+                  </a:lnTo>
+                  <a:lnTo>
+                    <a:pt x="6119970" y="890806"/>
+                  </a:lnTo>
+                  <a:lnTo>
+                    <a:pt x="6049626" y="889205"/>
+                  </a:lnTo>
+                  <a:lnTo>
+                    <a:pt x="5979281" y="887498"/>
+                  </a:lnTo>
+                  <a:lnTo>
+                    <a:pt x="5908937" y="885678"/>
+                  </a:lnTo>
+                  <a:lnTo>
+                    <a:pt x="5838592" y="883738"/>
+                  </a:lnTo>
+                  <a:lnTo>
+                    <a:pt x="5768248" y="881670"/>
+                  </a:lnTo>
+                  <a:lnTo>
+                    <a:pt x="5697903" y="879466"/>
+                  </a:lnTo>
+                  <a:lnTo>
+                    <a:pt x="5627559" y="877115"/>
+                  </a:lnTo>
+                  <a:lnTo>
+                    <a:pt x="5557214" y="874610"/>
+                  </a:lnTo>
+                  <a:lnTo>
+                    <a:pt x="5486870" y="871939"/>
+                  </a:lnTo>
+                  <a:lnTo>
+                    <a:pt x="5416525" y="869092"/>
+                  </a:lnTo>
+                  <a:lnTo>
+                    <a:pt x="5346181" y="866057"/>
+                  </a:lnTo>
+                  <a:lnTo>
+                    <a:pt x="5275836" y="862822"/>
+                  </a:lnTo>
+                  <a:lnTo>
+                    <a:pt x="5205492" y="859373"/>
+                  </a:lnTo>
+                  <a:lnTo>
+                    <a:pt x="5135147" y="855696"/>
+                  </a:lnTo>
+                  <a:lnTo>
+                    <a:pt x="5064803" y="851777"/>
+                  </a:lnTo>
+                  <a:lnTo>
+                    <a:pt x="4994458" y="847598"/>
+                  </a:lnTo>
+                  <a:lnTo>
+                    <a:pt x="4924114" y="843144"/>
+                  </a:lnTo>
+                  <a:lnTo>
+                    <a:pt x="4853769" y="838396"/>
+                  </a:lnTo>
+                  <a:lnTo>
+                    <a:pt x="4783425" y="833334"/>
+                  </a:lnTo>
+                  <a:lnTo>
+                    <a:pt x="4713080" y="827938"/>
+                  </a:lnTo>
+                  <a:lnTo>
+                    <a:pt x="4642736" y="822186"/>
+                  </a:lnTo>
+                  <a:lnTo>
+                    <a:pt x="4572391" y="816054"/>
+                  </a:lnTo>
+                  <a:lnTo>
+                    <a:pt x="4502047" y="809517"/>
+                  </a:lnTo>
+                  <a:lnTo>
+                    <a:pt x="4431702" y="802548"/>
+                  </a:lnTo>
+                  <a:lnTo>
+                    <a:pt x="4361358" y="795120"/>
+                  </a:lnTo>
+                  <a:lnTo>
+                    <a:pt x="4291013" y="787200"/>
+                  </a:lnTo>
+                  <a:lnTo>
+                    <a:pt x="4220669" y="778758"/>
+                  </a:lnTo>
+                  <a:lnTo>
+                    <a:pt x="4150324" y="769759"/>
+                  </a:lnTo>
+                  <a:lnTo>
+                    <a:pt x="4079980" y="760165"/>
+                  </a:lnTo>
+                  <a:lnTo>
+                    <a:pt x="4009635" y="749938"/>
+                  </a:lnTo>
+                  <a:lnTo>
+                    <a:pt x="3939291" y="739036"/>
+                  </a:lnTo>
+                  <a:lnTo>
+                    <a:pt x="3868946" y="727414"/>
+                  </a:lnTo>
+                  <a:lnTo>
+                    <a:pt x="3798602" y="715025"/>
+                  </a:lnTo>
+                  <a:lnTo>
+                    <a:pt x="3728257" y="701817"/>
+                  </a:lnTo>
+                  <a:lnTo>
+                    <a:pt x="3657913" y="687738"/>
+                  </a:lnTo>
+                  <a:lnTo>
+                    <a:pt x="3587569" y="672729"/>
+                  </a:lnTo>
+                  <a:lnTo>
+                    <a:pt x="3517224" y="656729"/>
+                  </a:lnTo>
+                  <a:lnTo>
+                    <a:pt x="3446880" y="639672"/>
+                  </a:lnTo>
+                  <a:lnTo>
+                    <a:pt x="3376535" y="621489"/>
+                  </a:lnTo>
+                  <a:lnTo>
+                    <a:pt x="3306191" y="610806"/>
+                  </a:lnTo>
+                  <a:lnTo>
+                    <a:pt x="3235846" y="603593"/>
+                  </a:lnTo>
+                  <a:lnTo>
+                    <a:pt x="3165502" y="596210"/>
+                  </a:lnTo>
+                  <a:lnTo>
+                    <a:pt x="3095157" y="588652"/>
+                  </a:lnTo>
+                  <a:lnTo>
+                    <a:pt x="3024813" y="580914"/>
+                  </a:lnTo>
+                  <a:lnTo>
+                    <a:pt x="2954468" y="572993"/>
+                  </a:lnTo>
+                  <a:lnTo>
+                    <a:pt x="2884124" y="564885"/>
+                  </a:lnTo>
+                  <a:lnTo>
+                    <a:pt x="2813779" y="556584"/>
+                  </a:lnTo>
+                  <a:lnTo>
+                    <a:pt x="2743435" y="548086"/>
+                  </a:lnTo>
+                  <a:lnTo>
+                    <a:pt x="2673090" y="539387"/>
+                  </a:lnTo>
+                  <a:lnTo>
+                    <a:pt x="2602746" y="530482"/>
+                  </a:lnTo>
+                  <a:lnTo>
+                    <a:pt x="2532401" y="521366"/>
+                  </a:lnTo>
+                  <a:lnTo>
+                    <a:pt x="2462057" y="512033"/>
+                  </a:lnTo>
+                  <a:lnTo>
+                    <a:pt x="2391712" y="502480"/>
+                  </a:lnTo>
+                  <a:lnTo>
+                    <a:pt x="2321368" y="492700"/>
+                  </a:lnTo>
+                  <a:lnTo>
+                    <a:pt x="2251023" y="482688"/>
+                  </a:lnTo>
+                  <a:lnTo>
+                    <a:pt x="2180679" y="472438"/>
+                  </a:lnTo>
+                  <a:lnTo>
+                    <a:pt x="2110334" y="461946"/>
+                  </a:lnTo>
+                  <a:lnTo>
+                    <a:pt x="2039990" y="451205"/>
+                  </a:lnTo>
+                  <a:lnTo>
+                    <a:pt x="1969645" y="440209"/>
+                  </a:lnTo>
+                  <a:lnTo>
+                    <a:pt x="1899301" y="428953"/>
+                  </a:lnTo>
+                  <a:lnTo>
+                    <a:pt x="1828956" y="417430"/>
+                  </a:lnTo>
+                  <a:lnTo>
+                    <a:pt x="1758612" y="405634"/>
+                  </a:lnTo>
+                  <a:lnTo>
+                    <a:pt x="1688267" y="393558"/>
+                  </a:lnTo>
+                  <a:lnTo>
+                    <a:pt x="1617923" y="381196"/>
+                  </a:lnTo>
+                  <a:lnTo>
+                    <a:pt x="1547578" y="368541"/>
+                  </a:lnTo>
+                  <a:lnTo>
+                    <a:pt x="1477234" y="355586"/>
+                  </a:lnTo>
+                  <a:lnTo>
+                    <a:pt x="1406889" y="342323"/>
+                  </a:lnTo>
+                  <a:lnTo>
+                    <a:pt x="1336545" y="328747"/>
+                  </a:lnTo>
+                  <a:lnTo>
+                    <a:pt x="1266200" y="314848"/>
+                  </a:lnTo>
+                  <a:lnTo>
+                    <a:pt x="1195856" y="300620"/>
+                  </a:lnTo>
+                  <a:lnTo>
+                    <a:pt x="1125511" y="286055"/>
+                  </a:lnTo>
+                  <a:lnTo>
+                    <a:pt x="1055167" y="271145"/>
+                  </a:lnTo>
+                  <a:lnTo>
+                    <a:pt x="984822" y="255881"/>
+                  </a:lnTo>
+                  <a:lnTo>
+                    <a:pt x="914478" y="240255"/>
+                  </a:lnTo>
+                  <a:lnTo>
+                    <a:pt x="844133" y="224259"/>
+                  </a:lnTo>
+                  <a:lnTo>
+                    <a:pt x="773789" y="207884"/>
+                  </a:lnTo>
+                  <a:lnTo>
+                    <a:pt x="703444" y="191120"/>
+                  </a:lnTo>
+                  <a:lnTo>
+                    <a:pt x="633100" y="173959"/>
+                  </a:lnTo>
+                  <a:lnTo>
+                    <a:pt x="562755" y="156392"/>
+                  </a:lnTo>
+                  <a:lnTo>
+                    <a:pt x="492411" y="138408"/>
+                  </a:lnTo>
+                  <a:lnTo>
+                    <a:pt x="422066" y="119997"/>
+                  </a:lnTo>
+                  <a:lnTo>
+                    <a:pt x="351722" y="101151"/>
+                  </a:lnTo>
+                  <a:lnTo>
+                    <a:pt x="281377" y="81857"/>
+                  </a:lnTo>
+                  <a:lnTo>
+                    <a:pt x="211033" y="62106"/>
+                  </a:lnTo>
+                  <a:lnTo>
+                    <a:pt x="140688" y="41887"/>
+                  </a:lnTo>
+                  <a:lnTo>
+                    <a:pt x="70344" y="21189"/>
+                  </a:lnTo>
+                  <a:lnTo>
+                    <a:pt x="0" y="0"/>
+                  </a:lnTo>
+                </a:path>
+              </a:pathLst>
+            </a:custGeom>
+          </p:spPr>
+          <p:txBody>
+            <a:bodyPr/>
+            <a:lstStyle/>
+            <a:p/>
+          </p:txBody>
+        </p:sp>
+        <p:sp>
+          <p:nvSpPr>
+            <p:cNvPr id="24" name="pl24"/>
+            <p:cNvSpPr/>
+            <p:nvPr/>
+          </p:nvSpPr>
+          <p:spPr>
+            <a:xfrm>
+              <a:off x="2279674" y="2143092"/>
+              <a:ext cx="5919742" cy="1225370"/>
+            </a:xfrm>
+            <a:custGeom>
+              <a:avLst/>
+              <a:pathLst>
+                <a:path w="5919742" h="1225370">
                   <a:moveTo>
                     <a:pt x="0" y="0"/>
                   </a:moveTo>
                   <a:lnTo>
-                    <a:pt x="11001" y="23730"/>
-                  </a:lnTo>
-                  <a:lnTo>
-                    <a:pt x="82624" y="171620"/>
-                  </a:lnTo>
-                  <a:lnTo>
-                    <a:pt x="154246" y="313188"/>
-                  </a:lnTo>
-                  <a:lnTo>
-                    <a:pt x="225869" y="448706"/>
-                  </a:lnTo>
-                  <a:lnTo>
-                    <a:pt x="297491" y="578431"/>
-                  </a:lnTo>
-                  <a:lnTo>
-                    <a:pt x="369114" y="702611"/>
-                  </a:lnTo>
-                  <a:lnTo>
-                    <a:pt x="440736" y="821484"/>
-                  </a:lnTo>
-                  <a:lnTo>
-                    <a:pt x="512359" y="935275"/>
-                  </a:lnTo>
-                  <a:lnTo>
-                    <a:pt x="583981" y="1044203"/>
-                  </a:lnTo>
-                  <a:lnTo>
-                    <a:pt x="655604" y="1148475"/>
-                  </a:lnTo>
-                  <a:lnTo>
-                    <a:pt x="727226" y="1248290"/>
-                  </a:lnTo>
-                  <a:lnTo>
-                    <a:pt x="798849" y="1343839"/>
-                  </a:lnTo>
-                  <a:lnTo>
-                    <a:pt x="870471" y="1435304"/>
-                  </a:lnTo>
-                  <a:lnTo>
-                    <a:pt x="942094" y="1522860"/>
-                  </a:lnTo>
-                  <a:lnTo>
-                    <a:pt x="1013716" y="1606673"/>
-                  </a:lnTo>
-                  <a:lnTo>
-                    <a:pt x="1085339" y="1686903"/>
-                  </a:lnTo>
-                  <a:lnTo>
-                    <a:pt x="1156962" y="1763705"/>
-                  </a:lnTo>
-                  <a:lnTo>
-                    <a:pt x="1228584" y="1837224"/>
-                  </a:lnTo>
-                  <a:lnTo>
-                    <a:pt x="1300207" y="1907600"/>
-                  </a:lnTo>
-                  <a:lnTo>
-                    <a:pt x="1371829" y="1974968"/>
-                  </a:lnTo>
-                  <a:lnTo>
-                    <a:pt x="1443452" y="2039457"/>
-                  </a:lnTo>
-                  <a:lnTo>
-                    <a:pt x="1515074" y="2101190"/>
-                  </a:lnTo>
-                  <a:lnTo>
-                    <a:pt x="1586697" y="2160284"/>
-                  </a:lnTo>
-                  <a:lnTo>
-                    <a:pt x="1658319" y="2216852"/>
-                  </a:lnTo>
-                  <a:lnTo>
-                    <a:pt x="1729942" y="2271002"/>
-                  </a:lnTo>
-                  <a:lnTo>
-                    <a:pt x="1801564" y="2322838"/>
-                  </a:lnTo>
-                  <a:lnTo>
-                    <a:pt x="1873187" y="2372458"/>
-                  </a:lnTo>
-                  <a:lnTo>
-                    <a:pt x="1944809" y="2419957"/>
-                  </a:lnTo>
-                  <a:lnTo>
-                    <a:pt x="2016432" y="2465426"/>
-                  </a:lnTo>
-                  <a:lnTo>
-                    <a:pt x="2088054" y="2508951"/>
-                  </a:lnTo>
-                  <a:lnTo>
-                    <a:pt x="2159677" y="2550616"/>
-                  </a:lnTo>
-                  <a:lnTo>
-                    <a:pt x="2231299" y="2590501"/>
-                  </a:lnTo>
-                  <a:lnTo>
-                    <a:pt x="2302922" y="2628680"/>
-                  </a:lnTo>
-                  <a:lnTo>
-                    <a:pt x="2374544" y="2665228"/>
-                  </a:lnTo>
-                  <a:lnTo>
-                    <a:pt x="2446167" y="2700213"/>
-                  </a:lnTo>
-                  <a:lnTo>
-                    <a:pt x="2517790" y="2733703"/>
-                  </a:lnTo>
-                  <a:lnTo>
-                    <a:pt x="2589412" y="2765762"/>
-                  </a:lnTo>
-                  <a:lnTo>
-                    <a:pt x="2661035" y="2796451"/>
-                  </a:lnTo>
-                  <a:lnTo>
-                    <a:pt x="2732657" y="2825827"/>
-                  </a:lnTo>
-                  <a:lnTo>
-                    <a:pt x="2804280" y="2853948"/>
-                  </a:lnTo>
-                  <a:lnTo>
-                    <a:pt x="2875902" y="2880867"/>
-                  </a:lnTo>
-                  <a:lnTo>
-                    <a:pt x="2947525" y="2906636"/>
-                  </a:lnTo>
-                  <a:lnTo>
-                    <a:pt x="3019147" y="2931303"/>
-                  </a:lnTo>
-                  <a:lnTo>
-                    <a:pt x="3090770" y="2954916"/>
-                  </a:lnTo>
-                  <a:lnTo>
-                    <a:pt x="3162392" y="2977519"/>
-                  </a:lnTo>
-                  <a:lnTo>
-                    <a:pt x="3234015" y="2999157"/>
-                  </a:lnTo>
-                  <a:lnTo>
-                    <a:pt x="3305637" y="3019869"/>
-                  </a:lnTo>
-                  <a:lnTo>
-                    <a:pt x="3377260" y="3039697"/>
-                  </a:lnTo>
-                  <a:lnTo>
-                    <a:pt x="3448882" y="3058676"/>
-                  </a:lnTo>
-                  <a:lnTo>
-                    <a:pt x="3520505" y="3076845"/>
-                  </a:lnTo>
-                  <a:lnTo>
-                    <a:pt x="3592127" y="3094237"/>
-                  </a:lnTo>
-                  <a:lnTo>
-                    <a:pt x="3663750" y="3110885"/>
-                  </a:lnTo>
-                  <a:lnTo>
-                    <a:pt x="3735372" y="3126822"/>
-                  </a:lnTo>
-                  <a:lnTo>
-                    <a:pt x="3806995" y="3142078"/>
-                  </a:lnTo>
-                  <a:lnTo>
-                    <a:pt x="3878618" y="3156682"/>
-                  </a:lnTo>
-                  <a:lnTo>
-                    <a:pt x="3950240" y="3170661"/>
-                  </a:lnTo>
-                  <a:lnTo>
-                    <a:pt x="4021863" y="3184043"/>
-                  </a:lnTo>
-                  <a:lnTo>
-                    <a:pt x="4093485" y="3196854"/>
-                  </a:lnTo>
-                  <a:lnTo>
-                    <a:pt x="4165108" y="3209116"/>
-                  </a:lnTo>
-                  <a:lnTo>
-                    <a:pt x="4236730" y="3220854"/>
-                  </a:lnTo>
-                  <a:lnTo>
-                    <a:pt x="4308353" y="3232091"/>
-                  </a:lnTo>
-                  <a:lnTo>
-                    <a:pt x="4379975" y="3242847"/>
-                  </a:lnTo>
-                  <a:lnTo>
-                    <a:pt x="4451598" y="3253144"/>
-                  </a:lnTo>
-                  <a:lnTo>
-                    <a:pt x="4523220" y="3263001"/>
-                  </a:lnTo>
-                  <a:lnTo>
-                    <a:pt x="4594843" y="3272436"/>
-                  </a:lnTo>
-                  <a:lnTo>
-                    <a:pt x="4666465" y="3281468"/>
-                  </a:lnTo>
-                  <a:lnTo>
-                    <a:pt x="4738088" y="3290114"/>
-                  </a:lnTo>
-                  <a:lnTo>
-                    <a:pt x="4809710" y="3298390"/>
-                  </a:lnTo>
-                  <a:lnTo>
-                    <a:pt x="4881333" y="3306313"/>
-                  </a:lnTo>
-                  <a:lnTo>
-                    <a:pt x="4952955" y="3313896"/>
-                  </a:lnTo>
-                  <a:lnTo>
-                    <a:pt x="5024578" y="3321156"/>
-                  </a:lnTo>
-                  <a:lnTo>
-                    <a:pt x="5096200" y="3328106"/>
-                  </a:lnTo>
-                  <a:lnTo>
-                    <a:pt x="5167823" y="3334758"/>
-                  </a:lnTo>
-                  <a:lnTo>
-                    <a:pt x="5239446" y="3341126"/>
-                  </a:lnTo>
-                  <a:lnTo>
-                    <a:pt x="5311068" y="3347222"/>
-                  </a:lnTo>
-                  <a:lnTo>
-                    <a:pt x="5382691" y="3353058"/>
-                  </a:lnTo>
-                  <a:lnTo>
-                    <a:pt x="5454313" y="3358644"/>
-                  </a:lnTo>
-                  <a:lnTo>
-                    <a:pt x="5525936" y="3363991"/>
-                  </a:lnTo>
-                  <a:lnTo>
-                    <a:pt x="5597558" y="3369109"/>
-                  </a:lnTo>
-                  <a:lnTo>
-                    <a:pt x="5669181" y="3374009"/>
-                  </a:lnTo>
-                  <a:lnTo>
-                    <a:pt x="5740803" y="3378700"/>
-                  </a:lnTo>
-                  <a:lnTo>
-                    <a:pt x="5812426" y="3383190"/>
-                  </a:lnTo>
-                  <a:lnTo>
-                    <a:pt x="5884048" y="3387488"/>
-                  </a:lnTo>
-                  <a:lnTo>
-                    <a:pt x="5955671" y="3391602"/>
-                  </a:lnTo>
-                  <a:lnTo>
-                    <a:pt x="6027293" y="3395541"/>
+                    <a:pt x="10805" y="8563"/>
+                  </a:lnTo>
+                  <a:lnTo>
+                    <a:pt x="81149" y="61933"/>
+                  </a:lnTo>
+                  <a:lnTo>
+                    <a:pt x="151494" y="113022"/>
+                  </a:lnTo>
+                  <a:lnTo>
+                    <a:pt x="221838" y="161927"/>
+                  </a:lnTo>
+                  <a:lnTo>
+                    <a:pt x="292183" y="208742"/>
+                  </a:lnTo>
+                  <a:lnTo>
+                    <a:pt x="362527" y="253556"/>
+                  </a:lnTo>
+                  <a:lnTo>
+                    <a:pt x="432872" y="296454"/>
+                  </a:lnTo>
+                  <a:lnTo>
+                    <a:pt x="503216" y="337519"/>
+                  </a:lnTo>
+                  <a:lnTo>
+                    <a:pt x="573561" y="376828"/>
+                  </a:lnTo>
+                  <a:lnTo>
+                    <a:pt x="643905" y="414457"/>
+                  </a:lnTo>
+                  <a:lnTo>
+                    <a:pt x="714250" y="450478"/>
+                  </a:lnTo>
+                  <a:lnTo>
+                    <a:pt x="784594" y="484960"/>
+                  </a:lnTo>
+                  <a:lnTo>
+                    <a:pt x="854939" y="517967"/>
+                  </a:lnTo>
+                  <a:lnTo>
+                    <a:pt x="925283" y="549564"/>
+                  </a:lnTo>
+                  <a:lnTo>
+                    <a:pt x="995628" y="579810"/>
+                  </a:lnTo>
+                  <a:lnTo>
+                    <a:pt x="1065972" y="608763"/>
+                  </a:lnTo>
+                  <a:lnTo>
+                    <a:pt x="1136317" y="636479"/>
+                  </a:lnTo>
+                  <a:lnTo>
+                    <a:pt x="1206661" y="663010"/>
+                  </a:lnTo>
+                  <a:lnTo>
+                    <a:pt x="1277006" y="688408"/>
+                  </a:lnTo>
+                  <a:lnTo>
+                    <a:pt x="1347350" y="712719"/>
+                  </a:lnTo>
+                  <a:lnTo>
+                    <a:pt x="1417695" y="735992"/>
+                  </a:lnTo>
+                  <a:lnTo>
+                    <a:pt x="1488039" y="758270"/>
+                  </a:lnTo>
+                  <a:lnTo>
+                    <a:pt x="1558384" y="779595"/>
+                  </a:lnTo>
+                  <a:lnTo>
+                    <a:pt x="1628728" y="800009"/>
+                  </a:lnTo>
+                  <a:lnTo>
+                    <a:pt x="1699073" y="819551"/>
+                  </a:lnTo>
+                  <a:lnTo>
+                    <a:pt x="1769417" y="838257"/>
+                  </a:lnTo>
+                  <a:lnTo>
+                    <a:pt x="1839762" y="856164"/>
+                  </a:lnTo>
+                  <a:lnTo>
+                    <a:pt x="1910106" y="873305"/>
+                  </a:lnTo>
+                  <a:lnTo>
+                    <a:pt x="1980451" y="889714"/>
+                  </a:lnTo>
+                  <a:lnTo>
+                    <a:pt x="2050795" y="905421"/>
+                  </a:lnTo>
+                  <a:lnTo>
+                    <a:pt x="2121140" y="920457"/>
+                  </a:lnTo>
+                  <a:lnTo>
+                    <a:pt x="2191484" y="934850"/>
+                  </a:lnTo>
+                  <a:lnTo>
+                    <a:pt x="2261828" y="948629"/>
+                  </a:lnTo>
+                  <a:lnTo>
+                    <a:pt x="2332173" y="961818"/>
+                  </a:lnTo>
+                  <a:lnTo>
+                    <a:pt x="2402517" y="974443"/>
+                  </a:lnTo>
+                  <a:lnTo>
+                    <a:pt x="2472862" y="986529"/>
+                  </a:lnTo>
+                  <a:lnTo>
+                    <a:pt x="2543206" y="998098"/>
+                  </a:lnTo>
+                  <a:lnTo>
+                    <a:pt x="2613551" y="1009173"/>
+                  </a:lnTo>
+                  <a:lnTo>
+                    <a:pt x="2683895" y="1019774"/>
+                  </a:lnTo>
+                  <a:lnTo>
+                    <a:pt x="2754240" y="1029922"/>
+                  </a:lnTo>
+                  <a:lnTo>
+                    <a:pt x="2824584" y="1039637"/>
+                  </a:lnTo>
+                  <a:lnTo>
+                    <a:pt x="2894929" y="1048936"/>
+                  </a:lnTo>
+                  <a:lnTo>
+                    <a:pt x="2965273" y="1057838"/>
+                  </a:lnTo>
+                  <a:lnTo>
+                    <a:pt x="3035618" y="1066359"/>
+                  </a:lnTo>
+                  <a:lnTo>
+                    <a:pt x="3105962" y="1074516"/>
+                  </a:lnTo>
+                  <a:lnTo>
+                    <a:pt x="3176307" y="1082325"/>
+                  </a:lnTo>
+                  <a:lnTo>
+                    <a:pt x="3246651" y="1089799"/>
+                  </a:lnTo>
+                  <a:lnTo>
+                    <a:pt x="3316996" y="1096955"/>
+                  </a:lnTo>
+                  <a:lnTo>
+                    <a:pt x="3387340" y="1103804"/>
+                  </a:lnTo>
+                  <a:lnTo>
+                    <a:pt x="3457685" y="1110361"/>
+                  </a:lnTo>
+                  <a:lnTo>
+                    <a:pt x="3528029" y="1116637"/>
+                  </a:lnTo>
+                  <a:lnTo>
+                    <a:pt x="3598374" y="1122645"/>
+                  </a:lnTo>
+                  <a:lnTo>
+                    <a:pt x="3668718" y="1128396"/>
+                  </a:lnTo>
+                  <a:lnTo>
+                    <a:pt x="3739063" y="1133902"/>
+                  </a:lnTo>
+                  <a:lnTo>
+                    <a:pt x="3809407" y="1139172"/>
+                  </a:lnTo>
+                  <a:lnTo>
+                    <a:pt x="3879752" y="1144217"/>
+                  </a:lnTo>
+                  <a:lnTo>
+                    <a:pt x="3950096" y="1149046"/>
+                  </a:lnTo>
+                  <a:lnTo>
+                    <a:pt x="4020441" y="1153669"/>
+                  </a:lnTo>
+                  <a:lnTo>
+                    <a:pt x="4090785" y="1158094"/>
+                  </a:lnTo>
+                  <a:lnTo>
+                    <a:pt x="4161130" y="1162330"/>
+                  </a:lnTo>
+                  <a:lnTo>
+                    <a:pt x="4231474" y="1166385"/>
+                  </a:lnTo>
+                  <a:lnTo>
+                    <a:pt x="4301819" y="1170267"/>
+                  </a:lnTo>
+                  <a:lnTo>
+                    <a:pt x="4372163" y="1173983"/>
+                  </a:lnTo>
+                  <a:lnTo>
+                    <a:pt x="4442508" y="1177540"/>
+                  </a:lnTo>
+                  <a:lnTo>
+                    <a:pt x="4512852" y="1180945"/>
+                  </a:lnTo>
+                  <a:lnTo>
+                    <a:pt x="4583197" y="1184204"/>
+                  </a:lnTo>
+                  <a:lnTo>
+                    <a:pt x="4653541" y="1187324"/>
+                  </a:lnTo>
+                  <a:lnTo>
+                    <a:pt x="4723886" y="1190311"/>
+                  </a:lnTo>
+                  <a:lnTo>
+                    <a:pt x="4794230" y="1193170"/>
+                  </a:lnTo>
+                  <a:lnTo>
+                    <a:pt x="4864575" y="1195907"/>
+                  </a:lnTo>
+                  <a:lnTo>
+                    <a:pt x="4934919" y="1198527"/>
+                  </a:lnTo>
+                  <a:lnTo>
+                    <a:pt x="5005264" y="1201035"/>
+                  </a:lnTo>
+                  <a:lnTo>
+                    <a:pt x="5075608" y="1203435"/>
+                  </a:lnTo>
+                  <a:lnTo>
+                    <a:pt x="5145953" y="1205734"/>
+                  </a:lnTo>
+                  <a:lnTo>
+                    <a:pt x="5216297" y="1207933"/>
+                  </a:lnTo>
+                  <a:lnTo>
+                    <a:pt x="5286642" y="1210039"/>
+                  </a:lnTo>
+                  <a:lnTo>
+                    <a:pt x="5356986" y="1212055"/>
+                  </a:lnTo>
+                  <a:lnTo>
+                    <a:pt x="5427331" y="1213985"/>
+                  </a:lnTo>
+                  <a:lnTo>
+                    <a:pt x="5497675" y="1215832"/>
+                  </a:lnTo>
+                  <a:lnTo>
+                    <a:pt x="5568020" y="1217600"/>
+                  </a:lnTo>
+                  <a:lnTo>
+                    <a:pt x="5638364" y="1219293"/>
+                  </a:lnTo>
+                  <a:lnTo>
+                    <a:pt x="5708709" y="1220913"/>
+                  </a:lnTo>
+                  <a:lnTo>
+                    <a:pt x="5779053" y="1222464"/>
+                  </a:lnTo>
+                  <a:lnTo>
+                    <a:pt x="5849398" y="1223949"/>
+                  </a:lnTo>
+                  <a:lnTo>
+                    <a:pt x="5919742" y="1225370"/>
                   </a:lnTo>
                 </a:path>
               </a:pathLst>
@@ -4376,27 +4411,27 @@
         </p:sp>
         <p:sp>
           <p:nvSpPr>
-            <p:cNvPr id="24" name="pl24"/>
+            <p:cNvPr id="25" name="pl25"/>
             <p:cNvSpPr/>
             <p:nvPr/>
           </p:nvSpPr>
           <p:spPr>
             <a:xfrm>
-              <a:off x="817517" y="4727786"/>
-              <a:ext cx="7799693" cy="0"/>
+              <a:off x="887106" y="3100960"/>
+              <a:ext cx="7660515" cy="0"/>
             </a:xfrm>
             <a:custGeom>
               <a:avLst/>
               <a:pathLst>
-                <a:path w="7799693" h="0">
+                <a:path w="7660515" h="0">
                   <a:moveTo>
                     <a:pt x="0" y="0"/>
                   </a:moveTo>
                   <a:lnTo>
-                    <a:pt x="7799693" y="0"/>
-                  </a:lnTo>
-                  <a:lnTo>
-                    <a:pt x="7799693" y="0"/>
+                    <a:pt x="7660515" y="0"/>
+                  </a:lnTo>
+                  <a:lnTo>
+                    <a:pt x="7660515" y="0"/>
                   </a:lnTo>
                 </a:path>
               </a:pathLst>
@@ -4419,21 +4454,21 @@
         </p:sp>
         <p:sp>
           <p:nvSpPr>
-            <p:cNvPr id="25" name="pl25"/>
+            <p:cNvPr id="26" name="pl26"/>
             <p:cNvSpPr/>
             <p:nvPr/>
           </p:nvSpPr>
           <p:spPr>
             <a:xfrm>
-              <a:off x="4588151" y="2073503"/>
-              <a:ext cx="0" cy="3649639"/>
+              <a:off x="4590457" y="2143092"/>
+              <a:ext cx="0" cy="1317069"/>
             </a:xfrm>
             <a:custGeom>
               <a:avLst/>
               <a:pathLst>
-                <a:path w="0" h="3649639">
+                <a:path w="0" h="1317069">
                   <a:moveTo>
-                    <a:pt x="0" y="3649639"/>
+                    <a:pt x="0" y="1317069"/>
                   </a:moveTo>
                   <a:lnTo>
                     <a:pt x="0" y="0"/>
@@ -4462,13 +4497,13 @@
         </p:sp>
         <p:sp>
           <p:nvSpPr>
-            <p:cNvPr id="26" name="tx26"/>
+            <p:cNvPr id="27" name="tx27"/>
             <p:cNvSpPr/>
             <p:nvPr/>
           </p:nvSpPr>
           <p:spPr>
             <a:xfrm>
-              <a:off x="692708" y="5517199"/>
+              <a:off x="762297" y="3360243"/>
               <a:ext cx="62179" cy="80101"/>
             </a:xfrm>
             <a:prstGeom prst="rect">
@@ -4508,13 +4543,13 @@
         </p:sp>
         <p:sp>
           <p:nvSpPr>
-            <p:cNvPr id="27" name="tx27"/>
+            <p:cNvPr id="28" name="tx28"/>
             <p:cNvSpPr/>
             <p:nvPr/>
           </p:nvSpPr>
           <p:spPr>
             <a:xfrm>
-              <a:off x="692708" y="4687735"/>
+              <a:off x="762297" y="3060909"/>
               <a:ext cx="62179" cy="80101"/>
             </a:xfrm>
             <a:prstGeom prst="rect">
@@ -4554,13 +4589,13 @@
         </p:sp>
         <p:sp>
           <p:nvSpPr>
-            <p:cNvPr id="28" name="tx28"/>
+            <p:cNvPr id="29" name="tx29"/>
             <p:cNvSpPr/>
             <p:nvPr/>
           </p:nvSpPr>
           <p:spPr>
             <a:xfrm>
-              <a:off x="692708" y="3858272"/>
+              <a:off x="762297" y="2761575"/>
               <a:ext cx="62179" cy="80101"/>
             </a:xfrm>
             <a:prstGeom prst="rect">
@@ -4600,13 +4635,13 @@
         </p:sp>
         <p:sp>
           <p:nvSpPr>
-            <p:cNvPr id="29" name="tx29"/>
+            <p:cNvPr id="30" name="tx30"/>
             <p:cNvSpPr/>
             <p:nvPr/>
           </p:nvSpPr>
           <p:spPr>
             <a:xfrm>
-              <a:off x="692708" y="3028808"/>
+              <a:off x="762297" y="2462242"/>
               <a:ext cx="62179" cy="80101"/>
             </a:xfrm>
             <a:prstGeom prst="rect">
@@ -4646,13 +4681,13 @@
         </p:sp>
         <p:sp>
           <p:nvSpPr>
-            <p:cNvPr id="30" name="tx30"/>
+            <p:cNvPr id="31" name="tx31"/>
             <p:cNvSpPr/>
             <p:nvPr/>
           </p:nvSpPr>
           <p:spPr>
             <a:xfrm>
-              <a:off x="692708" y="2199345"/>
+              <a:off x="762297" y="2162908"/>
               <a:ext cx="62179" cy="80101"/>
             </a:xfrm>
             <a:prstGeom prst="rect">
@@ -4692,13 +4727,13 @@
         </p:sp>
         <p:sp>
           <p:nvSpPr>
-            <p:cNvPr id="31" name="tx31"/>
+            <p:cNvPr id="32" name="tx32"/>
             <p:cNvSpPr/>
             <p:nvPr/>
           </p:nvSpPr>
           <p:spPr>
             <a:xfrm>
-              <a:off x="2360651" y="5785772"/>
+              <a:off x="2401262" y="3522791"/>
               <a:ext cx="161574" cy="80101"/>
             </a:xfrm>
             <a:prstGeom prst="rect">
@@ -4738,13 +4773,13 @@
         </p:sp>
         <p:sp>
           <p:nvSpPr>
-            <p:cNvPr id="32" name="tx32"/>
+            <p:cNvPr id="33" name="tx33"/>
             <p:cNvSpPr/>
             <p:nvPr/>
           </p:nvSpPr>
           <p:spPr>
             <a:xfrm>
-              <a:off x="4561958" y="5785772"/>
+              <a:off x="4564176" y="3522791"/>
               <a:ext cx="62179" cy="80101"/>
             </a:xfrm>
             <a:prstGeom prst="rect">
@@ -4784,13 +4819,13 @@
         </p:sp>
         <p:sp>
           <p:nvSpPr>
-            <p:cNvPr id="33" name="tx33"/>
+            <p:cNvPr id="34" name="tx34"/>
             <p:cNvSpPr/>
             <p:nvPr/>
           </p:nvSpPr>
           <p:spPr>
             <a:xfrm>
-              <a:off x="6682478" y="5785772"/>
+              <a:off x="6646302" y="3522791"/>
               <a:ext cx="124358" cy="80101"/>
             </a:xfrm>
             <a:prstGeom prst="rect">
@@ -4830,13 +4865,13 @@
         </p:sp>
         <p:sp>
           <p:nvSpPr>
-            <p:cNvPr id="34" name="tx34"/>
+            <p:cNvPr id="35" name="tx35"/>
             <p:cNvSpPr/>
             <p:nvPr/>
           </p:nvSpPr>
           <p:spPr>
             <a:xfrm>
-              <a:off x="2928340" y="5925448"/>
+              <a:off x="2928340" y="3662467"/>
               <a:ext cx="3578047" cy="100218"/>
             </a:xfrm>
             <a:prstGeom prst="rect">
@@ -4876,13 +4911,13 @@
         </p:sp>
         <p:sp>
           <p:nvSpPr>
-            <p:cNvPr id="35" name="tx35"/>
+            <p:cNvPr id="36" name="tx36"/>
             <p:cNvSpPr/>
             <p:nvPr/>
           </p:nvSpPr>
           <p:spPr>
             <a:xfrm rot="-5400000">
-              <a:off x="68446" y="3848213"/>
+              <a:off x="138035" y="2751517"/>
               <a:ext cx="1016904" cy="100218"/>
             </a:xfrm>
             <a:prstGeom prst="rect">
@@ -4922,13 +4957,13 @@
         </p:sp>
         <p:sp>
           <p:nvSpPr>
-            <p:cNvPr id="36" name="tx36"/>
+            <p:cNvPr id="37" name="tx37"/>
             <p:cNvSpPr/>
             <p:nvPr/>
           </p:nvSpPr>
           <p:spPr>
             <a:xfrm>
-              <a:off x="817517" y="1896563"/>
+              <a:off x="887106" y="1966152"/>
               <a:ext cx="6388364" cy="82021"/>
             </a:xfrm>
             <a:prstGeom prst="rect">
@@ -4968,13 +5003,3511 @@
         </p:sp>
         <p:sp>
           <p:nvSpPr>
-            <p:cNvPr id="37" name="tx37"/>
+            <p:cNvPr id="38" name="tx38"/>
             <p:cNvSpPr/>
             <p:nvPr/>
           </p:nvSpPr>
           <p:spPr>
             <a:xfrm>
-              <a:off x="817517" y="1669789"/>
+              <a:off x="887106" y="1739378"/>
+              <a:ext cx="754380" cy="120152"/>
+            </a:xfrm>
+            <a:prstGeom prst="rect">
+              <a:avLst/>
+            </a:prstGeom>
+            <a:noFill/>
+          </p:spPr>
+          <p:txBody>
+            <a:bodyPr lIns="0" rIns="0" tIns="0" bIns="0" anchorCtr="1" anchor="ctr" wrap="none"/>
+            <a:lstStyle/>
+            <a:p>
+              <a:pPr algn="l" marL="0" marR="0" indent="0">
+                <a:lnSpc>
+                  <a:spcPts val="1320"/>
+                </a:lnSpc>
+                <a:spcBef>
+                  <a:spcPts val="0"/>
+                </a:spcBef>
+                <a:spcAft>
+                  <a:spcPts val="0"/>
+                </a:spcAft>
+              </a:pPr>
+              <a:r>
+                <a:rPr sz="1320">
+                  <a:solidFill>
+                    <a:srgbClr val="000000">
+                      <a:alpha val="100000"/>
+                    </a:srgbClr>
+                  </a:solidFill>
+                  <a:latin typeface="Helvetica"/>
+                  <a:cs typeface="Helvetica"/>
+                </a:rPr>
+                <a:t>Cytopenia</a:t>
+              </a:r>
+            </a:p>
+          </p:txBody>
+        </p:sp>
+        <p:sp>
+          <p:nvSpPr>
+            <p:cNvPr id="39" name="pl39"/>
+            <p:cNvSpPr/>
+            <p:nvPr/>
+          </p:nvSpPr>
+          <p:spPr>
+            <a:xfrm>
+              <a:off x="887106" y="5444019"/>
+              <a:ext cx="7660515" cy="0"/>
+            </a:xfrm>
+            <a:custGeom>
+              <a:avLst/>
+              <a:pathLst>
+                <a:path w="7660515" h="0">
+                  <a:moveTo>
+                    <a:pt x="0" y="0"/>
+                  </a:moveTo>
+                  <a:lnTo>
+                    <a:pt x="7660515" y="0"/>
+                  </a:lnTo>
+                  <a:lnTo>
+                    <a:pt x="7660515" y="0"/>
+                  </a:lnTo>
+                </a:path>
+              </a:pathLst>
+            </a:custGeom>
+            <a:ln w="6775" cap="flat">
+              <a:solidFill>
+                <a:srgbClr val="EBEBEB">
+                  <a:alpha val="100000"/>
+                </a:srgbClr>
+              </a:solidFill>
+              <a:prstDash val="solid"/>
+              <a:round/>
+            </a:ln>
+          </p:spPr>
+          <p:txBody>
+            <a:bodyPr/>
+            <a:lstStyle/>
+            <a:p/>
+          </p:txBody>
+        </p:sp>
+        <p:sp>
+          <p:nvSpPr>
+            <p:cNvPr id="40" name="pl40"/>
+            <p:cNvSpPr/>
+            <p:nvPr/>
+          </p:nvSpPr>
+          <p:spPr>
+            <a:xfrm>
+              <a:off x="887106" y="5144686"/>
+              <a:ext cx="7660515" cy="0"/>
+            </a:xfrm>
+            <a:custGeom>
+              <a:avLst/>
+              <a:pathLst>
+                <a:path w="7660515" h="0">
+                  <a:moveTo>
+                    <a:pt x="0" y="0"/>
+                  </a:moveTo>
+                  <a:lnTo>
+                    <a:pt x="7660515" y="0"/>
+                  </a:lnTo>
+                  <a:lnTo>
+                    <a:pt x="7660515" y="0"/>
+                  </a:lnTo>
+                </a:path>
+              </a:pathLst>
+            </a:custGeom>
+            <a:ln w="6775" cap="flat">
+              <a:solidFill>
+                <a:srgbClr val="EBEBEB">
+                  <a:alpha val="100000"/>
+                </a:srgbClr>
+              </a:solidFill>
+              <a:prstDash val="solid"/>
+              <a:round/>
+            </a:ln>
+          </p:spPr>
+          <p:txBody>
+            <a:bodyPr/>
+            <a:lstStyle/>
+            <a:p/>
+          </p:txBody>
+        </p:sp>
+        <p:sp>
+          <p:nvSpPr>
+            <p:cNvPr id="41" name="pl41"/>
+            <p:cNvSpPr/>
+            <p:nvPr/>
+          </p:nvSpPr>
+          <p:spPr>
+            <a:xfrm>
+              <a:off x="887106" y="4845352"/>
+              <a:ext cx="7660515" cy="0"/>
+            </a:xfrm>
+            <a:custGeom>
+              <a:avLst/>
+              <a:pathLst>
+                <a:path w="7660515" h="0">
+                  <a:moveTo>
+                    <a:pt x="0" y="0"/>
+                  </a:moveTo>
+                  <a:lnTo>
+                    <a:pt x="7660515" y="0"/>
+                  </a:lnTo>
+                  <a:lnTo>
+                    <a:pt x="7660515" y="0"/>
+                  </a:lnTo>
+                </a:path>
+              </a:pathLst>
+            </a:custGeom>
+            <a:ln w="6775" cap="flat">
+              <a:solidFill>
+                <a:srgbClr val="EBEBEB">
+                  <a:alpha val="100000"/>
+                </a:srgbClr>
+              </a:solidFill>
+              <a:prstDash val="solid"/>
+              <a:round/>
+            </a:ln>
+          </p:spPr>
+          <p:txBody>
+            <a:bodyPr/>
+            <a:lstStyle/>
+            <a:p/>
+          </p:txBody>
+        </p:sp>
+        <p:sp>
+          <p:nvSpPr>
+            <p:cNvPr id="42" name="pl42"/>
+            <p:cNvSpPr/>
+            <p:nvPr/>
+          </p:nvSpPr>
+          <p:spPr>
+            <a:xfrm>
+              <a:off x="887106" y="4546018"/>
+              <a:ext cx="7660515" cy="0"/>
+            </a:xfrm>
+            <a:custGeom>
+              <a:avLst/>
+              <a:pathLst>
+                <a:path w="7660515" h="0">
+                  <a:moveTo>
+                    <a:pt x="0" y="0"/>
+                  </a:moveTo>
+                  <a:lnTo>
+                    <a:pt x="7660515" y="0"/>
+                  </a:lnTo>
+                  <a:lnTo>
+                    <a:pt x="7660515" y="0"/>
+                  </a:lnTo>
+                </a:path>
+              </a:pathLst>
+            </a:custGeom>
+            <a:ln w="6775" cap="flat">
+              <a:solidFill>
+                <a:srgbClr val="EBEBEB">
+                  <a:alpha val="100000"/>
+                </a:srgbClr>
+              </a:solidFill>
+              <a:prstDash val="solid"/>
+              <a:round/>
+            </a:ln>
+          </p:spPr>
+          <p:txBody>
+            <a:bodyPr/>
+            <a:lstStyle/>
+            <a:p/>
+          </p:txBody>
+        </p:sp>
+        <p:sp>
+          <p:nvSpPr>
+            <p:cNvPr id="43" name="pl43"/>
+            <p:cNvSpPr/>
+            <p:nvPr/>
+          </p:nvSpPr>
+          <p:spPr>
+            <a:xfrm>
+              <a:off x="1636763" y="4336484"/>
+              <a:ext cx="0" cy="1317069"/>
+            </a:xfrm>
+            <a:custGeom>
+              <a:avLst/>
+              <a:pathLst>
+                <a:path w="0" h="1317069">
+                  <a:moveTo>
+                    <a:pt x="0" y="1317069"/>
+                  </a:moveTo>
+                  <a:lnTo>
+                    <a:pt x="0" y="0"/>
+                  </a:lnTo>
+                  <a:lnTo>
+                    <a:pt x="0" y="0"/>
+                  </a:lnTo>
+                </a:path>
+              </a:pathLst>
+            </a:custGeom>
+            <a:ln w="6775" cap="flat">
+              <a:solidFill>
+                <a:srgbClr val="EBEBEB">
+                  <a:alpha val="100000"/>
+                </a:srgbClr>
+              </a:solidFill>
+              <a:prstDash val="solid"/>
+              <a:round/>
+            </a:ln>
+          </p:spPr>
+          <p:txBody>
+            <a:bodyPr/>
+            <a:lstStyle/>
+            <a:p/>
+          </p:txBody>
+        </p:sp>
+        <p:sp>
+          <p:nvSpPr>
+            <p:cNvPr id="44" name="pl44"/>
+            <p:cNvSpPr/>
+            <p:nvPr/>
+          </p:nvSpPr>
+          <p:spPr>
+            <a:xfrm>
+              <a:off x="2482050" y="4336484"/>
+              <a:ext cx="0" cy="1317069"/>
+            </a:xfrm>
+            <a:custGeom>
+              <a:avLst/>
+              <a:pathLst>
+                <a:path w="0" h="1317069">
+                  <a:moveTo>
+                    <a:pt x="0" y="1317069"/>
+                  </a:moveTo>
+                  <a:lnTo>
+                    <a:pt x="0" y="0"/>
+                  </a:lnTo>
+                  <a:lnTo>
+                    <a:pt x="0" y="0"/>
+                  </a:lnTo>
+                </a:path>
+              </a:pathLst>
+            </a:custGeom>
+            <a:ln w="6775" cap="flat">
+              <a:solidFill>
+                <a:srgbClr val="EBEBEB">
+                  <a:alpha val="100000"/>
+                </a:srgbClr>
+              </a:solidFill>
+              <a:prstDash val="solid"/>
+              <a:round/>
+            </a:ln>
+          </p:spPr>
+          <p:txBody>
+            <a:bodyPr/>
+            <a:lstStyle/>
+            <a:p/>
+          </p:txBody>
+        </p:sp>
+        <p:sp>
+          <p:nvSpPr>
+            <p:cNvPr id="45" name="pl45"/>
+            <p:cNvSpPr/>
+            <p:nvPr/>
+          </p:nvSpPr>
+          <p:spPr>
+            <a:xfrm>
+              <a:off x="3327336" y="4336484"/>
+              <a:ext cx="0" cy="1317069"/>
+            </a:xfrm>
+            <a:custGeom>
+              <a:avLst/>
+              <a:pathLst>
+                <a:path w="0" h="1317069">
+                  <a:moveTo>
+                    <a:pt x="0" y="1317069"/>
+                  </a:moveTo>
+                  <a:lnTo>
+                    <a:pt x="0" y="0"/>
+                  </a:lnTo>
+                  <a:lnTo>
+                    <a:pt x="0" y="0"/>
+                  </a:lnTo>
+                </a:path>
+              </a:pathLst>
+            </a:custGeom>
+            <a:ln w="6775" cap="flat">
+              <a:solidFill>
+                <a:srgbClr val="EBEBEB">
+                  <a:alpha val="100000"/>
+                </a:srgbClr>
+              </a:solidFill>
+              <a:prstDash val="solid"/>
+              <a:round/>
+            </a:ln>
+          </p:spPr>
+          <p:txBody>
+            <a:bodyPr/>
+            <a:lstStyle/>
+            <a:p/>
+          </p:txBody>
+        </p:sp>
+        <p:sp>
+          <p:nvSpPr>
+            <p:cNvPr id="46" name="pl46"/>
+            <p:cNvSpPr/>
+            <p:nvPr/>
+          </p:nvSpPr>
+          <p:spPr>
+            <a:xfrm>
+              <a:off x="4172622" y="4336484"/>
+              <a:ext cx="0" cy="1317069"/>
+            </a:xfrm>
+            <a:custGeom>
+              <a:avLst/>
+              <a:pathLst>
+                <a:path w="0" h="1317069">
+                  <a:moveTo>
+                    <a:pt x="0" y="1317069"/>
+                  </a:moveTo>
+                  <a:lnTo>
+                    <a:pt x="0" y="0"/>
+                  </a:lnTo>
+                  <a:lnTo>
+                    <a:pt x="0" y="0"/>
+                  </a:lnTo>
+                </a:path>
+              </a:pathLst>
+            </a:custGeom>
+            <a:ln w="6775" cap="flat">
+              <a:solidFill>
+                <a:srgbClr val="EBEBEB">
+                  <a:alpha val="100000"/>
+                </a:srgbClr>
+              </a:solidFill>
+              <a:prstDash val="solid"/>
+              <a:round/>
+            </a:ln>
+          </p:spPr>
+          <p:txBody>
+            <a:bodyPr/>
+            <a:lstStyle/>
+            <a:p/>
+          </p:txBody>
+        </p:sp>
+        <p:sp>
+          <p:nvSpPr>
+            <p:cNvPr id="47" name="pl47"/>
+            <p:cNvSpPr/>
+            <p:nvPr/>
+          </p:nvSpPr>
+          <p:spPr>
+            <a:xfrm>
+              <a:off x="5017909" y="4336484"/>
+              <a:ext cx="0" cy="1317069"/>
+            </a:xfrm>
+            <a:custGeom>
+              <a:avLst/>
+              <a:pathLst>
+                <a:path w="0" h="1317069">
+                  <a:moveTo>
+                    <a:pt x="0" y="1317069"/>
+                  </a:moveTo>
+                  <a:lnTo>
+                    <a:pt x="0" y="0"/>
+                  </a:lnTo>
+                  <a:lnTo>
+                    <a:pt x="0" y="0"/>
+                  </a:lnTo>
+                </a:path>
+              </a:pathLst>
+            </a:custGeom>
+            <a:ln w="6775" cap="flat">
+              <a:solidFill>
+                <a:srgbClr val="EBEBEB">
+                  <a:alpha val="100000"/>
+                </a:srgbClr>
+              </a:solidFill>
+              <a:prstDash val="solid"/>
+              <a:round/>
+            </a:ln>
+          </p:spPr>
+          <p:txBody>
+            <a:bodyPr/>
+            <a:lstStyle/>
+            <a:p/>
+          </p:txBody>
+        </p:sp>
+        <p:sp>
+          <p:nvSpPr>
+            <p:cNvPr id="48" name="pl48"/>
+            <p:cNvSpPr/>
+            <p:nvPr/>
+          </p:nvSpPr>
+          <p:spPr>
+            <a:xfrm>
+              <a:off x="5863195" y="4336484"/>
+              <a:ext cx="0" cy="1317069"/>
+            </a:xfrm>
+            <a:custGeom>
+              <a:avLst/>
+              <a:pathLst>
+                <a:path w="0" h="1317069">
+                  <a:moveTo>
+                    <a:pt x="0" y="1317069"/>
+                  </a:moveTo>
+                  <a:lnTo>
+                    <a:pt x="0" y="0"/>
+                  </a:lnTo>
+                  <a:lnTo>
+                    <a:pt x="0" y="0"/>
+                  </a:lnTo>
+                </a:path>
+              </a:pathLst>
+            </a:custGeom>
+            <a:ln w="6775" cap="flat">
+              <a:solidFill>
+                <a:srgbClr val="EBEBEB">
+                  <a:alpha val="100000"/>
+                </a:srgbClr>
+              </a:solidFill>
+              <a:prstDash val="solid"/>
+              <a:round/>
+            </a:ln>
+          </p:spPr>
+          <p:txBody>
+            <a:bodyPr/>
+            <a:lstStyle/>
+            <a:p/>
+          </p:txBody>
+        </p:sp>
+        <p:sp>
+          <p:nvSpPr>
+            <p:cNvPr id="49" name="pl49"/>
+            <p:cNvSpPr/>
+            <p:nvPr/>
+          </p:nvSpPr>
+          <p:spPr>
+            <a:xfrm>
+              <a:off x="6708482" y="4336484"/>
+              <a:ext cx="0" cy="1317069"/>
+            </a:xfrm>
+            <a:custGeom>
+              <a:avLst/>
+              <a:pathLst>
+                <a:path w="0" h="1317069">
+                  <a:moveTo>
+                    <a:pt x="0" y="1317069"/>
+                  </a:moveTo>
+                  <a:lnTo>
+                    <a:pt x="0" y="0"/>
+                  </a:lnTo>
+                  <a:lnTo>
+                    <a:pt x="0" y="0"/>
+                  </a:lnTo>
+                </a:path>
+              </a:pathLst>
+            </a:custGeom>
+            <a:ln w="6775" cap="flat">
+              <a:solidFill>
+                <a:srgbClr val="EBEBEB">
+                  <a:alpha val="100000"/>
+                </a:srgbClr>
+              </a:solidFill>
+              <a:prstDash val="solid"/>
+              <a:round/>
+            </a:ln>
+          </p:spPr>
+          <p:txBody>
+            <a:bodyPr/>
+            <a:lstStyle/>
+            <a:p/>
+          </p:txBody>
+        </p:sp>
+        <p:sp>
+          <p:nvSpPr>
+            <p:cNvPr id="50" name="pl50"/>
+            <p:cNvSpPr/>
+            <p:nvPr/>
+          </p:nvSpPr>
+          <p:spPr>
+            <a:xfrm>
+              <a:off x="7553768" y="4336484"/>
+              <a:ext cx="0" cy="1317069"/>
+            </a:xfrm>
+            <a:custGeom>
+              <a:avLst/>
+              <a:pathLst>
+                <a:path w="0" h="1317069">
+                  <a:moveTo>
+                    <a:pt x="0" y="1317069"/>
+                  </a:moveTo>
+                  <a:lnTo>
+                    <a:pt x="0" y="0"/>
+                  </a:lnTo>
+                  <a:lnTo>
+                    <a:pt x="0" y="0"/>
+                  </a:lnTo>
+                </a:path>
+              </a:pathLst>
+            </a:custGeom>
+            <a:ln w="6775" cap="flat">
+              <a:solidFill>
+                <a:srgbClr val="EBEBEB">
+                  <a:alpha val="100000"/>
+                </a:srgbClr>
+              </a:solidFill>
+              <a:prstDash val="solid"/>
+              <a:round/>
+            </a:ln>
+          </p:spPr>
+          <p:txBody>
+            <a:bodyPr/>
+            <a:lstStyle/>
+            <a:p/>
+          </p:txBody>
+        </p:sp>
+        <p:sp>
+          <p:nvSpPr>
+            <p:cNvPr id="51" name="pl51"/>
+            <p:cNvSpPr/>
+            <p:nvPr/>
+          </p:nvSpPr>
+          <p:spPr>
+            <a:xfrm>
+              <a:off x="8399054" y="4336484"/>
+              <a:ext cx="0" cy="1317069"/>
+            </a:xfrm>
+            <a:custGeom>
+              <a:avLst/>
+              <a:pathLst>
+                <a:path w="0" h="1317069">
+                  <a:moveTo>
+                    <a:pt x="0" y="1317069"/>
+                  </a:moveTo>
+                  <a:lnTo>
+                    <a:pt x="0" y="0"/>
+                  </a:lnTo>
+                  <a:lnTo>
+                    <a:pt x="0" y="0"/>
+                  </a:lnTo>
+                </a:path>
+              </a:pathLst>
+            </a:custGeom>
+            <a:ln w="6775" cap="flat">
+              <a:solidFill>
+                <a:srgbClr val="EBEBEB">
+                  <a:alpha val="100000"/>
+                </a:srgbClr>
+              </a:solidFill>
+              <a:prstDash val="solid"/>
+              <a:round/>
+            </a:ln>
+          </p:spPr>
+          <p:txBody>
+            <a:bodyPr/>
+            <a:lstStyle/>
+            <a:p/>
+          </p:txBody>
+        </p:sp>
+        <p:sp>
+          <p:nvSpPr>
+            <p:cNvPr id="52" name="pl52"/>
+            <p:cNvSpPr/>
+            <p:nvPr/>
+          </p:nvSpPr>
+          <p:spPr>
+            <a:xfrm>
+              <a:off x="887106" y="5593686"/>
+              <a:ext cx="7660515" cy="0"/>
+            </a:xfrm>
+            <a:custGeom>
+              <a:avLst/>
+              <a:pathLst>
+                <a:path w="7660515" h="0">
+                  <a:moveTo>
+                    <a:pt x="0" y="0"/>
+                  </a:moveTo>
+                  <a:lnTo>
+                    <a:pt x="7660515" y="0"/>
+                  </a:lnTo>
+                  <a:lnTo>
+                    <a:pt x="7660515" y="0"/>
+                  </a:lnTo>
+                </a:path>
+              </a:pathLst>
+            </a:custGeom>
+            <a:ln w="13550" cap="flat">
+              <a:solidFill>
+                <a:srgbClr val="EBEBEB">
+                  <a:alpha val="100000"/>
+                </a:srgbClr>
+              </a:solidFill>
+              <a:prstDash val="solid"/>
+              <a:round/>
+            </a:ln>
+          </p:spPr>
+          <p:txBody>
+            <a:bodyPr/>
+            <a:lstStyle/>
+            <a:p/>
+          </p:txBody>
+        </p:sp>
+        <p:sp>
+          <p:nvSpPr>
+            <p:cNvPr id="53" name="pl53"/>
+            <p:cNvSpPr/>
+            <p:nvPr/>
+          </p:nvSpPr>
+          <p:spPr>
+            <a:xfrm>
+              <a:off x="887106" y="5294352"/>
+              <a:ext cx="7660515" cy="0"/>
+            </a:xfrm>
+            <a:custGeom>
+              <a:avLst/>
+              <a:pathLst>
+                <a:path w="7660515" h="0">
+                  <a:moveTo>
+                    <a:pt x="0" y="0"/>
+                  </a:moveTo>
+                  <a:lnTo>
+                    <a:pt x="7660515" y="0"/>
+                  </a:lnTo>
+                  <a:lnTo>
+                    <a:pt x="7660515" y="0"/>
+                  </a:lnTo>
+                </a:path>
+              </a:pathLst>
+            </a:custGeom>
+            <a:ln w="13550" cap="flat">
+              <a:solidFill>
+                <a:srgbClr val="EBEBEB">
+                  <a:alpha val="100000"/>
+                </a:srgbClr>
+              </a:solidFill>
+              <a:prstDash val="solid"/>
+              <a:round/>
+            </a:ln>
+          </p:spPr>
+          <p:txBody>
+            <a:bodyPr/>
+            <a:lstStyle/>
+            <a:p/>
+          </p:txBody>
+        </p:sp>
+        <p:sp>
+          <p:nvSpPr>
+            <p:cNvPr id="54" name="pl54"/>
+            <p:cNvSpPr/>
+            <p:nvPr/>
+          </p:nvSpPr>
+          <p:spPr>
+            <a:xfrm>
+              <a:off x="887106" y="4995019"/>
+              <a:ext cx="7660515" cy="0"/>
+            </a:xfrm>
+            <a:custGeom>
+              <a:avLst/>
+              <a:pathLst>
+                <a:path w="7660515" h="0">
+                  <a:moveTo>
+                    <a:pt x="0" y="0"/>
+                  </a:moveTo>
+                  <a:lnTo>
+                    <a:pt x="7660515" y="0"/>
+                  </a:lnTo>
+                  <a:lnTo>
+                    <a:pt x="7660515" y="0"/>
+                  </a:lnTo>
+                </a:path>
+              </a:pathLst>
+            </a:custGeom>
+            <a:ln w="13550" cap="flat">
+              <a:solidFill>
+                <a:srgbClr val="EBEBEB">
+                  <a:alpha val="100000"/>
+                </a:srgbClr>
+              </a:solidFill>
+              <a:prstDash val="solid"/>
+              <a:round/>
+            </a:ln>
+          </p:spPr>
+          <p:txBody>
+            <a:bodyPr/>
+            <a:lstStyle/>
+            <a:p/>
+          </p:txBody>
+        </p:sp>
+        <p:sp>
+          <p:nvSpPr>
+            <p:cNvPr id="55" name="pl55"/>
+            <p:cNvSpPr/>
+            <p:nvPr/>
+          </p:nvSpPr>
+          <p:spPr>
+            <a:xfrm>
+              <a:off x="887106" y="4695685"/>
+              <a:ext cx="7660515" cy="0"/>
+            </a:xfrm>
+            <a:custGeom>
+              <a:avLst/>
+              <a:pathLst>
+                <a:path w="7660515" h="0">
+                  <a:moveTo>
+                    <a:pt x="0" y="0"/>
+                  </a:moveTo>
+                  <a:lnTo>
+                    <a:pt x="7660515" y="0"/>
+                  </a:lnTo>
+                  <a:lnTo>
+                    <a:pt x="7660515" y="0"/>
+                  </a:lnTo>
+                </a:path>
+              </a:pathLst>
+            </a:custGeom>
+            <a:ln w="13550" cap="flat">
+              <a:solidFill>
+                <a:srgbClr val="EBEBEB">
+                  <a:alpha val="100000"/>
+                </a:srgbClr>
+              </a:solidFill>
+              <a:prstDash val="solid"/>
+              <a:round/>
+            </a:ln>
+          </p:spPr>
+          <p:txBody>
+            <a:bodyPr/>
+            <a:lstStyle/>
+            <a:p/>
+          </p:txBody>
+        </p:sp>
+        <p:sp>
+          <p:nvSpPr>
+            <p:cNvPr id="56" name="pl56"/>
+            <p:cNvSpPr/>
+            <p:nvPr/>
+          </p:nvSpPr>
+          <p:spPr>
+            <a:xfrm>
+              <a:off x="887106" y="4396351"/>
+              <a:ext cx="7660515" cy="0"/>
+            </a:xfrm>
+            <a:custGeom>
+              <a:avLst/>
+              <a:pathLst>
+                <a:path w="7660515" h="0">
+                  <a:moveTo>
+                    <a:pt x="0" y="0"/>
+                  </a:moveTo>
+                  <a:lnTo>
+                    <a:pt x="7660515" y="0"/>
+                  </a:lnTo>
+                  <a:lnTo>
+                    <a:pt x="7660515" y="0"/>
+                  </a:lnTo>
+                </a:path>
+              </a:pathLst>
+            </a:custGeom>
+            <a:ln w="13550" cap="flat">
+              <a:solidFill>
+                <a:srgbClr val="EBEBEB">
+                  <a:alpha val="100000"/>
+                </a:srgbClr>
+              </a:solidFill>
+              <a:prstDash val="solid"/>
+              <a:round/>
+            </a:ln>
+          </p:spPr>
+          <p:txBody>
+            <a:bodyPr/>
+            <a:lstStyle/>
+            <a:p/>
+          </p:txBody>
+        </p:sp>
+        <p:sp>
+          <p:nvSpPr>
+            <p:cNvPr id="57" name="pl57"/>
+            <p:cNvSpPr/>
+            <p:nvPr/>
+          </p:nvSpPr>
+          <p:spPr>
+            <a:xfrm>
+              <a:off x="1214120" y="4336484"/>
+              <a:ext cx="0" cy="1317069"/>
+            </a:xfrm>
+            <a:custGeom>
+              <a:avLst/>
+              <a:pathLst>
+                <a:path w="0" h="1317069">
+                  <a:moveTo>
+                    <a:pt x="0" y="1317069"/>
+                  </a:moveTo>
+                  <a:lnTo>
+                    <a:pt x="0" y="0"/>
+                  </a:lnTo>
+                  <a:lnTo>
+                    <a:pt x="0" y="0"/>
+                  </a:lnTo>
+                </a:path>
+              </a:pathLst>
+            </a:custGeom>
+            <a:ln w="13550" cap="flat">
+              <a:solidFill>
+                <a:srgbClr val="EBEBEB">
+                  <a:alpha val="100000"/>
+                </a:srgbClr>
+              </a:solidFill>
+              <a:prstDash val="solid"/>
+              <a:round/>
+            </a:ln>
+          </p:spPr>
+          <p:txBody>
+            <a:bodyPr/>
+            <a:lstStyle/>
+            <a:p/>
+          </p:txBody>
+        </p:sp>
+        <p:sp>
+          <p:nvSpPr>
+            <p:cNvPr id="58" name="pl58"/>
+            <p:cNvSpPr/>
+            <p:nvPr/>
+          </p:nvSpPr>
+          <p:spPr>
+            <a:xfrm>
+              <a:off x="2059406" y="4336484"/>
+              <a:ext cx="0" cy="1317069"/>
+            </a:xfrm>
+            <a:custGeom>
+              <a:avLst/>
+              <a:pathLst>
+                <a:path w="0" h="1317069">
+                  <a:moveTo>
+                    <a:pt x="0" y="1317069"/>
+                  </a:moveTo>
+                  <a:lnTo>
+                    <a:pt x="0" y="0"/>
+                  </a:lnTo>
+                  <a:lnTo>
+                    <a:pt x="0" y="0"/>
+                  </a:lnTo>
+                </a:path>
+              </a:pathLst>
+            </a:custGeom>
+            <a:ln w="13550" cap="flat">
+              <a:solidFill>
+                <a:srgbClr val="EBEBEB">
+                  <a:alpha val="100000"/>
+                </a:srgbClr>
+              </a:solidFill>
+              <a:prstDash val="solid"/>
+              <a:round/>
+            </a:ln>
+          </p:spPr>
+          <p:txBody>
+            <a:bodyPr/>
+            <a:lstStyle/>
+            <a:p/>
+          </p:txBody>
+        </p:sp>
+        <p:sp>
+          <p:nvSpPr>
+            <p:cNvPr id="59" name="pl59"/>
+            <p:cNvSpPr/>
+            <p:nvPr/>
+          </p:nvSpPr>
+          <p:spPr>
+            <a:xfrm>
+              <a:off x="2904693" y="4336484"/>
+              <a:ext cx="0" cy="1317069"/>
+            </a:xfrm>
+            <a:custGeom>
+              <a:avLst/>
+              <a:pathLst>
+                <a:path w="0" h="1317069">
+                  <a:moveTo>
+                    <a:pt x="0" y="1317069"/>
+                  </a:moveTo>
+                  <a:lnTo>
+                    <a:pt x="0" y="0"/>
+                  </a:lnTo>
+                  <a:lnTo>
+                    <a:pt x="0" y="0"/>
+                  </a:lnTo>
+                </a:path>
+              </a:pathLst>
+            </a:custGeom>
+            <a:ln w="13550" cap="flat">
+              <a:solidFill>
+                <a:srgbClr val="EBEBEB">
+                  <a:alpha val="100000"/>
+                </a:srgbClr>
+              </a:solidFill>
+              <a:prstDash val="solid"/>
+              <a:round/>
+            </a:ln>
+          </p:spPr>
+          <p:txBody>
+            <a:bodyPr/>
+            <a:lstStyle/>
+            <a:p/>
+          </p:txBody>
+        </p:sp>
+        <p:sp>
+          <p:nvSpPr>
+            <p:cNvPr id="60" name="pl60"/>
+            <p:cNvSpPr/>
+            <p:nvPr/>
+          </p:nvSpPr>
+          <p:spPr>
+            <a:xfrm>
+              <a:off x="3749979" y="4336484"/>
+              <a:ext cx="0" cy="1317069"/>
+            </a:xfrm>
+            <a:custGeom>
+              <a:avLst/>
+              <a:pathLst>
+                <a:path w="0" h="1317069">
+                  <a:moveTo>
+                    <a:pt x="0" y="1317069"/>
+                  </a:moveTo>
+                  <a:lnTo>
+                    <a:pt x="0" y="0"/>
+                  </a:lnTo>
+                  <a:lnTo>
+                    <a:pt x="0" y="0"/>
+                  </a:lnTo>
+                </a:path>
+              </a:pathLst>
+            </a:custGeom>
+            <a:ln w="13550" cap="flat">
+              <a:solidFill>
+                <a:srgbClr val="EBEBEB">
+                  <a:alpha val="100000"/>
+                </a:srgbClr>
+              </a:solidFill>
+              <a:prstDash val="solid"/>
+              <a:round/>
+            </a:ln>
+          </p:spPr>
+          <p:txBody>
+            <a:bodyPr/>
+            <a:lstStyle/>
+            <a:p/>
+          </p:txBody>
+        </p:sp>
+        <p:sp>
+          <p:nvSpPr>
+            <p:cNvPr id="61" name="pl61"/>
+            <p:cNvSpPr/>
+            <p:nvPr/>
+          </p:nvSpPr>
+          <p:spPr>
+            <a:xfrm>
+              <a:off x="4595266" y="4336484"/>
+              <a:ext cx="0" cy="1317069"/>
+            </a:xfrm>
+            <a:custGeom>
+              <a:avLst/>
+              <a:pathLst>
+                <a:path w="0" h="1317069">
+                  <a:moveTo>
+                    <a:pt x="0" y="1317069"/>
+                  </a:moveTo>
+                  <a:lnTo>
+                    <a:pt x="0" y="0"/>
+                  </a:lnTo>
+                  <a:lnTo>
+                    <a:pt x="0" y="0"/>
+                  </a:lnTo>
+                </a:path>
+              </a:pathLst>
+            </a:custGeom>
+            <a:ln w="13550" cap="flat">
+              <a:solidFill>
+                <a:srgbClr val="EBEBEB">
+                  <a:alpha val="100000"/>
+                </a:srgbClr>
+              </a:solidFill>
+              <a:prstDash val="solid"/>
+              <a:round/>
+            </a:ln>
+          </p:spPr>
+          <p:txBody>
+            <a:bodyPr/>
+            <a:lstStyle/>
+            <a:p/>
+          </p:txBody>
+        </p:sp>
+        <p:sp>
+          <p:nvSpPr>
+            <p:cNvPr id="62" name="pl62"/>
+            <p:cNvSpPr/>
+            <p:nvPr/>
+          </p:nvSpPr>
+          <p:spPr>
+            <a:xfrm>
+              <a:off x="5440552" y="4336484"/>
+              <a:ext cx="0" cy="1317069"/>
+            </a:xfrm>
+            <a:custGeom>
+              <a:avLst/>
+              <a:pathLst>
+                <a:path w="0" h="1317069">
+                  <a:moveTo>
+                    <a:pt x="0" y="1317069"/>
+                  </a:moveTo>
+                  <a:lnTo>
+                    <a:pt x="0" y="0"/>
+                  </a:lnTo>
+                  <a:lnTo>
+                    <a:pt x="0" y="0"/>
+                  </a:lnTo>
+                </a:path>
+              </a:pathLst>
+            </a:custGeom>
+            <a:ln w="13550" cap="flat">
+              <a:solidFill>
+                <a:srgbClr val="EBEBEB">
+                  <a:alpha val="100000"/>
+                </a:srgbClr>
+              </a:solidFill>
+              <a:prstDash val="solid"/>
+              <a:round/>
+            </a:ln>
+          </p:spPr>
+          <p:txBody>
+            <a:bodyPr/>
+            <a:lstStyle/>
+            <a:p/>
+          </p:txBody>
+        </p:sp>
+        <p:sp>
+          <p:nvSpPr>
+            <p:cNvPr id="63" name="pl63"/>
+            <p:cNvSpPr/>
+            <p:nvPr/>
+          </p:nvSpPr>
+          <p:spPr>
+            <a:xfrm>
+              <a:off x="6285838" y="4336484"/>
+              <a:ext cx="0" cy="1317069"/>
+            </a:xfrm>
+            <a:custGeom>
+              <a:avLst/>
+              <a:pathLst>
+                <a:path w="0" h="1317069">
+                  <a:moveTo>
+                    <a:pt x="0" y="1317069"/>
+                  </a:moveTo>
+                  <a:lnTo>
+                    <a:pt x="0" y="0"/>
+                  </a:lnTo>
+                  <a:lnTo>
+                    <a:pt x="0" y="0"/>
+                  </a:lnTo>
+                </a:path>
+              </a:pathLst>
+            </a:custGeom>
+            <a:ln w="13550" cap="flat">
+              <a:solidFill>
+                <a:srgbClr val="EBEBEB">
+                  <a:alpha val="100000"/>
+                </a:srgbClr>
+              </a:solidFill>
+              <a:prstDash val="solid"/>
+              <a:round/>
+            </a:ln>
+          </p:spPr>
+          <p:txBody>
+            <a:bodyPr/>
+            <a:lstStyle/>
+            <a:p/>
+          </p:txBody>
+        </p:sp>
+        <p:sp>
+          <p:nvSpPr>
+            <p:cNvPr id="64" name="pl64"/>
+            <p:cNvSpPr/>
+            <p:nvPr/>
+          </p:nvSpPr>
+          <p:spPr>
+            <a:xfrm>
+              <a:off x="7131125" y="4336484"/>
+              <a:ext cx="0" cy="1317069"/>
+            </a:xfrm>
+            <a:custGeom>
+              <a:avLst/>
+              <a:pathLst>
+                <a:path w="0" h="1317069">
+                  <a:moveTo>
+                    <a:pt x="0" y="1317069"/>
+                  </a:moveTo>
+                  <a:lnTo>
+                    <a:pt x="0" y="0"/>
+                  </a:lnTo>
+                  <a:lnTo>
+                    <a:pt x="0" y="0"/>
+                  </a:lnTo>
+                </a:path>
+              </a:pathLst>
+            </a:custGeom>
+            <a:ln w="13550" cap="flat">
+              <a:solidFill>
+                <a:srgbClr val="EBEBEB">
+                  <a:alpha val="100000"/>
+                </a:srgbClr>
+              </a:solidFill>
+              <a:prstDash val="solid"/>
+              <a:round/>
+            </a:ln>
+          </p:spPr>
+          <p:txBody>
+            <a:bodyPr/>
+            <a:lstStyle/>
+            <a:p/>
+          </p:txBody>
+        </p:sp>
+        <p:sp>
+          <p:nvSpPr>
+            <p:cNvPr id="65" name="pl65"/>
+            <p:cNvSpPr/>
+            <p:nvPr/>
+          </p:nvSpPr>
+          <p:spPr>
+            <a:xfrm>
+              <a:off x="7976411" y="4336484"/>
+              <a:ext cx="0" cy="1317069"/>
+            </a:xfrm>
+            <a:custGeom>
+              <a:avLst/>
+              <a:pathLst>
+                <a:path w="0" h="1317069">
+                  <a:moveTo>
+                    <a:pt x="0" y="1317069"/>
+                  </a:moveTo>
+                  <a:lnTo>
+                    <a:pt x="0" y="0"/>
+                  </a:lnTo>
+                  <a:lnTo>
+                    <a:pt x="0" y="0"/>
+                  </a:lnTo>
+                </a:path>
+              </a:pathLst>
+            </a:custGeom>
+            <a:ln w="13550" cap="flat">
+              <a:solidFill>
+                <a:srgbClr val="EBEBEB">
+                  <a:alpha val="100000"/>
+                </a:srgbClr>
+              </a:solidFill>
+              <a:prstDash val="solid"/>
+              <a:round/>
+            </a:ln>
+          </p:spPr>
+          <p:txBody>
+            <a:bodyPr/>
+            <a:lstStyle/>
+            <a:p/>
+          </p:txBody>
+        </p:sp>
+        <p:sp>
+          <p:nvSpPr>
+            <p:cNvPr id="66" name="pg66"/>
+            <p:cNvSpPr/>
+            <p:nvPr/>
+          </p:nvSpPr>
+          <p:spPr>
+            <a:xfrm>
+              <a:off x="1235312" y="4336484"/>
+              <a:ext cx="6964104" cy="1245941"/>
+            </a:xfrm>
+            <a:custGeom>
+              <a:avLst/>
+              <a:pathLst>
+                <a:path w="6964104" h="1245941">
+                  <a:moveTo>
+                    <a:pt x="1776676" y="0"/>
+                  </a:moveTo>
+                  <a:lnTo>
+                    <a:pt x="1828956" y="58805"/>
+                  </a:lnTo>
+                  <a:lnTo>
+                    <a:pt x="1899301" y="133029"/>
+                  </a:lnTo>
+                  <a:lnTo>
+                    <a:pt x="1969645" y="202656"/>
+                  </a:lnTo>
+                  <a:lnTo>
+                    <a:pt x="2039990" y="267971"/>
+                  </a:lnTo>
+                  <a:lnTo>
+                    <a:pt x="2110334" y="329240"/>
+                  </a:lnTo>
+                  <a:lnTo>
+                    <a:pt x="2180679" y="386715"/>
+                  </a:lnTo>
+                  <a:lnTo>
+                    <a:pt x="2251023" y="440629"/>
+                  </a:lnTo>
+                  <a:lnTo>
+                    <a:pt x="2321368" y="491205"/>
+                  </a:lnTo>
+                  <a:lnTo>
+                    <a:pt x="2391712" y="538648"/>
+                  </a:lnTo>
+                  <a:lnTo>
+                    <a:pt x="2462057" y="583152"/>
+                  </a:lnTo>
+                  <a:lnTo>
+                    <a:pt x="2532401" y="624900"/>
+                  </a:lnTo>
+                  <a:lnTo>
+                    <a:pt x="2602746" y="664063"/>
+                  </a:lnTo>
+                  <a:lnTo>
+                    <a:pt x="2673090" y="700800"/>
+                  </a:lnTo>
+                  <a:lnTo>
+                    <a:pt x="2743435" y="735261"/>
+                  </a:lnTo>
+                  <a:lnTo>
+                    <a:pt x="2813779" y="767588"/>
+                  </a:lnTo>
+                  <a:lnTo>
+                    <a:pt x="2884124" y="797913"/>
+                  </a:lnTo>
+                  <a:lnTo>
+                    <a:pt x="2954468" y="826360"/>
+                  </a:lnTo>
+                  <a:lnTo>
+                    <a:pt x="3024813" y="853044"/>
+                  </a:lnTo>
+                  <a:lnTo>
+                    <a:pt x="3095157" y="878076"/>
+                  </a:lnTo>
+                  <a:lnTo>
+                    <a:pt x="3165502" y="901558"/>
+                  </a:lnTo>
+                  <a:lnTo>
+                    <a:pt x="3235846" y="923585"/>
+                  </a:lnTo>
+                  <a:lnTo>
+                    <a:pt x="3306191" y="944248"/>
+                  </a:lnTo>
+                  <a:lnTo>
+                    <a:pt x="3376535" y="959993"/>
+                  </a:lnTo>
+                  <a:lnTo>
+                    <a:pt x="3446880" y="966875"/>
+                  </a:lnTo>
+                  <a:lnTo>
+                    <a:pt x="3517224" y="973598"/>
+                  </a:lnTo>
+                  <a:lnTo>
+                    <a:pt x="3587569" y="980165"/>
+                  </a:lnTo>
+                  <a:lnTo>
+                    <a:pt x="3657913" y="986580"/>
+                  </a:lnTo>
+                  <a:lnTo>
+                    <a:pt x="3728257" y="992846"/>
+                  </a:lnTo>
+                  <a:lnTo>
+                    <a:pt x="3798602" y="998968"/>
+                  </a:lnTo>
+                  <a:lnTo>
+                    <a:pt x="3868946" y="1004947"/>
+                  </a:lnTo>
+                  <a:lnTo>
+                    <a:pt x="3939291" y="1010789"/>
+                  </a:lnTo>
+                  <a:lnTo>
+                    <a:pt x="4009635" y="1016495"/>
+                  </a:lnTo>
+                  <a:lnTo>
+                    <a:pt x="4079980" y="1022068"/>
+                  </a:lnTo>
+                  <a:lnTo>
+                    <a:pt x="4150324" y="1027513"/>
+                  </a:lnTo>
+                  <a:lnTo>
+                    <a:pt x="4220669" y="1032832"/>
+                  </a:lnTo>
+                  <a:lnTo>
+                    <a:pt x="4291013" y="1038027"/>
+                  </a:lnTo>
+                  <a:lnTo>
+                    <a:pt x="4361358" y="1043102"/>
+                  </a:lnTo>
+                  <a:lnTo>
+                    <a:pt x="4431702" y="1048060"/>
+                  </a:lnTo>
+                  <a:lnTo>
+                    <a:pt x="4502047" y="1052903"/>
+                  </a:lnTo>
+                  <a:lnTo>
+                    <a:pt x="4572391" y="1057634"/>
+                  </a:lnTo>
+                  <a:lnTo>
+                    <a:pt x="4642736" y="1062255"/>
+                  </a:lnTo>
+                  <a:lnTo>
+                    <a:pt x="4713080" y="1066769"/>
+                  </a:lnTo>
+                  <a:lnTo>
+                    <a:pt x="4783425" y="1071179"/>
+                  </a:lnTo>
+                  <a:lnTo>
+                    <a:pt x="4853769" y="1075486"/>
+                  </a:lnTo>
+                  <a:lnTo>
+                    <a:pt x="4924114" y="1079694"/>
+                  </a:lnTo>
+                  <a:lnTo>
+                    <a:pt x="4994458" y="1083804"/>
+                  </a:lnTo>
+                  <a:lnTo>
+                    <a:pt x="5064803" y="1087819"/>
+                  </a:lnTo>
+                  <a:lnTo>
+                    <a:pt x="5135147" y="1091742"/>
+                  </a:lnTo>
+                  <a:lnTo>
+                    <a:pt x="5205492" y="1095573"/>
+                  </a:lnTo>
+                  <a:lnTo>
+                    <a:pt x="5275836" y="1099316"/>
+                  </a:lnTo>
+                  <a:lnTo>
+                    <a:pt x="5346181" y="1102972"/>
+                  </a:lnTo>
+                  <a:lnTo>
+                    <a:pt x="5416525" y="1106543"/>
+                  </a:lnTo>
+                  <a:lnTo>
+                    <a:pt x="5486870" y="1110032"/>
+                  </a:lnTo>
+                  <a:lnTo>
+                    <a:pt x="5557214" y="1113440"/>
+                  </a:lnTo>
+                  <a:lnTo>
+                    <a:pt x="5627559" y="1116769"/>
+                  </a:lnTo>
+                  <a:lnTo>
+                    <a:pt x="5697903" y="1120020"/>
+                  </a:lnTo>
+                  <a:lnTo>
+                    <a:pt x="5768248" y="1123197"/>
+                  </a:lnTo>
+                  <a:lnTo>
+                    <a:pt x="5838592" y="1126300"/>
+                  </a:lnTo>
+                  <a:lnTo>
+                    <a:pt x="5908937" y="1129331"/>
+                  </a:lnTo>
+                  <a:lnTo>
+                    <a:pt x="5979281" y="1132292"/>
+                  </a:lnTo>
+                  <a:lnTo>
+                    <a:pt x="6049626" y="1135184"/>
+                  </a:lnTo>
+                  <a:lnTo>
+                    <a:pt x="6119970" y="1138010"/>
+                  </a:lnTo>
+                  <a:lnTo>
+                    <a:pt x="6190315" y="1140770"/>
+                  </a:lnTo>
+                  <a:lnTo>
+                    <a:pt x="6260659" y="1143466"/>
+                  </a:lnTo>
+                  <a:lnTo>
+                    <a:pt x="6331004" y="1146100"/>
+                  </a:lnTo>
+                  <a:lnTo>
+                    <a:pt x="6401348" y="1148672"/>
+                  </a:lnTo>
+                  <a:lnTo>
+                    <a:pt x="6471693" y="1151185"/>
+                  </a:lnTo>
+                  <a:lnTo>
+                    <a:pt x="6542037" y="1153640"/>
+                  </a:lnTo>
+                  <a:lnTo>
+                    <a:pt x="6612382" y="1156038"/>
+                  </a:lnTo>
+                  <a:lnTo>
+                    <a:pt x="6682726" y="1158381"/>
+                  </a:lnTo>
+                  <a:lnTo>
+                    <a:pt x="6753071" y="1160669"/>
+                  </a:lnTo>
+                  <a:lnTo>
+                    <a:pt x="6823415" y="1162904"/>
+                  </a:lnTo>
+                  <a:lnTo>
+                    <a:pt x="6893760" y="1165088"/>
+                  </a:lnTo>
+                  <a:lnTo>
+                    <a:pt x="6964104" y="1167221"/>
+                  </a:lnTo>
+                  <a:lnTo>
+                    <a:pt x="6964104" y="1245941"/>
+                  </a:lnTo>
+                  <a:lnTo>
+                    <a:pt x="6893760" y="1245198"/>
+                  </a:lnTo>
+                  <a:lnTo>
+                    <a:pt x="6823415" y="1244405"/>
+                  </a:lnTo>
+                  <a:lnTo>
+                    <a:pt x="6753071" y="1243560"/>
+                  </a:lnTo>
+                  <a:lnTo>
+                    <a:pt x="6682726" y="1242660"/>
+                  </a:lnTo>
+                  <a:lnTo>
+                    <a:pt x="6612382" y="1241699"/>
+                  </a:lnTo>
+                  <a:lnTo>
+                    <a:pt x="6542037" y="1240676"/>
+                  </a:lnTo>
+                  <a:lnTo>
+                    <a:pt x="6471693" y="1239585"/>
+                  </a:lnTo>
+                  <a:lnTo>
+                    <a:pt x="6401348" y="1238421"/>
+                  </a:lnTo>
+                  <a:lnTo>
+                    <a:pt x="6331004" y="1237181"/>
+                  </a:lnTo>
+                  <a:lnTo>
+                    <a:pt x="6260659" y="1235860"/>
+                  </a:lnTo>
+                  <a:lnTo>
+                    <a:pt x="6190315" y="1234451"/>
+                  </a:lnTo>
+                  <a:lnTo>
+                    <a:pt x="6119970" y="1232948"/>
+                  </a:lnTo>
+                  <a:lnTo>
+                    <a:pt x="6049626" y="1231347"/>
+                  </a:lnTo>
+                  <a:lnTo>
+                    <a:pt x="5979281" y="1229640"/>
+                  </a:lnTo>
+                  <a:lnTo>
+                    <a:pt x="5908937" y="1227820"/>
+                  </a:lnTo>
+                  <a:lnTo>
+                    <a:pt x="5838592" y="1225880"/>
+                  </a:lnTo>
+                  <a:lnTo>
+                    <a:pt x="5768248" y="1223812"/>
+                  </a:lnTo>
+                  <a:lnTo>
+                    <a:pt x="5697903" y="1221608"/>
+                  </a:lnTo>
+                  <a:lnTo>
+                    <a:pt x="5627559" y="1219257"/>
+                  </a:lnTo>
+                  <a:lnTo>
+                    <a:pt x="5557214" y="1216752"/>
+                  </a:lnTo>
+                  <a:lnTo>
+                    <a:pt x="5486870" y="1214081"/>
+                  </a:lnTo>
+                  <a:lnTo>
+                    <a:pt x="5416525" y="1211234"/>
+                  </a:lnTo>
+                  <a:lnTo>
+                    <a:pt x="5346181" y="1208199"/>
+                  </a:lnTo>
+                  <a:lnTo>
+                    <a:pt x="5275836" y="1204964"/>
+                  </a:lnTo>
+                  <a:lnTo>
+                    <a:pt x="5205492" y="1201515"/>
+                  </a:lnTo>
+                  <a:lnTo>
+                    <a:pt x="5135147" y="1197838"/>
+                  </a:lnTo>
+                  <a:lnTo>
+                    <a:pt x="5064803" y="1193919"/>
+                  </a:lnTo>
+                  <a:lnTo>
+                    <a:pt x="4994458" y="1189740"/>
+                  </a:lnTo>
+                  <a:lnTo>
+                    <a:pt x="4924114" y="1185286"/>
+                  </a:lnTo>
+                  <a:lnTo>
+                    <a:pt x="4853769" y="1180538"/>
+                  </a:lnTo>
+                  <a:lnTo>
+                    <a:pt x="4783425" y="1175476"/>
+                  </a:lnTo>
+                  <a:lnTo>
+                    <a:pt x="4713080" y="1170080"/>
+                  </a:lnTo>
+                  <a:lnTo>
+                    <a:pt x="4642736" y="1164328"/>
+                  </a:lnTo>
+                  <a:lnTo>
+                    <a:pt x="4572391" y="1158196"/>
+                  </a:lnTo>
+                  <a:lnTo>
+                    <a:pt x="4502047" y="1151659"/>
+                  </a:lnTo>
+                  <a:lnTo>
+                    <a:pt x="4431702" y="1144690"/>
+                  </a:lnTo>
+                  <a:lnTo>
+                    <a:pt x="4361358" y="1137261"/>
+                  </a:lnTo>
+                  <a:lnTo>
+                    <a:pt x="4291013" y="1129342"/>
+                  </a:lnTo>
+                  <a:lnTo>
+                    <a:pt x="4220669" y="1120900"/>
+                  </a:lnTo>
+                  <a:lnTo>
+                    <a:pt x="4150324" y="1111901"/>
+                  </a:lnTo>
+                  <a:lnTo>
+                    <a:pt x="4079980" y="1102307"/>
+                  </a:lnTo>
+                  <a:lnTo>
+                    <a:pt x="4009635" y="1092080"/>
+                  </a:lnTo>
+                  <a:lnTo>
+                    <a:pt x="3939291" y="1081178"/>
+                  </a:lnTo>
+                  <a:lnTo>
+                    <a:pt x="3868946" y="1069556"/>
+                  </a:lnTo>
+                  <a:lnTo>
+                    <a:pt x="3798602" y="1057167"/>
+                  </a:lnTo>
+                  <a:lnTo>
+                    <a:pt x="3728257" y="1043959"/>
+                  </a:lnTo>
+                  <a:lnTo>
+                    <a:pt x="3657913" y="1029880"/>
+                  </a:lnTo>
+                  <a:lnTo>
+                    <a:pt x="3587569" y="1014871"/>
+                  </a:lnTo>
+                  <a:lnTo>
+                    <a:pt x="3517224" y="998871"/>
+                  </a:lnTo>
+                  <a:lnTo>
+                    <a:pt x="3446880" y="981814"/>
+                  </a:lnTo>
+                  <a:lnTo>
+                    <a:pt x="3376535" y="963631"/>
+                  </a:lnTo>
+                  <a:lnTo>
+                    <a:pt x="3306191" y="952948"/>
+                  </a:lnTo>
+                  <a:lnTo>
+                    <a:pt x="3235846" y="945735"/>
+                  </a:lnTo>
+                  <a:lnTo>
+                    <a:pt x="3165502" y="938352"/>
+                  </a:lnTo>
+                  <a:lnTo>
+                    <a:pt x="3095157" y="930794"/>
+                  </a:lnTo>
+                  <a:lnTo>
+                    <a:pt x="3024813" y="923056"/>
+                  </a:lnTo>
+                  <a:lnTo>
+                    <a:pt x="2954468" y="915135"/>
+                  </a:lnTo>
+                  <a:lnTo>
+                    <a:pt x="2884124" y="907027"/>
+                  </a:lnTo>
+                  <a:lnTo>
+                    <a:pt x="2813779" y="898726"/>
+                  </a:lnTo>
+                  <a:lnTo>
+                    <a:pt x="2743435" y="890228"/>
+                  </a:lnTo>
+                  <a:lnTo>
+                    <a:pt x="2673090" y="881529"/>
+                  </a:lnTo>
+                  <a:lnTo>
+                    <a:pt x="2602746" y="872624"/>
+                  </a:lnTo>
+                  <a:lnTo>
+                    <a:pt x="2532401" y="863508"/>
+                  </a:lnTo>
+                  <a:lnTo>
+                    <a:pt x="2462057" y="854175"/>
+                  </a:lnTo>
+                  <a:lnTo>
+                    <a:pt x="2391712" y="844622"/>
+                  </a:lnTo>
+                  <a:lnTo>
+                    <a:pt x="2321368" y="834841"/>
+                  </a:lnTo>
+                  <a:lnTo>
+                    <a:pt x="2251023" y="824829"/>
+                  </a:lnTo>
+                  <a:lnTo>
+                    <a:pt x="2180679" y="814580"/>
+                  </a:lnTo>
+                  <a:lnTo>
+                    <a:pt x="2110334" y="804088"/>
+                  </a:lnTo>
+                  <a:lnTo>
+                    <a:pt x="2039990" y="793347"/>
+                  </a:lnTo>
+                  <a:lnTo>
+                    <a:pt x="1969645" y="782351"/>
+                  </a:lnTo>
+                  <a:lnTo>
+                    <a:pt x="1899301" y="771095"/>
+                  </a:lnTo>
+                  <a:lnTo>
+                    <a:pt x="1828956" y="759572"/>
+                  </a:lnTo>
+                  <a:lnTo>
+                    <a:pt x="1758612" y="747776"/>
+                  </a:lnTo>
+                  <a:lnTo>
+                    <a:pt x="1688267" y="735700"/>
+                  </a:lnTo>
+                  <a:lnTo>
+                    <a:pt x="1617923" y="723338"/>
+                  </a:lnTo>
+                  <a:lnTo>
+                    <a:pt x="1547578" y="710683"/>
+                  </a:lnTo>
+                  <a:lnTo>
+                    <a:pt x="1477234" y="697728"/>
+                  </a:lnTo>
+                  <a:lnTo>
+                    <a:pt x="1406889" y="684465"/>
+                  </a:lnTo>
+                  <a:lnTo>
+                    <a:pt x="1336545" y="670889"/>
+                  </a:lnTo>
+                  <a:lnTo>
+                    <a:pt x="1266200" y="656990"/>
+                  </a:lnTo>
+                  <a:lnTo>
+                    <a:pt x="1195856" y="642762"/>
+                  </a:lnTo>
+                  <a:lnTo>
+                    <a:pt x="1125511" y="628197"/>
+                  </a:lnTo>
+                  <a:lnTo>
+                    <a:pt x="1055167" y="613287"/>
+                  </a:lnTo>
+                  <a:lnTo>
+                    <a:pt x="984822" y="598023"/>
+                  </a:lnTo>
+                  <a:lnTo>
+                    <a:pt x="914478" y="582397"/>
+                  </a:lnTo>
+                  <a:lnTo>
+                    <a:pt x="844133" y="566401"/>
+                  </a:lnTo>
+                  <a:lnTo>
+                    <a:pt x="773789" y="550026"/>
+                  </a:lnTo>
+                  <a:lnTo>
+                    <a:pt x="703444" y="533262"/>
+                  </a:lnTo>
+                  <a:lnTo>
+                    <a:pt x="633100" y="516101"/>
+                  </a:lnTo>
+                  <a:lnTo>
+                    <a:pt x="562755" y="498534"/>
+                  </a:lnTo>
+                  <a:lnTo>
+                    <a:pt x="492411" y="480550"/>
+                  </a:lnTo>
+                  <a:lnTo>
+                    <a:pt x="422066" y="462139"/>
+                  </a:lnTo>
+                  <a:lnTo>
+                    <a:pt x="351722" y="443292"/>
+                  </a:lnTo>
+                  <a:lnTo>
+                    <a:pt x="281377" y="423999"/>
+                  </a:lnTo>
+                  <a:lnTo>
+                    <a:pt x="211033" y="404248"/>
+                  </a:lnTo>
+                  <a:lnTo>
+                    <a:pt x="140688" y="384029"/>
+                  </a:lnTo>
+                  <a:lnTo>
+                    <a:pt x="70344" y="363330"/>
+                  </a:lnTo>
+                  <a:lnTo>
+                    <a:pt x="0" y="342141"/>
+                  </a:lnTo>
+                  <a:close/>
+                </a:path>
+              </a:pathLst>
+            </a:custGeom>
+            <a:solidFill>
+              <a:srgbClr val="FF8C00">
+                <a:alpha val="20000"/>
+              </a:srgbClr>
+            </a:solidFill>
+          </p:spPr>
+          <p:txBody>
+            <a:bodyPr/>
+            <a:lstStyle/>
+            <a:p/>
+          </p:txBody>
+        </p:sp>
+        <p:sp>
+          <p:nvSpPr>
+            <p:cNvPr id="67" name="pl67"/>
+            <p:cNvSpPr/>
+            <p:nvPr/>
+          </p:nvSpPr>
+          <p:spPr>
+            <a:xfrm>
+              <a:off x="3011988" y="4336484"/>
+              <a:ext cx="5187427" cy="1167221"/>
+            </a:xfrm>
+            <a:custGeom>
+              <a:avLst/>
+              <a:pathLst>
+                <a:path w="5187427" h="1167221">
+                  <a:moveTo>
+                    <a:pt x="0" y="0"/>
+                  </a:moveTo>
+                  <a:lnTo>
+                    <a:pt x="52279" y="58805"/>
+                  </a:lnTo>
+                  <a:lnTo>
+                    <a:pt x="122624" y="133029"/>
+                  </a:lnTo>
+                  <a:lnTo>
+                    <a:pt x="192968" y="202656"/>
+                  </a:lnTo>
+                  <a:lnTo>
+                    <a:pt x="263313" y="267971"/>
+                  </a:lnTo>
+                  <a:lnTo>
+                    <a:pt x="333657" y="329240"/>
+                  </a:lnTo>
+                  <a:lnTo>
+                    <a:pt x="404002" y="386715"/>
+                  </a:lnTo>
+                  <a:lnTo>
+                    <a:pt x="474346" y="440629"/>
+                  </a:lnTo>
+                  <a:lnTo>
+                    <a:pt x="544691" y="491205"/>
+                  </a:lnTo>
+                  <a:lnTo>
+                    <a:pt x="615035" y="538648"/>
+                  </a:lnTo>
+                  <a:lnTo>
+                    <a:pt x="685380" y="583152"/>
+                  </a:lnTo>
+                  <a:lnTo>
+                    <a:pt x="755724" y="624900"/>
+                  </a:lnTo>
+                  <a:lnTo>
+                    <a:pt x="826069" y="664063"/>
+                  </a:lnTo>
+                  <a:lnTo>
+                    <a:pt x="896413" y="700800"/>
+                  </a:lnTo>
+                  <a:lnTo>
+                    <a:pt x="966758" y="735261"/>
+                  </a:lnTo>
+                  <a:lnTo>
+                    <a:pt x="1037102" y="767588"/>
+                  </a:lnTo>
+                  <a:lnTo>
+                    <a:pt x="1107447" y="797913"/>
+                  </a:lnTo>
+                  <a:lnTo>
+                    <a:pt x="1177791" y="826360"/>
+                  </a:lnTo>
+                  <a:lnTo>
+                    <a:pt x="1248136" y="853044"/>
+                  </a:lnTo>
+                  <a:lnTo>
+                    <a:pt x="1318480" y="878076"/>
+                  </a:lnTo>
+                  <a:lnTo>
+                    <a:pt x="1388825" y="901558"/>
+                  </a:lnTo>
+                  <a:lnTo>
+                    <a:pt x="1459169" y="923585"/>
+                  </a:lnTo>
+                  <a:lnTo>
+                    <a:pt x="1529514" y="944248"/>
+                  </a:lnTo>
+                  <a:lnTo>
+                    <a:pt x="1599858" y="959993"/>
+                  </a:lnTo>
+                  <a:lnTo>
+                    <a:pt x="1670203" y="966875"/>
+                  </a:lnTo>
+                  <a:lnTo>
+                    <a:pt x="1740547" y="973598"/>
+                  </a:lnTo>
+                  <a:lnTo>
+                    <a:pt x="1810892" y="980165"/>
+                  </a:lnTo>
+                  <a:lnTo>
+                    <a:pt x="1881236" y="986580"/>
+                  </a:lnTo>
+                  <a:lnTo>
+                    <a:pt x="1951581" y="992846"/>
+                  </a:lnTo>
+                  <a:lnTo>
+                    <a:pt x="2021925" y="998968"/>
+                  </a:lnTo>
+                  <a:lnTo>
+                    <a:pt x="2092270" y="1004947"/>
+                  </a:lnTo>
+                  <a:lnTo>
+                    <a:pt x="2162614" y="1010789"/>
+                  </a:lnTo>
+                  <a:lnTo>
+                    <a:pt x="2232959" y="1016495"/>
+                  </a:lnTo>
+                  <a:lnTo>
+                    <a:pt x="2303303" y="1022068"/>
+                  </a:lnTo>
+                  <a:lnTo>
+                    <a:pt x="2373648" y="1027513"/>
+                  </a:lnTo>
+                  <a:lnTo>
+                    <a:pt x="2443992" y="1032832"/>
+                  </a:lnTo>
+                  <a:lnTo>
+                    <a:pt x="2514337" y="1038027"/>
+                  </a:lnTo>
+                  <a:lnTo>
+                    <a:pt x="2584681" y="1043102"/>
+                  </a:lnTo>
+                  <a:lnTo>
+                    <a:pt x="2655026" y="1048060"/>
+                  </a:lnTo>
+                  <a:lnTo>
+                    <a:pt x="2725370" y="1052903"/>
+                  </a:lnTo>
+                  <a:lnTo>
+                    <a:pt x="2795715" y="1057634"/>
+                  </a:lnTo>
+                  <a:lnTo>
+                    <a:pt x="2866059" y="1062255"/>
+                  </a:lnTo>
+                  <a:lnTo>
+                    <a:pt x="2936404" y="1066769"/>
+                  </a:lnTo>
+                  <a:lnTo>
+                    <a:pt x="3006748" y="1071179"/>
+                  </a:lnTo>
+                  <a:lnTo>
+                    <a:pt x="3077093" y="1075486"/>
+                  </a:lnTo>
+                  <a:lnTo>
+                    <a:pt x="3147437" y="1079694"/>
+                  </a:lnTo>
+                  <a:lnTo>
+                    <a:pt x="3217782" y="1083804"/>
+                  </a:lnTo>
+                  <a:lnTo>
+                    <a:pt x="3288126" y="1087819"/>
+                  </a:lnTo>
+                  <a:lnTo>
+                    <a:pt x="3358471" y="1091742"/>
+                  </a:lnTo>
+                  <a:lnTo>
+                    <a:pt x="3428815" y="1095573"/>
+                  </a:lnTo>
+                  <a:lnTo>
+                    <a:pt x="3499159" y="1099316"/>
+                  </a:lnTo>
+                  <a:lnTo>
+                    <a:pt x="3569504" y="1102972"/>
+                  </a:lnTo>
+                  <a:lnTo>
+                    <a:pt x="3639848" y="1106543"/>
+                  </a:lnTo>
+                  <a:lnTo>
+                    <a:pt x="3710193" y="1110032"/>
+                  </a:lnTo>
+                  <a:lnTo>
+                    <a:pt x="3780537" y="1113440"/>
+                  </a:lnTo>
+                  <a:lnTo>
+                    <a:pt x="3850882" y="1116769"/>
+                  </a:lnTo>
+                  <a:lnTo>
+                    <a:pt x="3921226" y="1120020"/>
+                  </a:lnTo>
+                  <a:lnTo>
+                    <a:pt x="3991571" y="1123197"/>
+                  </a:lnTo>
+                  <a:lnTo>
+                    <a:pt x="4061915" y="1126300"/>
+                  </a:lnTo>
+                  <a:lnTo>
+                    <a:pt x="4132260" y="1129331"/>
+                  </a:lnTo>
+                  <a:lnTo>
+                    <a:pt x="4202604" y="1132292"/>
+                  </a:lnTo>
+                  <a:lnTo>
+                    <a:pt x="4272949" y="1135184"/>
+                  </a:lnTo>
+                  <a:lnTo>
+                    <a:pt x="4343293" y="1138010"/>
+                  </a:lnTo>
+                  <a:lnTo>
+                    <a:pt x="4413638" y="1140770"/>
+                  </a:lnTo>
+                  <a:lnTo>
+                    <a:pt x="4483982" y="1143466"/>
+                  </a:lnTo>
+                  <a:lnTo>
+                    <a:pt x="4554327" y="1146100"/>
+                  </a:lnTo>
+                  <a:lnTo>
+                    <a:pt x="4624671" y="1148672"/>
+                  </a:lnTo>
+                  <a:lnTo>
+                    <a:pt x="4695016" y="1151185"/>
+                  </a:lnTo>
+                  <a:lnTo>
+                    <a:pt x="4765360" y="1153640"/>
+                  </a:lnTo>
+                  <a:lnTo>
+                    <a:pt x="4835705" y="1156038"/>
+                  </a:lnTo>
+                  <a:lnTo>
+                    <a:pt x="4906049" y="1158381"/>
+                  </a:lnTo>
+                  <a:lnTo>
+                    <a:pt x="4976394" y="1160669"/>
+                  </a:lnTo>
+                  <a:lnTo>
+                    <a:pt x="5046738" y="1162904"/>
+                  </a:lnTo>
+                  <a:lnTo>
+                    <a:pt x="5117083" y="1165088"/>
+                  </a:lnTo>
+                  <a:lnTo>
+                    <a:pt x="5187427" y="1167221"/>
+                  </a:lnTo>
+                </a:path>
+              </a:pathLst>
+            </a:custGeom>
+          </p:spPr>
+          <p:txBody>
+            <a:bodyPr/>
+            <a:lstStyle/>
+            <a:p/>
+          </p:txBody>
+        </p:sp>
+        <p:sp>
+          <p:nvSpPr>
+            <p:cNvPr id="68" name="pl68"/>
+            <p:cNvSpPr/>
+            <p:nvPr/>
+          </p:nvSpPr>
+          <p:spPr>
+            <a:xfrm>
+              <a:off x="1235312" y="4678626"/>
+              <a:ext cx="6964104" cy="903799"/>
+            </a:xfrm>
+            <a:custGeom>
+              <a:avLst/>
+              <a:pathLst>
+                <a:path w="6964104" h="903799">
+                  <a:moveTo>
+                    <a:pt x="6964104" y="903799"/>
+                  </a:moveTo>
+                  <a:lnTo>
+                    <a:pt x="6893760" y="903056"/>
+                  </a:lnTo>
+                  <a:lnTo>
+                    <a:pt x="6823415" y="902263"/>
+                  </a:lnTo>
+                  <a:lnTo>
+                    <a:pt x="6753071" y="901418"/>
+                  </a:lnTo>
+                  <a:lnTo>
+                    <a:pt x="6682726" y="900518"/>
+                  </a:lnTo>
+                  <a:lnTo>
+                    <a:pt x="6612382" y="899557"/>
+                  </a:lnTo>
+                  <a:lnTo>
+                    <a:pt x="6542037" y="898534"/>
+                  </a:lnTo>
+                  <a:lnTo>
+                    <a:pt x="6471693" y="897443"/>
+                  </a:lnTo>
+                  <a:lnTo>
+                    <a:pt x="6401348" y="896280"/>
+                  </a:lnTo>
+                  <a:lnTo>
+                    <a:pt x="6331004" y="895040"/>
+                  </a:lnTo>
+                  <a:lnTo>
+                    <a:pt x="6260659" y="893718"/>
+                  </a:lnTo>
+                  <a:lnTo>
+                    <a:pt x="6190315" y="892309"/>
+                  </a:lnTo>
+                  <a:lnTo>
+                    <a:pt x="6119970" y="890806"/>
+                  </a:lnTo>
+                  <a:lnTo>
+                    <a:pt x="6049626" y="889205"/>
+                  </a:lnTo>
+                  <a:lnTo>
+                    <a:pt x="5979281" y="887498"/>
+                  </a:lnTo>
+                  <a:lnTo>
+                    <a:pt x="5908937" y="885678"/>
+                  </a:lnTo>
+                  <a:lnTo>
+                    <a:pt x="5838592" y="883738"/>
+                  </a:lnTo>
+                  <a:lnTo>
+                    <a:pt x="5768248" y="881670"/>
+                  </a:lnTo>
+                  <a:lnTo>
+                    <a:pt x="5697903" y="879466"/>
+                  </a:lnTo>
+                  <a:lnTo>
+                    <a:pt x="5627559" y="877115"/>
+                  </a:lnTo>
+                  <a:lnTo>
+                    <a:pt x="5557214" y="874610"/>
+                  </a:lnTo>
+                  <a:lnTo>
+                    <a:pt x="5486870" y="871939"/>
+                  </a:lnTo>
+                  <a:lnTo>
+                    <a:pt x="5416525" y="869092"/>
+                  </a:lnTo>
+                  <a:lnTo>
+                    <a:pt x="5346181" y="866057"/>
+                  </a:lnTo>
+                  <a:lnTo>
+                    <a:pt x="5275836" y="862822"/>
+                  </a:lnTo>
+                  <a:lnTo>
+                    <a:pt x="5205492" y="859373"/>
+                  </a:lnTo>
+                  <a:lnTo>
+                    <a:pt x="5135147" y="855696"/>
+                  </a:lnTo>
+                  <a:lnTo>
+                    <a:pt x="5064803" y="851777"/>
+                  </a:lnTo>
+                  <a:lnTo>
+                    <a:pt x="4994458" y="847598"/>
+                  </a:lnTo>
+                  <a:lnTo>
+                    <a:pt x="4924114" y="843144"/>
+                  </a:lnTo>
+                  <a:lnTo>
+                    <a:pt x="4853769" y="838396"/>
+                  </a:lnTo>
+                  <a:lnTo>
+                    <a:pt x="4783425" y="833334"/>
+                  </a:lnTo>
+                  <a:lnTo>
+                    <a:pt x="4713080" y="827938"/>
+                  </a:lnTo>
+                  <a:lnTo>
+                    <a:pt x="4642736" y="822186"/>
+                  </a:lnTo>
+                  <a:lnTo>
+                    <a:pt x="4572391" y="816054"/>
+                  </a:lnTo>
+                  <a:lnTo>
+                    <a:pt x="4502047" y="809517"/>
+                  </a:lnTo>
+                  <a:lnTo>
+                    <a:pt x="4431702" y="802548"/>
+                  </a:lnTo>
+                  <a:lnTo>
+                    <a:pt x="4361358" y="795120"/>
+                  </a:lnTo>
+                  <a:lnTo>
+                    <a:pt x="4291013" y="787200"/>
+                  </a:lnTo>
+                  <a:lnTo>
+                    <a:pt x="4220669" y="778758"/>
+                  </a:lnTo>
+                  <a:lnTo>
+                    <a:pt x="4150324" y="769759"/>
+                  </a:lnTo>
+                  <a:lnTo>
+                    <a:pt x="4079980" y="760165"/>
+                  </a:lnTo>
+                  <a:lnTo>
+                    <a:pt x="4009635" y="749938"/>
+                  </a:lnTo>
+                  <a:lnTo>
+                    <a:pt x="3939291" y="739036"/>
+                  </a:lnTo>
+                  <a:lnTo>
+                    <a:pt x="3868946" y="727414"/>
+                  </a:lnTo>
+                  <a:lnTo>
+                    <a:pt x="3798602" y="715025"/>
+                  </a:lnTo>
+                  <a:lnTo>
+                    <a:pt x="3728257" y="701817"/>
+                  </a:lnTo>
+                  <a:lnTo>
+                    <a:pt x="3657913" y="687738"/>
+                  </a:lnTo>
+                  <a:lnTo>
+                    <a:pt x="3587569" y="672729"/>
+                  </a:lnTo>
+                  <a:lnTo>
+                    <a:pt x="3517224" y="656729"/>
+                  </a:lnTo>
+                  <a:lnTo>
+                    <a:pt x="3446880" y="639672"/>
+                  </a:lnTo>
+                  <a:lnTo>
+                    <a:pt x="3376535" y="621489"/>
+                  </a:lnTo>
+                  <a:lnTo>
+                    <a:pt x="3306191" y="610806"/>
+                  </a:lnTo>
+                  <a:lnTo>
+                    <a:pt x="3235846" y="603593"/>
+                  </a:lnTo>
+                  <a:lnTo>
+                    <a:pt x="3165502" y="596210"/>
+                  </a:lnTo>
+                  <a:lnTo>
+                    <a:pt x="3095157" y="588652"/>
+                  </a:lnTo>
+                  <a:lnTo>
+                    <a:pt x="3024813" y="580914"/>
+                  </a:lnTo>
+                  <a:lnTo>
+                    <a:pt x="2954468" y="572993"/>
+                  </a:lnTo>
+                  <a:lnTo>
+                    <a:pt x="2884124" y="564885"/>
+                  </a:lnTo>
+                  <a:lnTo>
+                    <a:pt x="2813779" y="556584"/>
+                  </a:lnTo>
+                  <a:lnTo>
+                    <a:pt x="2743435" y="548086"/>
+                  </a:lnTo>
+                  <a:lnTo>
+                    <a:pt x="2673090" y="539387"/>
+                  </a:lnTo>
+                  <a:lnTo>
+                    <a:pt x="2602746" y="530482"/>
+                  </a:lnTo>
+                  <a:lnTo>
+                    <a:pt x="2532401" y="521366"/>
+                  </a:lnTo>
+                  <a:lnTo>
+                    <a:pt x="2462057" y="512033"/>
+                  </a:lnTo>
+                  <a:lnTo>
+                    <a:pt x="2391712" y="502480"/>
+                  </a:lnTo>
+                  <a:lnTo>
+                    <a:pt x="2321368" y="492700"/>
+                  </a:lnTo>
+                  <a:lnTo>
+                    <a:pt x="2251023" y="482688"/>
+                  </a:lnTo>
+                  <a:lnTo>
+                    <a:pt x="2180679" y="472438"/>
+                  </a:lnTo>
+                  <a:lnTo>
+                    <a:pt x="2110334" y="461946"/>
+                  </a:lnTo>
+                  <a:lnTo>
+                    <a:pt x="2039990" y="451205"/>
+                  </a:lnTo>
+                  <a:lnTo>
+                    <a:pt x="1969645" y="440209"/>
+                  </a:lnTo>
+                  <a:lnTo>
+                    <a:pt x="1899301" y="428953"/>
+                  </a:lnTo>
+                  <a:lnTo>
+                    <a:pt x="1828956" y="417430"/>
+                  </a:lnTo>
+                  <a:lnTo>
+                    <a:pt x="1758612" y="405634"/>
+                  </a:lnTo>
+                  <a:lnTo>
+                    <a:pt x="1688267" y="393558"/>
+                  </a:lnTo>
+                  <a:lnTo>
+                    <a:pt x="1617923" y="381196"/>
+                  </a:lnTo>
+                  <a:lnTo>
+                    <a:pt x="1547578" y="368541"/>
+                  </a:lnTo>
+                  <a:lnTo>
+                    <a:pt x="1477234" y="355586"/>
+                  </a:lnTo>
+                  <a:lnTo>
+                    <a:pt x="1406889" y="342323"/>
+                  </a:lnTo>
+                  <a:lnTo>
+                    <a:pt x="1336545" y="328747"/>
+                  </a:lnTo>
+                  <a:lnTo>
+                    <a:pt x="1266200" y="314848"/>
+                  </a:lnTo>
+                  <a:lnTo>
+                    <a:pt x="1195856" y="300620"/>
+                  </a:lnTo>
+                  <a:lnTo>
+                    <a:pt x="1125511" y="286055"/>
+                  </a:lnTo>
+                  <a:lnTo>
+                    <a:pt x="1055167" y="271145"/>
+                  </a:lnTo>
+                  <a:lnTo>
+                    <a:pt x="984822" y="255881"/>
+                  </a:lnTo>
+                  <a:lnTo>
+                    <a:pt x="914478" y="240255"/>
+                  </a:lnTo>
+                  <a:lnTo>
+                    <a:pt x="844133" y="224259"/>
+                  </a:lnTo>
+                  <a:lnTo>
+                    <a:pt x="773789" y="207884"/>
+                  </a:lnTo>
+                  <a:lnTo>
+                    <a:pt x="703444" y="191120"/>
+                  </a:lnTo>
+                  <a:lnTo>
+                    <a:pt x="633100" y="173959"/>
+                  </a:lnTo>
+                  <a:lnTo>
+                    <a:pt x="562755" y="156392"/>
+                  </a:lnTo>
+                  <a:lnTo>
+                    <a:pt x="492411" y="138408"/>
+                  </a:lnTo>
+                  <a:lnTo>
+                    <a:pt x="422066" y="119997"/>
+                  </a:lnTo>
+                  <a:lnTo>
+                    <a:pt x="351722" y="101151"/>
+                  </a:lnTo>
+                  <a:lnTo>
+                    <a:pt x="281377" y="81857"/>
+                  </a:lnTo>
+                  <a:lnTo>
+                    <a:pt x="211033" y="62106"/>
+                  </a:lnTo>
+                  <a:lnTo>
+                    <a:pt x="140688" y="41887"/>
+                  </a:lnTo>
+                  <a:lnTo>
+                    <a:pt x="70344" y="21189"/>
+                  </a:lnTo>
+                  <a:lnTo>
+                    <a:pt x="0" y="0"/>
+                  </a:lnTo>
+                </a:path>
+              </a:pathLst>
+            </a:custGeom>
+          </p:spPr>
+          <p:txBody>
+            <a:bodyPr/>
+            <a:lstStyle/>
+            <a:p/>
+          </p:txBody>
+        </p:sp>
+        <p:sp>
+          <p:nvSpPr>
+            <p:cNvPr id="69" name="pl69"/>
+            <p:cNvSpPr/>
+            <p:nvPr/>
+          </p:nvSpPr>
+          <p:spPr>
+            <a:xfrm>
+              <a:off x="2279674" y="4336484"/>
+              <a:ext cx="5919742" cy="1225370"/>
+            </a:xfrm>
+            <a:custGeom>
+              <a:avLst/>
+              <a:pathLst>
+                <a:path w="5919742" h="1225370">
+                  <a:moveTo>
+                    <a:pt x="0" y="0"/>
+                  </a:moveTo>
+                  <a:lnTo>
+                    <a:pt x="10805" y="8563"/>
+                  </a:lnTo>
+                  <a:lnTo>
+                    <a:pt x="81149" y="61933"/>
+                  </a:lnTo>
+                  <a:lnTo>
+                    <a:pt x="151494" y="113022"/>
+                  </a:lnTo>
+                  <a:lnTo>
+                    <a:pt x="221838" y="161927"/>
+                  </a:lnTo>
+                  <a:lnTo>
+                    <a:pt x="292183" y="208742"/>
+                  </a:lnTo>
+                  <a:lnTo>
+                    <a:pt x="362527" y="253556"/>
+                  </a:lnTo>
+                  <a:lnTo>
+                    <a:pt x="432872" y="296454"/>
+                  </a:lnTo>
+                  <a:lnTo>
+                    <a:pt x="503216" y="337519"/>
+                  </a:lnTo>
+                  <a:lnTo>
+                    <a:pt x="573561" y="376828"/>
+                  </a:lnTo>
+                  <a:lnTo>
+                    <a:pt x="643905" y="414457"/>
+                  </a:lnTo>
+                  <a:lnTo>
+                    <a:pt x="714250" y="450478"/>
+                  </a:lnTo>
+                  <a:lnTo>
+                    <a:pt x="784594" y="484960"/>
+                  </a:lnTo>
+                  <a:lnTo>
+                    <a:pt x="854939" y="517967"/>
+                  </a:lnTo>
+                  <a:lnTo>
+                    <a:pt x="925283" y="549564"/>
+                  </a:lnTo>
+                  <a:lnTo>
+                    <a:pt x="995628" y="579810"/>
+                  </a:lnTo>
+                  <a:lnTo>
+                    <a:pt x="1065972" y="608763"/>
+                  </a:lnTo>
+                  <a:lnTo>
+                    <a:pt x="1136317" y="636479"/>
+                  </a:lnTo>
+                  <a:lnTo>
+                    <a:pt x="1206661" y="663010"/>
+                  </a:lnTo>
+                  <a:lnTo>
+                    <a:pt x="1277006" y="688408"/>
+                  </a:lnTo>
+                  <a:lnTo>
+                    <a:pt x="1347350" y="712719"/>
+                  </a:lnTo>
+                  <a:lnTo>
+                    <a:pt x="1417695" y="735992"/>
+                  </a:lnTo>
+                  <a:lnTo>
+                    <a:pt x="1488039" y="758270"/>
+                  </a:lnTo>
+                  <a:lnTo>
+                    <a:pt x="1558384" y="779595"/>
+                  </a:lnTo>
+                  <a:lnTo>
+                    <a:pt x="1628728" y="800009"/>
+                  </a:lnTo>
+                  <a:lnTo>
+                    <a:pt x="1699073" y="819551"/>
+                  </a:lnTo>
+                  <a:lnTo>
+                    <a:pt x="1769417" y="838257"/>
+                  </a:lnTo>
+                  <a:lnTo>
+                    <a:pt x="1839762" y="856164"/>
+                  </a:lnTo>
+                  <a:lnTo>
+                    <a:pt x="1910106" y="873305"/>
+                  </a:lnTo>
+                  <a:lnTo>
+                    <a:pt x="1980451" y="889714"/>
+                  </a:lnTo>
+                  <a:lnTo>
+                    <a:pt x="2050795" y="905421"/>
+                  </a:lnTo>
+                  <a:lnTo>
+                    <a:pt x="2121140" y="920457"/>
+                  </a:lnTo>
+                  <a:lnTo>
+                    <a:pt x="2191484" y="934850"/>
+                  </a:lnTo>
+                  <a:lnTo>
+                    <a:pt x="2261828" y="948629"/>
+                  </a:lnTo>
+                  <a:lnTo>
+                    <a:pt x="2332173" y="961818"/>
+                  </a:lnTo>
+                  <a:lnTo>
+                    <a:pt x="2402517" y="974443"/>
+                  </a:lnTo>
+                  <a:lnTo>
+                    <a:pt x="2472862" y="986529"/>
+                  </a:lnTo>
+                  <a:lnTo>
+                    <a:pt x="2543206" y="998098"/>
+                  </a:lnTo>
+                  <a:lnTo>
+                    <a:pt x="2613551" y="1009173"/>
+                  </a:lnTo>
+                  <a:lnTo>
+                    <a:pt x="2683895" y="1019774"/>
+                  </a:lnTo>
+                  <a:lnTo>
+                    <a:pt x="2754240" y="1029922"/>
+                  </a:lnTo>
+                  <a:lnTo>
+                    <a:pt x="2824584" y="1039637"/>
+                  </a:lnTo>
+                  <a:lnTo>
+                    <a:pt x="2894929" y="1048936"/>
+                  </a:lnTo>
+                  <a:lnTo>
+                    <a:pt x="2965273" y="1057838"/>
+                  </a:lnTo>
+                  <a:lnTo>
+                    <a:pt x="3035618" y="1066359"/>
+                  </a:lnTo>
+                  <a:lnTo>
+                    <a:pt x="3105962" y="1074516"/>
+                  </a:lnTo>
+                  <a:lnTo>
+                    <a:pt x="3176307" y="1082325"/>
+                  </a:lnTo>
+                  <a:lnTo>
+                    <a:pt x="3246651" y="1089799"/>
+                  </a:lnTo>
+                  <a:lnTo>
+                    <a:pt x="3316996" y="1096955"/>
+                  </a:lnTo>
+                  <a:lnTo>
+                    <a:pt x="3387340" y="1103804"/>
+                  </a:lnTo>
+                  <a:lnTo>
+                    <a:pt x="3457685" y="1110361"/>
+                  </a:lnTo>
+                  <a:lnTo>
+                    <a:pt x="3528029" y="1116637"/>
+                  </a:lnTo>
+                  <a:lnTo>
+                    <a:pt x="3598374" y="1122645"/>
+                  </a:lnTo>
+                  <a:lnTo>
+                    <a:pt x="3668718" y="1128396"/>
+                  </a:lnTo>
+                  <a:lnTo>
+                    <a:pt x="3739063" y="1133902"/>
+                  </a:lnTo>
+                  <a:lnTo>
+                    <a:pt x="3809407" y="1139172"/>
+                  </a:lnTo>
+                  <a:lnTo>
+                    <a:pt x="3879752" y="1144217"/>
+                  </a:lnTo>
+                  <a:lnTo>
+                    <a:pt x="3950096" y="1149046"/>
+                  </a:lnTo>
+                  <a:lnTo>
+                    <a:pt x="4020441" y="1153669"/>
+                  </a:lnTo>
+                  <a:lnTo>
+                    <a:pt x="4090785" y="1158094"/>
+                  </a:lnTo>
+                  <a:lnTo>
+                    <a:pt x="4161130" y="1162330"/>
+                  </a:lnTo>
+                  <a:lnTo>
+                    <a:pt x="4231474" y="1166385"/>
+                  </a:lnTo>
+                  <a:lnTo>
+                    <a:pt x="4301819" y="1170267"/>
+                  </a:lnTo>
+                  <a:lnTo>
+                    <a:pt x="4372163" y="1173983"/>
+                  </a:lnTo>
+                  <a:lnTo>
+                    <a:pt x="4442508" y="1177540"/>
+                  </a:lnTo>
+                  <a:lnTo>
+                    <a:pt x="4512852" y="1180945"/>
+                  </a:lnTo>
+                  <a:lnTo>
+                    <a:pt x="4583197" y="1184204"/>
+                  </a:lnTo>
+                  <a:lnTo>
+                    <a:pt x="4653541" y="1187324"/>
+                  </a:lnTo>
+                  <a:lnTo>
+                    <a:pt x="4723886" y="1190311"/>
+                  </a:lnTo>
+                  <a:lnTo>
+                    <a:pt x="4794230" y="1193170"/>
+                  </a:lnTo>
+                  <a:lnTo>
+                    <a:pt x="4864575" y="1195907"/>
+                  </a:lnTo>
+                  <a:lnTo>
+                    <a:pt x="4934919" y="1198527"/>
+                  </a:lnTo>
+                  <a:lnTo>
+                    <a:pt x="5005264" y="1201035"/>
+                  </a:lnTo>
+                  <a:lnTo>
+                    <a:pt x="5075608" y="1203435"/>
+                  </a:lnTo>
+                  <a:lnTo>
+                    <a:pt x="5145953" y="1205734"/>
+                  </a:lnTo>
+                  <a:lnTo>
+                    <a:pt x="5216297" y="1207933"/>
+                  </a:lnTo>
+                  <a:lnTo>
+                    <a:pt x="5286642" y="1210039"/>
+                  </a:lnTo>
+                  <a:lnTo>
+                    <a:pt x="5356986" y="1212055"/>
+                  </a:lnTo>
+                  <a:lnTo>
+                    <a:pt x="5427331" y="1213985"/>
+                  </a:lnTo>
+                  <a:lnTo>
+                    <a:pt x="5497675" y="1215832"/>
+                  </a:lnTo>
+                  <a:lnTo>
+                    <a:pt x="5568020" y="1217600"/>
+                  </a:lnTo>
+                  <a:lnTo>
+                    <a:pt x="5638364" y="1219293"/>
+                  </a:lnTo>
+                  <a:lnTo>
+                    <a:pt x="5708709" y="1220913"/>
+                  </a:lnTo>
+                  <a:lnTo>
+                    <a:pt x="5779053" y="1222464"/>
+                  </a:lnTo>
+                  <a:lnTo>
+                    <a:pt x="5849398" y="1223949"/>
+                  </a:lnTo>
+                  <a:lnTo>
+                    <a:pt x="5919742" y="1225370"/>
+                  </a:lnTo>
+                </a:path>
+              </a:pathLst>
+            </a:custGeom>
+            <a:ln w="27101" cap="flat">
+              <a:solidFill>
+                <a:srgbClr val="FF8C00">
+                  <a:alpha val="100000"/>
+                </a:srgbClr>
+              </a:solidFill>
+              <a:prstDash val="solid"/>
+              <a:round/>
+            </a:ln>
+          </p:spPr>
+          <p:txBody>
+            <a:bodyPr/>
+            <a:lstStyle/>
+            <a:p/>
+          </p:txBody>
+        </p:sp>
+        <p:sp>
+          <p:nvSpPr>
+            <p:cNvPr id="70" name="pl70"/>
+            <p:cNvSpPr/>
+            <p:nvPr/>
+          </p:nvSpPr>
+          <p:spPr>
+            <a:xfrm>
+              <a:off x="887106" y="5294352"/>
+              <a:ext cx="7660515" cy="0"/>
+            </a:xfrm>
+            <a:custGeom>
+              <a:avLst/>
+              <a:pathLst>
+                <a:path w="7660515" h="0">
+                  <a:moveTo>
+                    <a:pt x="0" y="0"/>
+                  </a:moveTo>
+                  <a:lnTo>
+                    <a:pt x="7660515" y="0"/>
+                  </a:lnTo>
+                  <a:lnTo>
+                    <a:pt x="7660515" y="0"/>
+                  </a:lnTo>
+                </a:path>
+              </a:pathLst>
+            </a:custGeom>
+            <a:ln w="13550" cap="flat">
+              <a:solidFill>
+                <a:srgbClr val="7F7F7F">
+                  <a:alpha val="100000"/>
+                </a:srgbClr>
+              </a:solidFill>
+              <a:prstDash val="dash"/>
+              <a:round/>
+            </a:ln>
+          </p:spPr>
+          <p:txBody>
+            <a:bodyPr/>
+            <a:lstStyle/>
+            <a:p/>
+          </p:txBody>
+        </p:sp>
+        <p:sp>
+          <p:nvSpPr>
+            <p:cNvPr id="71" name="pl71"/>
+            <p:cNvSpPr/>
+            <p:nvPr/>
+          </p:nvSpPr>
+          <p:spPr>
+            <a:xfrm>
+              <a:off x="4590457" y="4336484"/>
+              <a:ext cx="0" cy="1317069"/>
+            </a:xfrm>
+            <a:custGeom>
+              <a:avLst/>
+              <a:pathLst>
+                <a:path w="0" h="1317069">
+                  <a:moveTo>
+                    <a:pt x="0" y="1317069"/>
+                  </a:moveTo>
+                  <a:lnTo>
+                    <a:pt x="0" y="0"/>
+                  </a:lnTo>
+                  <a:lnTo>
+                    <a:pt x="0" y="0"/>
+                  </a:lnTo>
+                </a:path>
+              </a:pathLst>
+            </a:custGeom>
+            <a:ln w="13550" cap="flat">
+              <a:solidFill>
+                <a:srgbClr val="666666">
+                  <a:alpha val="100000"/>
+                </a:srgbClr>
+              </a:solidFill>
+              <a:prstDash val="dot"/>
+              <a:round/>
+            </a:ln>
+          </p:spPr>
+          <p:txBody>
+            <a:bodyPr/>
+            <a:lstStyle/>
+            <a:p/>
+          </p:txBody>
+        </p:sp>
+        <p:sp>
+          <p:nvSpPr>
+            <p:cNvPr id="72" name="tx72"/>
+            <p:cNvSpPr/>
+            <p:nvPr/>
+          </p:nvSpPr>
+          <p:spPr>
+            <a:xfrm>
+              <a:off x="762297" y="5553636"/>
+              <a:ext cx="62179" cy="80101"/>
+            </a:xfrm>
+            <a:prstGeom prst="rect">
+              <a:avLst/>
+            </a:prstGeom>
+            <a:noFill/>
+          </p:spPr>
+          <p:txBody>
+            <a:bodyPr lIns="0" rIns="0" tIns="0" bIns="0" anchorCtr="1" anchor="ctr" wrap="none"/>
+            <a:lstStyle/>
+            <a:p>
+              <a:pPr algn="l" marL="0" marR="0" indent="0">
+                <a:lnSpc>
+                  <a:spcPts val="880"/>
+                </a:lnSpc>
+                <a:spcBef>
+                  <a:spcPts val="0"/>
+                </a:spcBef>
+                <a:spcAft>
+                  <a:spcPts val="0"/>
+                </a:spcAft>
+              </a:pPr>
+              <a:r>
+                <a:rPr sz="880">
+                  <a:solidFill>
+                    <a:srgbClr val="4D4D4D">
+                      <a:alpha val="100000"/>
+                    </a:srgbClr>
+                  </a:solidFill>
+                  <a:latin typeface="Helvetica"/>
+                  <a:cs typeface="Helvetica"/>
+                </a:rPr>
+                <a:t>0</a:t>
+              </a:r>
+            </a:p>
+          </p:txBody>
+        </p:sp>
+        <p:sp>
+          <p:nvSpPr>
+            <p:cNvPr id="73" name="tx73"/>
+            <p:cNvSpPr/>
+            <p:nvPr/>
+          </p:nvSpPr>
+          <p:spPr>
+            <a:xfrm>
+              <a:off x="762297" y="5254302"/>
+              <a:ext cx="62179" cy="80101"/>
+            </a:xfrm>
+            <a:prstGeom prst="rect">
+              <a:avLst/>
+            </a:prstGeom>
+            <a:noFill/>
+          </p:spPr>
+          <p:txBody>
+            <a:bodyPr lIns="0" rIns="0" tIns="0" bIns="0" anchorCtr="1" anchor="ctr" wrap="none"/>
+            <a:lstStyle/>
+            <a:p>
+              <a:pPr algn="l" marL="0" marR="0" indent="0">
+                <a:lnSpc>
+                  <a:spcPts val="880"/>
+                </a:lnSpc>
+                <a:spcBef>
+                  <a:spcPts val="0"/>
+                </a:spcBef>
+                <a:spcAft>
+                  <a:spcPts val="0"/>
+                </a:spcAft>
+              </a:pPr>
+              <a:r>
+                <a:rPr sz="880">
+                  <a:solidFill>
+                    <a:srgbClr val="4D4D4D">
+                      <a:alpha val="100000"/>
+                    </a:srgbClr>
+                  </a:solidFill>
+                  <a:latin typeface="Helvetica"/>
+                  <a:cs typeface="Helvetica"/>
+                </a:rPr>
+                <a:t>1</a:t>
+              </a:r>
+            </a:p>
+          </p:txBody>
+        </p:sp>
+        <p:sp>
+          <p:nvSpPr>
+            <p:cNvPr id="74" name="tx74"/>
+            <p:cNvSpPr/>
+            <p:nvPr/>
+          </p:nvSpPr>
+          <p:spPr>
+            <a:xfrm>
+              <a:off x="762297" y="4954968"/>
+              <a:ext cx="62179" cy="80101"/>
+            </a:xfrm>
+            <a:prstGeom prst="rect">
+              <a:avLst/>
+            </a:prstGeom>
+            <a:noFill/>
+          </p:spPr>
+          <p:txBody>
+            <a:bodyPr lIns="0" rIns="0" tIns="0" bIns="0" anchorCtr="1" anchor="ctr" wrap="none"/>
+            <a:lstStyle/>
+            <a:p>
+              <a:pPr algn="l" marL="0" marR="0" indent="0">
+                <a:lnSpc>
+                  <a:spcPts val="880"/>
+                </a:lnSpc>
+                <a:spcBef>
+                  <a:spcPts val="0"/>
+                </a:spcBef>
+                <a:spcAft>
+                  <a:spcPts val="0"/>
+                </a:spcAft>
+              </a:pPr>
+              <a:r>
+                <a:rPr sz="880">
+                  <a:solidFill>
+                    <a:srgbClr val="4D4D4D">
+                      <a:alpha val="100000"/>
+                    </a:srgbClr>
+                  </a:solidFill>
+                  <a:latin typeface="Helvetica"/>
+                  <a:cs typeface="Helvetica"/>
+                </a:rPr>
+                <a:t>2</a:t>
+              </a:r>
+            </a:p>
+          </p:txBody>
+        </p:sp>
+        <p:sp>
+          <p:nvSpPr>
+            <p:cNvPr id="75" name="tx75"/>
+            <p:cNvSpPr/>
+            <p:nvPr/>
+          </p:nvSpPr>
+          <p:spPr>
+            <a:xfrm>
+              <a:off x="762297" y="4655634"/>
+              <a:ext cx="62179" cy="80101"/>
+            </a:xfrm>
+            <a:prstGeom prst="rect">
+              <a:avLst/>
+            </a:prstGeom>
+            <a:noFill/>
+          </p:spPr>
+          <p:txBody>
+            <a:bodyPr lIns="0" rIns="0" tIns="0" bIns="0" anchorCtr="1" anchor="ctr" wrap="none"/>
+            <a:lstStyle/>
+            <a:p>
+              <a:pPr algn="l" marL="0" marR="0" indent="0">
+                <a:lnSpc>
+                  <a:spcPts val="880"/>
+                </a:lnSpc>
+                <a:spcBef>
+                  <a:spcPts val="0"/>
+                </a:spcBef>
+                <a:spcAft>
+                  <a:spcPts val="0"/>
+                </a:spcAft>
+              </a:pPr>
+              <a:r>
+                <a:rPr sz="880">
+                  <a:solidFill>
+                    <a:srgbClr val="4D4D4D">
+                      <a:alpha val="100000"/>
+                    </a:srgbClr>
+                  </a:solidFill>
+                  <a:latin typeface="Helvetica"/>
+                  <a:cs typeface="Helvetica"/>
+                </a:rPr>
+                <a:t>3</a:t>
+              </a:r>
+            </a:p>
+          </p:txBody>
+        </p:sp>
+        <p:sp>
+          <p:nvSpPr>
+            <p:cNvPr id="76" name="tx76"/>
+            <p:cNvSpPr/>
+            <p:nvPr/>
+          </p:nvSpPr>
+          <p:spPr>
+            <a:xfrm>
+              <a:off x="762297" y="4356300"/>
+              <a:ext cx="62179" cy="80101"/>
+            </a:xfrm>
+            <a:prstGeom prst="rect">
+              <a:avLst/>
+            </a:prstGeom>
+            <a:noFill/>
+          </p:spPr>
+          <p:txBody>
+            <a:bodyPr lIns="0" rIns="0" tIns="0" bIns="0" anchorCtr="1" anchor="ctr" wrap="none"/>
+            <a:lstStyle/>
+            <a:p>
+              <a:pPr algn="l" marL="0" marR="0" indent="0">
+                <a:lnSpc>
+                  <a:spcPts val="880"/>
+                </a:lnSpc>
+                <a:spcBef>
+                  <a:spcPts val="0"/>
+                </a:spcBef>
+                <a:spcAft>
+                  <a:spcPts val="0"/>
+                </a:spcAft>
+              </a:pPr>
+              <a:r>
+                <a:rPr sz="880">
+                  <a:solidFill>
+                    <a:srgbClr val="4D4D4D">
+                      <a:alpha val="100000"/>
+                    </a:srgbClr>
+                  </a:solidFill>
+                  <a:latin typeface="Helvetica"/>
+                  <a:cs typeface="Helvetica"/>
+                </a:rPr>
+                <a:t>4</a:t>
+              </a:r>
+            </a:p>
+          </p:txBody>
+        </p:sp>
+        <p:sp>
+          <p:nvSpPr>
+            <p:cNvPr id="77" name="tx77"/>
+            <p:cNvSpPr/>
+            <p:nvPr/>
+          </p:nvSpPr>
+          <p:spPr>
+            <a:xfrm>
+              <a:off x="1133333" y="5716183"/>
+              <a:ext cx="161574" cy="80101"/>
+            </a:xfrm>
+            <a:prstGeom prst="rect">
+              <a:avLst/>
+            </a:prstGeom>
+            <a:noFill/>
+          </p:spPr>
+          <p:txBody>
+            <a:bodyPr lIns="0" rIns="0" tIns="0" bIns="0" anchorCtr="1" anchor="ctr" wrap="none"/>
+            <a:lstStyle/>
+            <a:p>
+              <a:pPr algn="l" marL="0" marR="0" indent="0">
+                <a:lnSpc>
+                  <a:spcPts val="880"/>
+                </a:lnSpc>
+                <a:spcBef>
+                  <a:spcPts val="0"/>
+                </a:spcBef>
+                <a:spcAft>
+                  <a:spcPts val="0"/>
+                </a:spcAft>
+              </a:pPr>
+              <a:r>
+                <a:rPr sz="880">
+                  <a:solidFill>
+                    <a:srgbClr val="4D4D4D">
+                      <a:alpha val="100000"/>
+                    </a:srgbClr>
+                  </a:solidFill>
+                  <a:latin typeface="Helvetica"/>
+                  <a:cs typeface="Helvetica"/>
+                </a:rPr>
+                <a:t>-40</a:t>
+              </a:r>
+            </a:p>
+          </p:txBody>
+        </p:sp>
+        <p:sp>
+          <p:nvSpPr>
+            <p:cNvPr id="78" name="tx78"/>
+            <p:cNvSpPr/>
+            <p:nvPr/>
+          </p:nvSpPr>
+          <p:spPr>
+            <a:xfrm>
+              <a:off x="1978619" y="5716183"/>
+              <a:ext cx="161574" cy="80101"/>
+            </a:xfrm>
+            <a:prstGeom prst="rect">
+              <a:avLst/>
+            </a:prstGeom>
+            <a:noFill/>
+          </p:spPr>
+          <p:txBody>
+            <a:bodyPr lIns="0" rIns="0" tIns="0" bIns="0" anchorCtr="1" anchor="ctr" wrap="none"/>
+            <a:lstStyle/>
+            <a:p>
+              <a:pPr algn="l" marL="0" marR="0" indent="0">
+                <a:lnSpc>
+                  <a:spcPts val="880"/>
+                </a:lnSpc>
+                <a:spcBef>
+                  <a:spcPts val="0"/>
+                </a:spcBef>
+                <a:spcAft>
+                  <a:spcPts val="0"/>
+                </a:spcAft>
+              </a:pPr>
+              <a:r>
+                <a:rPr sz="880">
+                  <a:solidFill>
+                    <a:srgbClr val="4D4D4D">
+                      <a:alpha val="100000"/>
+                    </a:srgbClr>
+                  </a:solidFill>
+                  <a:latin typeface="Helvetica"/>
+                  <a:cs typeface="Helvetica"/>
+                </a:rPr>
+                <a:t>-30</a:t>
+              </a:r>
+            </a:p>
+          </p:txBody>
+        </p:sp>
+        <p:sp>
+          <p:nvSpPr>
+            <p:cNvPr id="79" name="tx79"/>
+            <p:cNvSpPr/>
+            <p:nvPr/>
+          </p:nvSpPr>
+          <p:spPr>
+            <a:xfrm>
+              <a:off x="2823906" y="5716183"/>
+              <a:ext cx="161574" cy="80101"/>
+            </a:xfrm>
+            <a:prstGeom prst="rect">
+              <a:avLst/>
+            </a:prstGeom>
+            <a:noFill/>
+          </p:spPr>
+          <p:txBody>
+            <a:bodyPr lIns="0" rIns="0" tIns="0" bIns="0" anchorCtr="1" anchor="ctr" wrap="none"/>
+            <a:lstStyle/>
+            <a:p>
+              <a:pPr algn="l" marL="0" marR="0" indent="0">
+                <a:lnSpc>
+                  <a:spcPts val="880"/>
+                </a:lnSpc>
+                <a:spcBef>
+                  <a:spcPts val="0"/>
+                </a:spcBef>
+                <a:spcAft>
+                  <a:spcPts val="0"/>
+                </a:spcAft>
+              </a:pPr>
+              <a:r>
+                <a:rPr sz="880">
+                  <a:solidFill>
+                    <a:srgbClr val="4D4D4D">
+                      <a:alpha val="100000"/>
+                    </a:srgbClr>
+                  </a:solidFill>
+                  <a:latin typeface="Helvetica"/>
+                  <a:cs typeface="Helvetica"/>
+                </a:rPr>
+                <a:t>-20</a:t>
+              </a:r>
+            </a:p>
+          </p:txBody>
+        </p:sp>
+        <p:sp>
+          <p:nvSpPr>
+            <p:cNvPr id="80" name="tx80"/>
+            <p:cNvSpPr/>
+            <p:nvPr/>
+          </p:nvSpPr>
+          <p:spPr>
+            <a:xfrm>
+              <a:off x="3669192" y="5716183"/>
+              <a:ext cx="161574" cy="80101"/>
+            </a:xfrm>
+            <a:prstGeom prst="rect">
+              <a:avLst/>
+            </a:prstGeom>
+            <a:noFill/>
+          </p:spPr>
+          <p:txBody>
+            <a:bodyPr lIns="0" rIns="0" tIns="0" bIns="0" anchorCtr="1" anchor="ctr" wrap="none"/>
+            <a:lstStyle/>
+            <a:p>
+              <a:pPr algn="l" marL="0" marR="0" indent="0">
+                <a:lnSpc>
+                  <a:spcPts val="880"/>
+                </a:lnSpc>
+                <a:spcBef>
+                  <a:spcPts val="0"/>
+                </a:spcBef>
+                <a:spcAft>
+                  <a:spcPts val="0"/>
+                </a:spcAft>
+              </a:pPr>
+              <a:r>
+                <a:rPr sz="880">
+                  <a:solidFill>
+                    <a:srgbClr val="4D4D4D">
+                      <a:alpha val="100000"/>
+                    </a:srgbClr>
+                  </a:solidFill>
+                  <a:latin typeface="Helvetica"/>
+                  <a:cs typeface="Helvetica"/>
+                </a:rPr>
+                <a:t>-10</a:t>
+              </a:r>
+            </a:p>
+          </p:txBody>
+        </p:sp>
+        <p:sp>
+          <p:nvSpPr>
+            <p:cNvPr id="81" name="tx81"/>
+            <p:cNvSpPr/>
+            <p:nvPr/>
+          </p:nvSpPr>
+          <p:spPr>
+            <a:xfrm>
+              <a:off x="4564176" y="5716183"/>
+              <a:ext cx="62179" cy="80101"/>
+            </a:xfrm>
+            <a:prstGeom prst="rect">
+              <a:avLst/>
+            </a:prstGeom>
+            <a:noFill/>
+          </p:spPr>
+          <p:txBody>
+            <a:bodyPr lIns="0" rIns="0" tIns="0" bIns="0" anchorCtr="1" anchor="ctr" wrap="none"/>
+            <a:lstStyle/>
+            <a:p>
+              <a:pPr algn="l" marL="0" marR="0" indent="0">
+                <a:lnSpc>
+                  <a:spcPts val="880"/>
+                </a:lnSpc>
+                <a:spcBef>
+                  <a:spcPts val="0"/>
+                </a:spcBef>
+                <a:spcAft>
+                  <a:spcPts val="0"/>
+                </a:spcAft>
+              </a:pPr>
+              <a:r>
+                <a:rPr sz="880">
+                  <a:solidFill>
+                    <a:srgbClr val="4D4D4D">
+                      <a:alpha val="100000"/>
+                    </a:srgbClr>
+                  </a:solidFill>
+                  <a:latin typeface="Helvetica"/>
+                  <a:cs typeface="Helvetica"/>
+                </a:rPr>
+                <a:t>0</a:t>
+              </a:r>
+            </a:p>
+          </p:txBody>
+        </p:sp>
+        <p:sp>
+          <p:nvSpPr>
+            <p:cNvPr id="82" name="tx82"/>
+            <p:cNvSpPr/>
+            <p:nvPr/>
+          </p:nvSpPr>
+          <p:spPr>
+            <a:xfrm>
+              <a:off x="5378373" y="5716183"/>
+              <a:ext cx="124358" cy="80101"/>
+            </a:xfrm>
+            <a:prstGeom prst="rect">
+              <a:avLst/>
+            </a:prstGeom>
+            <a:noFill/>
+          </p:spPr>
+          <p:txBody>
+            <a:bodyPr lIns="0" rIns="0" tIns="0" bIns="0" anchorCtr="1" anchor="ctr" wrap="none"/>
+            <a:lstStyle/>
+            <a:p>
+              <a:pPr algn="l" marL="0" marR="0" indent="0">
+                <a:lnSpc>
+                  <a:spcPts val="880"/>
+                </a:lnSpc>
+                <a:spcBef>
+                  <a:spcPts val="0"/>
+                </a:spcBef>
+                <a:spcAft>
+                  <a:spcPts val="0"/>
+                </a:spcAft>
+              </a:pPr>
+              <a:r>
+                <a:rPr sz="880">
+                  <a:solidFill>
+                    <a:srgbClr val="4D4D4D">
+                      <a:alpha val="100000"/>
+                    </a:srgbClr>
+                  </a:solidFill>
+                  <a:latin typeface="Helvetica"/>
+                  <a:cs typeface="Helvetica"/>
+                </a:rPr>
+                <a:t>10</a:t>
+              </a:r>
+            </a:p>
+          </p:txBody>
+        </p:sp>
+        <p:sp>
+          <p:nvSpPr>
+            <p:cNvPr id="83" name="tx83"/>
+            <p:cNvSpPr/>
+            <p:nvPr/>
+          </p:nvSpPr>
+          <p:spPr>
+            <a:xfrm>
+              <a:off x="6223659" y="5716183"/>
+              <a:ext cx="124358" cy="80101"/>
+            </a:xfrm>
+            <a:prstGeom prst="rect">
+              <a:avLst/>
+            </a:prstGeom>
+            <a:noFill/>
+          </p:spPr>
+          <p:txBody>
+            <a:bodyPr lIns="0" rIns="0" tIns="0" bIns="0" anchorCtr="1" anchor="ctr" wrap="none"/>
+            <a:lstStyle/>
+            <a:p>
+              <a:pPr algn="l" marL="0" marR="0" indent="0">
+                <a:lnSpc>
+                  <a:spcPts val="880"/>
+                </a:lnSpc>
+                <a:spcBef>
+                  <a:spcPts val="0"/>
+                </a:spcBef>
+                <a:spcAft>
+                  <a:spcPts val="0"/>
+                </a:spcAft>
+              </a:pPr>
+              <a:r>
+                <a:rPr sz="880">
+                  <a:solidFill>
+                    <a:srgbClr val="4D4D4D">
+                      <a:alpha val="100000"/>
+                    </a:srgbClr>
+                  </a:solidFill>
+                  <a:latin typeface="Helvetica"/>
+                  <a:cs typeface="Helvetica"/>
+                </a:rPr>
+                <a:t>20</a:t>
+              </a:r>
+            </a:p>
+          </p:txBody>
+        </p:sp>
+        <p:sp>
+          <p:nvSpPr>
+            <p:cNvPr id="84" name="tx84"/>
+            <p:cNvSpPr/>
+            <p:nvPr/>
+          </p:nvSpPr>
+          <p:spPr>
+            <a:xfrm>
+              <a:off x="7068946" y="5716183"/>
+              <a:ext cx="124358" cy="80101"/>
+            </a:xfrm>
+            <a:prstGeom prst="rect">
+              <a:avLst/>
+            </a:prstGeom>
+            <a:noFill/>
+          </p:spPr>
+          <p:txBody>
+            <a:bodyPr lIns="0" rIns="0" tIns="0" bIns="0" anchorCtr="1" anchor="ctr" wrap="none"/>
+            <a:lstStyle/>
+            <a:p>
+              <a:pPr algn="l" marL="0" marR="0" indent="0">
+                <a:lnSpc>
+                  <a:spcPts val="880"/>
+                </a:lnSpc>
+                <a:spcBef>
+                  <a:spcPts val="0"/>
+                </a:spcBef>
+                <a:spcAft>
+                  <a:spcPts val="0"/>
+                </a:spcAft>
+              </a:pPr>
+              <a:r>
+                <a:rPr sz="880">
+                  <a:solidFill>
+                    <a:srgbClr val="4D4D4D">
+                      <a:alpha val="100000"/>
+                    </a:srgbClr>
+                  </a:solidFill>
+                  <a:latin typeface="Helvetica"/>
+                  <a:cs typeface="Helvetica"/>
+                </a:rPr>
+                <a:t>30</a:t>
+              </a:r>
+            </a:p>
+          </p:txBody>
+        </p:sp>
+        <p:sp>
+          <p:nvSpPr>
+            <p:cNvPr id="85" name="tx85"/>
+            <p:cNvSpPr/>
+            <p:nvPr/>
+          </p:nvSpPr>
+          <p:spPr>
+            <a:xfrm>
+              <a:off x="7914232" y="5716183"/>
+              <a:ext cx="124358" cy="80101"/>
+            </a:xfrm>
+            <a:prstGeom prst="rect">
+              <a:avLst/>
+            </a:prstGeom>
+            <a:noFill/>
+          </p:spPr>
+          <p:txBody>
+            <a:bodyPr lIns="0" rIns="0" tIns="0" bIns="0" anchorCtr="1" anchor="ctr" wrap="none"/>
+            <a:lstStyle/>
+            <a:p>
+              <a:pPr algn="l" marL="0" marR="0" indent="0">
+                <a:lnSpc>
+                  <a:spcPts val="880"/>
+                </a:lnSpc>
+                <a:spcBef>
+                  <a:spcPts val="0"/>
+                </a:spcBef>
+                <a:spcAft>
+                  <a:spcPts val="0"/>
+                </a:spcAft>
+              </a:pPr>
+              <a:r>
+                <a:rPr sz="880">
+                  <a:solidFill>
+                    <a:srgbClr val="4D4D4D">
+                      <a:alpha val="100000"/>
+                    </a:srgbClr>
+                  </a:solidFill>
+                  <a:latin typeface="Helvetica"/>
+                  <a:cs typeface="Helvetica"/>
+                </a:rPr>
+                <a:t>40</a:t>
+              </a:r>
+            </a:p>
+          </p:txBody>
+        </p:sp>
+        <p:sp>
+          <p:nvSpPr>
+            <p:cNvPr id="86" name="tx86"/>
+            <p:cNvSpPr/>
+            <p:nvPr/>
+          </p:nvSpPr>
+          <p:spPr>
+            <a:xfrm>
+              <a:off x="2928340" y="5855859"/>
+              <a:ext cx="3578047" cy="100218"/>
+            </a:xfrm>
+            <a:prstGeom prst="rect">
+              <a:avLst/>
+            </a:prstGeom>
+            <a:noFill/>
+          </p:spPr>
+          <p:txBody>
+            <a:bodyPr lIns="0" rIns="0" tIns="0" bIns="0" anchorCtr="1" anchor="ctr" wrap="none"/>
+            <a:lstStyle/>
+            <a:p>
+              <a:pPr algn="l" marL="0" marR="0" indent="0">
+                <a:lnSpc>
+                  <a:spcPts val="1100"/>
+                </a:lnSpc>
+                <a:spcBef>
+                  <a:spcPts val="0"/>
+                </a:spcBef>
+                <a:spcAft>
+                  <a:spcPts val="0"/>
+                </a:spcAft>
+              </a:pPr>
+              <a:r>
+                <a:rPr sz="1100">
+                  <a:solidFill>
+                    <a:srgbClr val="000000">
+                      <a:alpha val="100000"/>
+                    </a:srgbClr>
+                  </a:solidFill>
+                  <a:latin typeface="Helvetica"/>
+                  <a:cs typeface="Helvetica"/>
+                </a:rPr>
+                <a:t>eGFR difference (%): 100 × (CKD-EPI Cr-Cys − CG) / CG</a:t>
+              </a:r>
+            </a:p>
+          </p:txBody>
+        </p:sp>
+        <p:sp>
+          <p:nvSpPr>
+            <p:cNvPr id="87" name="tx87"/>
+            <p:cNvSpPr/>
+            <p:nvPr/>
+          </p:nvSpPr>
+          <p:spPr>
+            <a:xfrm rot="-5400000">
+              <a:off x="138035" y="4944909"/>
+              <a:ext cx="1016904" cy="100218"/>
+            </a:xfrm>
+            <a:prstGeom prst="rect">
+              <a:avLst/>
+            </a:prstGeom>
+            <a:noFill/>
+          </p:spPr>
+          <p:txBody>
+            <a:bodyPr lIns="0" rIns="0" tIns="0" bIns="0" anchorCtr="1" anchor="ctr" wrap="none"/>
+            <a:lstStyle/>
+            <a:p>
+              <a:pPr algn="l" marL="0" marR="0" indent="0">
+                <a:lnSpc>
+                  <a:spcPts val="1100"/>
+                </a:lnSpc>
+                <a:spcBef>
+                  <a:spcPts val="0"/>
+                </a:spcBef>
+                <a:spcAft>
+                  <a:spcPts val="0"/>
+                </a:spcAft>
+              </a:pPr>
+              <a:r>
+                <a:rPr sz="1100">
+                  <a:solidFill>
+                    <a:srgbClr val="000000">
+                      <a:alpha val="100000"/>
+                    </a:srgbClr>
+                  </a:solidFill>
+                  <a:latin typeface="Helvetica"/>
+                  <a:cs typeface="Helvetica"/>
+                </a:rPr>
+                <a:t>subHR (95% CI)</a:t>
+              </a:r>
+            </a:p>
+          </p:txBody>
+        </p:sp>
+        <p:sp>
+          <p:nvSpPr>
+            <p:cNvPr id="88" name="tx88"/>
+            <p:cNvSpPr/>
+            <p:nvPr/>
+          </p:nvSpPr>
+          <p:spPr>
+            <a:xfrm>
+              <a:off x="887106" y="4159544"/>
+              <a:ext cx="6388364" cy="82021"/>
+            </a:xfrm>
+            <a:prstGeom prst="rect">
+              <a:avLst/>
+            </a:prstGeom>
+            <a:noFill/>
+          </p:spPr>
+          <p:txBody>
+            <a:bodyPr lIns="0" rIns="0" tIns="0" bIns="0" anchorCtr="1" anchor="ctr" wrap="none"/>
+            <a:lstStyle/>
+            <a:p>
+              <a:pPr algn="l" marL="0" marR="0" indent="0">
+                <a:lnSpc>
+                  <a:spcPts val="900"/>
+                </a:lnSpc>
+                <a:spcBef>
+                  <a:spcPts val="0"/>
+                </a:spcBef>
+                <a:spcAft>
+                  <a:spcPts val="0"/>
+                </a:spcAft>
+              </a:pPr>
+              <a:r>
+                <a:rPr sz="900">
+                  <a:solidFill>
+                    <a:srgbClr val="404040">
+                      <a:alpha val="100000"/>
+                    </a:srgbClr>
+                  </a:solidFill>
+                  <a:latin typeface="Helvetica"/>
+                  <a:cs typeface="Helvetica"/>
+                </a:rPr>
+                <a:t>subHR per 10 % decline: 1.69 (1.33-2.16), p = &lt;0.001  |  per IQR decline (Δ = 29.3 %): 4.65 (2.28-9.48)  |  IQR: [-14.6, 14.7] %</a:t>
+              </a:r>
+            </a:p>
+          </p:txBody>
+        </p:sp>
+        <p:sp>
+          <p:nvSpPr>
+            <p:cNvPr id="89" name="tx89"/>
+            <p:cNvSpPr/>
+            <p:nvPr/>
+          </p:nvSpPr>
+          <p:spPr>
+            <a:xfrm>
+              <a:off x="887106" y="3932770"/>
               <a:ext cx="754380" cy="120152"/>
             </a:xfrm>
             <a:prstGeom prst="rect">
